--- a/static/ppts/G6_Math_T1_Factors_Multiples.pptx
+++ b/static/ppts/G6_Math_T1_Factors_Multiples.pptx
@@ -9,9 +9,10 @@
     <p:sldId id="257" r:id="rId3"/>
     <p:sldId id="258" r:id="rId4"/>
     <p:sldId id="259" r:id="rId5"/>
+    <p:sldId id="260" r:id="rId6"/>
   </p:sldIdLst>
   <p:notesMasterIdLst>
-    <p:notesMasterId r:id="rId6"/>
+    <p:notesMasterId r:id="rId7"/>
   </p:notesMasterIdLst>
   <p:sldSz cx="9144000" cy="5143500"/>
   <p:notesSz cx="5143500" cy="9144000"/>
@@ -811,6 +812,94 @@
 </p:notes>
 </file>
 
+<file path=ppt/notesSlides/notesSlide5.xml><?xml version="1.0" encoding="utf-8"?>
+<p:notes xmlns:a="http://schemas.openxmlformats.org/drawingml/2006/main" xmlns:r="http://schemas.openxmlformats.org/officeDocument/2006/relationships" xmlns:p="http://schemas.openxmlformats.org/presentationml/2006/main">
+  <p:cSld>
+    <p:spTree>
+      <p:nvGrpSpPr>
+        <p:cNvPr id="1" name=""/>
+        <p:cNvGrpSpPr/>
+        <p:nvPr/>
+      </p:nvGrpSpPr>
+      <p:grpSpPr>
+        <a:xfrm>
+          <a:off x="0" y="0"/>
+          <a:ext cx="0" cy="0"/>
+          <a:chOff x="0" y="0"/>
+          <a:chExt cx="0" cy="0"/>
+        </a:xfrm>
+      </p:grpSpPr>
+      <p:sp>
+        <p:nvSpPr>
+          <p:cNvPr id="2" name="Slide Image Placeholder 1"/>
+          <p:cNvSpPr>
+            <a:spLocks noGrp="1" noRot="1" noChangeAspect="1"/>
+          </p:cNvSpPr>
+          <p:nvPr>
+            <p:ph type="sldImg"/>
+          </p:nvPr>
+        </p:nvSpPr>
+        <p:spPr/>
+      </p:sp>
+      <p:sp>
+        <p:nvSpPr>
+          <p:cNvPr id="3" name="Notes Placeholder 2"/>
+          <p:cNvSpPr>
+            <a:spLocks noGrp="1"/>
+          </p:cNvSpPr>
+          <p:nvPr>
+            <p:ph type="body" idx="1"/>
+          </p:nvPr>
+        </p:nvSpPr>
+        <p:spPr/>
+        <p:txBody>
+          <a:bodyPr/>
+          <a:lstStyle/>
+          <a:p>
+            <a:r>
+              <a:rPr lang="en-US" dirty="0"/>
+              <a:t/>
+            </a:r>
+            <a:endParaRPr lang="en-US" dirty="0"/>
+          </a:p>
+        </p:txBody>
+      </p:sp>
+      <p:sp>
+        <p:nvSpPr>
+          <p:cNvPr id="4" name="Slide Number Placeholder 3"/>
+          <p:cNvSpPr>
+            <a:spLocks noGrp="1"/>
+          </p:cNvSpPr>
+          <p:nvPr>
+            <p:ph type="sldNum" sz="quarter" idx="10"/>
+          </p:nvPr>
+        </p:nvSpPr>
+        <p:spPr/>
+        <p:txBody>
+          <a:bodyPr/>
+          <a:lstStyle/>
+          <a:p>
+            <a:fld id="{F7021451-1387-4CA6-816F-3879F97B5CBC}" type="slidenum">
+              <a:rPr lang="en-US"/>
+              <a:t>5</a:t>
+            </a:fld>
+            <a:endParaRPr lang="en-US"/>
+          </a:p>
+        </p:txBody>
+      </p:sp>
+    </p:spTree>
+    <p:extLst>
+      <p:ext uri="{BB962C8B-B14F-4D97-AF65-F5344CB8AC3E}">
+        <p14:creationId xmlns:p14="http://schemas.microsoft.com/office/powerpoint/2010/main" val="1024086991"/>
+      </p:ext>
+    </p:extLst>
+  </p:cSld>
+  <p:clrMapOvr>
+    <a:masterClrMapping/>
+  </p:clrMapOvr>
+</p:notes>
+</file>
+
 <file path=ppt/slideLayouts/slideLayout1.xml><?xml version="1.0" encoding="utf-8"?>
 <p:sldLayout xmlns:a="http://schemas.openxmlformats.org/drawingml/2006/main" xmlns:r="http://schemas.openxmlformats.org/officeDocument/2006/relationships" xmlns:p="http://schemas.openxmlformats.org/presentationml/2006/main" preserve="1">
   <p:cSld name="DEFAULT">
@@ -1170,7 +1259,7 @@
         </p:nvSpPr>
         <p:spPr>
           <a:xfrm>
-            <a:off x="731520" y="1280160"/>
+            <a:off x="731520" y="1097280"/>
             <a:ext cx="7772400" cy="1371600"/>
           </a:xfrm>
           <a:prstGeom prst="rect">
@@ -1187,7 +1276,7 @@
               <a:buNone/>
             </a:pPr>
             <a:r>
-              <a:rPr lang="en-US" sz="3600" b="1" dirty="0">
+              <a:rPr lang="en-US" sz="4000" b="1" dirty="0">
                 <a:solidFill>
                   <a:srgbClr val="FFFFFF"/>
                 </a:solidFill>
@@ -1197,7 +1286,7 @@
               </a:rPr>
               <a:t>Factors, Multiples &amp; Primes</a:t>
             </a:r>
-            <a:endParaRPr lang="en-US" sz="3600" dirty="0"/>
+            <a:endParaRPr lang="en-US" sz="4000" dirty="0"/>
           </a:p>
         </p:txBody>
       </p:sp>
@@ -1209,7 +1298,7 @@
         </p:nvSpPr>
         <p:spPr>
           <a:xfrm>
-            <a:off x="731520" y="2743200"/>
+            <a:off x="731520" y="2560320"/>
             <a:ext cx="7772400" cy="548640"/>
           </a:xfrm>
           <a:prstGeom prst="rect">
@@ -1228,13 +1317,13 @@
             <a:r>
               <a:rPr lang="en-US" sz="1600" dirty="0">
                 <a:solidFill>
-                  <a:srgbClr val="9B9690"/>
+                  <a:srgbClr val="E9C46A"/>
                 </a:solidFill>
                 <a:latin typeface="Calibri" pitchFamily="34" charset="0"/>
                 <a:ea typeface="Calibri" pitchFamily="34" charset="-122"/>
                 <a:cs typeface="Calibri" pitchFamily="34" charset="-120"/>
               </a:rPr>
-              <a:t>G6 Maths · Number Sense</a:t>
+              <a:t>Grade 6 Mathematics · Mr Zocchi</a:t>
             </a:r>
             <a:endParaRPr lang="en-US" sz="1600" dirty="0"/>
           </a:p>
@@ -1242,14 +1331,36 @@
       </p:sp>
       <p:sp>
         <p:nvSpPr>
-          <p:cNvPr id="5" name="Text 3"/>
-          <p:cNvSpPr/>
-          <p:nvPr/>
-        </p:nvSpPr>
-        <p:spPr>
-          <a:xfrm>
-            <a:off x="731520" y="4389120"/>
-            <a:ext cx="7772400" cy="457200"/>
+          <p:cNvPr id="5" name="Shape 3"/>
+          <p:cNvSpPr/>
+          <p:nvPr/>
+        </p:nvSpPr>
+        <p:spPr>
+          <a:xfrm>
+            <a:off x="731520" y="3474720"/>
+            <a:ext cx="2011680" cy="411480"/>
+          </a:xfrm>
+          <a:prstGeom prst="roundRect">
+            <a:avLst>
+              <a:gd name="adj" fmla="val 17778"/>
+            </a:avLst>
+          </a:prstGeom>
+          <a:solidFill>
+            <a:srgbClr val="2A9D8F"/>
+          </a:solidFill>
+          <a:ln/>
+        </p:spPr>
+      </p:sp>
+      <p:sp>
+        <p:nvSpPr>
+          <p:cNvPr id="6" name="Text 4"/>
+          <p:cNvSpPr/>
+          <p:nvPr/>
+        </p:nvSpPr>
+        <p:spPr>
+          <a:xfrm>
+            <a:off x="731520" y="3474720"/>
+            <a:ext cx="2011680" cy="411480"/>
           </a:xfrm>
           <a:prstGeom prst="rect">
             <a:avLst/>
@@ -1261,21 +1372,21 @@
           <a:bodyPr wrap="square" rtlCol="0" anchor="ctr"/>
           <a:lstStyle/>
           <a:p>
-            <a:pPr indent="0" marL="0">
+            <a:pPr algn="ctr" indent="0" marL="0">
               <a:buNone/>
             </a:pPr>
             <a:r>
-              <a:rPr lang="en-US" sz="1000" dirty="0">
-                <a:solidFill>
-                  <a:srgbClr val="6B6660"/>
+              <a:rPr lang="en-US" sz="1200" b="1" dirty="0">
+                <a:solidFill>
+                  <a:srgbClr val="FFFFFF"/>
                 </a:solidFill>
                 <a:latin typeface="Calibri" pitchFamily="34" charset="0"/>
                 <a:ea typeface="Calibri" pitchFamily="34" charset="-122"/>
                 <a:cs typeface="Calibri" pitchFamily="34" charset="-120"/>
               </a:rPr>
-              <a:t>Mr Zocchi · mrzocchi.com</a:t>
-            </a:r>
-            <a:endParaRPr lang="en-US" sz="1000" dirty="0"/>
+              <a:t>Term 1 · Number Sense</a:t>
+            </a:r>
+            <a:endParaRPr lang="en-US" sz="1200" dirty="0"/>
           </a:p>
         </p:txBody>
       </p:sp>
@@ -1293,7 +1404,7 @@
     <p:bg>
       <p:bgPr>
         <a:solidFill>
-          <a:srgbClr val="FFFFFF"/>
+          <a:srgbClr val="FAF8F5"/>
         </a:solidFill>
       </p:bgPr>
     </p:bg>
@@ -1339,8 +1450,8 @@
         </p:nvSpPr>
         <p:spPr>
           <a:xfrm>
-            <a:off x="548640" y="274320"/>
-            <a:ext cx="8046720" cy="640080"/>
+            <a:off x="7772400" y="4709160"/>
+            <a:ext cx="1097280" cy="320040"/>
           </a:xfrm>
           <a:prstGeom prst="rect">
             <a:avLst/>
@@ -1349,14 +1460,105 @@
           <a:ln/>
         </p:spPr>
         <p:txBody>
-          <a:bodyPr wrap="square" lIns="0" tIns="0" rIns="0" bIns="0" rtlCol="0" anchor="ctr"/>
+          <a:bodyPr wrap="square" rtlCol="0" anchor="ctr"/>
+          <a:lstStyle/>
+          <a:p>
+            <a:pPr algn="r" indent="0" marL="0">
+              <a:buNone/>
+            </a:pPr>
+            <a:r>
+              <a:rPr lang="en-US" sz="900" dirty="0">
+                <a:solidFill>
+                  <a:srgbClr val="6B6660"/>
+                </a:solidFill>
+                <a:latin typeface="Calibri" pitchFamily="34" charset="0"/>
+                <a:ea typeface="Calibri" pitchFamily="34" charset="-122"/>
+                <a:cs typeface="Calibri" pitchFamily="34" charset="-120"/>
+              </a:rPr>
+              <a:t>2 / 5</a:t>
+            </a:r>
+            <a:endParaRPr lang="en-US" sz="900" dirty="0"/>
+          </a:p>
+        </p:txBody>
+      </p:sp>
+      <p:sp>
+        <p:nvSpPr>
+          <p:cNvPr id="4" name="Shape 2"/>
+          <p:cNvSpPr/>
+          <p:nvPr/>
+        </p:nvSpPr>
+        <p:spPr>
+          <a:xfrm>
+            <a:off x="1371600" y="914400"/>
+            <a:ext cx="6400800" cy="3200400"/>
+          </a:xfrm>
+          <a:prstGeom prst="rect">
+            <a:avLst/>
+          </a:prstGeom>
+          <a:solidFill>
+            <a:srgbClr val="FFFFFF"/>
+          </a:solidFill>
+          <a:ln w="12700">
+            <a:solidFill>
+              <a:srgbClr val="E5E2DC"/>
+            </a:solidFill>
+            <a:prstDash val="solid"/>
+          </a:ln>
+          <a:effectLst>
+            <a:outerShdw sx="100000" sy="100000" kx="0" ky="0" algn="bl" rotWithShape="0" blurRad="50800" dist="25400" dir="8100000">
+              <a:srgbClr val="000000">
+                <a:alpha val="10000"/>
+              </a:srgbClr>
+            </a:outerShdw>
+          </a:effectLst>
+        </p:spPr>
+      </p:sp>
+      <p:sp>
+        <p:nvSpPr>
+          <p:cNvPr id="5" name="Shape 3"/>
+          <p:cNvSpPr/>
+          <p:nvPr/>
+        </p:nvSpPr>
+        <p:spPr>
+          <a:xfrm>
+            <a:off x="1371600" y="914400"/>
+            <a:ext cx="91440" cy="3200400"/>
+          </a:xfrm>
+          <a:prstGeom prst="rect">
+            <a:avLst/>
+          </a:prstGeom>
+          <a:solidFill>
+            <a:srgbClr val="2A9D8F"/>
+          </a:solidFill>
+          <a:ln/>
+        </p:spPr>
+      </p:sp>
+      <p:sp>
+        <p:nvSpPr>
+          <p:cNvPr id="6" name="Text 4"/>
+          <p:cNvSpPr/>
+          <p:nvPr/>
+        </p:nvSpPr>
+        <p:spPr>
+          <a:xfrm>
+            <a:off x="1828800" y="1097280"/>
+            <a:ext cx="5669280" cy="640080"/>
+          </a:xfrm>
+          <a:prstGeom prst="rect">
+            <a:avLst/>
+          </a:prstGeom>
+          <a:noFill/>
+          <a:ln/>
+        </p:spPr>
+        <p:txBody>
+          <a:bodyPr wrap="square" rtlCol="0" anchor="ctr"/>
           <a:lstStyle/>
           <a:p>
             <a:pPr indent="0" marL="0">
               <a:buNone/>
             </a:pPr>
             <a:r>
-              <a:rPr lang="en-US" sz="2600" b="1" dirty="0">
+              <a:rPr lang="en-US" sz="2400" b="1" dirty="0">
                 <a:solidFill>
                   <a:srgbClr val="1B2A4A"/>
                 </a:solidFill>
@@ -1364,22 +1566,22 @@
                 <a:ea typeface="Georgia" pitchFamily="34" charset="-122"/>
                 <a:cs typeface="Georgia" pitchFamily="34" charset="-120"/>
               </a:rPr>
-              <a:t>Factors</a:t>
-            </a:r>
-            <a:endParaRPr lang="en-US" sz="2600" dirty="0"/>
-          </a:p>
-        </p:txBody>
-      </p:sp>
-      <p:sp>
-        <p:nvSpPr>
-          <p:cNvPr id="4" name="Text 2"/>
-          <p:cNvSpPr/>
-          <p:nvPr/>
-        </p:nvSpPr>
-        <p:spPr>
-          <a:xfrm>
-            <a:off x="548640" y="1097280"/>
-            <a:ext cx="8046720" cy="3474720"/>
+              <a:t>Building Blocks of Numbers</a:t>
+            </a:r>
+            <a:endParaRPr lang="en-US" sz="2400" dirty="0"/>
+          </a:p>
+        </p:txBody>
+      </p:sp>
+      <p:sp>
+        <p:nvSpPr>
+          <p:cNvPr id="7" name="Text 5"/>
+          <p:cNvSpPr/>
+          <p:nvPr/>
+        </p:nvSpPr>
+        <p:spPr>
+          <a:xfrm>
+            <a:off x="1828800" y="1828800"/>
+            <a:ext cx="5669280" cy="2011680"/>
           </a:xfrm>
           <a:prstGeom prst="rect">
             <a:avLst/>
@@ -1391,12 +1593,11 @@
           <a:bodyPr wrap="square" rtlCol="0" anchor="t"/>
           <a:lstStyle/>
           <a:p>
-            <a:pPr marL="342900" indent="-342900">
-              <a:spcAft>
-                <a:spcPts val="800"/>
-              </a:spcAft>
-              <a:buSzPct val="100000"/>
-              <a:buChar char="•"/>
+            <a:pPr indent="0" marL="0">
+              <a:lnSpc>
+                <a:spcPct val="130000"/>
+              </a:lnSpc>
+              <a:buNone/>
             </a:pPr>
             <a:r>
               <a:rPr lang="en-US" sz="1500" dirty="0">
@@ -1407,129 +1608,9 @@
                 <a:ea typeface="Calibri" pitchFamily="34" charset="-122"/>
                 <a:cs typeface="Calibri" pitchFamily="34" charset="-120"/>
               </a:rPr>
-              <a:t>Factors are numbers that divide exactly into another number (no remainder)</a:t>
+              <a:t>Factors and multiples are the fundamental relationships between numbers. Understanding them helps with simplifying fractions, finding common denominators, and solving problems. Prime numbers are the 'atoms' of mathematics — every number can be built from them.</a:t>
             </a:r>
             <a:endParaRPr lang="en-US" sz="1500" dirty="0"/>
-          </a:p>
-          <a:p>
-            <a:pPr marL="342900" indent="-342900">
-              <a:spcAft>
-                <a:spcPts val="800"/>
-              </a:spcAft>
-              <a:buSzPct val="100000"/>
-              <a:buChar char="•"/>
-            </a:pPr>
-            <a:r>
-              <a:rPr lang="en-US" sz="1500" dirty="0">
-                <a:solidFill>
-                  <a:srgbClr val="3D3A36"/>
-                </a:solidFill>
-                <a:latin typeface="Calibri" pitchFamily="34" charset="0"/>
-                <a:ea typeface="Calibri" pitchFamily="34" charset="-122"/>
-                <a:cs typeface="Calibri" pitchFamily="34" charset="-120"/>
-              </a:rPr>
-              <a:t>Factors of 12: 1, 2, 3, 4, 6, 12</a:t>
-            </a:r>
-            <a:endParaRPr lang="en-US" sz="1500" dirty="0"/>
-          </a:p>
-          <a:p>
-            <a:pPr marL="342900" indent="-342900">
-              <a:spcAft>
-                <a:spcPts val="800"/>
-              </a:spcAft>
-              <a:buSzPct val="100000"/>
-              <a:buChar char="•"/>
-            </a:pPr>
-            <a:r>
-              <a:rPr lang="en-US" sz="1500" dirty="0">
-                <a:solidFill>
-                  <a:srgbClr val="3D3A36"/>
-                </a:solidFill>
-                <a:latin typeface="Calibri" pitchFamily="34" charset="0"/>
-                <a:ea typeface="Calibri" pitchFamily="34" charset="-122"/>
-                <a:cs typeface="Calibri" pitchFamily="34" charset="-120"/>
-              </a:rPr>
-              <a:t>Always come in pairs: 1×12, 2×6, 3×4</a:t>
-            </a:r>
-            <a:endParaRPr lang="en-US" sz="1500" dirty="0"/>
-          </a:p>
-          <a:p>
-            <a:pPr marL="342900" indent="-342900">
-              <a:spcAft>
-                <a:spcPts val="800"/>
-              </a:spcAft>
-              <a:buSzPct val="100000"/>
-              <a:buChar char="•"/>
-            </a:pPr>
-            <a:r>
-              <a:rPr lang="en-US" sz="1500" dirty="0">
-                <a:solidFill>
-                  <a:srgbClr val="3D3A36"/>
-                </a:solidFill>
-                <a:latin typeface="Calibri" pitchFamily="34" charset="0"/>
-                <a:ea typeface="Calibri" pitchFamily="34" charset="-122"/>
-                <a:cs typeface="Calibri" pitchFamily="34" charset="-120"/>
-              </a:rPr>
-              <a:t>Every number has at least two factors: 1 and itself</a:t>
-            </a:r>
-            <a:endParaRPr lang="en-US" sz="1500" dirty="0"/>
-          </a:p>
-          <a:p>
-            <a:pPr marL="342900" indent="-342900">
-              <a:spcAft>
-                <a:spcPts val="800"/>
-              </a:spcAft>
-              <a:buSzPct val="100000"/>
-              <a:buChar char="•"/>
-            </a:pPr>
-            <a:r>
-              <a:rPr lang="en-US" sz="1500" dirty="0">
-                <a:solidFill>
-                  <a:srgbClr val="3D3A36"/>
-                </a:solidFill>
-                <a:latin typeface="Calibri" pitchFamily="34" charset="0"/>
-                <a:ea typeface="Calibri" pitchFamily="34" charset="-122"/>
-                <a:cs typeface="Calibri" pitchFamily="34" charset="-120"/>
-              </a:rPr>
-              <a:t>HCF (Highest Common Factor): the largest factor shared by two numbers</a:t>
-            </a:r>
-            <a:endParaRPr lang="en-US" sz="1500" dirty="0"/>
-          </a:p>
-        </p:txBody>
-      </p:sp>
-      <p:sp>
-        <p:nvSpPr>
-          <p:cNvPr id="5" name="Text 3"/>
-          <p:cNvSpPr/>
-          <p:nvPr/>
-        </p:nvSpPr>
-        <p:spPr>
-          <a:xfrm>
-            <a:off x="548640" y="4800600"/>
-            <a:ext cx="3657600" cy="274320"/>
-          </a:xfrm>
-          <a:prstGeom prst="rect">
-            <a:avLst/>
-          </a:prstGeom>
-          <a:noFill/>
-          <a:ln/>
-        </p:spPr>
-        <p:txBody>
-          <a:bodyPr wrap="square" rtlCol="0" anchor="ctr"/>
-          <a:lstStyle/>
-          <a:p>
-            <a:pPr indent="0" marL="0">
-              <a:buNone/>
-            </a:pPr>
-            <a:r>
-              <a:rPr lang="en-US" sz="800" dirty="0">
-                <a:solidFill>
-                  <a:srgbClr val="9B9690"/>
-                </a:solidFill>
-              </a:rPr>
-              <a:t>mrzocchi.com</a:t>
-            </a:r>
-            <a:endParaRPr lang="en-US" sz="800" dirty="0"/>
           </a:p>
         </p:txBody>
       </p:sp>
@@ -1547,7 +1628,7 @@
     <p:bg>
       <p:bgPr>
         <a:solidFill>
-          <a:srgbClr val="FFFFFF"/>
+          <a:srgbClr val="FAF8F5"/>
         </a:solidFill>
       </p:bgPr>
     </p:bg>
@@ -1593,8 +1674,8 @@
         </p:nvSpPr>
         <p:spPr>
           <a:xfrm>
-            <a:off x="548640" y="274320"/>
-            <a:ext cx="8046720" cy="640080"/>
+            <a:off x="7772400" y="4709160"/>
+            <a:ext cx="1097280" cy="320040"/>
           </a:xfrm>
           <a:prstGeom prst="rect">
             <a:avLst/>
@@ -1603,7 +1684,46 @@
           <a:ln/>
         </p:spPr>
         <p:txBody>
-          <a:bodyPr wrap="square" lIns="0" tIns="0" rIns="0" bIns="0" rtlCol="0" anchor="ctr"/>
+          <a:bodyPr wrap="square" rtlCol="0" anchor="ctr"/>
+          <a:lstStyle/>
+          <a:p>
+            <a:pPr algn="r" indent="0" marL="0">
+              <a:buNone/>
+            </a:pPr>
+            <a:r>
+              <a:rPr lang="en-US" sz="900" dirty="0">
+                <a:solidFill>
+                  <a:srgbClr val="6B6660"/>
+                </a:solidFill>
+                <a:latin typeface="Calibri" pitchFamily="34" charset="0"/>
+                <a:ea typeface="Calibri" pitchFamily="34" charset="-122"/>
+                <a:cs typeface="Calibri" pitchFamily="34" charset="-120"/>
+              </a:rPr>
+              <a:t>3 / 5</a:t>
+            </a:r>
+            <a:endParaRPr lang="en-US" sz="900" dirty="0"/>
+          </a:p>
+        </p:txBody>
+      </p:sp>
+      <p:sp>
+        <p:nvSpPr>
+          <p:cNvPr id="4" name="Text 2"/>
+          <p:cNvSpPr/>
+          <p:nvPr/>
+        </p:nvSpPr>
+        <p:spPr>
+          <a:xfrm>
+            <a:off x="457200" y="274320"/>
+            <a:ext cx="8229600" cy="640080"/>
+          </a:xfrm>
+          <a:prstGeom prst="rect">
+            <a:avLst/>
+          </a:prstGeom>
+          <a:noFill/>
+          <a:ln/>
+        </p:spPr>
+        <p:txBody>
+          <a:bodyPr wrap="square" rtlCol="0" anchor="ctr"/>
           <a:lstStyle/>
           <a:p>
             <a:pPr indent="0" marL="0">
@@ -1618,7 +1738,7 @@
                 <a:ea typeface="Georgia" pitchFamily="34" charset="-122"/>
                 <a:cs typeface="Georgia" pitchFamily="34" charset="-120"/>
               </a:rPr>
-              <a:t>Multiples &amp; Primes</a:t>
+              <a:t>Key Definitions</a:t>
             </a:r>
             <a:endParaRPr lang="en-US" sz="2600" dirty="0"/>
           </a:p>
@@ -1626,14 +1746,66 @@
       </p:sp>
       <p:sp>
         <p:nvSpPr>
-          <p:cNvPr id="4" name="Text 2"/>
-          <p:cNvSpPr/>
-          <p:nvPr/>
-        </p:nvSpPr>
-        <p:spPr>
-          <a:xfrm>
-            <a:off x="548640" y="1097280"/>
-            <a:ext cx="8046720" cy="3474720"/>
+          <p:cNvPr id="5" name="Shape 3"/>
+          <p:cNvSpPr/>
+          <p:nvPr/>
+        </p:nvSpPr>
+        <p:spPr>
+          <a:xfrm>
+            <a:off x="457200" y="1188720"/>
+            <a:ext cx="2560320" cy="1828800"/>
+          </a:xfrm>
+          <a:prstGeom prst="rect">
+            <a:avLst/>
+          </a:prstGeom>
+          <a:solidFill>
+            <a:srgbClr val="FFFFFF"/>
+          </a:solidFill>
+          <a:ln w="12700">
+            <a:solidFill>
+              <a:srgbClr val="E5E2DC"/>
+            </a:solidFill>
+            <a:prstDash val="solid"/>
+          </a:ln>
+          <a:effectLst>
+            <a:outerShdw sx="100000" sy="100000" kx="0" ky="0" algn="bl" rotWithShape="0" blurRad="50800" dist="25400" dir="8100000">
+              <a:srgbClr val="000000">
+                <a:alpha val="10000"/>
+              </a:srgbClr>
+            </a:outerShdw>
+          </a:effectLst>
+        </p:spPr>
+      </p:sp>
+      <p:sp>
+        <p:nvSpPr>
+          <p:cNvPr id="6" name="Shape 4"/>
+          <p:cNvSpPr/>
+          <p:nvPr/>
+        </p:nvSpPr>
+        <p:spPr>
+          <a:xfrm>
+            <a:off x="457200" y="1188720"/>
+            <a:ext cx="2560320" cy="54864"/>
+          </a:xfrm>
+          <a:prstGeom prst="rect">
+            <a:avLst/>
+          </a:prstGeom>
+          <a:solidFill>
+            <a:srgbClr val="2A9D8F"/>
+          </a:solidFill>
+          <a:ln/>
+        </p:spPr>
+      </p:sp>
+      <p:sp>
+        <p:nvSpPr>
+          <p:cNvPr id="7" name="Text 5"/>
+          <p:cNvSpPr/>
+          <p:nvPr/>
+        </p:nvSpPr>
+        <p:spPr>
+          <a:xfrm>
+            <a:off x="594360" y="1325880"/>
+            <a:ext cx="2286000" cy="365760"/>
           </a:xfrm>
           <a:prstGeom prst="rect">
             <a:avLst/>
@@ -1642,39 +1814,53 @@
           <a:ln/>
         </p:spPr>
         <p:txBody>
-          <a:bodyPr wrap="square" rtlCol="0" anchor="t"/>
-          <a:lstStyle/>
-          <a:p>
-            <a:pPr marL="342900" indent="-342900">
-              <a:spcAft>
-                <a:spcPts val="800"/>
-              </a:spcAft>
-              <a:buSzPct val="100000"/>
-              <a:buChar char="•"/>
-            </a:pPr>
-            <a:r>
-              <a:rPr lang="en-US" sz="1500" dirty="0">
-                <a:solidFill>
-                  <a:srgbClr val="3D3A36"/>
+          <a:bodyPr wrap="square" rtlCol="0" anchor="ctr"/>
+          <a:lstStyle/>
+          <a:p>
+            <a:pPr indent="0" marL="0">
+              <a:buNone/>
+            </a:pPr>
+            <a:r>
+              <a:rPr lang="en-US" sz="1400" b="1" dirty="0">
+                <a:solidFill>
+                  <a:srgbClr val="1B2A4A"/>
                 </a:solidFill>
                 <a:latin typeface="Calibri" pitchFamily="34" charset="0"/>
                 <a:ea typeface="Calibri" pitchFamily="34" charset="-122"/>
                 <a:cs typeface="Calibri" pitchFamily="34" charset="-120"/>
               </a:rPr>
-              <a:t>Multiples: the times table of a number (e.g., multiples of 3: 3, 6, 9, 12...)</a:t>
-            </a:r>
-            <a:endParaRPr lang="en-US" sz="1500" dirty="0"/>
-          </a:p>
-          <a:p>
-            <a:pPr marL="342900" indent="-342900">
-              <a:spcAft>
-                <a:spcPts val="800"/>
-              </a:spcAft>
-              <a:buSzPct val="100000"/>
-              <a:buChar char="•"/>
-            </a:pPr>
-            <a:r>
-              <a:rPr lang="en-US" sz="1500" dirty="0">
+              <a:t>Factors</a:t>
+            </a:r>
+            <a:endParaRPr lang="en-US" sz="1400" dirty="0"/>
+          </a:p>
+        </p:txBody>
+      </p:sp>
+      <p:sp>
+        <p:nvSpPr>
+          <p:cNvPr id="8" name="Text 6"/>
+          <p:cNvSpPr/>
+          <p:nvPr/>
+        </p:nvSpPr>
+        <p:spPr>
+          <a:xfrm>
+            <a:off x="594360" y="1737360"/>
+            <a:ext cx="2286000" cy="1097280"/>
+          </a:xfrm>
+          <a:prstGeom prst="rect">
+            <a:avLst/>
+          </a:prstGeom>
+          <a:noFill/>
+          <a:ln/>
+        </p:spPr>
+        <p:txBody>
+          <a:bodyPr wrap="square" rtlCol="0" anchor="t"/>
+          <a:lstStyle/>
+          <a:p>
+            <a:pPr indent="0" marL="0">
+              <a:buNone/>
+            </a:pPr>
+            <a:r>
+              <a:rPr lang="en-US" sz="1100" dirty="0">
                 <a:solidFill>
                   <a:srgbClr val="3D3A36"/>
                 </a:solidFill>
@@ -1682,41 +1868,129 @@
                 <a:ea typeface="Calibri" pitchFamily="34" charset="-122"/>
                 <a:cs typeface="Calibri" pitchFamily="34" charset="-120"/>
               </a:rPr>
-              <a:t>LCM (Lowest Common Multiple): smallest multiple shared by two numbers</a:t>
-            </a:r>
-            <a:endParaRPr lang="en-US" sz="1500" dirty="0"/>
-          </a:p>
-          <a:p>
-            <a:pPr marL="342900" indent="-342900">
-              <a:spcAft>
-                <a:spcPts val="800"/>
-              </a:spcAft>
-              <a:buSzPct val="100000"/>
-              <a:buChar char="•"/>
-            </a:pPr>
-            <a:r>
-              <a:rPr lang="en-US" sz="1500" dirty="0">
-                <a:solidFill>
-                  <a:srgbClr val="3D3A36"/>
+              <a:t>Numbers that divide exactly into another number. Factors of 12: 1, 2, 3, 4, 6, 12. Every number has at least two factors: 1 and itself.</a:t>
+            </a:r>
+            <a:endParaRPr lang="en-US" sz="1100" dirty="0"/>
+          </a:p>
+        </p:txBody>
+      </p:sp>
+      <p:sp>
+        <p:nvSpPr>
+          <p:cNvPr id="9" name="Shape 7"/>
+          <p:cNvSpPr/>
+          <p:nvPr/>
+        </p:nvSpPr>
+        <p:spPr>
+          <a:xfrm>
+            <a:off x="3291840" y="1188720"/>
+            <a:ext cx="2560320" cy="1828800"/>
+          </a:xfrm>
+          <a:prstGeom prst="rect">
+            <a:avLst/>
+          </a:prstGeom>
+          <a:solidFill>
+            <a:srgbClr val="FFFFFF"/>
+          </a:solidFill>
+          <a:ln w="12700">
+            <a:solidFill>
+              <a:srgbClr val="E5E2DC"/>
+            </a:solidFill>
+            <a:prstDash val="solid"/>
+          </a:ln>
+          <a:effectLst>
+            <a:outerShdw sx="100000" sy="100000" kx="0" ky="0" algn="bl" rotWithShape="0" blurRad="50800" dist="25400" dir="8100000">
+              <a:srgbClr val="000000">
+                <a:alpha val="10000"/>
+              </a:srgbClr>
+            </a:outerShdw>
+          </a:effectLst>
+        </p:spPr>
+      </p:sp>
+      <p:sp>
+        <p:nvSpPr>
+          <p:cNvPr id="10" name="Shape 8"/>
+          <p:cNvSpPr/>
+          <p:nvPr/>
+        </p:nvSpPr>
+        <p:spPr>
+          <a:xfrm>
+            <a:off x="3291840" y="1188720"/>
+            <a:ext cx="2560320" cy="54864"/>
+          </a:xfrm>
+          <a:prstGeom prst="rect">
+            <a:avLst/>
+          </a:prstGeom>
+          <a:solidFill>
+            <a:srgbClr val="2A9D8F"/>
+          </a:solidFill>
+          <a:ln/>
+        </p:spPr>
+      </p:sp>
+      <p:sp>
+        <p:nvSpPr>
+          <p:cNvPr id="11" name="Text 9"/>
+          <p:cNvSpPr/>
+          <p:nvPr/>
+        </p:nvSpPr>
+        <p:spPr>
+          <a:xfrm>
+            <a:off x="3429000" y="1325880"/>
+            <a:ext cx="2286000" cy="365760"/>
+          </a:xfrm>
+          <a:prstGeom prst="rect">
+            <a:avLst/>
+          </a:prstGeom>
+          <a:noFill/>
+          <a:ln/>
+        </p:spPr>
+        <p:txBody>
+          <a:bodyPr wrap="square" rtlCol="0" anchor="ctr"/>
+          <a:lstStyle/>
+          <a:p>
+            <a:pPr indent="0" marL="0">
+              <a:buNone/>
+            </a:pPr>
+            <a:r>
+              <a:rPr lang="en-US" sz="1400" b="1" dirty="0">
+                <a:solidFill>
+                  <a:srgbClr val="1B2A4A"/>
                 </a:solidFill>
                 <a:latin typeface="Calibri" pitchFamily="34" charset="0"/>
                 <a:ea typeface="Calibri" pitchFamily="34" charset="-122"/>
                 <a:cs typeface="Calibri" pitchFamily="34" charset="-120"/>
               </a:rPr>
-              <a:t>Prime numbers: only TWO factors — 1 and itself</a:t>
-            </a:r>
-            <a:endParaRPr lang="en-US" sz="1500" dirty="0"/>
-          </a:p>
-          <a:p>
-            <a:pPr marL="342900" indent="-342900">
-              <a:spcAft>
-                <a:spcPts val="800"/>
-              </a:spcAft>
-              <a:buSzPct val="100000"/>
-              <a:buChar char="•"/>
-            </a:pPr>
-            <a:r>
-              <a:rPr lang="en-US" sz="1500" dirty="0">
+              <a:t>Multiples</a:t>
+            </a:r>
+            <a:endParaRPr lang="en-US" sz="1400" dirty="0"/>
+          </a:p>
+        </p:txBody>
+      </p:sp>
+      <p:sp>
+        <p:nvSpPr>
+          <p:cNvPr id="12" name="Text 10"/>
+          <p:cNvSpPr/>
+          <p:nvPr/>
+        </p:nvSpPr>
+        <p:spPr>
+          <a:xfrm>
+            <a:off x="3429000" y="1737360"/>
+            <a:ext cx="2286000" cy="1097280"/>
+          </a:xfrm>
+          <a:prstGeom prst="rect">
+            <a:avLst/>
+          </a:prstGeom>
+          <a:noFill/>
+          <a:ln/>
+        </p:spPr>
+        <p:txBody>
+          <a:bodyPr wrap="square" rtlCol="0" anchor="t"/>
+          <a:lstStyle/>
+          <a:p>
+            <a:pPr indent="0" marL="0">
+              <a:buNone/>
+            </a:pPr>
+            <a:r>
+              <a:rPr lang="en-US" sz="1100" dirty="0">
                 <a:solidFill>
                   <a:srgbClr val="3D3A36"/>
                 </a:solidFill>
@@ -1724,41 +1998,129 @@
                 <a:ea typeface="Calibri" pitchFamily="34" charset="-122"/>
                 <a:cs typeface="Calibri" pitchFamily="34" charset="-120"/>
               </a:rPr>
-              <a:t>First primes: 2, 3, 5, 7, 11, 13, 17, 19, 23...</a:t>
-            </a:r>
-            <a:endParaRPr lang="en-US" sz="1500" dirty="0"/>
-          </a:p>
-          <a:p>
-            <a:pPr marL="342900" indent="-342900">
-              <a:spcAft>
-                <a:spcPts val="800"/>
-              </a:spcAft>
-              <a:buSzPct val="100000"/>
-              <a:buChar char="•"/>
-            </a:pPr>
-            <a:r>
-              <a:rPr lang="en-US" sz="1500" dirty="0">
-                <a:solidFill>
-                  <a:srgbClr val="3D3A36"/>
+              <a:t>The 'times table' results. Multiples of 5: 5, 10, 15, 20, 25... A multiple = the number × any whole number.</a:t>
+            </a:r>
+            <a:endParaRPr lang="en-US" sz="1100" dirty="0"/>
+          </a:p>
+        </p:txBody>
+      </p:sp>
+      <p:sp>
+        <p:nvSpPr>
+          <p:cNvPr id="13" name="Shape 11"/>
+          <p:cNvSpPr/>
+          <p:nvPr/>
+        </p:nvSpPr>
+        <p:spPr>
+          <a:xfrm>
+            <a:off x="6126480" y="1188720"/>
+            <a:ext cx="2560320" cy="1828800"/>
+          </a:xfrm>
+          <a:prstGeom prst="rect">
+            <a:avLst/>
+          </a:prstGeom>
+          <a:solidFill>
+            <a:srgbClr val="FFFFFF"/>
+          </a:solidFill>
+          <a:ln w="12700">
+            <a:solidFill>
+              <a:srgbClr val="E5E2DC"/>
+            </a:solidFill>
+            <a:prstDash val="solid"/>
+          </a:ln>
+          <a:effectLst>
+            <a:outerShdw sx="100000" sy="100000" kx="0" ky="0" algn="bl" rotWithShape="0" blurRad="50800" dist="25400" dir="8100000">
+              <a:srgbClr val="000000">
+                <a:alpha val="10000"/>
+              </a:srgbClr>
+            </a:outerShdw>
+          </a:effectLst>
+        </p:spPr>
+      </p:sp>
+      <p:sp>
+        <p:nvSpPr>
+          <p:cNvPr id="14" name="Shape 12"/>
+          <p:cNvSpPr/>
+          <p:nvPr/>
+        </p:nvSpPr>
+        <p:spPr>
+          <a:xfrm>
+            <a:off x="6126480" y="1188720"/>
+            <a:ext cx="2560320" cy="54864"/>
+          </a:xfrm>
+          <a:prstGeom prst="rect">
+            <a:avLst/>
+          </a:prstGeom>
+          <a:solidFill>
+            <a:srgbClr val="2A9D8F"/>
+          </a:solidFill>
+          <a:ln/>
+        </p:spPr>
+      </p:sp>
+      <p:sp>
+        <p:nvSpPr>
+          <p:cNvPr id="15" name="Text 13"/>
+          <p:cNvSpPr/>
+          <p:nvPr/>
+        </p:nvSpPr>
+        <p:spPr>
+          <a:xfrm>
+            <a:off x="6263640" y="1325880"/>
+            <a:ext cx="2286000" cy="365760"/>
+          </a:xfrm>
+          <a:prstGeom prst="rect">
+            <a:avLst/>
+          </a:prstGeom>
+          <a:noFill/>
+          <a:ln/>
+        </p:spPr>
+        <p:txBody>
+          <a:bodyPr wrap="square" rtlCol="0" anchor="ctr"/>
+          <a:lstStyle/>
+          <a:p>
+            <a:pPr indent="0" marL="0">
+              <a:buNone/>
+            </a:pPr>
+            <a:r>
+              <a:rPr lang="en-US" sz="1400" b="1" dirty="0">
+                <a:solidFill>
+                  <a:srgbClr val="1B2A4A"/>
                 </a:solidFill>
                 <a:latin typeface="Calibri" pitchFamily="34" charset="0"/>
                 <a:ea typeface="Calibri" pitchFamily="34" charset="-122"/>
                 <a:cs typeface="Calibri" pitchFamily="34" charset="-120"/>
               </a:rPr>
-              <a:t>2 is the only EVEN prime number</a:t>
-            </a:r>
-            <a:endParaRPr lang="en-US" sz="1500" dirty="0"/>
-          </a:p>
-          <a:p>
-            <a:pPr marL="342900" indent="-342900">
-              <a:spcAft>
-                <a:spcPts val="800"/>
-              </a:spcAft>
-              <a:buSzPct val="100000"/>
-              <a:buChar char="•"/>
-            </a:pPr>
-            <a:r>
-              <a:rPr lang="en-US" sz="1500" dirty="0">
+              <a:t>Prime Numbers</a:t>
+            </a:r>
+            <a:endParaRPr lang="en-US" sz="1400" dirty="0"/>
+          </a:p>
+        </p:txBody>
+      </p:sp>
+      <p:sp>
+        <p:nvSpPr>
+          <p:cNvPr id="16" name="Text 14"/>
+          <p:cNvSpPr/>
+          <p:nvPr/>
+        </p:nvSpPr>
+        <p:spPr>
+          <a:xfrm>
+            <a:off x="6263640" y="1737360"/>
+            <a:ext cx="2286000" cy="1097280"/>
+          </a:xfrm>
+          <a:prstGeom prst="rect">
+            <a:avLst/>
+          </a:prstGeom>
+          <a:noFill/>
+          <a:ln/>
+        </p:spPr>
+        <p:txBody>
+          <a:bodyPr wrap="square" rtlCol="0" anchor="t"/>
+          <a:lstStyle/>
+          <a:p>
+            <a:pPr indent="0" marL="0">
+              <a:buNone/>
+            </a:pPr>
+            <a:r>
+              <a:rPr lang="en-US" sz="1100" dirty="0">
                 <a:solidFill>
                   <a:srgbClr val="3D3A36"/>
                 </a:solidFill>
@@ -1766,45 +2128,9 @@
                 <a:ea typeface="Calibri" pitchFamily="34" charset="-122"/>
                 <a:cs typeface="Calibri" pitchFamily="34" charset="-120"/>
               </a:rPr>
-              <a:t>1 is NOT a prime number (only one factor)</a:t>
-            </a:r>
-            <a:endParaRPr lang="en-US" sz="1500" dirty="0"/>
-          </a:p>
-        </p:txBody>
-      </p:sp>
-      <p:sp>
-        <p:nvSpPr>
-          <p:cNvPr id="5" name="Text 3"/>
-          <p:cNvSpPr/>
-          <p:nvPr/>
-        </p:nvSpPr>
-        <p:spPr>
-          <a:xfrm>
-            <a:off x="548640" y="4800600"/>
-            <a:ext cx="3657600" cy="274320"/>
-          </a:xfrm>
-          <a:prstGeom prst="rect">
-            <a:avLst/>
-          </a:prstGeom>
-          <a:noFill/>
-          <a:ln/>
-        </p:spPr>
-        <p:txBody>
-          <a:bodyPr wrap="square" rtlCol="0" anchor="ctr"/>
-          <a:lstStyle/>
-          <a:p>
-            <a:pPr indent="0" marL="0">
-              <a:buNone/>
-            </a:pPr>
-            <a:r>
-              <a:rPr lang="en-US" sz="800" dirty="0">
-                <a:solidFill>
-                  <a:srgbClr val="9B9690"/>
-                </a:solidFill>
-              </a:rPr>
-              <a:t>mrzocchi.com</a:t>
-            </a:r>
-            <a:endParaRPr lang="en-US" sz="800" dirty="0"/>
+              <a:t>A number with EXACTLY two factors: 1 and itself. First primes: 2, 3, 5, 7, 11, 13, 17, 19, 23, 29. Note: 1 is NOT prime (only one factor). 2 is the only even prime.</a:t>
+            </a:r>
+            <a:endParaRPr lang="en-US" sz="1100" dirty="0"/>
           </a:p>
         </p:txBody>
       </p:sp>
@@ -1819,6 +2145,507 @@
 <file path=ppt/slides/slide4.xml><?xml version="1.0" encoding="utf-8"?>
 <p:sld xmlns:a="http://schemas.openxmlformats.org/drawingml/2006/main" xmlns:r="http://schemas.openxmlformats.org/officeDocument/2006/relationships" xmlns:p="http://schemas.openxmlformats.org/presentationml/2006/main">
   <p:cSld name="Slide 4">
+    <p:bg>
+      <p:bgPr>
+        <a:solidFill>
+          <a:srgbClr val="FAF8F5"/>
+        </a:solidFill>
+      </p:bgPr>
+    </p:bg>
+    <p:spTree>
+      <p:nvGrpSpPr>
+        <p:cNvPr id="1" name=""/>
+        <p:cNvGrpSpPr/>
+        <p:nvPr/>
+      </p:nvGrpSpPr>
+      <p:grpSpPr>
+        <a:xfrm>
+          <a:off x="0" y="0"/>
+          <a:ext cx="0" cy="0"/>
+          <a:chOff x="0" y="0"/>
+          <a:chExt cx="0" cy="0"/>
+        </a:xfrm>
+      </p:grpSpPr>
+      <p:sp>
+        <p:nvSpPr>
+          <p:cNvPr id="2" name="Shape 0"/>
+          <p:cNvSpPr/>
+          <p:nvPr/>
+        </p:nvSpPr>
+        <p:spPr>
+          <a:xfrm>
+            <a:off x="0" y="0"/>
+            <a:ext cx="9144000" cy="54864"/>
+          </a:xfrm>
+          <a:prstGeom prst="rect">
+            <a:avLst/>
+          </a:prstGeom>
+          <a:solidFill>
+            <a:srgbClr val="2A9D8F"/>
+          </a:solidFill>
+          <a:ln/>
+        </p:spPr>
+      </p:sp>
+      <p:sp>
+        <p:nvSpPr>
+          <p:cNvPr id="3" name="Text 1"/>
+          <p:cNvSpPr/>
+          <p:nvPr/>
+        </p:nvSpPr>
+        <p:spPr>
+          <a:xfrm>
+            <a:off x="7772400" y="4709160"/>
+            <a:ext cx="1097280" cy="320040"/>
+          </a:xfrm>
+          <a:prstGeom prst="rect">
+            <a:avLst/>
+          </a:prstGeom>
+          <a:noFill/>
+          <a:ln/>
+        </p:spPr>
+        <p:txBody>
+          <a:bodyPr wrap="square" rtlCol="0" anchor="ctr"/>
+          <a:lstStyle/>
+          <a:p>
+            <a:pPr algn="r" indent="0" marL="0">
+              <a:buNone/>
+            </a:pPr>
+            <a:r>
+              <a:rPr lang="en-US" sz="900" dirty="0">
+                <a:solidFill>
+                  <a:srgbClr val="6B6660"/>
+                </a:solidFill>
+                <a:latin typeface="Calibri" pitchFamily="34" charset="0"/>
+                <a:ea typeface="Calibri" pitchFamily="34" charset="-122"/>
+                <a:cs typeface="Calibri" pitchFamily="34" charset="-120"/>
+              </a:rPr>
+              <a:t>4 / 5</a:t>
+            </a:r>
+            <a:endParaRPr lang="en-US" sz="900" dirty="0"/>
+          </a:p>
+        </p:txBody>
+      </p:sp>
+      <p:sp>
+        <p:nvSpPr>
+          <p:cNvPr id="4" name="Text 2"/>
+          <p:cNvSpPr/>
+          <p:nvPr/>
+        </p:nvSpPr>
+        <p:spPr>
+          <a:xfrm>
+            <a:off x="457200" y="274320"/>
+            <a:ext cx="8229600" cy="640080"/>
+          </a:xfrm>
+          <a:prstGeom prst="rect">
+            <a:avLst/>
+          </a:prstGeom>
+          <a:noFill/>
+          <a:ln/>
+        </p:spPr>
+        <p:txBody>
+          <a:bodyPr wrap="square" rtlCol="0" anchor="ctr"/>
+          <a:lstStyle/>
+          <a:p>
+            <a:pPr indent="0" marL="0">
+              <a:buNone/>
+            </a:pPr>
+            <a:r>
+              <a:rPr lang="en-US" sz="2600" b="1" dirty="0">
+                <a:solidFill>
+                  <a:srgbClr val="1B2A4A"/>
+                </a:solidFill>
+                <a:latin typeface="Georgia" pitchFamily="34" charset="0"/>
+                <a:ea typeface="Georgia" pitchFamily="34" charset="-122"/>
+                <a:cs typeface="Georgia" pitchFamily="34" charset="-120"/>
+              </a:rPr>
+              <a:t>HCF and LCM</a:t>
+            </a:r>
+            <a:endParaRPr lang="en-US" sz="2600" dirty="0"/>
+          </a:p>
+        </p:txBody>
+      </p:sp>
+      <p:sp>
+        <p:nvSpPr>
+          <p:cNvPr id="5" name="Text 3"/>
+          <p:cNvSpPr/>
+          <p:nvPr/>
+        </p:nvSpPr>
+        <p:spPr>
+          <a:xfrm>
+            <a:off x="457200" y="1188720"/>
+            <a:ext cx="3840480" cy="3474720"/>
+          </a:xfrm>
+          <a:prstGeom prst="rect">
+            <a:avLst/>
+          </a:prstGeom>
+          <a:noFill/>
+          <a:ln/>
+        </p:spPr>
+        <p:txBody>
+          <a:bodyPr wrap="square" rtlCol="0" anchor="t"/>
+          <a:lstStyle/>
+          <a:p>
+            <a:pPr marL="342900" indent="-342900">
+              <a:spcAft>
+                <a:spcPts val="600"/>
+              </a:spcAft>
+              <a:buSzPct val="100000"/>
+              <a:buChar char="•"/>
+            </a:pPr>
+            <a:r>
+              <a:rPr lang="en-US" sz="1400" dirty="0">
+                <a:solidFill>
+                  <a:srgbClr val="3D3A36"/>
+                </a:solidFill>
+                <a:latin typeface="Calibri" pitchFamily="34" charset="0"/>
+                <a:ea typeface="Calibri" pitchFamily="34" charset="-122"/>
+                <a:cs typeface="Calibri" pitchFamily="34" charset="-120"/>
+              </a:rPr>
+              <a:t>HCF = Highest Common Factor</a:t>
+            </a:r>
+            <a:endParaRPr lang="en-US" sz="1400" dirty="0"/>
+          </a:p>
+          <a:p>
+            <a:pPr marL="342900" indent="-342900">
+              <a:spcAft>
+                <a:spcPts val="600"/>
+              </a:spcAft>
+              <a:buSzPct val="100000"/>
+              <a:buChar char="•"/>
+            </a:pPr>
+            <a:r>
+              <a:rPr lang="en-US" sz="1400" dirty="0">
+                <a:solidFill>
+                  <a:srgbClr val="3D3A36"/>
+                </a:solidFill>
+                <a:latin typeface="Calibri" pitchFamily="34" charset="0"/>
+                <a:ea typeface="Calibri" pitchFamily="34" charset="-122"/>
+                <a:cs typeface="Calibri" pitchFamily="34" charset="-120"/>
+              </a:rPr>
+              <a:t>The largest factor shared by two numbers</a:t>
+            </a:r>
+            <a:endParaRPr lang="en-US" sz="1400" dirty="0"/>
+          </a:p>
+          <a:p>
+            <a:pPr marL="342900" indent="-342900">
+              <a:spcAft>
+                <a:spcPts val="600"/>
+              </a:spcAft>
+              <a:buSzPct val="100000"/>
+              <a:buChar char="•"/>
+            </a:pPr>
+            <a:r>
+              <a:rPr lang="en-US" sz="1400" dirty="0">
+                <a:solidFill>
+                  <a:srgbClr val="3D3A36"/>
+                </a:solidFill>
+                <a:latin typeface="Calibri" pitchFamily="34" charset="0"/>
+                <a:ea typeface="Calibri" pitchFamily="34" charset="-122"/>
+                <a:cs typeface="Calibri" pitchFamily="34" charset="-120"/>
+              </a:rPr>
+              <a:t>HCF of 12 and 18: factors of 12 = 1,2,3,4,6,12; factors of 18 = 1,2,3,6,9,18; common = 1,2,3,6 → HCF = 6</a:t>
+            </a:r>
+            <a:endParaRPr lang="en-US" sz="1400" dirty="0"/>
+          </a:p>
+          <a:p>
+            <a:pPr marL="342900" indent="-342900">
+              <a:spcAft>
+                <a:spcPts val="600"/>
+              </a:spcAft>
+              <a:buSzPct val="100000"/>
+              <a:buChar char="•"/>
+            </a:pPr>
+            <a:r>
+              <a:rPr lang="en-US" sz="1400" dirty="0">
+                <a:solidFill>
+                  <a:srgbClr val="3D3A36"/>
+                </a:solidFill>
+                <a:latin typeface="Calibri" pitchFamily="34" charset="0"/>
+                <a:ea typeface="Calibri" pitchFamily="34" charset="-122"/>
+                <a:cs typeface="Calibri" pitchFamily="34" charset="-120"/>
+              </a:rPr>
+              <a:t>LCM = Lowest Common Multiple</a:t>
+            </a:r>
+            <a:endParaRPr lang="en-US" sz="1400" dirty="0"/>
+          </a:p>
+          <a:p>
+            <a:pPr marL="342900" indent="-342900">
+              <a:spcAft>
+                <a:spcPts val="600"/>
+              </a:spcAft>
+              <a:buSzPct val="100000"/>
+              <a:buChar char="•"/>
+            </a:pPr>
+            <a:r>
+              <a:rPr lang="en-US" sz="1400" dirty="0">
+                <a:solidFill>
+                  <a:srgbClr val="3D3A36"/>
+                </a:solidFill>
+                <a:latin typeface="Calibri" pitchFamily="34" charset="0"/>
+                <a:ea typeface="Calibri" pitchFamily="34" charset="-122"/>
+                <a:cs typeface="Calibri" pitchFamily="34" charset="-120"/>
+              </a:rPr>
+              <a:t>The smallest multiple shared by two numbers</a:t>
+            </a:r>
+            <a:endParaRPr lang="en-US" sz="1400" dirty="0"/>
+          </a:p>
+          <a:p>
+            <a:pPr marL="342900" indent="-342900">
+              <a:spcAft>
+                <a:spcPts val="600"/>
+              </a:spcAft>
+              <a:buSzPct val="100000"/>
+              <a:buChar char="•"/>
+            </a:pPr>
+            <a:r>
+              <a:rPr lang="en-US" sz="1400" dirty="0">
+                <a:solidFill>
+                  <a:srgbClr val="3D3A36"/>
+                </a:solidFill>
+                <a:latin typeface="Calibri" pitchFamily="34" charset="0"/>
+                <a:ea typeface="Calibri" pitchFamily="34" charset="-122"/>
+                <a:cs typeface="Calibri" pitchFamily="34" charset="-120"/>
+              </a:rPr>
+              <a:t>LCM of 4 and 6: multiples of 4 = 4,8,12,16...; multiples of 6 = 6,12,18...; LCM = 12</a:t>
+            </a:r>
+            <a:endParaRPr lang="en-US" sz="1400" dirty="0"/>
+          </a:p>
+        </p:txBody>
+      </p:sp>
+      <p:sp>
+        <p:nvSpPr>
+          <p:cNvPr id="6" name="Shape 4"/>
+          <p:cNvSpPr/>
+          <p:nvPr/>
+        </p:nvSpPr>
+        <p:spPr>
+          <a:xfrm>
+            <a:off x="4846320" y="1188720"/>
+            <a:ext cx="3840480" cy="3474720"/>
+          </a:xfrm>
+          <a:prstGeom prst="rect">
+            <a:avLst/>
+          </a:prstGeom>
+          <a:solidFill>
+            <a:srgbClr val="FFFFFF"/>
+          </a:solidFill>
+          <a:ln w="12700">
+            <a:solidFill>
+              <a:srgbClr val="E5E2DC"/>
+            </a:solidFill>
+            <a:prstDash val="solid"/>
+          </a:ln>
+          <a:effectLst>
+            <a:outerShdw sx="100000" sy="100000" kx="0" ky="0" algn="bl" rotWithShape="0" blurRad="50800" dist="25400" dir="8100000">
+              <a:srgbClr val="000000">
+                <a:alpha val="10000"/>
+              </a:srgbClr>
+            </a:outerShdw>
+          </a:effectLst>
+        </p:spPr>
+      </p:sp>
+      <p:sp>
+        <p:nvSpPr>
+          <p:cNvPr id="7" name="Shape 5"/>
+          <p:cNvSpPr/>
+          <p:nvPr/>
+        </p:nvSpPr>
+        <p:spPr>
+          <a:xfrm>
+            <a:off x="4846320" y="1188720"/>
+            <a:ext cx="3840480" cy="54864"/>
+          </a:xfrm>
+          <a:prstGeom prst="rect">
+            <a:avLst/>
+          </a:prstGeom>
+          <a:solidFill>
+            <a:srgbClr val="2A9D8F"/>
+          </a:solidFill>
+          <a:ln/>
+        </p:spPr>
+      </p:sp>
+      <p:sp>
+        <p:nvSpPr>
+          <p:cNvPr id="8" name="Text 6"/>
+          <p:cNvSpPr/>
+          <p:nvPr/>
+        </p:nvSpPr>
+        <p:spPr>
+          <a:xfrm>
+            <a:off x="5120640" y="1371600"/>
+            <a:ext cx="3291840" cy="3108960"/>
+          </a:xfrm>
+          <a:prstGeom prst="rect">
+            <a:avLst/>
+          </a:prstGeom>
+          <a:noFill/>
+          <a:ln/>
+        </p:spPr>
+        <p:txBody>
+          <a:bodyPr wrap="square" rtlCol="0" anchor="t"/>
+          <a:lstStyle/>
+          <a:p>
+            <a:pPr indent="0" marL="0">
+              <a:spcAft>
+                <a:spcPts val="400"/>
+              </a:spcAft>
+              <a:buNone/>
+            </a:pPr>
+            <a:r>
+              <a:rPr lang="en-US" sz="1600" b="1" dirty="0">
+                <a:solidFill>
+                  <a:srgbClr val="1B2A4A"/>
+                </a:solidFill>
+                <a:latin typeface="Calibri" pitchFamily="34" charset="0"/>
+                <a:ea typeface="Calibri" pitchFamily="34" charset="-122"/>
+                <a:cs typeface="Calibri" pitchFamily="34" charset="-120"/>
+              </a:rPr>
+              <a:t>Prime Factorisation</a:t>
+            </a:r>
+            <a:endParaRPr lang="en-US" sz="1600" dirty="0"/>
+          </a:p>
+          <a:p>
+            <a:pPr indent="0" marL="0">
+              <a:spcAft>
+                <a:spcPts val="400"/>
+              </a:spcAft>
+              <a:buNone/>
+            </a:pPr>
+            <a:endParaRPr lang="en-US" sz="1600" dirty="0"/>
+          </a:p>
+          <a:p>
+            <a:pPr indent="0" marL="0">
+              <a:spcAft>
+                <a:spcPts val="400"/>
+              </a:spcAft>
+              <a:buNone/>
+            </a:pPr>
+            <a:r>
+              <a:rPr lang="en-US" sz="1300" dirty="0">
+                <a:solidFill>
+                  <a:srgbClr val="3D3A36"/>
+                </a:solidFill>
+                <a:latin typeface="Calibri" pitchFamily="34" charset="0"/>
+                <a:ea typeface="Calibri" pitchFamily="34" charset="-122"/>
+                <a:cs typeface="Calibri" pitchFamily="34" charset="-120"/>
+              </a:rPr>
+              <a:t>Breaking a number into its prime factors</a:t>
+            </a:r>
+            <a:endParaRPr lang="en-US" sz="1600" dirty="0"/>
+          </a:p>
+          <a:p>
+            <a:pPr indent="0" marL="0">
+              <a:spcAft>
+                <a:spcPts val="400"/>
+              </a:spcAft>
+              <a:buNone/>
+            </a:pPr>
+            <a:r>
+              <a:rPr lang="en-US" sz="1300" dirty="0">
+                <a:solidFill>
+                  <a:srgbClr val="3D3A36"/>
+                </a:solidFill>
+                <a:latin typeface="Calibri" pitchFamily="34" charset="0"/>
+                <a:ea typeface="Calibri" pitchFamily="34" charset="-122"/>
+                <a:cs typeface="Calibri" pitchFamily="34" charset="-120"/>
+              </a:rPr>
+              <a:t>Use a factor tree: 36 → 6 × 6 → 2×3 × 2×3 = 2² × 3²</a:t>
+            </a:r>
+            <a:endParaRPr lang="en-US" sz="1600" dirty="0"/>
+          </a:p>
+          <a:p>
+            <a:pPr indent="0" marL="0">
+              <a:spcAft>
+                <a:spcPts val="400"/>
+              </a:spcAft>
+              <a:buNone/>
+            </a:pPr>
+            <a:r>
+              <a:rPr lang="en-US" sz="1300" dirty="0">
+                <a:solidFill>
+                  <a:srgbClr val="3D3A36"/>
+                </a:solidFill>
+                <a:latin typeface="Calibri" pitchFamily="34" charset="0"/>
+                <a:ea typeface="Calibri" pitchFamily="34" charset="-122"/>
+                <a:cs typeface="Calibri" pitchFamily="34" charset="-120"/>
+              </a:rPr>
+              <a:t>Every composite number has a unique prime factorisation</a:t>
+            </a:r>
+            <a:endParaRPr lang="en-US" sz="1600" dirty="0"/>
+          </a:p>
+          <a:p>
+            <a:pPr indent="0" marL="0">
+              <a:spcAft>
+                <a:spcPts val="400"/>
+              </a:spcAft>
+              <a:buNone/>
+            </a:pPr>
+            <a:r>
+              <a:rPr lang="en-US" sz="1300" dirty="0">
+                <a:solidFill>
+                  <a:srgbClr val="3D3A36"/>
+                </a:solidFill>
+                <a:latin typeface="Calibri" pitchFamily="34" charset="0"/>
+                <a:ea typeface="Calibri" pitchFamily="34" charset="-122"/>
+                <a:cs typeface="Calibri" pitchFamily="34" charset="-120"/>
+              </a:rPr>
+              <a:t>Useful for finding HCF and LCM efficiently</a:t>
+            </a:r>
+            <a:endParaRPr lang="en-US" sz="1600" dirty="0"/>
+          </a:p>
+          <a:p>
+            <a:pPr indent="0" marL="0">
+              <a:spcAft>
+                <a:spcPts val="400"/>
+              </a:spcAft>
+              <a:buNone/>
+            </a:pPr>
+            <a:r>
+              <a:rPr lang="en-US" sz="1300" dirty="0">
+                <a:solidFill>
+                  <a:srgbClr val="3D3A36"/>
+                </a:solidFill>
+                <a:latin typeface="Calibri" pitchFamily="34" charset="0"/>
+                <a:ea typeface="Calibri" pitchFamily="34" charset="-122"/>
+                <a:cs typeface="Calibri" pitchFamily="34" charset="-120"/>
+              </a:rPr>
+              <a:t>HCF: use the lowest power of common primes</a:t>
+            </a:r>
+            <a:endParaRPr lang="en-US" sz="1600" dirty="0"/>
+          </a:p>
+          <a:p>
+            <a:pPr indent="0" marL="0">
+              <a:spcAft>
+                <a:spcPts val="400"/>
+              </a:spcAft>
+              <a:buNone/>
+            </a:pPr>
+            <a:r>
+              <a:rPr lang="en-US" sz="1300" dirty="0">
+                <a:solidFill>
+                  <a:srgbClr val="3D3A36"/>
+                </a:solidFill>
+                <a:latin typeface="Calibri" pitchFamily="34" charset="0"/>
+                <a:ea typeface="Calibri" pitchFamily="34" charset="-122"/>
+                <a:cs typeface="Calibri" pitchFamily="34" charset="-120"/>
+              </a:rPr>
+              <a:t>LCM: use the highest power of all primes</a:t>
+            </a:r>
+            <a:endParaRPr lang="en-US" sz="1600" dirty="0"/>
+          </a:p>
+        </p:txBody>
+      </p:sp>
+    </p:spTree>
+  </p:cSld>
+  <p:clrMapOvr>
+    <a:masterClrMapping/>
+  </p:clrMapOvr>
+</p:sld>
+</file>
+
+<file path=ppt/slides/slide5.xml><?xml version="1.0" encoding="utf-8"?>
+<p:sld xmlns:a="http://schemas.openxmlformats.org/drawingml/2006/main" xmlns:r="http://schemas.openxmlformats.org/officeDocument/2006/relationships" xmlns:p="http://schemas.openxmlformats.org/presentationml/2006/main">
+  <p:cSld name="Slide 5">
     <p:bg>
       <p:bgPr>
         <a:solidFill>
@@ -1849,13 +2676,13 @@
         <p:spPr>
           <a:xfrm>
             <a:off x="0" y="0"/>
-            <a:ext cx="9144000" cy="54864"/>
-          </a:xfrm>
-          <a:prstGeom prst="rect">
-            <a:avLst/>
-          </a:prstGeom>
-          <a:solidFill>
-            <a:srgbClr val="2A9D8F"/>
+            <a:ext cx="109728" cy="5143500"/>
+          </a:xfrm>
+          <a:prstGeom prst="rect">
+            <a:avLst/>
+          </a:prstGeom>
+          <a:solidFill>
+            <a:srgbClr val="E9C46A"/>
           </a:solidFill>
           <a:ln/>
         </p:spPr>
@@ -1868,8 +2695,8 @@
         </p:nvSpPr>
         <p:spPr>
           <a:xfrm>
-            <a:off x="548640" y="457200"/>
-            <a:ext cx="8046720" cy="640080"/>
+            <a:off x="731520" y="457200"/>
+            <a:ext cx="7772400" cy="731520"/>
           </a:xfrm>
           <a:prstGeom prst="rect">
             <a:avLst/>
@@ -1885,7 +2712,7 @@
               <a:buNone/>
             </a:pPr>
             <a:r>
-              <a:rPr lang="en-US" sz="2800" b="1" dirty="0">
+              <a:rPr lang="en-US" sz="3200" b="1" dirty="0">
                 <a:solidFill>
                   <a:srgbClr val="FFFFFF"/>
                 </a:solidFill>
@@ -1895,7 +2722,7 @@
               </a:rPr>
               <a:t>Key Takeaways</a:t>
             </a:r>
-            <a:endParaRPr lang="en-US" sz="2800" dirty="0"/>
+            <a:endParaRPr lang="en-US" sz="3200" dirty="0"/>
           </a:p>
         </p:txBody>
       </p:sp>
@@ -1907,8 +2734,8 @@
         </p:nvSpPr>
         <p:spPr>
           <a:xfrm>
-            <a:off x="731520" y="1371600"/>
-            <a:ext cx="7680960" cy="3200400"/>
+            <a:off x="731520" y="1463040"/>
+            <a:ext cx="7772400" cy="3200400"/>
           </a:xfrm>
           <a:prstGeom prst="rect">
             <a:avLst/>
@@ -1928,7 +2755,7 @@
               <a:buChar char="•"/>
             </a:pPr>
             <a:r>
-              <a:rPr lang="en-US" sz="1600" dirty="0">
+              <a:rPr lang="en-US" sz="1500" dirty="0">
                 <a:solidFill>
                   <a:srgbClr val="CADCFC"/>
                 </a:solidFill>
@@ -1936,9 +2763,9 @@
                 <a:ea typeface="Calibri" pitchFamily="34" charset="-122"/>
                 <a:cs typeface="Calibri" pitchFamily="34" charset="-120"/>
               </a:rPr>
-              <a:t>Factors divide into a number exactly; multiples are the times table</a:t>
-            </a:r>
-            <a:endParaRPr lang="en-US" sz="1600" dirty="0"/>
+              <a:t>Factors: divide exactly into a number. Multiples: times table results</a:t>
+            </a:r>
+            <a:endParaRPr lang="en-US" sz="1500" dirty="0"/>
           </a:p>
           <a:p>
             <a:pPr marL="342900" indent="-342900">
@@ -1949,7 +2776,7 @@
               <a:buChar char="•"/>
             </a:pPr>
             <a:r>
-              <a:rPr lang="en-US" sz="1600" dirty="0">
+              <a:rPr lang="en-US" sz="1500" dirty="0">
                 <a:solidFill>
                   <a:srgbClr val="CADCFC"/>
                 </a:solidFill>
@@ -1957,9 +2784,9 @@
                 <a:ea typeface="Calibri" pitchFamily="34" charset="-122"/>
                 <a:cs typeface="Calibri" pitchFamily="34" charset="-120"/>
               </a:rPr>
-              <a:t>HCF = highest common factor; LCM = lowest common multiple</a:t>
-            </a:r>
-            <a:endParaRPr lang="en-US" sz="1600" dirty="0"/>
+              <a:t>Prime: exactly two factors (1 and itself). 1 is NOT prime</a:t>
+            </a:r>
+            <a:endParaRPr lang="en-US" sz="1500" dirty="0"/>
           </a:p>
           <a:p>
             <a:pPr marL="342900" indent="-342900">
@@ -1970,7 +2797,7 @@
               <a:buChar char="•"/>
             </a:pPr>
             <a:r>
-              <a:rPr lang="en-US" sz="1600" dirty="0">
+              <a:rPr lang="en-US" sz="1500" dirty="0">
                 <a:solidFill>
                   <a:srgbClr val="CADCFC"/>
                 </a:solidFill>
@@ -1978,9 +2805,9 @@
                 <a:ea typeface="Calibri" pitchFamily="34" charset="-122"/>
                 <a:cs typeface="Calibri" pitchFamily="34" charset="-120"/>
               </a:rPr>
-              <a:t>Prime numbers have exactly 2 factors (1 and themselves)</a:t>
-            </a:r>
-            <a:endParaRPr lang="en-US" sz="1600" dirty="0"/>
+              <a:t>HCF: highest common factor — largest shared factor</a:t>
+            </a:r>
+            <a:endParaRPr lang="en-US" sz="1500" dirty="0"/>
           </a:p>
           <a:p>
             <a:pPr marL="342900" indent="-342900">
@@ -1991,7 +2818,7 @@
               <a:buChar char="•"/>
             </a:pPr>
             <a:r>
-              <a:rPr lang="en-US" sz="1600" dirty="0">
+              <a:rPr lang="en-US" sz="1500" dirty="0">
                 <a:solidFill>
                   <a:srgbClr val="CADCFC"/>
                 </a:solidFill>
@@ -1999,9 +2826,30 @@
                 <a:ea typeface="Calibri" pitchFamily="34" charset="-122"/>
                 <a:cs typeface="Calibri" pitchFamily="34" charset="-120"/>
               </a:rPr>
-              <a:t>1 is not prime; 2 is the only even prime</a:t>
-            </a:r>
-            <a:endParaRPr lang="en-US" sz="1600" dirty="0"/>
+              <a:t>LCM: lowest common multiple — smallest shared multiple</a:t>
+            </a:r>
+            <a:endParaRPr lang="en-US" sz="1500" dirty="0"/>
+          </a:p>
+          <a:p>
+            <a:pPr marL="342900" indent="-342900">
+              <a:spcAft>
+                <a:spcPts val="1000"/>
+              </a:spcAft>
+              <a:buSzPct val="100000"/>
+              <a:buChar char="•"/>
+            </a:pPr>
+            <a:r>
+              <a:rPr lang="en-US" sz="1500" dirty="0">
+                <a:solidFill>
+                  <a:srgbClr val="CADCFC"/>
+                </a:solidFill>
+                <a:latin typeface="Calibri" pitchFamily="34" charset="0"/>
+                <a:ea typeface="Calibri" pitchFamily="34" charset="-122"/>
+                <a:cs typeface="Calibri" pitchFamily="34" charset="-120"/>
+              </a:rPr>
+              <a:t>Prime factorisation: breaking a number into prime factors using factor trees</a:t>
+            </a:r>
+            <a:endParaRPr lang="en-US" sz="1500" dirty="0"/>
           </a:p>
         </p:txBody>
       </p:sp>
@@ -2013,8 +2861,8 @@
         </p:nvSpPr>
         <p:spPr>
           <a:xfrm>
-            <a:off x="548640" y="4572000"/>
-            <a:ext cx="3657600" cy="274320"/>
+            <a:off x="731520" y="4572000"/>
+            <a:ext cx="7772400" cy="365760"/>
           </a:xfrm>
           <a:prstGeom prst="rect">
             <a:avLst/>
@@ -2030,14 +2878,17 @@
               <a:buNone/>
             </a:pPr>
             <a:r>
-              <a:rPr lang="en-US" sz="1000" dirty="0">
-                <a:solidFill>
-                  <a:srgbClr val="6B6660"/>
-                </a:solidFill>
+              <a:rPr lang="en-US" sz="1100" dirty="0">
+                <a:solidFill>
+                  <a:srgbClr val="E9C46A"/>
+                </a:solidFill>
+                <a:latin typeface="Calibri" pitchFamily="34" charset="0"/>
+                <a:ea typeface="Calibri" pitchFamily="34" charset="-122"/>
+                <a:cs typeface="Calibri" pitchFamily="34" charset="-120"/>
               </a:rPr>
               <a:t>mrzocchi.com</a:t>
             </a:r>
-            <a:endParaRPr lang="en-US" sz="1000" dirty="0"/>
+            <a:endParaRPr lang="en-US" sz="1100" dirty="0"/>
           </a:p>
         </p:txBody>
       </p:sp>

--- a/static/ppts/G6_Math_T1_Factors_Multiples.pptx
+++ b/static/ppts/G6_Math_T1_Factors_Multiples.pptx
@@ -10,9 +10,11 @@
     <p:sldId id="258" r:id="rId4"/>
     <p:sldId id="259" r:id="rId5"/>
     <p:sldId id="260" r:id="rId6"/>
+    <p:sldId id="261" r:id="rId7"/>
+    <p:sldId id="262" r:id="rId8"/>
   </p:sldIdLst>
   <p:notesMasterIdLst>
-    <p:notesMasterId r:id="rId7"/>
+    <p:notesMasterId r:id="rId9"/>
   </p:notesMasterIdLst>
   <p:sldSz cx="9144000" cy="5143500"/>
   <p:notesSz cx="5143500" cy="9144000"/>
@@ -900,6 +902,182 @@
 </p:notes>
 </file>
 
+<file path=ppt/notesSlides/notesSlide6.xml><?xml version="1.0" encoding="utf-8"?>
+<p:notes xmlns:a="http://schemas.openxmlformats.org/drawingml/2006/main" xmlns:r="http://schemas.openxmlformats.org/officeDocument/2006/relationships" xmlns:p="http://schemas.openxmlformats.org/presentationml/2006/main">
+  <p:cSld>
+    <p:spTree>
+      <p:nvGrpSpPr>
+        <p:cNvPr id="1" name=""/>
+        <p:cNvGrpSpPr/>
+        <p:nvPr/>
+      </p:nvGrpSpPr>
+      <p:grpSpPr>
+        <a:xfrm>
+          <a:off x="0" y="0"/>
+          <a:ext cx="0" cy="0"/>
+          <a:chOff x="0" y="0"/>
+          <a:chExt cx="0" cy="0"/>
+        </a:xfrm>
+      </p:grpSpPr>
+      <p:sp>
+        <p:nvSpPr>
+          <p:cNvPr id="2" name="Slide Image Placeholder 1"/>
+          <p:cNvSpPr>
+            <a:spLocks noGrp="1" noRot="1" noChangeAspect="1"/>
+          </p:cNvSpPr>
+          <p:nvPr>
+            <p:ph type="sldImg"/>
+          </p:nvPr>
+        </p:nvSpPr>
+        <p:spPr/>
+      </p:sp>
+      <p:sp>
+        <p:nvSpPr>
+          <p:cNvPr id="3" name="Notes Placeholder 2"/>
+          <p:cNvSpPr>
+            <a:spLocks noGrp="1"/>
+          </p:cNvSpPr>
+          <p:nvPr>
+            <p:ph type="body" idx="1"/>
+          </p:nvPr>
+        </p:nvSpPr>
+        <p:spPr/>
+        <p:txBody>
+          <a:bodyPr/>
+          <a:lstStyle/>
+          <a:p>
+            <a:r>
+              <a:rPr lang="en-US" dirty="0"/>
+              <a:t/>
+            </a:r>
+            <a:endParaRPr lang="en-US" dirty="0"/>
+          </a:p>
+        </p:txBody>
+      </p:sp>
+      <p:sp>
+        <p:nvSpPr>
+          <p:cNvPr id="4" name="Slide Number Placeholder 3"/>
+          <p:cNvSpPr>
+            <a:spLocks noGrp="1"/>
+          </p:cNvSpPr>
+          <p:nvPr>
+            <p:ph type="sldNum" sz="quarter" idx="10"/>
+          </p:nvPr>
+        </p:nvSpPr>
+        <p:spPr/>
+        <p:txBody>
+          <a:bodyPr/>
+          <a:lstStyle/>
+          <a:p>
+            <a:fld id="{F7021451-1387-4CA6-816F-3879F97B5CBC}" type="slidenum">
+              <a:rPr lang="en-US"/>
+              <a:t>6</a:t>
+            </a:fld>
+            <a:endParaRPr lang="en-US"/>
+          </a:p>
+        </p:txBody>
+      </p:sp>
+    </p:spTree>
+    <p:extLst>
+      <p:ext uri="{BB962C8B-B14F-4D97-AF65-F5344CB8AC3E}">
+        <p14:creationId xmlns:p14="http://schemas.microsoft.com/office/powerpoint/2010/main" val="1024086991"/>
+      </p:ext>
+    </p:extLst>
+  </p:cSld>
+  <p:clrMapOvr>
+    <a:masterClrMapping/>
+  </p:clrMapOvr>
+</p:notes>
+</file>
+
+<file path=ppt/notesSlides/notesSlide7.xml><?xml version="1.0" encoding="utf-8"?>
+<p:notes xmlns:a="http://schemas.openxmlformats.org/drawingml/2006/main" xmlns:r="http://schemas.openxmlformats.org/officeDocument/2006/relationships" xmlns:p="http://schemas.openxmlformats.org/presentationml/2006/main">
+  <p:cSld>
+    <p:spTree>
+      <p:nvGrpSpPr>
+        <p:cNvPr id="1" name=""/>
+        <p:cNvGrpSpPr/>
+        <p:nvPr/>
+      </p:nvGrpSpPr>
+      <p:grpSpPr>
+        <a:xfrm>
+          <a:off x="0" y="0"/>
+          <a:ext cx="0" cy="0"/>
+          <a:chOff x="0" y="0"/>
+          <a:chExt cx="0" cy="0"/>
+        </a:xfrm>
+      </p:grpSpPr>
+      <p:sp>
+        <p:nvSpPr>
+          <p:cNvPr id="2" name="Slide Image Placeholder 1"/>
+          <p:cNvSpPr>
+            <a:spLocks noGrp="1" noRot="1" noChangeAspect="1"/>
+          </p:cNvSpPr>
+          <p:nvPr>
+            <p:ph type="sldImg"/>
+          </p:nvPr>
+        </p:nvSpPr>
+        <p:spPr/>
+      </p:sp>
+      <p:sp>
+        <p:nvSpPr>
+          <p:cNvPr id="3" name="Notes Placeholder 2"/>
+          <p:cNvSpPr>
+            <a:spLocks noGrp="1"/>
+          </p:cNvSpPr>
+          <p:nvPr>
+            <p:ph type="body" idx="1"/>
+          </p:nvPr>
+        </p:nvSpPr>
+        <p:spPr/>
+        <p:txBody>
+          <a:bodyPr/>
+          <a:lstStyle/>
+          <a:p>
+            <a:r>
+              <a:rPr lang="en-US" dirty="0"/>
+              <a:t/>
+            </a:r>
+            <a:endParaRPr lang="en-US" dirty="0"/>
+          </a:p>
+        </p:txBody>
+      </p:sp>
+      <p:sp>
+        <p:nvSpPr>
+          <p:cNvPr id="4" name="Slide Number Placeholder 3"/>
+          <p:cNvSpPr>
+            <a:spLocks noGrp="1"/>
+          </p:cNvSpPr>
+          <p:nvPr>
+            <p:ph type="sldNum" sz="quarter" idx="10"/>
+          </p:nvPr>
+        </p:nvSpPr>
+        <p:spPr/>
+        <p:txBody>
+          <a:bodyPr/>
+          <a:lstStyle/>
+          <a:p>
+            <a:fld id="{F7021451-1387-4CA6-816F-3879F97B5CBC}" type="slidenum">
+              <a:rPr lang="en-US"/>
+              <a:t>7</a:t>
+            </a:fld>
+            <a:endParaRPr lang="en-US"/>
+          </a:p>
+        </p:txBody>
+      </p:sp>
+    </p:spTree>
+    <p:extLst>
+      <p:ext uri="{BB962C8B-B14F-4D97-AF65-F5344CB8AC3E}">
+        <p14:creationId xmlns:p14="http://schemas.microsoft.com/office/powerpoint/2010/main" val="1024086991"/>
+      </p:ext>
+    </p:extLst>
+  </p:cSld>
+  <p:clrMapOvr>
+    <a:masterClrMapping/>
+  </p:clrMapOvr>
+</p:notes>
+</file>
+
 <file path=ppt/slideLayouts/slideLayout1.xml><?xml version="1.0" encoding="utf-8"?>
 <p:sldLayout xmlns:a="http://schemas.openxmlformats.org/drawingml/2006/main" xmlns:r="http://schemas.openxmlformats.org/officeDocument/2006/relationships" xmlns:p="http://schemas.openxmlformats.org/presentationml/2006/main" preserve="1">
   <p:cSld name="DEFAULT">
@@ -1210,13 +1388,6 @@
 <file path=ppt/slides/slide1.xml><?xml version="1.0" encoding="utf-8"?>
 <p:sld xmlns:a="http://schemas.openxmlformats.org/drawingml/2006/main" xmlns:r="http://schemas.openxmlformats.org/officeDocument/2006/relationships" xmlns:p="http://schemas.openxmlformats.org/presentationml/2006/main">
   <p:cSld name="Slide 1">
-    <p:bg>
-      <p:bgPr>
-        <a:solidFill>
-          <a:srgbClr val="1B2A4A"/>
-        </a:solidFill>
-      </p:bgPr>
-    </p:bg>
     <p:spTree>
       <p:nvGrpSpPr>
         <p:cNvPr id="1" name=""/>
@@ -1240,7 +1411,27 @@
         <p:spPr>
           <a:xfrm>
             <a:off x="0" y="0"/>
-            <a:ext cx="109728" cy="5143500"/>
+            <a:ext cx="9144000" cy="5143500"/>
+          </a:xfrm>
+          <a:prstGeom prst="rect">
+            <a:avLst/>
+          </a:prstGeom>
+          <a:solidFill>
+            <a:srgbClr val="1B2A4A"/>
+          </a:solidFill>
+          <a:ln/>
+        </p:spPr>
+      </p:sp>
+      <p:sp>
+        <p:nvSpPr>
+          <p:cNvPr id="3" name="Shape 1"/>
+          <p:cNvSpPr/>
+          <p:nvPr/>
+        </p:nvSpPr>
+        <p:spPr>
+          <a:xfrm>
+            <a:off x="0" y="4777740"/>
+            <a:ext cx="9144000" cy="365760"/>
           </a:xfrm>
           <a:prstGeom prst="rect">
             <a:avLst/>
@@ -1253,14 +1444,36 @@
       </p:sp>
       <p:sp>
         <p:nvSpPr>
-          <p:cNvPr id="3" name="Text 1"/>
-          <p:cNvSpPr/>
-          <p:nvPr/>
-        </p:nvSpPr>
-        <p:spPr>
-          <a:xfrm>
-            <a:off x="731520" y="1097280"/>
-            <a:ext cx="7772400" cy="1371600"/>
+          <p:cNvPr id="4" name="Shape 2"/>
+          <p:cNvSpPr/>
+          <p:nvPr/>
+        </p:nvSpPr>
+        <p:spPr>
+          <a:xfrm>
+            <a:off x="6858000" y="-1371600"/>
+            <a:ext cx="4572000" cy="4572000"/>
+          </a:xfrm>
+          <a:prstGeom prst="ellipse">
+            <a:avLst/>
+          </a:prstGeom>
+          <a:solidFill>
+            <a:srgbClr val="2A9D8F">
+              <a:alpha val="12000"/>
+            </a:srgbClr>
+          </a:solidFill>
+          <a:ln/>
+        </p:spPr>
+      </p:sp>
+      <p:sp>
+        <p:nvSpPr>
+          <p:cNvPr id="5" name="Text 3"/>
+          <p:cNvSpPr/>
+          <p:nvPr/>
+        </p:nvSpPr>
+        <p:spPr>
+          <a:xfrm>
+            <a:off x="731520" y="914400"/>
+            <a:ext cx="7680960" cy="457200"/>
           </a:xfrm>
           <a:prstGeom prst="rect">
             <a:avLst/>
@@ -1276,7 +1489,46 @@
               <a:buNone/>
             </a:pPr>
             <a:r>
-              <a:rPr lang="en-US" sz="4000" b="1" dirty="0">
+              <a:rPr lang="en-US" sz="1300" b="1" spc="500" kern="0" dirty="0">
+                <a:solidFill>
+                  <a:srgbClr val="2A9D8F"/>
+                </a:solidFill>
+                <a:latin typeface="Calibri" pitchFamily="34" charset="0"/>
+                <a:ea typeface="Calibri" pitchFamily="34" charset="-122"/>
+                <a:cs typeface="Calibri" pitchFamily="34" charset="-120"/>
+              </a:rPr>
+              <a:t>GRADE 6 MATHEMATICS</a:t>
+            </a:r>
+            <a:endParaRPr lang="en-US" sz="1300" dirty="0"/>
+          </a:p>
+        </p:txBody>
+      </p:sp>
+      <p:sp>
+        <p:nvSpPr>
+          <p:cNvPr id="6" name="Text 4"/>
+          <p:cNvSpPr/>
+          <p:nvPr/>
+        </p:nvSpPr>
+        <p:spPr>
+          <a:xfrm>
+            <a:off x="731520" y="1463040"/>
+            <a:ext cx="6858000" cy="1645920"/>
+          </a:xfrm>
+          <a:prstGeom prst="rect">
+            <a:avLst/>
+          </a:prstGeom>
+          <a:noFill/>
+          <a:ln/>
+        </p:spPr>
+        <p:txBody>
+          <a:bodyPr wrap="square" rtlCol="0" anchor="t"/>
+          <a:lstStyle/>
+          <a:p>
+            <a:pPr indent="0" marL="0">
+              <a:buNone/>
+            </a:pPr>
+            <a:r>
+              <a:rPr lang="en-US" sz="3800" b="1" dirty="0">
                 <a:solidFill>
                   <a:srgbClr val="FFFFFF"/>
                 </a:solidFill>
@@ -1284,46 +1536,63 @@
                 <a:ea typeface="Georgia" pitchFamily="34" charset="-122"/>
                 <a:cs typeface="Georgia" pitchFamily="34" charset="-120"/>
               </a:rPr>
-              <a:t>Factors, Multiples &amp; Primes</a:t>
-            </a:r>
-            <a:endParaRPr lang="en-US" sz="4000" dirty="0"/>
-          </a:p>
-        </p:txBody>
-      </p:sp>
-      <p:sp>
-        <p:nvSpPr>
-          <p:cNvPr id="4" name="Text 2"/>
-          <p:cNvSpPr/>
-          <p:nvPr/>
-        </p:nvSpPr>
-        <p:spPr>
-          <a:xfrm>
-            <a:off x="731520" y="2560320"/>
-            <a:ext cx="7772400" cy="548640"/>
-          </a:xfrm>
-          <a:prstGeom prst="rect">
-            <a:avLst/>
-          </a:prstGeom>
-          <a:noFill/>
-          <a:ln/>
-        </p:spPr>
-        <p:txBody>
-          <a:bodyPr wrap="square" rtlCol="0" anchor="ctr"/>
-          <a:lstStyle/>
+              <a:t>Factors, Multiples</a:t>
+            </a:r>
+            <a:endParaRPr lang="en-US" sz="3800" dirty="0"/>
+          </a:p>
           <a:p>
             <a:pPr indent="0" marL="0">
               <a:buNone/>
             </a:pPr>
             <a:r>
-              <a:rPr lang="en-US" sz="1600" dirty="0">
-                <a:solidFill>
-                  <a:srgbClr val="E9C46A"/>
+              <a:rPr lang="en-US" sz="3800" b="1" dirty="0">
+                <a:solidFill>
+                  <a:srgbClr val="FFFFFF"/>
+                </a:solidFill>
+                <a:latin typeface="Georgia" pitchFamily="34" charset="0"/>
+                <a:ea typeface="Georgia" pitchFamily="34" charset="-122"/>
+                <a:cs typeface="Georgia" pitchFamily="34" charset="-120"/>
+              </a:rPr>
+              <a:t>&amp; Primes</a:t>
+            </a:r>
+            <a:endParaRPr lang="en-US" sz="3800" dirty="0"/>
+          </a:p>
+        </p:txBody>
+      </p:sp>
+      <p:sp>
+        <p:nvSpPr>
+          <p:cNvPr id="7" name="Text 5"/>
+          <p:cNvSpPr/>
+          <p:nvPr/>
+        </p:nvSpPr>
+        <p:spPr>
+          <a:xfrm>
+            <a:off x="731520" y="3200400"/>
+            <a:ext cx="6400800" cy="548640"/>
+          </a:xfrm>
+          <a:prstGeom prst="rect">
+            <a:avLst/>
+          </a:prstGeom>
+          <a:noFill/>
+          <a:ln/>
+        </p:spPr>
+        <p:txBody>
+          <a:bodyPr wrap="square" rtlCol="0" anchor="ctr"/>
+          <a:lstStyle/>
+          <a:p>
+            <a:pPr indent="0" marL="0">
+              <a:buNone/>
+            </a:pPr>
+            <a:r>
+              <a:rPr lang="en-US" sz="1600" i="1" dirty="0">
+                <a:solidFill>
+                  <a:srgbClr val="9B9690"/>
                 </a:solidFill>
                 <a:latin typeface="Calibri" pitchFamily="34" charset="0"/>
                 <a:ea typeface="Calibri" pitchFamily="34" charset="-122"/>
                 <a:cs typeface="Calibri" pitchFamily="34" charset="-120"/>
               </a:rPr>
-              <a:t>Grade 6 Mathematics · Mr Zocchi</a:t>
+              <a:t>The building blocks of numbers</a:t>
             </a:r>
             <a:endParaRPr lang="en-US" sz="1600" dirty="0"/>
           </a:p>
@@ -1331,36 +1600,14 @@
       </p:sp>
       <p:sp>
         <p:nvSpPr>
-          <p:cNvPr id="5" name="Shape 3"/>
-          <p:cNvSpPr/>
-          <p:nvPr/>
-        </p:nvSpPr>
-        <p:spPr>
-          <a:xfrm>
-            <a:off x="731520" y="3474720"/>
-            <a:ext cx="2011680" cy="411480"/>
-          </a:xfrm>
-          <a:prstGeom prst="roundRect">
-            <a:avLst>
-              <a:gd name="adj" fmla="val 17778"/>
-            </a:avLst>
-          </a:prstGeom>
-          <a:solidFill>
-            <a:srgbClr val="2A9D8F"/>
-          </a:solidFill>
-          <a:ln/>
-        </p:spPr>
-      </p:sp>
-      <p:sp>
-        <p:nvSpPr>
-          <p:cNvPr id="6" name="Text 4"/>
-          <p:cNvSpPr/>
-          <p:nvPr/>
-        </p:nvSpPr>
-        <p:spPr>
-          <a:xfrm>
-            <a:off x="731520" y="3474720"/>
-            <a:ext cx="2011680" cy="411480"/>
+          <p:cNvPr id="8" name="Text 6"/>
+          <p:cNvSpPr/>
+          <p:nvPr/>
+        </p:nvSpPr>
+        <p:spPr>
+          <a:xfrm>
+            <a:off x="731520" y="4297680"/>
+            <a:ext cx="2743200" cy="365760"/>
           </a:xfrm>
           <a:prstGeom prst="rect">
             <a:avLst/>
@@ -1372,21 +1619,21 @@
           <a:bodyPr wrap="square" rtlCol="0" anchor="ctr"/>
           <a:lstStyle/>
           <a:p>
-            <a:pPr algn="ctr" indent="0" marL="0">
+            <a:pPr indent="0" marL="0">
               <a:buNone/>
             </a:pPr>
             <a:r>
-              <a:rPr lang="en-US" sz="1200" b="1" dirty="0">
-                <a:solidFill>
-                  <a:srgbClr val="FFFFFF"/>
+              <a:rPr lang="en-US" sz="1100" dirty="0">
+                <a:solidFill>
+                  <a:srgbClr val="9B9690"/>
                 </a:solidFill>
                 <a:latin typeface="Calibri" pitchFamily="34" charset="0"/>
                 <a:ea typeface="Calibri" pitchFamily="34" charset="-122"/>
                 <a:cs typeface="Calibri" pitchFamily="34" charset="-120"/>
               </a:rPr>
-              <a:t>Term 1 · Number Sense</a:t>
-            </a:r>
-            <a:endParaRPr lang="en-US" sz="1200" dirty="0"/>
+              <a:t>mrzocchi.com</a:t>
+            </a:r>
+            <a:endParaRPr lang="en-US" sz="1100" dirty="0"/>
           </a:p>
         </p:txBody>
       </p:sp>
@@ -1431,7 +1678,47 @@
         <p:spPr>
           <a:xfrm>
             <a:off x="0" y="0"/>
-            <a:ext cx="9144000" cy="54864"/>
+            <a:ext cx="9144000" cy="822960"/>
+          </a:xfrm>
+          <a:prstGeom prst="rect">
+            <a:avLst/>
+          </a:prstGeom>
+          <a:solidFill>
+            <a:srgbClr val="FFFFFF"/>
+          </a:solidFill>
+          <a:ln/>
+        </p:spPr>
+      </p:sp>
+      <p:sp>
+        <p:nvSpPr>
+          <p:cNvPr id="3" name="Shape 1"/>
+          <p:cNvSpPr/>
+          <p:nvPr/>
+        </p:nvSpPr>
+        <p:spPr>
+          <a:xfrm>
+            <a:off x="0" y="804672"/>
+            <a:ext cx="9144000" cy="27432"/>
+          </a:xfrm>
+          <a:prstGeom prst="rect">
+            <a:avLst/>
+          </a:prstGeom>
+          <a:solidFill>
+            <a:srgbClr val="E5E2DC"/>
+          </a:solidFill>
+          <a:ln/>
+        </p:spPr>
+      </p:sp>
+      <p:sp>
+        <p:nvSpPr>
+          <p:cNvPr id="4" name="Shape 2"/>
+          <p:cNvSpPr/>
+          <p:nvPr/>
+        </p:nvSpPr>
+        <p:spPr>
+          <a:xfrm>
+            <a:off x="548640" y="201168"/>
+            <a:ext cx="54864" cy="420624"/>
           </a:xfrm>
           <a:prstGeom prst="rect">
             <a:avLst/>
@@ -1444,14 +1731,14 @@
       </p:sp>
       <p:sp>
         <p:nvSpPr>
-          <p:cNvPr id="3" name="Text 1"/>
-          <p:cNvSpPr/>
-          <p:nvPr/>
-        </p:nvSpPr>
-        <p:spPr>
-          <a:xfrm>
-            <a:off x="7772400" y="4709160"/>
-            <a:ext cx="1097280" cy="320040"/>
+          <p:cNvPr id="5" name="Text 3"/>
+          <p:cNvSpPr/>
+          <p:nvPr/>
+        </p:nvSpPr>
+        <p:spPr>
+          <a:xfrm>
+            <a:off x="777240" y="137160"/>
+            <a:ext cx="7772400" cy="548640"/>
           </a:xfrm>
           <a:prstGeom prst="rect">
             <a:avLst/>
@@ -1460,37 +1747,37 @@
           <a:ln/>
         </p:spPr>
         <p:txBody>
-          <a:bodyPr wrap="square" rtlCol="0" anchor="ctr"/>
-          <a:lstStyle/>
-          <a:p>
-            <a:pPr algn="r" indent="0" marL="0">
+          <a:bodyPr wrap="square" lIns="0" tIns="0" rIns="0" bIns="0" rtlCol="0" anchor="ctr"/>
+          <a:lstStyle/>
+          <a:p>
+            <a:pPr indent="0" marL="0">
               <a:buNone/>
             </a:pPr>
             <a:r>
-              <a:rPr lang="en-US" sz="900" dirty="0">
-                <a:solidFill>
-                  <a:srgbClr val="6B6660"/>
-                </a:solidFill>
-                <a:latin typeface="Calibri" pitchFamily="34" charset="0"/>
-                <a:ea typeface="Calibri" pitchFamily="34" charset="-122"/>
-                <a:cs typeface="Calibri" pitchFamily="34" charset="-120"/>
-              </a:rPr>
-              <a:t>2 / 5</a:t>
-            </a:r>
-            <a:endParaRPr lang="en-US" sz="900" dirty="0"/>
-          </a:p>
-        </p:txBody>
-      </p:sp>
-      <p:sp>
-        <p:nvSpPr>
-          <p:cNvPr id="4" name="Shape 2"/>
-          <p:cNvSpPr/>
-          <p:nvPr/>
-        </p:nvSpPr>
-        <p:spPr>
-          <a:xfrm>
-            <a:off x="1371600" y="914400"/>
-            <a:ext cx="6400800" cy="3200400"/>
+              <a:rPr lang="en-US" sz="2000" b="1" dirty="0">
+                <a:solidFill>
+                  <a:srgbClr val="1B2A4A"/>
+                </a:solidFill>
+                <a:latin typeface="Georgia" pitchFamily="34" charset="0"/>
+                <a:ea typeface="Georgia" pitchFamily="34" charset="-122"/>
+                <a:cs typeface="Georgia" pitchFamily="34" charset="-120"/>
+              </a:rPr>
+              <a:t>Key Vocabulary</a:t>
+            </a:r>
+            <a:endParaRPr lang="en-US" sz="2000" dirty="0"/>
+          </a:p>
+        </p:txBody>
+      </p:sp>
+      <p:sp>
+        <p:nvSpPr>
+          <p:cNvPr id="6" name="Shape 4"/>
+          <p:cNvSpPr/>
+          <p:nvPr/>
+        </p:nvSpPr>
+        <p:spPr>
+          <a:xfrm>
+            <a:off x="731520" y="1051560"/>
+            <a:ext cx="3657600" cy="658368"/>
           </a:xfrm>
           <a:prstGeom prst="rect">
             <a:avLst/>
@@ -1498,12 +1785,7 @@
           <a:solidFill>
             <a:srgbClr val="FFFFFF"/>
           </a:solidFill>
-          <a:ln w="12700">
-            <a:solidFill>
-              <a:srgbClr val="E5E2DC"/>
-            </a:solidFill>
-            <a:prstDash val="solid"/>
-          </a:ln>
+          <a:ln/>
           <a:effectLst>
             <a:outerShdw sx="100000" sy="100000" kx="0" ky="0" algn="bl" rotWithShape="0" blurRad="50800" dist="25400" dir="8100000">
               <a:srgbClr val="000000">
@@ -1515,14 +1797,14 @@
       </p:sp>
       <p:sp>
         <p:nvSpPr>
-          <p:cNvPr id="5" name="Shape 3"/>
-          <p:cNvSpPr/>
-          <p:nvPr/>
-        </p:nvSpPr>
-        <p:spPr>
-          <a:xfrm>
-            <a:off x="1371600" y="914400"/>
-            <a:ext cx="91440" cy="3200400"/>
+          <p:cNvPr id="7" name="Shape 5"/>
+          <p:cNvSpPr/>
+          <p:nvPr/>
+        </p:nvSpPr>
+        <p:spPr>
+          <a:xfrm>
+            <a:off x="731520" y="1051560"/>
+            <a:ext cx="54864" cy="658368"/>
           </a:xfrm>
           <a:prstGeom prst="rect">
             <a:avLst/>
@@ -1535,14 +1817,14 @@
       </p:sp>
       <p:sp>
         <p:nvSpPr>
-          <p:cNvPr id="6" name="Text 4"/>
-          <p:cNvSpPr/>
-          <p:nvPr/>
-        </p:nvSpPr>
-        <p:spPr>
-          <a:xfrm>
-            <a:off x="1828800" y="1097280"/>
-            <a:ext cx="5669280" cy="640080"/>
+          <p:cNvPr id="8" name="Text 6"/>
+          <p:cNvSpPr/>
+          <p:nvPr/>
+        </p:nvSpPr>
+        <p:spPr>
+          <a:xfrm>
+            <a:off x="914400" y="1051560"/>
+            <a:ext cx="1463040" cy="658368"/>
           </a:xfrm>
           <a:prstGeom prst="rect">
             <a:avLst/>
@@ -1551,14 +1833,14 @@
           <a:ln/>
         </p:spPr>
         <p:txBody>
-          <a:bodyPr wrap="square" rtlCol="0" anchor="ctr"/>
+          <a:bodyPr wrap="square" lIns="0" tIns="0" rIns="0" bIns="0" rtlCol="0" anchor="ctr"/>
           <a:lstStyle/>
           <a:p>
             <a:pPr indent="0" marL="0">
               <a:buNone/>
             </a:pPr>
             <a:r>
-              <a:rPr lang="en-US" sz="2400" b="1" dirty="0">
+              <a:rPr lang="en-US" sz="1300" b="1" dirty="0">
                 <a:solidFill>
                   <a:srgbClr val="1B2A4A"/>
                 </a:solidFill>
@@ -1566,22 +1848,22 @@
                 <a:ea typeface="Georgia" pitchFamily="34" charset="-122"/>
                 <a:cs typeface="Georgia" pitchFamily="34" charset="-120"/>
               </a:rPr>
-              <a:t>Building Blocks of Numbers</a:t>
-            </a:r>
-            <a:endParaRPr lang="en-US" sz="2400" dirty="0"/>
-          </a:p>
-        </p:txBody>
-      </p:sp>
-      <p:sp>
-        <p:nvSpPr>
-          <p:cNvPr id="7" name="Text 5"/>
-          <p:cNvSpPr/>
-          <p:nvPr/>
-        </p:nvSpPr>
-        <p:spPr>
-          <a:xfrm>
-            <a:off x="1828800" y="1828800"/>
-            <a:ext cx="5669280" cy="2011680"/>
+              <a:t>Factor</a:t>
+            </a:r>
+            <a:endParaRPr lang="en-US" sz="1300" dirty="0"/>
+          </a:p>
+        </p:txBody>
+      </p:sp>
+      <p:sp>
+        <p:nvSpPr>
+          <p:cNvPr id="9" name="Text 7"/>
+          <p:cNvSpPr/>
+          <p:nvPr/>
+        </p:nvSpPr>
+        <p:spPr>
+          <a:xfrm>
+            <a:off x="2377440" y="1051560"/>
+            <a:ext cx="1920240" cy="658368"/>
           </a:xfrm>
           <a:prstGeom prst="rect">
             <a:avLst/>
@@ -1590,27 +1872,649 @@
           <a:ln/>
         </p:spPr>
         <p:txBody>
-          <a:bodyPr wrap="square" rtlCol="0" anchor="t"/>
+          <a:bodyPr wrap="square" lIns="0" tIns="0" rIns="0" bIns="0" rtlCol="0" anchor="ctr"/>
           <a:lstStyle/>
           <a:p>
             <a:pPr indent="0" marL="0">
-              <a:lnSpc>
-                <a:spcPct val="130000"/>
-              </a:lnSpc>
               <a:buNone/>
             </a:pPr>
             <a:r>
-              <a:rPr lang="en-US" sz="1500" dirty="0">
-                <a:solidFill>
-                  <a:srgbClr val="3D3A36"/>
+              <a:rPr lang="en-US" sz="1100" dirty="0">
+                <a:solidFill>
+                  <a:srgbClr val="6B6660"/>
                 </a:solidFill>
                 <a:latin typeface="Calibri" pitchFamily="34" charset="0"/>
                 <a:ea typeface="Calibri" pitchFamily="34" charset="-122"/>
                 <a:cs typeface="Calibri" pitchFamily="34" charset="-120"/>
               </a:rPr>
-              <a:t>Factors and multiples are the fundamental relationships between numbers. Understanding them helps with simplifying fractions, finding common denominators, and solving problems. Prime numbers are the 'atoms' of mathematics — every number can be built from them.</a:t>
-            </a:r>
-            <a:endParaRPr lang="en-US" sz="1500" dirty="0"/>
+              <a:t>A number that divides exactly into another</a:t>
+            </a:r>
+            <a:endParaRPr lang="en-US" sz="1100" dirty="0"/>
+          </a:p>
+        </p:txBody>
+      </p:sp>
+      <p:sp>
+        <p:nvSpPr>
+          <p:cNvPr id="10" name="Shape 8"/>
+          <p:cNvSpPr/>
+          <p:nvPr/>
+        </p:nvSpPr>
+        <p:spPr>
+          <a:xfrm>
+            <a:off x="4754880" y="1051560"/>
+            <a:ext cx="3657600" cy="658368"/>
+          </a:xfrm>
+          <a:prstGeom prst="rect">
+            <a:avLst/>
+          </a:prstGeom>
+          <a:solidFill>
+            <a:srgbClr val="FFFFFF"/>
+          </a:solidFill>
+          <a:ln/>
+          <a:effectLst>
+            <a:outerShdw sx="100000" sy="100000" kx="0" ky="0" algn="bl" rotWithShape="0" blurRad="50800" dist="25400" dir="8100000">
+              <a:srgbClr val="000000">
+                <a:alpha val="10000"/>
+              </a:srgbClr>
+            </a:outerShdw>
+          </a:effectLst>
+        </p:spPr>
+      </p:sp>
+      <p:sp>
+        <p:nvSpPr>
+          <p:cNvPr id="11" name="Shape 9"/>
+          <p:cNvSpPr/>
+          <p:nvPr/>
+        </p:nvSpPr>
+        <p:spPr>
+          <a:xfrm>
+            <a:off x="4754880" y="1051560"/>
+            <a:ext cx="54864" cy="658368"/>
+          </a:xfrm>
+          <a:prstGeom prst="rect">
+            <a:avLst/>
+          </a:prstGeom>
+          <a:solidFill>
+            <a:srgbClr val="2A9D8F"/>
+          </a:solidFill>
+          <a:ln/>
+        </p:spPr>
+      </p:sp>
+      <p:sp>
+        <p:nvSpPr>
+          <p:cNvPr id="12" name="Text 10"/>
+          <p:cNvSpPr/>
+          <p:nvPr/>
+        </p:nvSpPr>
+        <p:spPr>
+          <a:xfrm>
+            <a:off x="4937760" y="1051560"/>
+            <a:ext cx="1463040" cy="658368"/>
+          </a:xfrm>
+          <a:prstGeom prst="rect">
+            <a:avLst/>
+          </a:prstGeom>
+          <a:noFill/>
+          <a:ln/>
+        </p:spPr>
+        <p:txBody>
+          <a:bodyPr wrap="square" lIns="0" tIns="0" rIns="0" bIns="0" rtlCol="0" anchor="ctr"/>
+          <a:lstStyle/>
+          <a:p>
+            <a:pPr indent="0" marL="0">
+              <a:buNone/>
+            </a:pPr>
+            <a:r>
+              <a:rPr lang="en-US" sz="1300" b="1" dirty="0">
+                <a:solidFill>
+                  <a:srgbClr val="1B2A4A"/>
+                </a:solidFill>
+                <a:latin typeface="Georgia" pitchFamily="34" charset="0"/>
+                <a:ea typeface="Georgia" pitchFamily="34" charset="-122"/>
+                <a:cs typeface="Georgia" pitchFamily="34" charset="-120"/>
+              </a:rPr>
+              <a:t>Multiple</a:t>
+            </a:r>
+            <a:endParaRPr lang="en-US" sz="1300" dirty="0"/>
+          </a:p>
+        </p:txBody>
+      </p:sp>
+      <p:sp>
+        <p:nvSpPr>
+          <p:cNvPr id="13" name="Text 11"/>
+          <p:cNvSpPr/>
+          <p:nvPr/>
+        </p:nvSpPr>
+        <p:spPr>
+          <a:xfrm>
+            <a:off x="6400800" y="1051560"/>
+            <a:ext cx="1920240" cy="658368"/>
+          </a:xfrm>
+          <a:prstGeom prst="rect">
+            <a:avLst/>
+          </a:prstGeom>
+          <a:noFill/>
+          <a:ln/>
+        </p:spPr>
+        <p:txBody>
+          <a:bodyPr wrap="square" lIns="0" tIns="0" rIns="0" bIns="0" rtlCol="0" anchor="ctr"/>
+          <a:lstStyle/>
+          <a:p>
+            <a:pPr indent="0" marL="0">
+              <a:buNone/>
+            </a:pPr>
+            <a:r>
+              <a:rPr lang="en-US" sz="1100" dirty="0">
+                <a:solidFill>
+                  <a:srgbClr val="6B6660"/>
+                </a:solidFill>
+                <a:latin typeface="Calibri" pitchFamily="34" charset="0"/>
+                <a:ea typeface="Calibri" pitchFamily="34" charset="-122"/>
+                <a:cs typeface="Calibri" pitchFamily="34" charset="-120"/>
+              </a:rPr>
+              <a:t>The result of multiplying a number</a:t>
+            </a:r>
+            <a:endParaRPr lang="en-US" sz="1100" dirty="0"/>
+          </a:p>
+        </p:txBody>
+      </p:sp>
+      <p:sp>
+        <p:nvSpPr>
+          <p:cNvPr id="14" name="Shape 12"/>
+          <p:cNvSpPr/>
+          <p:nvPr/>
+        </p:nvSpPr>
+        <p:spPr>
+          <a:xfrm>
+            <a:off x="731520" y="1819656"/>
+            <a:ext cx="3657600" cy="658368"/>
+          </a:xfrm>
+          <a:prstGeom prst="rect">
+            <a:avLst/>
+          </a:prstGeom>
+          <a:solidFill>
+            <a:srgbClr val="FFFFFF"/>
+          </a:solidFill>
+          <a:ln/>
+          <a:effectLst>
+            <a:outerShdw sx="100000" sy="100000" kx="0" ky="0" algn="bl" rotWithShape="0" blurRad="50800" dist="25400" dir="8100000">
+              <a:srgbClr val="000000">
+                <a:alpha val="10000"/>
+              </a:srgbClr>
+            </a:outerShdw>
+          </a:effectLst>
+        </p:spPr>
+      </p:sp>
+      <p:sp>
+        <p:nvSpPr>
+          <p:cNvPr id="15" name="Shape 13"/>
+          <p:cNvSpPr/>
+          <p:nvPr/>
+        </p:nvSpPr>
+        <p:spPr>
+          <a:xfrm>
+            <a:off x="731520" y="1819656"/>
+            <a:ext cx="54864" cy="658368"/>
+          </a:xfrm>
+          <a:prstGeom prst="rect">
+            <a:avLst/>
+          </a:prstGeom>
+          <a:solidFill>
+            <a:srgbClr val="2A9D8F"/>
+          </a:solidFill>
+          <a:ln/>
+        </p:spPr>
+      </p:sp>
+      <p:sp>
+        <p:nvSpPr>
+          <p:cNvPr id="16" name="Text 14"/>
+          <p:cNvSpPr/>
+          <p:nvPr/>
+        </p:nvSpPr>
+        <p:spPr>
+          <a:xfrm>
+            <a:off x="914400" y="1819656"/>
+            <a:ext cx="1463040" cy="658368"/>
+          </a:xfrm>
+          <a:prstGeom prst="rect">
+            <a:avLst/>
+          </a:prstGeom>
+          <a:noFill/>
+          <a:ln/>
+        </p:spPr>
+        <p:txBody>
+          <a:bodyPr wrap="square" lIns="0" tIns="0" rIns="0" bIns="0" rtlCol="0" anchor="ctr"/>
+          <a:lstStyle/>
+          <a:p>
+            <a:pPr indent="0" marL="0">
+              <a:buNone/>
+            </a:pPr>
+            <a:r>
+              <a:rPr lang="en-US" sz="1300" b="1" dirty="0">
+                <a:solidFill>
+                  <a:srgbClr val="1B2A4A"/>
+                </a:solidFill>
+                <a:latin typeface="Georgia" pitchFamily="34" charset="0"/>
+                <a:ea typeface="Georgia" pitchFamily="34" charset="-122"/>
+                <a:cs typeface="Georgia" pitchFamily="34" charset="-120"/>
+              </a:rPr>
+              <a:t>Prime</a:t>
+            </a:r>
+            <a:endParaRPr lang="en-US" sz="1300" dirty="0"/>
+          </a:p>
+        </p:txBody>
+      </p:sp>
+      <p:sp>
+        <p:nvSpPr>
+          <p:cNvPr id="17" name="Text 15"/>
+          <p:cNvSpPr/>
+          <p:nvPr/>
+        </p:nvSpPr>
+        <p:spPr>
+          <a:xfrm>
+            <a:off x="2377440" y="1819656"/>
+            <a:ext cx="1920240" cy="658368"/>
+          </a:xfrm>
+          <a:prstGeom prst="rect">
+            <a:avLst/>
+          </a:prstGeom>
+          <a:noFill/>
+          <a:ln/>
+        </p:spPr>
+        <p:txBody>
+          <a:bodyPr wrap="square" lIns="0" tIns="0" rIns="0" bIns="0" rtlCol="0" anchor="ctr"/>
+          <a:lstStyle/>
+          <a:p>
+            <a:pPr indent="0" marL="0">
+              <a:buNone/>
+            </a:pPr>
+            <a:r>
+              <a:rPr lang="en-US" sz="1100" dirty="0">
+                <a:solidFill>
+                  <a:srgbClr val="6B6660"/>
+                </a:solidFill>
+                <a:latin typeface="Calibri" pitchFamily="34" charset="0"/>
+                <a:ea typeface="Calibri" pitchFamily="34" charset="-122"/>
+                <a:cs typeface="Calibri" pitchFamily="34" charset="-120"/>
+              </a:rPr>
+              <a:t>A number with exactly 2 factors (1 and itself)</a:t>
+            </a:r>
+            <a:endParaRPr lang="en-US" sz="1100" dirty="0"/>
+          </a:p>
+        </p:txBody>
+      </p:sp>
+      <p:sp>
+        <p:nvSpPr>
+          <p:cNvPr id="18" name="Shape 16"/>
+          <p:cNvSpPr/>
+          <p:nvPr/>
+        </p:nvSpPr>
+        <p:spPr>
+          <a:xfrm>
+            <a:off x="4754880" y="1819656"/>
+            <a:ext cx="3657600" cy="658368"/>
+          </a:xfrm>
+          <a:prstGeom prst="rect">
+            <a:avLst/>
+          </a:prstGeom>
+          <a:solidFill>
+            <a:srgbClr val="FFFFFF"/>
+          </a:solidFill>
+          <a:ln/>
+          <a:effectLst>
+            <a:outerShdw sx="100000" sy="100000" kx="0" ky="0" algn="bl" rotWithShape="0" blurRad="50800" dist="25400" dir="8100000">
+              <a:srgbClr val="000000">
+                <a:alpha val="10000"/>
+              </a:srgbClr>
+            </a:outerShdw>
+          </a:effectLst>
+        </p:spPr>
+      </p:sp>
+      <p:sp>
+        <p:nvSpPr>
+          <p:cNvPr id="19" name="Shape 17"/>
+          <p:cNvSpPr/>
+          <p:nvPr/>
+        </p:nvSpPr>
+        <p:spPr>
+          <a:xfrm>
+            <a:off x="4754880" y="1819656"/>
+            <a:ext cx="54864" cy="658368"/>
+          </a:xfrm>
+          <a:prstGeom prst="rect">
+            <a:avLst/>
+          </a:prstGeom>
+          <a:solidFill>
+            <a:srgbClr val="2A9D8F"/>
+          </a:solidFill>
+          <a:ln/>
+        </p:spPr>
+      </p:sp>
+      <p:sp>
+        <p:nvSpPr>
+          <p:cNvPr id="20" name="Text 18"/>
+          <p:cNvSpPr/>
+          <p:nvPr/>
+        </p:nvSpPr>
+        <p:spPr>
+          <a:xfrm>
+            <a:off x="4937760" y="1819656"/>
+            <a:ext cx="1463040" cy="658368"/>
+          </a:xfrm>
+          <a:prstGeom prst="rect">
+            <a:avLst/>
+          </a:prstGeom>
+          <a:noFill/>
+          <a:ln/>
+        </p:spPr>
+        <p:txBody>
+          <a:bodyPr wrap="square" lIns="0" tIns="0" rIns="0" bIns="0" rtlCol="0" anchor="ctr"/>
+          <a:lstStyle/>
+          <a:p>
+            <a:pPr indent="0" marL="0">
+              <a:buNone/>
+            </a:pPr>
+            <a:r>
+              <a:rPr lang="en-US" sz="1300" b="1" dirty="0">
+                <a:solidFill>
+                  <a:srgbClr val="1B2A4A"/>
+                </a:solidFill>
+                <a:latin typeface="Georgia" pitchFamily="34" charset="0"/>
+                <a:ea typeface="Georgia" pitchFamily="34" charset="-122"/>
+                <a:cs typeface="Georgia" pitchFamily="34" charset="-120"/>
+              </a:rPr>
+              <a:t>Composite</a:t>
+            </a:r>
+            <a:endParaRPr lang="en-US" sz="1300" dirty="0"/>
+          </a:p>
+        </p:txBody>
+      </p:sp>
+      <p:sp>
+        <p:nvSpPr>
+          <p:cNvPr id="21" name="Text 19"/>
+          <p:cNvSpPr/>
+          <p:nvPr/>
+        </p:nvSpPr>
+        <p:spPr>
+          <a:xfrm>
+            <a:off x="6400800" y="1819656"/>
+            <a:ext cx="1920240" cy="658368"/>
+          </a:xfrm>
+          <a:prstGeom prst="rect">
+            <a:avLst/>
+          </a:prstGeom>
+          <a:noFill/>
+          <a:ln/>
+        </p:spPr>
+        <p:txBody>
+          <a:bodyPr wrap="square" lIns="0" tIns="0" rIns="0" bIns="0" rtlCol="0" anchor="ctr"/>
+          <a:lstStyle/>
+          <a:p>
+            <a:pPr indent="0" marL="0">
+              <a:buNone/>
+            </a:pPr>
+            <a:r>
+              <a:rPr lang="en-US" sz="1100" dirty="0">
+                <a:solidFill>
+                  <a:srgbClr val="6B6660"/>
+                </a:solidFill>
+                <a:latin typeface="Calibri" pitchFamily="34" charset="0"/>
+                <a:ea typeface="Calibri" pitchFamily="34" charset="-122"/>
+                <a:cs typeface="Calibri" pitchFamily="34" charset="-120"/>
+              </a:rPr>
+              <a:t>A number with more than 2 factors</a:t>
+            </a:r>
+            <a:endParaRPr lang="en-US" sz="1100" dirty="0"/>
+          </a:p>
+        </p:txBody>
+      </p:sp>
+      <p:sp>
+        <p:nvSpPr>
+          <p:cNvPr id="22" name="Shape 20"/>
+          <p:cNvSpPr/>
+          <p:nvPr/>
+        </p:nvSpPr>
+        <p:spPr>
+          <a:xfrm>
+            <a:off x="731520" y="2587752"/>
+            <a:ext cx="3657600" cy="658368"/>
+          </a:xfrm>
+          <a:prstGeom prst="rect">
+            <a:avLst/>
+          </a:prstGeom>
+          <a:solidFill>
+            <a:srgbClr val="FFFFFF"/>
+          </a:solidFill>
+          <a:ln/>
+          <a:effectLst>
+            <a:outerShdw sx="100000" sy="100000" kx="0" ky="0" algn="bl" rotWithShape="0" blurRad="50800" dist="25400" dir="8100000">
+              <a:srgbClr val="000000">
+                <a:alpha val="10000"/>
+              </a:srgbClr>
+            </a:outerShdw>
+          </a:effectLst>
+        </p:spPr>
+      </p:sp>
+      <p:sp>
+        <p:nvSpPr>
+          <p:cNvPr id="23" name="Shape 21"/>
+          <p:cNvSpPr/>
+          <p:nvPr/>
+        </p:nvSpPr>
+        <p:spPr>
+          <a:xfrm>
+            <a:off x="731520" y="2587752"/>
+            <a:ext cx="54864" cy="658368"/>
+          </a:xfrm>
+          <a:prstGeom prst="rect">
+            <a:avLst/>
+          </a:prstGeom>
+          <a:solidFill>
+            <a:srgbClr val="2A9D8F"/>
+          </a:solidFill>
+          <a:ln/>
+        </p:spPr>
+      </p:sp>
+      <p:sp>
+        <p:nvSpPr>
+          <p:cNvPr id="24" name="Text 22"/>
+          <p:cNvSpPr/>
+          <p:nvPr/>
+        </p:nvSpPr>
+        <p:spPr>
+          <a:xfrm>
+            <a:off x="914400" y="2587752"/>
+            <a:ext cx="1463040" cy="658368"/>
+          </a:xfrm>
+          <a:prstGeom prst="rect">
+            <a:avLst/>
+          </a:prstGeom>
+          <a:noFill/>
+          <a:ln/>
+        </p:spPr>
+        <p:txBody>
+          <a:bodyPr wrap="square" lIns="0" tIns="0" rIns="0" bIns="0" rtlCol="0" anchor="ctr"/>
+          <a:lstStyle/>
+          <a:p>
+            <a:pPr indent="0" marL="0">
+              <a:buNone/>
+            </a:pPr>
+            <a:r>
+              <a:rPr lang="en-US" sz="1300" b="1" dirty="0">
+                <a:solidFill>
+                  <a:srgbClr val="1B2A4A"/>
+                </a:solidFill>
+                <a:latin typeface="Georgia" pitchFamily="34" charset="0"/>
+                <a:ea typeface="Georgia" pitchFamily="34" charset="-122"/>
+                <a:cs typeface="Georgia" pitchFamily="34" charset="-120"/>
+              </a:rPr>
+              <a:t>HCF</a:t>
+            </a:r>
+            <a:endParaRPr lang="en-US" sz="1300" dirty="0"/>
+          </a:p>
+        </p:txBody>
+      </p:sp>
+      <p:sp>
+        <p:nvSpPr>
+          <p:cNvPr id="25" name="Text 23"/>
+          <p:cNvSpPr/>
+          <p:nvPr/>
+        </p:nvSpPr>
+        <p:spPr>
+          <a:xfrm>
+            <a:off x="2377440" y="2587752"/>
+            <a:ext cx="1920240" cy="658368"/>
+          </a:xfrm>
+          <a:prstGeom prst="rect">
+            <a:avLst/>
+          </a:prstGeom>
+          <a:noFill/>
+          <a:ln/>
+        </p:spPr>
+        <p:txBody>
+          <a:bodyPr wrap="square" lIns="0" tIns="0" rIns="0" bIns="0" rtlCol="0" anchor="ctr"/>
+          <a:lstStyle/>
+          <a:p>
+            <a:pPr indent="0" marL="0">
+              <a:buNone/>
+            </a:pPr>
+            <a:r>
+              <a:rPr lang="en-US" sz="1100" dirty="0">
+                <a:solidFill>
+                  <a:srgbClr val="6B6660"/>
+                </a:solidFill>
+                <a:latin typeface="Calibri" pitchFamily="34" charset="0"/>
+                <a:ea typeface="Calibri" pitchFamily="34" charset="-122"/>
+                <a:cs typeface="Calibri" pitchFamily="34" charset="-120"/>
+              </a:rPr>
+              <a:t>Highest Common Factor</a:t>
+            </a:r>
+            <a:endParaRPr lang="en-US" sz="1100" dirty="0"/>
+          </a:p>
+        </p:txBody>
+      </p:sp>
+      <p:sp>
+        <p:nvSpPr>
+          <p:cNvPr id="26" name="Shape 24"/>
+          <p:cNvSpPr/>
+          <p:nvPr/>
+        </p:nvSpPr>
+        <p:spPr>
+          <a:xfrm>
+            <a:off x="4754880" y="2587752"/>
+            <a:ext cx="3657600" cy="658368"/>
+          </a:xfrm>
+          <a:prstGeom prst="rect">
+            <a:avLst/>
+          </a:prstGeom>
+          <a:solidFill>
+            <a:srgbClr val="FFFFFF"/>
+          </a:solidFill>
+          <a:ln/>
+          <a:effectLst>
+            <a:outerShdw sx="100000" sy="100000" kx="0" ky="0" algn="bl" rotWithShape="0" blurRad="50800" dist="25400" dir="8100000">
+              <a:srgbClr val="000000">
+                <a:alpha val="10000"/>
+              </a:srgbClr>
+            </a:outerShdw>
+          </a:effectLst>
+        </p:spPr>
+      </p:sp>
+      <p:sp>
+        <p:nvSpPr>
+          <p:cNvPr id="27" name="Shape 25"/>
+          <p:cNvSpPr/>
+          <p:nvPr/>
+        </p:nvSpPr>
+        <p:spPr>
+          <a:xfrm>
+            <a:off x="4754880" y="2587752"/>
+            <a:ext cx="54864" cy="658368"/>
+          </a:xfrm>
+          <a:prstGeom prst="rect">
+            <a:avLst/>
+          </a:prstGeom>
+          <a:solidFill>
+            <a:srgbClr val="2A9D8F"/>
+          </a:solidFill>
+          <a:ln/>
+        </p:spPr>
+      </p:sp>
+      <p:sp>
+        <p:nvSpPr>
+          <p:cNvPr id="28" name="Text 26"/>
+          <p:cNvSpPr/>
+          <p:nvPr/>
+        </p:nvSpPr>
+        <p:spPr>
+          <a:xfrm>
+            <a:off x="4937760" y="2587752"/>
+            <a:ext cx="1463040" cy="658368"/>
+          </a:xfrm>
+          <a:prstGeom prst="rect">
+            <a:avLst/>
+          </a:prstGeom>
+          <a:noFill/>
+          <a:ln/>
+        </p:spPr>
+        <p:txBody>
+          <a:bodyPr wrap="square" lIns="0" tIns="0" rIns="0" bIns="0" rtlCol="0" anchor="ctr"/>
+          <a:lstStyle/>
+          <a:p>
+            <a:pPr indent="0" marL="0">
+              <a:buNone/>
+            </a:pPr>
+            <a:r>
+              <a:rPr lang="en-US" sz="1300" b="1" dirty="0">
+                <a:solidFill>
+                  <a:srgbClr val="1B2A4A"/>
+                </a:solidFill>
+                <a:latin typeface="Georgia" pitchFamily="34" charset="0"/>
+                <a:ea typeface="Georgia" pitchFamily="34" charset="-122"/>
+                <a:cs typeface="Georgia" pitchFamily="34" charset="-120"/>
+              </a:rPr>
+              <a:t>LCM</a:t>
+            </a:r>
+            <a:endParaRPr lang="en-US" sz="1300" dirty="0"/>
+          </a:p>
+        </p:txBody>
+      </p:sp>
+      <p:sp>
+        <p:nvSpPr>
+          <p:cNvPr id="29" name="Text 27"/>
+          <p:cNvSpPr/>
+          <p:nvPr/>
+        </p:nvSpPr>
+        <p:spPr>
+          <a:xfrm>
+            <a:off x="6400800" y="2587752"/>
+            <a:ext cx="1920240" cy="658368"/>
+          </a:xfrm>
+          <a:prstGeom prst="rect">
+            <a:avLst/>
+          </a:prstGeom>
+          <a:noFill/>
+          <a:ln/>
+        </p:spPr>
+        <p:txBody>
+          <a:bodyPr wrap="square" lIns="0" tIns="0" rIns="0" bIns="0" rtlCol="0" anchor="ctr"/>
+          <a:lstStyle/>
+          <a:p>
+            <a:pPr indent="0" marL="0">
+              <a:buNone/>
+            </a:pPr>
+            <a:r>
+              <a:rPr lang="en-US" sz="1100" dirty="0">
+                <a:solidFill>
+                  <a:srgbClr val="6B6660"/>
+                </a:solidFill>
+                <a:latin typeface="Calibri" pitchFamily="34" charset="0"/>
+                <a:ea typeface="Calibri" pitchFamily="34" charset="-122"/>
+                <a:cs typeface="Calibri" pitchFamily="34" charset="-120"/>
+              </a:rPr>
+              <a:t>Lowest Common Multiple</a:t>
+            </a:r>
+            <a:endParaRPr lang="en-US" sz="1100" dirty="0"/>
           </a:p>
         </p:txBody>
       </p:sp>
@@ -1655,7 +2559,47 @@
         <p:spPr>
           <a:xfrm>
             <a:off x="0" y="0"/>
-            <a:ext cx="9144000" cy="54864"/>
+            <a:ext cx="9144000" cy="822960"/>
+          </a:xfrm>
+          <a:prstGeom prst="rect">
+            <a:avLst/>
+          </a:prstGeom>
+          <a:solidFill>
+            <a:srgbClr val="FFFFFF"/>
+          </a:solidFill>
+          <a:ln/>
+        </p:spPr>
+      </p:sp>
+      <p:sp>
+        <p:nvSpPr>
+          <p:cNvPr id="3" name="Shape 1"/>
+          <p:cNvSpPr/>
+          <p:nvPr/>
+        </p:nvSpPr>
+        <p:spPr>
+          <a:xfrm>
+            <a:off x="0" y="804672"/>
+            <a:ext cx="9144000" cy="27432"/>
+          </a:xfrm>
+          <a:prstGeom prst="rect">
+            <a:avLst/>
+          </a:prstGeom>
+          <a:solidFill>
+            <a:srgbClr val="E5E2DC"/>
+          </a:solidFill>
+          <a:ln/>
+        </p:spPr>
+      </p:sp>
+      <p:sp>
+        <p:nvSpPr>
+          <p:cNvPr id="4" name="Shape 2"/>
+          <p:cNvSpPr/>
+          <p:nvPr/>
+        </p:nvSpPr>
+        <p:spPr>
+          <a:xfrm>
+            <a:off x="548640" y="201168"/>
+            <a:ext cx="54864" cy="420624"/>
           </a:xfrm>
           <a:prstGeom prst="rect">
             <a:avLst/>
@@ -1668,14 +2612,14 @@
       </p:sp>
       <p:sp>
         <p:nvSpPr>
-          <p:cNvPr id="3" name="Text 1"/>
-          <p:cNvSpPr/>
-          <p:nvPr/>
-        </p:nvSpPr>
-        <p:spPr>
-          <a:xfrm>
-            <a:off x="7772400" y="4709160"/>
-            <a:ext cx="1097280" cy="320040"/>
+          <p:cNvPr id="5" name="Text 3"/>
+          <p:cNvSpPr/>
+          <p:nvPr/>
+        </p:nvSpPr>
+        <p:spPr>
+          <a:xfrm>
+            <a:off x="777240" y="137160"/>
+            <a:ext cx="7772400" cy="548640"/>
           </a:xfrm>
           <a:prstGeom prst="rect">
             <a:avLst/>
@@ -1684,53 +2628,14 @@
           <a:ln/>
         </p:spPr>
         <p:txBody>
-          <a:bodyPr wrap="square" rtlCol="0" anchor="ctr"/>
-          <a:lstStyle/>
-          <a:p>
-            <a:pPr algn="r" indent="0" marL="0">
-              <a:buNone/>
-            </a:pPr>
-            <a:r>
-              <a:rPr lang="en-US" sz="900" dirty="0">
-                <a:solidFill>
-                  <a:srgbClr val="6B6660"/>
-                </a:solidFill>
-                <a:latin typeface="Calibri" pitchFamily="34" charset="0"/>
-                <a:ea typeface="Calibri" pitchFamily="34" charset="-122"/>
-                <a:cs typeface="Calibri" pitchFamily="34" charset="-120"/>
-              </a:rPr>
-              <a:t>3 / 5</a:t>
-            </a:r>
-            <a:endParaRPr lang="en-US" sz="900" dirty="0"/>
-          </a:p>
-        </p:txBody>
-      </p:sp>
-      <p:sp>
-        <p:nvSpPr>
-          <p:cNvPr id="4" name="Text 2"/>
-          <p:cNvSpPr/>
-          <p:nvPr/>
-        </p:nvSpPr>
-        <p:spPr>
-          <a:xfrm>
-            <a:off x="457200" y="274320"/>
-            <a:ext cx="8229600" cy="640080"/>
-          </a:xfrm>
-          <a:prstGeom prst="rect">
-            <a:avLst/>
-          </a:prstGeom>
-          <a:noFill/>
-          <a:ln/>
-        </p:spPr>
-        <p:txBody>
-          <a:bodyPr wrap="square" rtlCol="0" anchor="ctr"/>
+          <a:bodyPr wrap="square" lIns="0" tIns="0" rIns="0" bIns="0" rtlCol="0" anchor="ctr"/>
           <a:lstStyle/>
           <a:p>
             <a:pPr indent="0" marL="0">
               <a:buNone/>
             </a:pPr>
             <a:r>
-              <a:rPr lang="en-US" sz="2600" b="1" dirty="0">
+              <a:rPr lang="en-US" sz="2000" b="1" dirty="0">
                 <a:solidFill>
                   <a:srgbClr val="1B2A4A"/>
                 </a:solidFill>
@@ -1738,22 +2643,22 @@
                 <a:ea typeface="Georgia" pitchFamily="34" charset="-122"/>
                 <a:cs typeface="Georgia" pitchFamily="34" charset="-120"/>
               </a:rPr>
-              <a:t>Key Definitions</a:t>
-            </a:r>
-            <a:endParaRPr lang="en-US" sz="2600" dirty="0"/>
-          </a:p>
-        </p:txBody>
-      </p:sp>
-      <p:sp>
-        <p:nvSpPr>
-          <p:cNvPr id="5" name="Shape 3"/>
-          <p:cNvSpPr/>
-          <p:nvPr/>
-        </p:nvSpPr>
-        <p:spPr>
-          <a:xfrm>
-            <a:off x="457200" y="1188720"/>
-            <a:ext cx="2560320" cy="1828800"/>
+              <a:t>Factors vs Multiples</a:t>
+            </a:r>
+            <a:endParaRPr lang="en-US" sz="2000" dirty="0"/>
+          </a:p>
+        </p:txBody>
+      </p:sp>
+      <p:sp>
+        <p:nvSpPr>
+          <p:cNvPr id="6" name="Shape 4"/>
+          <p:cNvSpPr/>
+          <p:nvPr/>
+        </p:nvSpPr>
+        <p:spPr>
+          <a:xfrm>
+            <a:off x="548640" y="1051560"/>
+            <a:ext cx="3840480" cy="3474720"/>
           </a:xfrm>
           <a:prstGeom prst="rect">
             <a:avLst/>
@@ -1761,12 +2666,7 @@
           <a:solidFill>
             <a:srgbClr val="FFFFFF"/>
           </a:solidFill>
-          <a:ln w="12700">
-            <a:solidFill>
-              <a:srgbClr val="E5E2DC"/>
-            </a:solidFill>
-            <a:prstDash val="solid"/>
-          </a:ln>
+          <a:ln/>
           <a:effectLst>
             <a:outerShdw sx="100000" sy="100000" kx="0" ky="0" algn="bl" rotWithShape="0" blurRad="50800" dist="25400" dir="8100000">
               <a:srgbClr val="000000">
@@ -1778,14 +2678,14 @@
       </p:sp>
       <p:sp>
         <p:nvSpPr>
-          <p:cNvPr id="6" name="Shape 4"/>
-          <p:cNvSpPr/>
-          <p:nvPr/>
-        </p:nvSpPr>
-        <p:spPr>
-          <a:xfrm>
-            <a:off x="457200" y="1188720"/>
-            <a:ext cx="2560320" cy="54864"/>
+          <p:cNvPr id="7" name="Shape 5"/>
+          <p:cNvSpPr/>
+          <p:nvPr/>
+        </p:nvSpPr>
+        <p:spPr>
+          <a:xfrm>
+            <a:off x="548640" y="1051560"/>
+            <a:ext cx="3840480" cy="54864"/>
           </a:xfrm>
           <a:prstGeom prst="rect">
             <a:avLst/>
@@ -1798,14 +2698,14 @@
       </p:sp>
       <p:sp>
         <p:nvSpPr>
-          <p:cNvPr id="7" name="Text 5"/>
-          <p:cNvSpPr/>
-          <p:nvPr/>
-        </p:nvSpPr>
-        <p:spPr>
-          <a:xfrm>
-            <a:off x="594360" y="1325880"/>
-            <a:ext cx="2286000" cy="365760"/>
+          <p:cNvPr id="8" name="Text 6"/>
+          <p:cNvSpPr/>
+          <p:nvPr/>
+        </p:nvSpPr>
+        <p:spPr>
+          <a:xfrm>
+            <a:off x="777240" y="1188720"/>
+            <a:ext cx="3383280" cy="457200"/>
           </a:xfrm>
           <a:prstGeom prst="rect">
             <a:avLst/>
@@ -1814,53 +2714,78 @@
           <a:ln/>
         </p:spPr>
         <p:txBody>
-          <a:bodyPr wrap="square" rtlCol="0" anchor="ctr"/>
+          <a:bodyPr wrap="square" lIns="0" tIns="0" rIns="0" bIns="0" rtlCol="0" anchor="ctr"/>
           <a:lstStyle/>
           <a:p>
             <a:pPr indent="0" marL="0">
               <a:buNone/>
             </a:pPr>
             <a:r>
-              <a:rPr lang="en-US" sz="1400" b="1" dirty="0">
+              <a:rPr lang="en-US" sz="1500" b="1" dirty="0">
                 <a:solidFill>
                   <a:srgbClr val="1B2A4A"/>
+                </a:solidFill>
+                <a:latin typeface="Georgia" pitchFamily="34" charset="0"/>
+                <a:ea typeface="Georgia" pitchFamily="34" charset="-122"/>
+                <a:cs typeface="Georgia" pitchFamily="34" charset="-120"/>
+              </a:rPr>
+              <a:t>Factors</a:t>
+            </a:r>
+            <a:endParaRPr lang="en-US" sz="1500" dirty="0"/>
+          </a:p>
+        </p:txBody>
+      </p:sp>
+      <p:sp>
+        <p:nvSpPr>
+          <p:cNvPr id="9" name="Text 7"/>
+          <p:cNvSpPr/>
+          <p:nvPr/>
+        </p:nvSpPr>
+        <p:spPr>
+          <a:xfrm>
+            <a:off x="777240" y="1691640"/>
+            <a:ext cx="3383280" cy="2651760"/>
+          </a:xfrm>
+          <a:prstGeom prst="rect">
+            <a:avLst/>
+          </a:prstGeom>
+          <a:noFill/>
+          <a:ln/>
+        </p:spPr>
+        <p:txBody>
+          <a:bodyPr wrap="square" rtlCol="0" anchor="t"/>
+          <a:lstStyle/>
+          <a:p>
+            <a:pPr marL="342900" indent="-342900">
+              <a:spcAft>
+                <a:spcPts val="600"/>
+              </a:spcAft>
+              <a:buSzPct val="100000"/>
+              <a:buChar char="•"/>
+            </a:pPr>
+            <a:r>
+              <a:rPr lang="en-US" sz="1300" dirty="0">
+                <a:solidFill>
+                  <a:srgbClr val="3D3A36"/>
                 </a:solidFill>
                 <a:latin typeface="Calibri" pitchFamily="34" charset="0"/>
                 <a:ea typeface="Calibri" pitchFamily="34" charset="-122"/>
                 <a:cs typeface="Calibri" pitchFamily="34" charset="-120"/>
               </a:rPr>
-              <a:t>Factors</a:t>
-            </a:r>
-            <a:endParaRPr lang="en-US" sz="1400" dirty="0"/>
-          </a:p>
-        </p:txBody>
-      </p:sp>
-      <p:sp>
-        <p:nvSpPr>
-          <p:cNvPr id="8" name="Text 6"/>
-          <p:cNvSpPr/>
-          <p:nvPr/>
-        </p:nvSpPr>
-        <p:spPr>
-          <a:xfrm>
-            <a:off x="594360" y="1737360"/>
-            <a:ext cx="2286000" cy="1097280"/>
-          </a:xfrm>
-          <a:prstGeom prst="rect">
-            <a:avLst/>
-          </a:prstGeom>
-          <a:noFill/>
-          <a:ln/>
-        </p:spPr>
-        <p:txBody>
-          <a:bodyPr wrap="square" rtlCol="0" anchor="t"/>
-          <a:lstStyle/>
-          <a:p>
-            <a:pPr indent="0" marL="0">
-              <a:buNone/>
-            </a:pPr>
-            <a:r>
-              <a:rPr lang="en-US" sz="1100" dirty="0">
+              <a:t>Numbers that divide INTO a number exactly</a:t>
+            </a:r>
+            <a:endParaRPr lang="en-US" sz="1300" dirty="0"/>
+          </a:p>
+          <a:p>
+            <a:pPr marL="342900" indent="-342900">
+              <a:spcAft>
+                <a:spcPts val="600"/>
+              </a:spcAft>
+              <a:buSzPct val="100000"/>
+              <a:buChar char="•"/>
+            </a:pPr>
+            <a:r>
+              <a:rPr lang="en-US" sz="1300" dirty="0">
                 <a:solidFill>
                   <a:srgbClr val="3D3A36"/>
                 </a:solidFill>
@@ -1868,22 +2793,85 @@
                 <a:ea typeface="Calibri" pitchFamily="34" charset="-122"/>
                 <a:cs typeface="Calibri" pitchFamily="34" charset="-120"/>
               </a:rPr>
-              <a:t>Numbers that divide exactly into another number. Factors of 12: 1, 2, 3, 4, 6, 12. Every number has at least two factors: 1 and itself.</a:t>
-            </a:r>
-            <a:endParaRPr lang="en-US" sz="1100" dirty="0"/>
-          </a:p>
-        </p:txBody>
-      </p:sp>
-      <p:sp>
-        <p:nvSpPr>
-          <p:cNvPr id="9" name="Shape 7"/>
-          <p:cNvSpPr/>
-          <p:nvPr/>
-        </p:nvSpPr>
-        <p:spPr>
-          <a:xfrm>
-            <a:off x="3291840" y="1188720"/>
-            <a:ext cx="2560320" cy="1828800"/>
+              <a:t>Factors of 12: 1, 2, 3, 4, 6, 12</a:t>
+            </a:r>
+            <a:endParaRPr lang="en-US" sz="1300" dirty="0"/>
+          </a:p>
+          <a:p>
+            <a:pPr marL="342900" indent="-342900">
+              <a:spcAft>
+                <a:spcPts val="600"/>
+              </a:spcAft>
+              <a:buSzPct val="100000"/>
+              <a:buChar char="•"/>
+            </a:pPr>
+            <a:r>
+              <a:rPr lang="en-US" sz="1300" dirty="0">
+                <a:solidFill>
+                  <a:srgbClr val="3D3A36"/>
+                </a:solidFill>
+                <a:latin typeface="Calibri" pitchFamily="34" charset="0"/>
+                <a:ea typeface="Calibri" pitchFamily="34" charset="-122"/>
+                <a:cs typeface="Calibri" pitchFamily="34" charset="-120"/>
+              </a:rPr>
+              <a:t>Always start from 1 and the number itself</a:t>
+            </a:r>
+            <a:endParaRPr lang="en-US" sz="1300" dirty="0"/>
+          </a:p>
+          <a:p>
+            <a:pPr marL="342900" indent="-342900">
+              <a:spcAft>
+                <a:spcPts val="600"/>
+              </a:spcAft>
+              <a:buSzPct val="100000"/>
+              <a:buChar char="•"/>
+            </a:pPr>
+            <a:r>
+              <a:rPr lang="en-US" sz="1300" dirty="0">
+                <a:solidFill>
+                  <a:srgbClr val="3D3A36"/>
+                </a:solidFill>
+                <a:latin typeface="Calibri" pitchFamily="34" charset="0"/>
+                <a:ea typeface="Calibri" pitchFamily="34" charset="-122"/>
+                <a:cs typeface="Calibri" pitchFamily="34" charset="-120"/>
+              </a:rPr>
+              <a:t>Work in pairs: 1×12, 2×6, 3×4</a:t>
+            </a:r>
+            <a:endParaRPr lang="en-US" sz="1300" dirty="0"/>
+          </a:p>
+          <a:p>
+            <a:pPr marL="342900" indent="-342900">
+              <a:spcAft>
+                <a:spcPts val="600"/>
+              </a:spcAft>
+              <a:buSzPct val="100000"/>
+              <a:buChar char="•"/>
+            </a:pPr>
+            <a:r>
+              <a:rPr lang="en-US" sz="1300" dirty="0">
+                <a:solidFill>
+                  <a:srgbClr val="3D3A36"/>
+                </a:solidFill>
+                <a:latin typeface="Calibri" pitchFamily="34" charset="0"/>
+                <a:ea typeface="Calibri" pitchFamily="34" charset="-122"/>
+                <a:cs typeface="Calibri" pitchFamily="34" charset="-120"/>
+              </a:rPr>
+              <a:t>Factors get SMALLER — there's a fixed set</a:t>
+            </a:r>
+            <a:endParaRPr lang="en-US" sz="1300" dirty="0"/>
+          </a:p>
+        </p:txBody>
+      </p:sp>
+      <p:sp>
+        <p:nvSpPr>
+          <p:cNvPr id="10" name="Shape 8"/>
+          <p:cNvSpPr/>
+          <p:nvPr/>
+        </p:nvSpPr>
+        <p:spPr>
+          <a:xfrm>
+            <a:off x="4754880" y="1051560"/>
+            <a:ext cx="3840480" cy="3474720"/>
           </a:xfrm>
           <a:prstGeom prst="rect">
             <a:avLst/>
@@ -1891,12 +2879,7 @@
           <a:solidFill>
             <a:srgbClr val="FFFFFF"/>
           </a:solidFill>
-          <a:ln w="12700">
-            <a:solidFill>
-              <a:srgbClr val="E5E2DC"/>
-            </a:solidFill>
-            <a:prstDash val="solid"/>
-          </a:ln>
+          <a:ln/>
           <a:effectLst>
             <a:outerShdw sx="100000" sy="100000" kx="0" ky="0" algn="bl" rotWithShape="0" blurRad="50800" dist="25400" dir="8100000">
               <a:srgbClr val="000000">
@@ -1908,34 +2891,34 @@
       </p:sp>
       <p:sp>
         <p:nvSpPr>
-          <p:cNvPr id="10" name="Shape 8"/>
-          <p:cNvSpPr/>
-          <p:nvPr/>
-        </p:nvSpPr>
-        <p:spPr>
-          <a:xfrm>
-            <a:off x="3291840" y="1188720"/>
-            <a:ext cx="2560320" cy="54864"/>
-          </a:xfrm>
-          <a:prstGeom prst="rect">
-            <a:avLst/>
-          </a:prstGeom>
-          <a:solidFill>
-            <a:srgbClr val="2A9D8F"/>
-          </a:solidFill>
-          <a:ln/>
-        </p:spPr>
-      </p:sp>
-      <p:sp>
-        <p:nvSpPr>
-          <p:cNvPr id="11" name="Text 9"/>
-          <p:cNvSpPr/>
-          <p:nvPr/>
-        </p:nvSpPr>
-        <p:spPr>
-          <a:xfrm>
-            <a:off x="3429000" y="1325880"/>
-            <a:ext cx="2286000" cy="365760"/>
+          <p:cNvPr id="11" name="Shape 9"/>
+          <p:cNvSpPr/>
+          <p:nvPr/>
+        </p:nvSpPr>
+        <p:spPr>
+          <a:xfrm>
+            <a:off x="4754880" y="1051560"/>
+            <a:ext cx="3840480" cy="54864"/>
+          </a:xfrm>
+          <a:prstGeom prst="rect">
+            <a:avLst/>
+          </a:prstGeom>
+          <a:solidFill>
+            <a:srgbClr val="E9C46A"/>
+          </a:solidFill>
+          <a:ln/>
+        </p:spPr>
+      </p:sp>
+      <p:sp>
+        <p:nvSpPr>
+          <p:cNvPr id="12" name="Text 10"/>
+          <p:cNvSpPr/>
+          <p:nvPr/>
+        </p:nvSpPr>
+        <p:spPr>
+          <a:xfrm>
+            <a:off x="4983480" y="1188720"/>
+            <a:ext cx="3383280" cy="457200"/>
           </a:xfrm>
           <a:prstGeom prst="rect">
             <a:avLst/>
@@ -1944,53 +2927,78 @@
           <a:ln/>
         </p:spPr>
         <p:txBody>
-          <a:bodyPr wrap="square" rtlCol="0" anchor="ctr"/>
+          <a:bodyPr wrap="square" lIns="0" tIns="0" rIns="0" bIns="0" rtlCol="0" anchor="ctr"/>
           <a:lstStyle/>
           <a:p>
             <a:pPr indent="0" marL="0">
               <a:buNone/>
             </a:pPr>
             <a:r>
-              <a:rPr lang="en-US" sz="1400" b="1" dirty="0">
+              <a:rPr lang="en-US" sz="1500" b="1" dirty="0">
                 <a:solidFill>
                   <a:srgbClr val="1B2A4A"/>
+                </a:solidFill>
+                <a:latin typeface="Georgia" pitchFamily="34" charset="0"/>
+                <a:ea typeface="Georgia" pitchFamily="34" charset="-122"/>
+                <a:cs typeface="Georgia" pitchFamily="34" charset="-120"/>
+              </a:rPr>
+              <a:t>Multiples</a:t>
+            </a:r>
+            <a:endParaRPr lang="en-US" sz="1500" dirty="0"/>
+          </a:p>
+        </p:txBody>
+      </p:sp>
+      <p:sp>
+        <p:nvSpPr>
+          <p:cNvPr id="13" name="Text 11"/>
+          <p:cNvSpPr/>
+          <p:nvPr/>
+        </p:nvSpPr>
+        <p:spPr>
+          <a:xfrm>
+            <a:off x="4983480" y="1691640"/>
+            <a:ext cx="3383280" cy="2651760"/>
+          </a:xfrm>
+          <a:prstGeom prst="rect">
+            <a:avLst/>
+          </a:prstGeom>
+          <a:noFill/>
+          <a:ln/>
+        </p:spPr>
+        <p:txBody>
+          <a:bodyPr wrap="square" rtlCol="0" anchor="t"/>
+          <a:lstStyle/>
+          <a:p>
+            <a:pPr marL="342900" indent="-342900">
+              <a:spcAft>
+                <a:spcPts val="600"/>
+              </a:spcAft>
+              <a:buSzPct val="100000"/>
+              <a:buChar char="•"/>
+            </a:pPr>
+            <a:r>
+              <a:rPr lang="en-US" sz="1300" dirty="0">
+                <a:solidFill>
+                  <a:srgbClr val="3D3A36"/>
                 </a:solidFill>
                 <a:latin typeface="Calibri" pitchFamily="34" charset="0"/>
                 <a:ea typeface="Calibri" pitchFamily="34" charset="-122"/>
                 <a:cs typeface="Calibri" pitchFamily="34" charset="-120"/>
               </a:rPr>
-              <a:t>Multiples</a:t>
-            </a:r>
-            <a:endParaRPr lang="en-US" sz="1400" dirty="0"/>
-          </a:p>
-        </p:txBody>
-      </p:sp>
-      <p:sp>
-        <p:nvSpPr>
-          <p:cNvPr id="12" name="Text 10"/>
-          <p:cNvSpPr/>
-          <p:nvPr/>
-        </p:nvSpPr>
-        <p:spPr>
-          <a:xfrm>
-            <a:off x="3429000" y="1737360"/>
-            <a:ext cx="2286000" cy="1097280"/>
-          </a:xfrm>
-          <a:prstGeom prst="rect">
-            <a:avLst/>
-          </a:prstGeom>
-          <a:noFill/>
-          <a:ln/>
-        </p:spPr>
-        <p:txBody>
-          <a:bodyPr wrap="square" rtlCol="0" anchor="t"/>
-          <a:lstStyle/>
-          <a:p>
-            <a:pPr indent="0" marL="0">
-              <a:buNone/>
-            </a:pPr>
-            <a:r>
-              <a:rPr lang="en-US" sz="1100" dirty="0">
+              <a:t>The TIMES TABLE of a number</a:t>
+            </a:r>
+            <a:endParaRPr lang="en-US" sz="1300" dirty="0"/>
+          </a:p>
+          <a:p>
+            <a:pPr marL="342900" indent="-342900">
+              <a:spcAft>
+                <a:spcPts val="600"/>
+              </a:spcAft>
+              <a:buSzPct val="100000"/>
+              <a:buChar char="•"/>
+            </a:pPr>
+            <a:r>
+              <a:rPr lang="en-US" sz="1300" dirty="0">
                 <a:solidFill>
                   <a:srgbClr val="3D3A36"/>
                 </a:solidFill>
@@ -1998,129 +3006,41 @@
                 <a:ea typeface="Calibri" pitchFamily="34" charset="-122"/>
                 <a:cs typeface="Calibri" pitchFamily="34" charset="-120"/>
               </a:rPr>
-              <a:t>The 'times table' results. Multiples of 5: 5, 10, 15, 20, 25... A multiple = the number × any whole number.</a:t>
-            </a:r>
-            <a:endParaRPr lang="en-US" sz="1100" dirty="0"/>
-          </a:p>
-        </p:txBody>
-      </p:sp>
-      <p:sp>
-        <p:nvSpPr>
-          <p:cNvPr id="13" name="Shape 11"/>
-          <p:cNvSpPr/>
-          <p:nvPr/>
-        </p:nvSpPr>
-        <p:spPr>
-          <a:xfrm>
-            <a:off x="6126480" y="1188720"/>
-            <a:ext cx="2560320" cy="1828800"/>
-          </a:xfrm>
-          <a:prstGeom prst="rect">
-            <a:avLst/>
-          </a:prstGeom>
-          <a:solidFill>
-            <a:srgbClr val="FFFFFF"/>
-          </a:solidFill>
-          <a:ln w="12700">
-            <a:solidFill>
-              <a:srgbClr val="E5E2DC"/>
-            </a:solidFill>
-            <a:prstDash val="solid"/>
-          </a:ln>
-          <a:effectLst>
-            <a:outerShdw sx="100000" sy="100000" kx="0" ky="0" algn="bl" rotWithShape="0" blurRad="50800" dist="25400" dir="8100000">
-              <a:srgbClr val="000000">
-                <a:alpha val="10000"/>
-              </a:srgbClr>
-            </a:outerShdw>
-          </a:effectLst>
-        </p:spPr>
-      </p:sp>
-      <p:sp>
-        <p:nvSpPr>
-          <p:cNvPr id="14" name="Shape 12"/>
-          <p:cNvSpPr/>
-          <p:nvPr/>
-        </p:nvSpPr>
-        <p:spPr>
-          <a:xfrm>
-            <a:off x="6126480" y="1188720"/>
-            <a:ext cx="2560320" cy="54864"/>
-          </a:xfrm>
-          <a:prstGeom prst="rect">
-            <a:avLst/>
-          </a:prstGeom>
-          <a:solidFill>
-            <a:srgbClr val="2A9D8F"/>
-          </a:solidFill>
-          <a:ln/>
-        </p:spPr>
-      </p:sp>
-      <p:sp>
-        <p:nvSpPr>
-          <p:cNvPr id="15" name="Text 13"/>
-          <p:cNvSpPr/>
-          <p:nvPr/>
-        </p:nvSpPr>
-        <p:spPr>
-          <a:xfrm>
-            <a:off x="6263640" y="1325880"/>
-            <a:ext cx="2286000" cy="365760"/>
-          </a:xfrm>
-          <a:prstGeom prst="rect">
-            <a:avLst/>
-          </a:prstGeom>
-          <a:noFill/>
-          <a:ln/>
-        </p:spPr>
-        <p:txBody>
-          <a:bodyPr wrap="square" rtlCol="0" anchor="ctr"/>
-          <a:lstStyle/>
-          <a:p>
-            <a:pPr indent="0" marL="0">
-              <a:buNone/>
-            </a:pPr>
-            <a:r>
-              <a:rPr lang="en-US" sz="1400" b="1" dirty="0">
-                <a:solidFill>
-                  <a:srgbClr val="1B2A4A"/>
+              <a:t>Multiples of 3: 3, 6, 9, 12, 15, 18...</a:t>
+            </a:r>
+            <a:endParaRPr lang="en-US" sz="1300" dirty="0"/>
+          </a:p>
+          <a:p>
+            <a:pPr marL="342900" indent="-342900">
+              <a:spcAft>
+                <a:spcPts val="600"/>
+              </a:spcAft>
+              <a:buSzPct val="100000"/>
+              <a:buChar char="•"/>
+            </a:pPr>
+            <a:r>
+              <a:rPr lang="en-US" sz="1300" dirty="0">
+                <a:solidFill>
+                  <a:srgbClr val="3D3A36"/>
                 </a:solidFill>
                 <a:latin typeface="Calibri" pitchFamily="34" charset="0"/>
                 <a:ea typeface="Calibri" pitchFamily="34" charset="-122"/>
                 <a:cs typeface="Calibri" pitchFamily="34" charset="-120"/>
               </a:rPr>
-              <a:t>Prime Numbers</a:t>
-            </a:r>
-            <a:endParaRPr lang="en-US" sz="1400" dirty="0"/>
-          </a:p>
-        </p:txBody>
-      </p:sp>
-      <p:sp>
-        <p:nvSpPr>
-          <p:cNvPr id="16" name="Text 14"/>
-          <p:cNvSpPr/>
-          <p:nvPr/>
-        </p:nvSpPr>
-        <p:spPr>
-          <a:xfrm>
-            <a:off x="6263640" y="1737360"/>
-            <a:ext cx="2286000" cy="1097280"/>
-          </a:xfrm>
-          <a:prstGeom prst="rect">
-            <a:avLst/>
-          </a:prstGeom>
-          <a:noFill/>
-          <a:ln/>
-        </p:spPr>
-        <p:txBody>
-          <a:bodyPr wrap="square" rtlCol="0" anchor="t"/>
-          <a:lstStyle/>
-          <a:p>
-            <a:pPr indent="0" marL="0">
-              <a:buNone/>
-            </a:pPr>
-            <a:r>
-              <a:rPr lang="en-US" sz="1100" dirty="0">
+              <a:t>Start from the number and keep adding</a:t>
+            </a:r>
+            <a:endParaRPr lang="en-US" sz="1300" dirty="0"/>
+          </a:p>
+          <a:p>
+            <a:pPr marL="342900" indent="-342900">
+              <a:spcAft>
+                <a:spcPts val="600"/>
+              </a:spcAft>
+              <a:buSzPct val="100000"/>
+              <a:buChar char="•"/>
+            </a:pPr>
+            <a:r>
+              <a:rPr lang="en-US" sz="1300" dirty="0">
                 <a:solidFill>
                   <a:srgbClr val="3D3A36"/>
                 </a:solidFill>
@@ -2128,9 +3048,30 @@
                 <a:ea typeface="Calibri" pitchFamily="34" charset="-122"/>
                 <a:cs typeface="Calibri" pitchFamily="34" charset="-120"/>
               </a:rPr>
-              <a:t>A number with EXACTLY two factors: 1 and itself. First primes: 2, 3, 5, 7, 11, 13, 17, 19, 23, 29. Note: 1 is NOT prime (only one factor). 2 is the only even prime.</a:t>
-            </a:r>
-            <a:endParaRPr lang="en-US" sz="1100" dirty="0"/>
+              <a:t>Multiples go on FOREVER</a:t>
+            </a:r>
+            <a:endParaRPr lang="en-US" sz="1300" dirty="0"/>
+          </a:p>
+          <a:p>
+            <a:pPr marL="342900" indent="-342900">
+              <a:spcAft>
+                <a:spcPts val="600"/>
+              </a:spcAft>
+              <a:buSzPct val="100000"/>
+              <a:buChar char="•"/>
+            </a:pPr>
+            <a:r>
+              <a:rPr lang="en-US" sz="1300" dirty="0">
+                <a:solidFill>
+                  <a:srgbClr val="3D3A36"/>
+                </a:solidFill>
+                <a:latin typeface="Calibri" pitchFamily="34" charset="0"/>
+                <a:ea typeface="Calibri" pitchFamily="34" charset="-122"/>
+                <a:cs typeface="Calibri" pitchFamily="34" charset="-120"/>
+              </a:rPr>
+              <a:t>Every number has infinite multiples</a:t>
+            </a:r>
+            <a:endParaRPr lang="en-US" sz="1300" dirty="0"/>
           </a:p>
         </p:txBody>
       </p:sp>
@@ -2175,7 +3116,47 @@
         <p:spPr>
           <a:xfrm>
             <a:off x="0" y="0"/>
-            <a:ext cx="9144000" cy="54864"/>
+            <a:ext cx="9144000" cy="822960"/>
+          </a:xfrm>
+          <a:prstGeom prst="rect">
+            <a:avLst/>
+          </a:prstGeom>
+          <a:solidFill>
+            <a:srgbClr val="FFFFFF"/>
+          </a:solidFill>
+          <a:ln/>
+        </p:spPr>
+      </p:sp>
+      <p:sp>
+        <p:nvSpPr>
+          <p:cNvPr id="3" name="Shape 1"/>
+          <p:cNvSpPr/>
+          <p:nvPr/>
+        </p:nvSpPr>
+        <p:spPr>
+          <a:xfrm>
+            <a:off x="0" y="804672"/>
+            <a:ext cx="9144000" cy="27432"/>
+          </a:xfrm>
+          <a:prstGeom prst="rect">
+            <a:avLst/>
+          </a:prstGeom>
+          <a:solidFill>
+            <a:srgbClr val="E5E2DC"/>
+          </a:solidFill>
+          <a:ln/>
+        </p:spPr>
+      </p:sp>
+      <p:sp>
+        <p:nvSpPr>
+          <p:cNvPr id="4" name="Shape 2"/>
+          <p:cNvSpPr/>
+          <p:nvPr/>
+        </p:nvSpPr>
+        <p:spPr>
+          <a:xfrm>
+            <a:off x="548640" y="201168"/>
+            <a:ext cx="54864" cy="420624"/>
           </a:xfrm>
           <a:prstGeom prst="rect">
             <a:avLst/>
@@ -2188,14 +3169,14 @@
       </p:sp>
       <p:sp>
         <p:nvSpPr>
-          <p:cNvPr id="3" name="Text 1"/>
-          <p:cNvSpPr/>
-          <p:nvPr/>
-        </p:nvSpPr>
-        <p:spPr>
-          <a:xfrm>
-            <a:off x="7772400" y="4709160"/>
-            <a:ext cx="1097280" cy="320040"/>
+          <p:cNvPr id="5" name="Text 3"/>
+          <p:cNvSpPr/>
+          <p:nvPr/>
+        </p:nvSpPr>
+        <p:spPr>
+          <a:xfrm>
+            <a:off x="777240" y="137160"/>
+            <a:ext cx="7772400" cy="548640"/>
           </a:xfrm>
           <a:prstGeom prst="rect">
             <a:avLst/>
@@ -2204,96 +3185,78 @@
           <a:ln/>
         </p:spPr>
         <p:txBody>
-          <a:bodyPr wrap="square" rtlCol="0" anchor="ctr"/>
-          <a:lstStyle/>
-          <a:p>
-            <a:pPr algn="r" indent="0" marL="0">
+          <a:bodyPr wrap="square" lIns="0" tIns="0" rIns="0" bIns="0" rtlCol="0" anchor="ctr"/>
+          <a:lstStyle/>
+          <a:p>
+            <a:pPr indent="0" marL="0">
               <a:buNone/>
             </a:pPr>
             <a:r>
-              <a:rPr lang="en-US" sz="900" dirty="0">
-                <a:solidFill>
-                  <a:srgbClr val="6B6660"/>
+              <a:rPr lang="en-US" sz="2000" b="1" dirty="0">
+                <a:solidFill>
+                  <a:srgbClr val="1B2A4A"/>
+                </a:solidFill>
+                <a:latin typeface="Georgia" pitchFamily="34" charset="0"/>
+                <a:ea typeface="Georgia" pitchFamily="34" charset="-122"/>
+                <a:cs typeface="Georgia" pitchFamily="34" charset="-120"/>
+              </a:rPr>
+              <a:t>Prime Numbers</a:t>
+            </a:r>
+            <a:endParaRPr lang="en-US" sz="2000" dirty="0"/>
+          </a:p>
+        </p:txBody>
+      </p:sp>
+      <p:sp>
+        <p:nvSpPr>
+          <p:cNvPr id="6" name="Text 4"/>
+          <p:cNvSpPr/>
+          <p:nvPr/>
+        </p:nvSpPr>
+        <p:spPr>
+          <a:xfrm>
+            <a:off x="731520" y="1051560"/>
+            <a:ext cx="7680960" cy="3108960"/>
+          </a:xfrm>
+          <a:prstGeom prst="rect">
+            <a:avLst/>
+          </a:prstGeom>
+          <a:noFill/>
+          <a:ln/>
+        </p:spPr>
+        <p:txBody>
+          <a:bodyPr wrap="square" rtlCol="0" anchor="t"/>
+          <a:lstStyle/>
+          <a:p>
+            <a:pPr marL="342900" indent="-342900">
+              <a:spcAft>
+                <a:spcPts val="800"/>
+              </a:spcAft>
+              <a:buSzPct val="100000"/>
+              <a:buChar char="•"/>
+            </a:pPr>
+            <a:r>
+              <a:rPr lang="en-US" sz="1500" dirty="0">
+                <a:solidFill>
+                  <a:srgbClr val="3D3A36"/>
                 </a:solidFill>
                 <a:latin typeface="Calibri" pitchFamily="34" charset="0"/>
                 <a:ea typeface="Calibri" pitchFamily="34" charset="-122"/>
                 <a:cs typeface="Calibri" pitchFamily="34" charset="-120"/>
               </a:rPr>
-              <a:t>4 / 5</a:t>
-            </a:r>
-            <a:endParaRPr lang="en-US" sz="900" dirty="0"/>
-          </a:p>
-        </p:txBody>
-      </p:sp>
-      <p:sp>
-        <p:nvSpPr>
-          <p:cNvPr id="4" name="Text 2"/>
-          <p:cNvSpPr/>
-          <p:nvPr/>
-        </p:nvSpPr>
-        <p:spPr>
-          <a:xfrm>
-            <a:off x="457200" y="274320"/>
-            <a:ext cx="8229600" cy="640080"/>
-          </a:xfrm>
-          <a:prstGeom prst="rect">
-            <a:avLst/>
-          </a:prstGeom>
-          <a:noFill/>
-          <a:ln/>
-        </p:spPr>
-        <p:txBody>
-          <a:bodyPr wrap="square" rtlCol="0" anchor="ctr"/>
-          <a:lstStyle/>
-          <a:p>
-            <a:pPr indent="0" marL="0">
-              <a:buNone/>
-            </a:pPr>
-            <a:r>
-              <a:rPr lang="en-US" sz="2600" b="1" dirty="0">
-                <a:solidFill>
-                  <a:srgbClr val="1B2A4A"/>
-                </a:solidFill>
-                <a:latin typeface="Georgia" pitchFamily="34" charset="0"/>
-                <a:ea typeface="Georgia" pitchFamily="34" charset="-122"/>
-                <a:cs typeface="Georgia" pitchFamily="34" charset="-120"/>
-              </a:rPr>
-              <a:t>HCF and LCM</a:t>
-            </a:r>
-            <a:endParaRPr lang="en-US" sz="2600" dirty="0"/>
-          </a:p>
-        </p:txBody>
-      </p:sp>
-      <p:sp>
-        <p:nvSpPr>
-          <p:cNvPr id="5" name="Text 3"/>
-          <p:cNvSpPr/>
-          <p:nvPr/>
-        </p:nvSpPr>
-        <p:spPr>
-          <a:xfrm>
-            <a:off x="457200" y="1188720"/>
-            <a:ext cx="3840480" cy="3474720"/>
-          </a:xfrm>
-          <a:prstGeom prst="rect">
-            <a:avLst/>
-          </a:prstGeom>
-          <a:noFill/>
-          <a:ln/>
-        </p:spPr>
-        <p:txBody>
-          <a:bodyPr wrap="square" rtlCol="0" anchor="t"/>
-          <a:lstStyle/>
+              <a:t>A prime number has EXACTLY 2 factors: 1 and itself.</a:t>
+            </a:r>
+            <a:endParaRPr lang="en-US" sz="1500" dirty="0"/>
+          </a:p>
           <a:p>
             <a:pPr marL="342900" indent="-342900">
               <a:spcAft>
-                <a:spcPts val="600"/>
+                <a:spcPts val="800"/>
               </a:spcAft>
               <a:buSzPct val="100000"/>
               <a:buChar char="•"/>
             </a:pPr>
             <a:r>
-              <a:rPr lang="en-US" sz="1400" dirty="0">
+              <a:rPr lang="en-US" sz="1500" dirty="0">
                 <a:solidFill>
                   <a:srgbClr val="3D3A36"/>
                 </a:solidFill>
@@ -2301,20 +3264,20 @@
                 <a:ea typeface="Calibri" pitchFamily="34" charset="-122"/>
                 <a:cs typeface="Calibri" pitchFamily="34" charset="-120"/>
               </a:rPr>
-              <a:t>HCF = Highest Common Factor</a:t>
-            </a:r>
-            <a:endParaRPr lang="en-US" sz="1400" dirty="0"/>
+              <a:t>First primes: 2, 3, 5, 7, 11, 13, 17, 19, 23, 29, 31...</a:t>
+            </a:r>
+            <a:endParaRPr lang="en-US" sz="1500" dirty="0"/>
           </a:p>
           <a:p>
             <a:pPr marL="342900" indent="-342900">
               <a:spcAft>
-                <a:spcPts val="600"/>
+                <a:spcPts val="800"/>
               </a:spcAft>
               <a:buSzPct val="100000"/>
               <a:buChar char="•"/>
             </a:pPr>
             <a:r>
-              <a:rPr lang="en-US" sz="1400" dirty="0">
+              <a:rPr lang="en-US" sz="1500" dirty="0">
                 <a:solidFill>
                   <a:srgbClr val="3D3A36"/>
                 </a:solidFill>
@@ -2322,20 +3285,20 @@
                 <a:ea typeface="Calibri" pitchFamily="34" charset="-122"/>
                 <a:cs typeface="Calibri" pitchFamily="34" charset="-120"/>
               </a:rPr>
-              <a:t>The largest factor shared by two numbers</a:t>
-            </a:r>
-            <a:endParaRPr lang="en-US" sz="1400" dirty="0"/>
+              <a:t>2 is the ONLY even prime number.</a:t>
+            </a:r>
+            <a:endParaRPr lang="en-US" sz="1500" dirty="0"/>
           </a:p>
           <a:p>
             <a:pPr marL="342900" indent="-342900">
               <a:spcAft>
-                <a:spcPts val="600"/>
+                <a:spcPts val="800"/>
               </a:spcAft>
               <a:buSzPct val="100000"/>
               <a:buChar char="•"/>
             </a:pPr>
             <a:r>
-              <a:rPr lang="en-US" sz="1400" dirty="0">
+              <a:rPr lang="en-US" sz="1500" dirty="0">
                 <a:solidFill>
                   <a:srgbClr val="3D3A36"/>
                 </a:solidFill>
@@ -2343,20 +3306,20 @@
                 <a:ea typeface="Calibri" pitchFamily="34" charset="-122"/>
                 <a:cs typeface="Calibri" pitchFamily="34" charset="-120"/>
               </a:rPr>
-              <a:t>HCF of 12 and 18: factors of 12 = 1,2,3,4,6,12; factors of 18 = 1,2,3,6,9,18; common = 1,2,3,6 → HCF = 6</a:t>
-            </a:r>
-            <a:endParaRPr lang="en-US" sz="1400" dirty="0"/>
+              <a:t>1 is NOT prime (it only has one factor).</a:t>
+            </a:r>
+            <a:endParaRPr lang="en-US" sz="1500" dirty="0"/>
           </a:p>
           <a:p>
             <a:pPr marL="342900" indent="-342900">
               <a:spcAft>
-                <a:spcPts val="600"/>
+                <a:spcPts val="800"/>
               </a:spcAft>
               <a:buSzPct val="100000"/>
               <a:buChar char="•"/>
             </a:pPr>
             <a:r>
-              <a:rPr lang="en-US" sz="1400" dirty="0">
+              <a:rPr lang="en-US" sz="1500" dirty="0">
                 <a:solidFill>
                   <a:srgbClr val="3D3A36"/>
                 </a:solidFill>
@@ -2364,77 +3327,30 @@
                 <a:ea typeface="Calibri" pitchFamily="34" charset="-122"/>
                 <a:cs typeface="Calibri" pitchFamily="34" charset="-120"/>
               </a:rPr>
-              <a:t>LCM = Lowest Common Multiple</a:t>
-            </a:r>
-            <a:endParaRPr lang="en-US" sz="1400" dirty="0"/>
-          </a:p>
-          <a:p>
-            <a:pPr marL="342900" indent="-342900">
-              <a:spcAft>
-                <a:spcPts val="600"/>
-              </a:spcAft>
-              <a:buSzPct val="100000"/>
-              <a:buChar char="•"/>
-            </a:pPr>
-            <a:r>
-              <a:rPr lang="en-US" sz="1400" dirty="0">
-                <a:solidFill>
-                  <a:srgbClr val="3D3A36"/>
-                </a:solidFill>
-                <a:latin typeface="Calibri" pitchFamily="34" charset="0"/>
-                <a:ea typeface="Calibri" pitchFamily="34" charset="-122"/>
-                <a:cs typeface="Calibri" pitchFamily="34" charset="-120"/>
-              </a:rPr>
-              <a:t>The smallest multiple shared by two numbers</a:t>
-            </a:r>
-            <a:endParaRPr lang="en-US" sz="1400" dirty="0"/>
-          </a:p>
-          <a:p>
-            <a:pPr marL="342900" indent="-342900">
-              <a:spcAft>
-                <a:spcPts val="600"/>
-              </a:spcAft>
-              <a:buSzPct val="100000"/>
-              <a:buChar char="•"/>
-            </a:pPr>
-            <a:r>
-              <a:rPr lang="en-US" sz="1400" dirty="0">
-                <a:solidFill>
-                  <a:srgbClr val="3D3A36"/>
-                </a:solidFill>
-                <a:latin typeface="Calibri" pitchFamily="34" charset="0"/>
-                <a:ea typeface="Calibri" pitchFamily="34" charset="-122"/>
-                <a:cs typeface="Calibri" pitchFamily="34" charset="-120"/>
-              </a:rPr>
-              <a:t>LCM of 4 and 6: multiples of 4 = 4,8,12,16...; multiples of 6 = 6,12,18...; LCM = 12</a:t>
-            </a:r>
-            <a:endParaRPr lang="en-US" sz="1400" dirty="0"/>
-          </a:p>
-        </p:txBody>
-      </p:sp>
-      <p:sp>
-        <p:nvSpPr>
-          <p:cNvPr id="6" name="Shape 4"/>
-          <p:cNvSpPr/>
-          <p:nvPr/>
-        </p:nvSpPr>
-        <p:spPr>
-          <a:xfrm>
-            <a:off x="4846320" y="1188720"/>
-            <a:ext cx="3840480" cy="3474720"/>
-          </a:xfrm>
-          <a:prstGeom prst="rect">
-            <a:avLst/>
-          </a:prstGeom>
-          <a:solidFill>
-            <a:srgbClr val="FFFFFF"/>
-          </a:solidFill>
-          <a:ln w="12700">
-            <a:solidFill>
-              <a:srgbClr val="E5E2DC"/>
-            </a:solidFill>
-            <a:prstDash val="solid"/>
-          </a:ln>
+              <a:t>Every whole number &gt; 1 is either prime or can be written as a product of primes.</a:t>
+            </a:r>
+            <a:endParaRPr lang="en-US" sz="1500" dirty="0"/>
+          </a:p>
+        </p:txBody>
+      </p:sp>
+      <p:sp>
+        <p:nvSpPr>
+          <p:cNvPr id="7" name="Shape 5"/>
+          <p:cNvSpPr/>
+          <p:nvPr/>
+        </p:nvSpPr>
+        <p:spPr>
+          <a:xfrm>
+            <a:off x="731520" y="4206240"/>
+            <a:ext cx="7680960" cy="640080"/>
+          </a:xfrm>
+          <a:prstGeom prst="rect">
+            <a:avLst/>
+          </a:prstGeom>
+          <a:solidFill>
+            <a:srgbClr val="E8F5F3"/>
+          </a:solidFill>
+          <a:ln/>
           <a:effectLst>
             <a:outerShdw sx="100000" sy="100000" kx="0" ky="0" algn="bl" rotWithShape="0" blurRad="50800" dist="25400" dir="8100000">
               <a:srgbClr val="000000">
@@ -2446,34 +3362,14 @@
       </p:sp>
       <p:sp>
         <p:nvSpPr>
-          <p:cNvPr id="7" name="Shape 5"/>
-          <p:cNvSpPr/>
-          <p:nvPr/>
-        </p:nvSpPr>
-        <p:spPr>
-          <a:xfrm>
-            <a:off x="4846320" y="1188720"/>
-            <a:ext cx="3840480" cy="54864"/>
-          </a:xfrm>
-          <a:prstGeom prst="rect">
-            <a:avLst/>
-          </a:prstGeom>
-          <a:solidFill>
-            <a:srgbClr val="2A9D8F"/>
-          </a:solidFill>
-          <a:ln/>
-        </p:spPr>
-      </p:sp>
-      <p:sp>
-        <p:nvSpPr>
           <p:cNvPr id="8" name="Text 6"/>
           <p:cNvSpPr/>
           <p:nvPr/>
         </p:nvSpPr>
         <p:spPr>
           <a:xfrm>
-            <a:off x="5120640" y="1371600"/>
-            <a:ext cx="3291840" cy="3108960"/>
+            <a:off x="914400" y="4251960"/>
+            <a:ext cx="7315200" cy="548640"/>
           </a:xfrm>
           <a:prstGeom prst="rect">
             <a:avLst/>
@@ -2482,46 +3378,28 @@
           <a:ln/>
         </p:spPr>
         <p:txBody>
-          <a:bodyPr wrap="square" rtlCol="0" anchor="t"/>
+          <a:bodyPr wrap="square" rtlCol="0" anchor="ctr"/>
           <a:lstStyle/>
           <a:p>
             <a:pPr indent="0" marL="0">
-              <a:spcAft>
-                <a:spcPts val="400"/>
-              </a:spcAft>
               <a:buNone/>
             </a:pPr>
             <a:r>
-              <a:rPr lang="en-US" sz="1600" b="1" dirty="0">
-                <a:solidFill>
-                  <a:srgbClr val="1B2A4A"/>
+              <a:rPr lang="en-US" sz="1200" b="1" dirty="0">
+                <a:solidFill>
+                  <a:srgbClr val="2A9D8F"/>
                 </a:solidFill>
                 <a:latin typeface="Calibri" pitchFamily="34" charset="0"/>
                 <a:ea typeface="Calibri" pitchFamily="34" charset="-122"/>
                 <a:cs typeface="Calibri" pitchFamily="34" charset="-120"/>
               </a:rPr>
-              <a:t>Prime Factorisation</a:t>
-            </a:r>
-            <a:endParaRPr lang="en-US" sz="1600" dirty="0"/>
-          </a:p>
-          <a:p>
+              <a:t>Key Idea: </a:t>
+            </a:r>
             <a:pPr indent="0" marL="0">
-              <a:spcAft>
-                <a:spcPts val="400"/>
-              </a:spcAft>
               <a:buNone/>
             </a:pPr>
-            <a:endParaRPr lang="en-US" sz="1600" dirty="0"/>
-          </a:p>
-          <a:p>
-            <a:pPr indent="0" marL="0">
-              <a:spcAft>
-                <a:spcPts val="400"/>
-              </a:spcAft>
-              <a:buNone/>
-            </a:pPr>
-            <a:r>
-              <a:rPr lang="en-US" sz="1300" dirty="0">
+            <a:r>
+              <a:rPr lang="en-US" sz="1200" i="1" dirty="0">
                 <a:solidFill>
                   <a:srgbClr val="3D3A36"/>
                 </a:solidFill>
@@ -2529,109 +3407,9 @@
                 <a:ea typeface="Calibri" pitchFamily="34" charset="-122"/>
                 <a:cs typeface="Calibri" pitchFamily="34" charset="-120"/>
               </a:rPr>
-              <a:t>Breaking a number into its prime factors</a:t>
-            </a:r>
-            <a:endParaRPr lang="en-US" sz="1600" dirty="0"/>
-          </a:p>
-          <a:p>
-            <a:pPr indent="0" marL="0">
-              <a:spcAft>
-                <a:spcPts val="400"/>
-              </a:spcAft>
-              <a:buNone/>
-            </a:pPr>
-            <a:r>
-              <a:rPr lang="en-US" sz="1300" dirty="0">
-                <a:solidFill>
-                  <a:srgbClr val="3D3A36"/>
-                </a:solidFill>
-                <a:latin typeface="Calibri" pitchFamily="34" charset="0"/>
-                <a:ea typeface="Calibri" pitchFamily="34" charset="-122"/>
-                <a:cs typeface="Calibri" pitchFamily="34" charset="-120"/>
-              </a:rPr>
-              <a:t>Use a factor tree: 36 → 6 × 6 → 2×3 × 2×3 = 2² × 3²</a:t>
-            </a:r>
-            <a:endParaRPr lang="en-US" sz="1600" dirty="0"/>
-          </a:p>
-          <a:p>
-            <a:pPr indent="0" marL="0">
-              <a:spcAft>
-                <a:spcPts val="400"/>
-              </a:spcAft>
-              <a:buNone/>
-            </a:pPr>
-            <a:r>
-              <a:rPr lang="en-US" sz="1300" dirty="0">
-                <a:solidFill>
-                  <a:srgbClr val="3D3A36"/>
-                </a:solidFill>
-                <a:latin typeface="Calibri" pitchFamily="34" charset="0"/>
-                <a:ea typeface="Calibri" pitchFamily="34" charset="-122"/>
-                <a:cs typeface="Calibri" pitchFamily="34" charset="-120"/>
-              </a:rPr>
-              <a:t>Every composite number has a unique prime factorisation</a:t>
-            </a:r>
-            <a:endParaRPr lang="en-US" sz="1600" dirty="0"/>
-          </a:p>
-          <a:p>
-            <a:pPr indent="0" marL="0">
-              <a:spcAft>
-                <a:spcPts val="400"/>
-              </a:spcAft>
-              <a:buNone/>
-            </a:pPr>
-            <a:r>
-              <a:rPr lang="en-US" sz="1300" dirty="0">
-                <a:solidFill>
-                  <a:srgbClr val="3D3A36"/>
-                </a:solidFill>
-                <a:latin typeface="Calibri" pitchFamily="34" charset="0"/>
-                <a:ea typeface="Calibri" pitchFamily="34" charset="-122"/>
-                <a:cs typeface="Calibri" pitchFamily="34" charset="-120"/>
-              </a:rPr>
-              <a:t>Useful for finding HCF and LCM efficiently</a:t>
-            </a:r>
-            <a:endParaRPr lang="en-US" sz="1600" dirty="0"/>
-          </a:p>
-          <a:p>
-            <a:pPr indent="0" marL="0">
-              <a:spcAft>
-                <a:spcPts val="400"/>
-              </a:spcAft>
-              <a:buNone/>
-            </a:pPr>
-            <a:r>
-              <a:rPr lang="en-US" sz="1300" dirty="0">
-                <a:solidFill>
-                  <a:srgbClr val="3D3A36"/>
-                </a:solidFill>
-                <a:latin typeface="Calibri" pitchFamily="34" charset="0"/>
-                <a:ea typeface="Calibri" pitchFamily="34" charset="-122"/>
-                <a:cs typeface="Calibri" pitchFamily="34" charset="-120"/>
-              </a:rPr>
-              <a:t>HCF: use the lowest power of common primes</a:t>
-            </a:r>
-            <a:endParaRPr lang="en-US" sz="1600" dirty="0"/>
-          </a:p>
-          <a:p>
-            <a:pPr indent="0" marL="0">
-              <a:spcAft>
-                <a:spcPts val="400"/>
-              </a:spcAft>
-              <a:buNone/>
-            </a:pPr>
-            <a:r>
-              <a:rPr lang="en-US" sz="1300" dirty="0">
-                <a:solidFill>
-                  <a:srgbClr val="3D3A36"/>
-                </a:solidFill>
-                <a:latin typeface="Calibri" pitchFamily="34" charset="0"/>
-                <a:ea typeface="Calibri" pitchFamily="34" charset="-122"/>
-                <a:cs typeface="Calibri" pitchFamily="34" charset="-120"/>
-              </a:rPr>
-              <a:t>LCM: use the highest power of all primes</a:t>
-            </a:r>
-            <a:endParaRPr lang="en-US" sz="1600" dirty="0"/>
+              <a:t>There are infinitely many prime numbers — they go on forever.</a:t>
+            </a:r>
+            <a:endParaRPr lang="en-US" sz="1200" dirty="0"/>
           </a:p>
         </p:txBody>
       </p:sp>
@@ -2649,7 +3427,7 @@
     <p:bg>
       <p:bgPr>
         <a:solidFill>
-          <a:srgbClr val="1B2A4A"/>
+          <a:srgbClr val="FAF8F5"/>
         </a:solidFill>
       </p:bgPr>
     </p:bg>
@@ -2676,27 +3454,67 @@
         <p:spPr>
           <a:xfrm>
             <a:off x="0" y="0"/>
-            <a:ext cx="109728" cy="5143500"/>
-          </a:xfrm>
-          <a:prstGeom prst="rect">
-            <a:avLst/>
-          </a:prstGeom>
-          <a:solidFill>
-            <a:srgbClr val="E9C46A"/>
-          </a:solidFill>
-          <a:ln/>
-        </p:spPr>
-      </p:sp>
-      <p:sp>
-        <p:nvSpPr>
-          <p:cNvPr id="3" name="Text 1"/>
-          <p:cNvSpPr/>
-          <p:nvPr/>
-        </p:nvSpPr>
-        <p:spPr>
-          <a:xfrm>
-            <a:off x="731520" y="457200"/>
-            <a:ext cx="7772400" cy="731520"/>
+            <a:ext cx="9144000" cy="822960"/>
+          </a:xfrm>
+          <a:prstGeom prst="rect">
+            <a:avLst/>
+          </a:prstGeom>
+          <a:solidFill>
+            <a:srgbClr val="FFFFFF"/>
+          </a:solidFill>
+          <a:ln/>
+        </p:spPr>
+      </p:sp>
+      <p:sp>
+        <p:nvSpPr>
+          <p:cNvPr id="3" name="Shape 1"/>
+          <p:cNvSpPr/>
+          <p:nvPr/>
+        </p:nvSpPr>
+        <p:spPr>
+          <a:xfrm>
+            <a:off x="0" y="804672"/>
+            <a:ext cx="9144000" cy="27432"/>
+          </a:xfrm>
+          <a:prstGeom prst="rect">
+            <a:avLst/>
+          </a:prstGeom>
+          <a:solidFill>
+            <a:srgbClr val="E5E2DC"/>
+          </a:solidFill>
+          <a:ln/>
+        </p:spPr>
+      </p:sp>
+      <p:sp>
+        <p:nvSpPr>
+          <p:cNvPr id="4" name="Shape 2"/>
+          <p:cNvSpPr/>
+          <p:nvPr/>
+        </p:nvSpPr>
+        <p:spPr>
+          <a:xfrm>
+            <a:off x="548640" y="201168"/>
+            <a:ext cx="54864" cy="420624"/>
+          </a:xfrm>
+          <a:prstGeom prst="rect">
+            <a:avLst/>
+          </a:prstGeom>
+          <a:solidFill>
+            <a:srgbClr val="2A9D8F"/>
+          </a:solidFill>
+          <a:ln/>
+        </p:spPr>
+      </p:sp>
+      <p:sp>
+        <p:nvSpPr>
+          <p:cNvPr id="5" name="Text 3"/>
+          <p:cNvSpPr/>
+          <p:nvPr/>
+        </p:nvSpPr>
+        <p:spPr>
+          <a:xfrm>
+            <a:off x="777240" y="137160"/>
+            <a:ext cx="7772400" cy="548640"/>
           </a:xfrm>
           <a:prstGeom prst="rect">
             <a:avLst/>
@@ -2705,37 +3523,37 @@
           <a:ln/>
         </p:spPr>
         <p:txBody>
-          <a:bodyPr wrap="square" rtlCol="0" anchor="ctr"/>
+          <a:bodyPr wrap="square" lIns="0" tIns="0" rIns="0" bIns="0" rtlCol="0" anchor="ctr"/>
           <a:lstStyle/>
           <a:p>
             <a:pPr indent="0" marL="0">
               <a:buNone/>
             </a:pPr>
             <a:r>
-              <a:rPr lang="en-US" sz="3200" b="1" dirty="0">
-                <a:solidFill>
-                  <a:srgbClr val="FFFFFF"/>
+              <a:rPr lang="en-US" sz="2000" b="1" dirty="0">
+                <a:solidFill>
+                  <a:srgbClr val="1B2A4A"/>
                 </a:solidFill>
                 <a:latin typeface="Georgia" pitchFamily="34" charset="0"/>
                 <a:ea typeface="Georgia" pitchFamily="34" charset="-122"/>
                 <a:cs typeface="Georgia" pitchFamily="34" charset="-120"/>
               </a:rPr>
-              <a:t>Key Takeaways</a:t>
-            </a:r>
-            <a:endParaRPr lang="en-US" sz="3200" dirty="0"/>
-          </a:p>
-        </p:txBody>
-      </p:sp>
-      <p:sp>
-        <p:nvSpPr>
-          <p:cNvPr id="4" name="Text 2"/>
-          <p:cNvSpPr/>
-          <p:nvPr/>
-        </p:nvSpPr>
-        <p:spPr>
-          <a:xfrm>
-            <a:off x="731520" y="1463040"/>
-            <a:ext cx="7772400" cy="3200400"/>
+              <a:t>HCF and LCM</a:t>
+            </a:r>
+            <a:endParaRPr lang="en-US" sz="2000" dirty="0"/>
+          </a:p>
+        </p:txBody>
+      </p:sp>
+      <p:sp>
+        <p:nvSpPr>
+          <p:cNvPr id="6" name="Text 4"/>
+          <p:cNvSpPr/>
+          <p:nvPr/>
+        </p:nvSpPr>
+        <p:spPr>
+          <a:xfrm>
+            <a:off x="731520" y="1051560"/>
+            <a:ext cx="7680960" cy="3108960"/>
           </a:xfrm>
           <a:prstGeom prst="rect">
             <a:avLst/>
@@ -2749,7 +3567,7 @@
           <a:p>
             <a:pPr marL="342900" indent="-342900">
               <a:spcAft>
-                <a:spcPts val="1000"/>
+                <a:spcPts val="800"/>
               </a:spcAft>
               <a:buSzPct val="100000"/>
               <a:buChar char="•"/>
@@ -2757,20 +3575,20 @@
             <a:r>
               <a:rPr lang="en-US" sz="1500" dirty="0">
                 <a:solidFill>
-                  <a:srgbClr val="CADCFC"/>
+                  <a:srgbClr val="3D3A36"/>
                 </a:solidFill>
                 <a:latin typeface="Calibri" pitchFamily="34" charset="0"/>
                 <a:ea typeface="Calibri" pitchFamily="34" charset="-122"/>
                 <a:cs typeface="Calibri" pitchFamily="34" charset="-120"/>
               </a:rPr>
-              <a:t>Factors: divide exactly into a number. Multiples: times table results</a:t>
+              <a:t>HCF (Highest Common Factor): the LARGEST factor shared by two numbers.</a:t>
             </a:r>
             <a:endParaRPr lang="en-US" sz="1500" dirty="0"/>
           </a:p>
           <a:p>
             <a:pPr marL="342900" indent="-342900">
               <a:spcAft>
-                <a:spcPts val="1000"/>
+                <a:spcPts val="800"/>
               </a:spcAft>
               <a:buSzPct val="100000"/>
               <a:buChar char="•"/>
@@ -2778,20 +3596,20 @@
             <a:r>
               <a:rPr lang="en-US" sz="1500" dirty="0">
                 <a:solidFill>
-                  <a:srgbClr val="CADCFC"/>
+                  <a:srgbClr val="3D3A36"/>
                 </a:solidFill>
                 <a:latin typeface="Calibri" pitchFamily="34" charset="0"/>
                 <a:ea typeface="Calibri" pitchFamily="34" charset="-122"/>
                 <a:cs typeface="Calibri" pitchFamily="34" charset="-120"/>
               </a:rPr>
-              <a:t>Prime: exactly two factors (1 and itself). 1 is NOT prime</a:t>
+              <a:t>HCF of 12 and 18: Factors of 12 = {1,2,3,4,6,12}, Factors of 18 = {1,2,3,6,9,18} → HCF = 6.</a:t>
             </a:r>
             <a:endParaRPr lang="en-US" sz="1500" dirty="0"/>
           </a:p>
           <a:p>
             <a:pPr marL="342900" indent="-342900">
               <a:spcAft>
-                <a:spcPts val="1000"/>
+                <a:spcPts val="800"/>
               </a:spcAft>
               <a:buSzPct val="100000"/>
               <a:buChar char="•"/>
@@ -2799,20 +3617,20 @@
             <a:r>
               <a:rPr lang="en-US" sz="1500" dirty="0">
                 <a:solidFill>
-                  <a:srgbClr val="CADCFC"/>
+                  <a:srgbClr val="3D3A36"/>
                 </a:solidFill>
                 <a:latin typeface="Calibri" pitchFamily="34" charset="0"/>
                 <a:ea typeface="Calibri" pitchFamily="34" charset="-122"/>
                 <a:cs typeface="Calibri" pitchFamily="34" charset="-120"/>
               </a:rPr>
-              <a:t>HCF: highest common factor — largest shared factor</a:t>
+              <a:t>LCM (Lowest Common Multiple): the SMALLEST multiple shared by two numbers.</a:t>
             </a:r>
             <a:endParaRPr lang="en-US" sz="1500" dirty="0"/>
           </a:p>
           <a:p>
             <a:pPr marL="342900" indent="-342900">
               <a:spcAft>
-                <a:spcPts val="1000"/>
+                <a:spcPts val="800"/>
               </a:spcAft>
               <a:buSzPct val="100000"/>
               <a:buChar char="•"/>
@@ -2820,20 +3638,20 @@
             <a:r>
               <a:rPr lang="en-US" sz="1500" dirty="0">
                 <a:solidFill>
-                  <a:srgbClr val="CADCFC"/>
+                  <a:srgbClr val="3D3A36"/>
                 </a:solidFill>
                 <a:latin typeface="Calibri" pitchFamily="34" charset="0"/>
                 <a:ea typeface="Calibri" pitchFamily="34" charset="-122"/>
                 <a:cs typeface="Calibri" pitchFamily="34" charset="-120"/>
               </a:rPr>
-              <a:t>LCM: lowest common multiple — smallest shared multiple</a:t>
+              <a:t>LCM of 4 and 6: Multiples of 4 = {4,8,12,16...}, Multiples of 6 = {6,12,18...} → LCM = 12.</a:t>
             </a:r>
             <a:endParaRPr lang="en-US" sz="1500" dirty="0"/>
           </a:p>
           <a:p>
             <a:pPr marL="342900" indent="-342900">
               <a:spcAft>
-                <a:spcPts val="1000"/>
+                <a:spcPts val="800"/>
               </a:spcAft>
               <a:buSzPct val="100000"/>
               <a:buChar char="•"/>
@@ -2841,18 +3659,110 @@
             <a:r>
               <a:rPr lang="en-US" sz="1500" dirty="0">
                 <a:solidFill>
-                  <a:srgbClr val="CADCFC"/>
+                  <a:srgbClr val="3D3A36"/>
                 </a:solidFill>
                 <a:latin typeface="Calibri" pitchFamily="34" charset="0"/>
                 <a:ea typeface="Calibri" pitchFamily="34" charset="-122"/>
                 <a:cs typeface="Calibri" pitchFamily="34" charset="-120"/>
               </a:rPr>
-              <a:t>Prime factorisation: breaking a number into prime factors using factor trees</a:t>
+              <a:t>HCF is useful for simplifying fractions. LCM is useful for adding fractions.</a:t>
             </a:r>
             <a:endParaRPr lang="en-US" sz="1500" dirty="0"/>
           </a:p>
         </p:txBody>
       </p:sp>
+    </p:spTree>
+  </p:cSld>
+  <p:clrMapOvr>
+    <a:masterClrMapping/>
+  </p:clrMapOvr>
+</p:sld>
+</file>
+
+<file path=ppt/slides/slide6.xml><?xml version="1.0" encoding="utf-8"?>
+<p:sld xmlns:a="http://schemas.openxmlformats.org/drawingml/2006/main" xmlns:r="http://schemas.openxmlformats.org/officeDocument/2006/relationships" xmlns:p="http://schemas.openxmlformats.org/presentationml/2006/main">
+  <p:cSld name="Slide 6">
+    <p:bg>
+      <p:bgPr>
+        <a:solidFill>
+          <a:srgbClr val="FAF8F5"/>
+        </a:solidFill>
+      </p:bgPr>
+    </p:bg>
+    <p:spTree>
+      <p:nvGrpSpPr>
+        <p:cNvPr id="1" name=""/>
+        <p:cNvGrpSpPr/>
+        <p:nvPr/>
+      </p:nvGrpSpPr>
+      <p:grpSpPr>
+        <a:xfrm>
+          <a:off x="0" y="0"/>
+          <a:ext cx="0" cy="0"/>
+          <a:chOff x="0" y="0"/>
+          <a:chExt cx="0" cy="0"/>
+        </a:xfrm>
+      </p:grpSpPr>
+      <p:sp>
+        <p:nvSpPr>
+          <p:cNvPr id="2" name="Shape 0"/>
+          <p:cNvSpPr/>
+          <p:nvPr/>
+        </p:nvSpPr>
+        <p:spPr>
+          <a:xfrm>
+            <a:off x="0" y="0"/>
+            <a:ext cx="9144000" cy="822960"/>
+          </a:xfrm>
+          <a:prstGeom prst="rect">
+            <a:avLst/>
+          </a:prstGeom>
+          <a:solidFill>
+            <a:srgbClr val="FFFFFF"/>
+          </a:solidFill>
+          <a:ln/>
+        </p:spPr>
+      </p:sp>
+      <p:sp>
+        <p:nvSpPr>
+          <p:cNvPr id="3" name="Shape 1"/>
+          <p:cNvSpPr/>
+          <p:nvPr/>
+        </p:nvSpPr>
+        <p:spPr>
+          <a:xfrm>
+            <a:off x="0" y="804672"/>
+            <a:ext cx="9144000" cy="27432"/>
+          </a:xfrm>
+          <a:prstGeom prst="rect">
+            <a:avLst/>
+          </a:prstGeom>
+          <a:solidFill>
+            <a:srgbClr val="E5E2DC"/>
+          </a:solidFill>
+          <a:ln/>
+        </p:spPr>
+      </p:sp>
+      <p:sp>
+        <p:nvSpPr>
+          <p:cNvPr id="4" name="Shape 2"/>
+          <p:cNvSpPr/>
+          <p:nvPr/>
+        </p:nvSpPr>
+        <p:spPr>
+          <a:xfrm>
+            <a:off x="548640" y="201168"/>
+            <a:ext cx="54864" cy="420624"/>
+          </a:xfrm>
+          <a:prstGeom prst="rect">
+            <a:avLst/>
+          </a:prstGeom>
+          <a:solidFill>
+            <a:srgbClr val="2A9D8F"/>
+          </a:solidFill>
+          <a:ln/>
+        </p:spPr>
+      </p:sp>
       <p:sp>
         <p:nvSpPr>
           <p:cNvPr id="5" name="Text 3"/>
@@ -2861,8 +3771,8 @@
         </p:nvSpPr>
         <p:spPr>
           <a:xfrm>
-            <a:off x="731520" y="4572000"/>
-            <a:ext cx="7772400" cy="365760"/>
+            <a:off x="777240" y="137160"/>
+            <a:ext cx="7772400" cy="548640"/>
           </a:xfrm>
           <a:prstGeom prst="rect">
             <a:avLst/>
@@ -2871,24 +3781,783 @@
           <a:ln/>
         </p:spPr>
         <p:txBody>
-          <a:bodyPr wrap="square" rtlCol="0" anchor="ctr"/>
+          <a:bodyPr wrap="square" lIns="0" tIns="0" rIns="0" bIns="0" rtlCol="0" anchor="ctr"/>
           <a:lstStyle/>
           <a:p>
             <a:pPr indent="0" marL="0">
               <a:buNone/>
             </a:pPr>
             <a:r>
-              <a:rPr lang="en-US" sz="1100" dirty="0">
-                <a:solidFill>
-                  <a:srgbClr val="E9C46A"/>
+              <a:rPr lang="en-US" sz="2000" b="1" dirty="0">
+                <a:solidFill>
+                  <a:srgbClr val="1B2A4A"/>
+                </a:solidFill>
+                <a:latin typeface="Georgia" pitchFamily="34" charset="0"/>
+                <a:ea typeface="Georgia" pitchFamily="34" charset="-122"/>
+                <a:cs typeface="Georgia" pitchFamily="34" charset="-120"/>
+              </a:rPr>
+              <a:t>Check Your Understanding</a:t>
+            </a:r>
+            <a:endParaRPr lang="en-US" sz="2000" dirty="0"/>
+          </a:p>
+        </p:txBody>
+      </p:sp>
+      <p:sp>
+        <p:nvSpPr>
+          <p:cNvPr id="6" name="Shape 4"/>
+          <p:cNvSpPr/>
+          <p:nvPr/>
+        </p:nvSpPr>
+        <p:spPr>
+          <a:xfrm>
+            <a:off x="731520" y="1051560"/>
+            <a:ext cx="7680960" cy="438912"/>
+          </a:xfrm>
+          <a:prstGeom prst="rect">
+            <a:avLst/>
+          </a:prstGeom>
+          <a:solidFill>
+            <a:srgbClr val="FFFFFF"/>
+          </a:solidFill>
+          <a:ln/>
+        </p:spPr>
+      </p:sp>
+      <p:sp>
+        <p:nvSpPr>
+          <p:cNvPr id="7" name="Text 5"/>
+          <p:cNvSpPr/>
+          <p:nvPr/>
+        </p:nvSpPr>
+        <p:spPr>
+          <a:xfrm>
+            <a:off x="868680" y="1051560"/>
+            <a:ext cx="320040" cy="438912"/>
+          </a:xfrm>
+          <a:prstGeom prst="rect">
+            <a:avLst/>
+          </a:prstGeom>
+          <a:noFill/>
+          <a:ln/>
+        </p:spPr>
+        <p:txBody>
+          <a:bodyPr wrap="square" rtlCol="0" anchor="ctr"/>
+          <a:lstStyle/>
+          <a:p>
+            <a:pPr indent="0" marL="0">
+              <a:buNone/>
+            </a:pPr>
+            <a:r>
+              <a:rPr lang="en-US" sz="1400" dirty="0">
+                <a:solidFill>
+                  <a:srgbClr val="2A9D8F"/>
+                </a:solidFill>
+              </a:rPr>
+              <a:t>☐</a:t>
+            </a:r>
+            <a:endParaRPr lang="en-US" sz="1400" dirty="0"/>
+          </a:p>
+        </p:txBody>
+      </p:sp>
+      <p:sp>
+        <p:nvSpPr>
+          <p:cNvPr id="8" name="Text 6"/>
+          <p:cNvSpPr/>
+          <p:nvPr/>
+        </p:nvSpPr>
+        <p:spPr>
+          <a:xfrm>
+            <a:off x="1234440" y="1051560"/>
+            <a:ext cx="6949440" cy="438912"/>
+          </a:xfrm>
+          <a:prstGeom prst="rect">
+            <a:avLst/>
+          </a:prstGeom>
+          <a:noFill/>
+          <a:ln/>
+        </p:spPr>
+        <p:txBody>
+          <a:bodyPr wrap="square" rtlCol="0" anchor="ctr"/>
+          <a:lstStyle/>
+          <a:p>
+            <a:pPr indent="0" marL="0">
+              <a:buNone/>
+            </a:pPr>
+            <a:r>
+              <a:rPr lang="en-US" sz="1300" dirty="0">
+                <a:solidFill>
+                  <a:srgbClr val="3D3A36"/>
                 </a:solidFill>
                 <a:latin typeface="Calibri" pitchFamily="34" charset="0"/>
                 <a:ea typeface="Calibri" pitchFamily="34" charset="-122"/>
                 <a:cs typeface="Calibri" pitchFamily="34" charset="-120"/>
               </a:rPr>
+              <a:t>I can find all factors of a number</a:t>
+            </a:r>
+            <a:endParaRPr lang="en-US" sz="1300" dirty="0"/>
+          </a:p>
+        </p:txBody>
+      </p:sp>
+      <p:sp>
+        <p:nvSpPr>
+          <p:cNvPr id="9" name="Shape 7"/>
+          <p:cNvSpPr/>
+          <p:nvPr/>
+        </p:nvSpPr>
+        <p:spPr>
+          <a:xfrm>
+            <a:off x="731520" y="1554480"/>
+            <a:ext cx="7680960" cy="438912"/>
+          </a:xfrm>
+          <a:prstGeom prst="rect">
+            <a:avLst/>
+          </a:prstGeom>
+          <a:solidFill>
+            <a:srgbClr val="F8F6F3"/>
+          </a:solidFill>
+          <a:ln/>
+        </p:spPr>
+      </p:sp>
+      <p:sp>
+        <p:nvSpPr>
+          <p:cNvPr id="10" name="Text 8"/>
+          <p:cNvSpPr/>
+          <p:nvPr/>
+        </p:nvSpPr>
+        <p:spPr>
+          <a:xfrm>
+            <a:off x="868680" y="1554480"/>
+            <a:ext cx="320040" cy="438912"/>
+          </a:xfrm>
+          <a:prstGeom prst="rect">
+            <a:avLst/>
+          </a:prstGeom>
+          <a:noFill/>
+          <a:ln/>
+        </p:spPr>
+        <p:txBody>
+          <a:bodyPr wrap="square" rtlCol="0" anchor="ctr"/>
+          <a:lstStyle/>
+          <a:p>
+            <a:pPr indent="0" marL="0">
+              <a:buNone/>
+            </a:pPr>
+            <a:r>
+              <a:rPr lang="en-US" sz="1400" dirty="0">
+                <a:solidFill>
+                  <a:srgbClr val="2A9D8F"/>
+                </a:solidFill>
+              </a:rPr>
+              <a:t>☐</a:t>
+            </a:r>
+            <a:endParaRPr lang="en-US" sz="1400" dirty="0"/>
+          </a:p>
+        </p:txBody>
+      </p:sp>
+      <p:sp>
+        <p:nvSpPr>
+          <p:cNvPr id="11" name="Text 9"/>
+          <p:cNvSpPr/>
+          <p:nvPr/>
+        </p:nvSpPr>
+        <p:spPr>
+          <a:xfrm>
+            <a:off x="1234440" y="1554480"/>
+            <a:ext cx="6949440" cy="438912"/>
+          </a:xfrm>
+          <a:prstGeom prst="rect">
+            <a:avLst/>
+          </a:prstGeom>
+          <a:noFill/>
+          <a:ln/>
+        </p:spPr>
+        <p:txBody>
+          <a:bodyPr wrap="square" rtlCol="0" anchor="ctr"/>
+          <a:lstStyle/>
+          <a:p>
+            <a:pPr indent="0" marL="0">
+              <a:buNone/>
+            </a:pPr>
+            <a:r>
+              <a:rPr lang="en-US" sz="1300" dirty="0">
+                <a:solidFill>
+                  <a:srgbClr val="3D3A36"/>
+                </a:solidFill>
+                <a:latin typeface="Calibri" pitchFamily="34" charset="0"/>
+                <a:ea typeface="Calibri" pitchFamily="34" charset="-122"/>
+                <a:cs typeface="Calibri" pitchFamily="34" charset="-120"/>
+              </a:rPr>
+              <a:t>I can list multiples of a number</a:t>
+            </a:r>
+            <a:endParaRPr lang="en-US" sz="1300" dirty="0"/>
+          </a:p>
+        </p:txBody>
+      </p:sp>
+      <p:sp>
+        <p:nvSpPr>
+          <p:cNvPr id="12" name="Shape 10"/>
+          <p:cNvSpPr/>
+          <p:nvPr/>
+        </p:nvSpPr>
+        <p:spPr>
+          <a:xfrm>
+            <a:off x="731520" y="2057400"/>
+            <a:ext cx="7680960" cy="438912"/>
+          </a:xfrm>
+          <a:prstGeom prst="rect">
+            <a:avLst/>
+          </a:prstGeom>
+          <a:solidFill>
+            <a:srgbClr val="FFFFFF"/>
+          </a:solidFill>
+          <a:ln/>
+        </p:spPr>
+      </p:sp>
+      <p:sp>
+        <p:nvSpPr>
+          <p:cNvPr id="13" name="Text 11"/>
+          <p:cNvSpPr/>
+          <p:nvPr/>
+        </p:nvSpPr>
+        <p:spPr>
+          <a:xfrm>
+            <a:off x="868680" y="2057400"/>
+            <a:ext cx="320040" cy="438912"/>
+          </a:xfrm>
+          <a:prstGeom prst="rect">
+            <a:avLst/>
+          </a:prstGeom>
+          <a:noFill/>
+          <a:ln/>
+        </p:spPr>
+        <p:txBody>
+          <a:bodyPr wrap="square" rtlCol="0" anchor="ctr"/>
+          <a:lstStyle/>
+          <a:p>
+            <a:pPr indent="0" marL="0">
+              <a:buNone/>
+            </a:pPr>
+            <a:r>
+              <a:rPr lang="en-US" sz="1400" dirty="0">
+                <a:solidFill>
+                  <a:srgbClr val="2A9D8F"/>
+                </a:solidFill>
+              </a:rPr>
+              <a:t>☐</a:t>
+            </a:r>
+            <a:endParaRPr lang="en-US" sz="1400" dirty="0"/>
+          </a:p>
+        </p:txBody>
+      </p:sp>
+      <p:sp>
+        <p:nvSpPr>
+          <p:cNvPr id="14" name="Text 12"/>
+          <p:cNvSpPr/>
+          <p:nvPr/>
+        </p:nvSpPr>
+        <p:spPr>
+          <a:xfrm>
+            <a:off x="1234440" y="2057400"/>
+            <a:ext cx="6949440" cy="438912"/>
+          </a:xfrm>
+          <a:prstGeom prst="rect">
+            <a:avLst/>
+          </a:prstGeom>
+          <a:noFill/>
+          <a:ln/>
+        </p:spPr>
+        <p:txBody>
+          <a:bodyPr wrap="square" rtlCol="0" anchor="ctr"/>
+          <a:lstStyle/>
+          <a:p>
+            <a:pPr indent="0" marL="0">
+              <a:buNone/>
+            </a:pPr>
+            <a:r>
+              <a:rPr lang="en-US" sz="1300" dirty="0">
+                <a:solidFill>
+                  <a:srgbClr val="3D3A36"/>
+                </a:solidFill>
+                <a:latin typeface="Calibri" pitchFamily="34" charset="0"/>
+                <a:ea typeface="Calibri" pitchFamily="34" charset="-122"/>
+                <a:cs typeface="Calibri" pitchFamily="34" charset="-120"/>
+              </a:rPr>
+              <a:t>I can identify prime numbers</a:t>
+            </a:r>
+            <a:endParaRPr lang="en-US" sz="1300" dirty="0"/>
+          </a:p>
+        </p:txBody>
+      </p:sp>
+      <p:sp>
+        <p:nvSpPr>
+          <p:cNvPr id="15" name="Shape 13"/>
+          <p:cNvSpPr/>
+          <p:nvPr/>
+        </p:nvSpPr>
+        <p:spPr>
+          <a:xfrm>
+            <a:off x="731520" y="2560320"/>
+            <a:ext cx="7680960" cy="438912"/>
+          </a:xfrm>
+          <a:prstGeom prst="rect">
+            <a:avLst/>
+          </a:prstGeom>
+          <a:solidFill>
+            <a:srgbClr val="F8F6F3"/>
+          </a:solidFill>
+          <a:ln/>
+        </p:spPr>
+      </p:sp>
+      <p:sp>
+        <p:nvSpPr>
+          <p:cNvPr id="16" name="Text 14"/>
+          <p:cNvSpPr/>
+          <p:nvPr/>
+        </p:nvSpPr>
+        <p:spPr>
+          <a:xfrm>
+            <a:off x="868680" y="2560320"/>
+            <a:ext cx="320040" cy="438912"/>
+          </a:xfrm>
+          <a:prstGeom prst="rect">
+            <a:avLst/>
+          </a:prstGeom>
+          <a:noFill/>
+          <a:ln/>
+        </p:spPr>
+        <p:txBody>
+          <a:bodyPr wrap="square" rtlCol="0" anchor="ctr"/>
+          <a:lstStyle/>
+          <a:p>
+            <a:pPr indent="0" marL="0">
+              <a:buNone/>
+            </a:pPr>
+            <a:r>
+              <a:rPr lang="en-US" sz="1400" dirty="0">
+                <a:solidFill>
+                  <a:srgbClr val="2A9D8F"/>
+                </a:solidFill>
+              </a:rPr>
+              <a:t>☐</a:t>
+            </a:r>
+            <a:endParaRPr lang="en-US" sz="1400" dirty="0"/>
+          </a:p>
+        </p:txBody>
+      </p:sp>
+      <p:sp>
+        <p:nvSpPr>
+          <p:cNvPr id="17" name="Text 15"/>
+          <p:cNvSpPr/>
+          <p:nvPr/>
+        </p:nvSpPr>
+        <p:spPr>
+          <a:xfrm>
+            <a:off x="1234440" y="2560320"/>
+            <a:ext cx="6949440" cy="438912"/>
+          </a:xfrm>
+          <a:prstGeom prst="rect">
+            <a:avLst/>
+          </a:prstGeom>
+          <a:noFill/>
+          <a:ln/>
+        </p:spPr>
+        <p:txBody>
+          <a:bodyPr wrap="square" rtlCol="0" anchor="ctr"/>
+          <a:lstStyle/>
+          <a:p>
+            <a:pPr indent="0" marL="0">
+              <a:buNone/>
+            </a:pPr>
+            <a:r>
+              <a:rPr lang="en-US" sz="1300" dirty="0">
+                <a:solidFill>
+                  <a:srgbClr val="3D3A36"/>
+                </a:solidFill>
+                <a:latin typeface="Calibri" pitchFamily="34" charset="0"/>
+                <a:ea typeface="Calibri" pitchFamily="34" charset="-122"/>
+                <a:cs typeface="Calibri" pitchFamily="34" charset="-120"/>
+              </a:rPr>
+              <a:t>I can find the HCF of two numbers</a:t>
+            </a:r>
+            <a:endParaRPr lang="en-US" sz="1300" dirty="0"/>
+          </a:p>
+        </p:txBody>
+      </p:sp>
+      <p:sp>
+        <p:nvSpPr>
+          <p:cNvPr id="18" name="Shape 16"/>
+          <p:cNvSpPr/>
+          <p:nvPr/>
+        </p:nvSpPr>
+        <p:spPr>
+          <a:xfrm>
+            <a:off x="731520" y="3063240"/>
+            <a:ext cx="7680960" cy="438912"/>
+          </a:xfrm>
+          <a:prstGeom prst="rect">
+            <a:avLst/>
+          </a:prstGeom>
+          <a:solidFill>
+            <a:srgbClr val="FFFFFF"/>
+          </a:solidFill>
+          <a:ln/>
+        </p:spPr>
+      </p:sp>
+      <p:sp>
+        <p:nvSpPr>
+          <p:cNvPr id="19" name="Text 17"/>
+          <p:cNvSpPr/>
+          <p:nvPr/>
+        </p:nvSpPr>
+        <p:spPr>
+          <a:xfrm>
+            <a:off x="868680" y="3063240"/>
+            <a:ext cx="320040" cy="438912"/>
+          </a:xfrm>
+          <a:prstGeom prst="rect">
+            <a:avLst/>
+          </a:prstGeom>
+          <a:noFill/>
+          <a:ln/>
+        </p:spPr>
+        <p:txBody>
+          <a:bodyPr wrap="square" rtlCol="0" anchor="ctr"/>
+          <a:lstStyle/>
+          <a:p>
+            <a:pPr indent="0" marL="0">
+              <a:buNone/>
+            </a:pPr>
+            <a:r>
+              <a:rPr lang="en-US" sz="1400" dirty="0">
+                <a:solidFill>
+                  <a:srgbClr val="2A9D8F"/>
+                </a:solidFill>
+              </a:rPr>
+              <a:t>☐</a:t>
+            </a:r>
+            <a:endParaRPr lang="en-US" sz="1400" dirty="0"/>
+          </a:p>
+        </p:txBody>
+      </p:sp>
+      <p:sp>
+        <p:nvSpPr>
+          <p:cNvPr id="20" name="Text 18"/>
+          <p:cNvSpPr/>
+          <p:nvPr/>
+        </p:nvSpPr>
+        <p:spPr>
+          <a:xfrm>
+            <a:off x="1234440" y="3063240"/>
+            <a:ext cx="6949440" cy="438912"/>
+          </a:xfrm>
+          <a:prstGeom prst="rect">
+            <a:avLst/>
+          </a:prstGeom>
+          <a:noFill/>
+          <a:ln/>
+        </p:spPr>
+        <p:txBody>
+          <a:bodyPr wrap="square" rtlCol="0" anchor="ctr"/>
+          <a:lstStyle/>
+          <a:p>
+            <a:pPr indent="0" marL="0">
+              <a:buNone/>
+            </a:pPr>
+            <a:r>
+              <a:rPr lang="en-US" sz="1300" dirty="0">
+                <a:solidFill>
+                  <a:srgbClr val="3D3A36"/>
+                </a:solidFill>
+                <a:latin typeface="Calibri" pitchFamily="34" charset="0"/>
+                <a:ea typeface="Calibri" pitchFamily="34" charset="-122"/>
+                <a:cs typeface="Calibri" pitchFamily="34" charset="-120"/>
+              </a:rPr>
+              <a:t>I can find the LCM of two numbers</a:t>
+            </a:r>
+            <a:endParaRPr lang="en-US" sz="1300" dirty="0"/>
+          </a:p>
+        </p:txBody>
+      </p:sp>
+      <p:sp>
+        <p:nvSpPr>
+          <p:cNvPr id="21" name="Shape 19"/>
+          <p:cNvSpPr/>
+          <p:nvPr/>
+        </p:nvSpPr>
+        <p:spPr>
+          <a:xfrm>
+            <a:off x="731520" y="3749040"/>
+            <a:ext cx="7680960" cy="594360"/>
+          </a:xfrm>
+          <a:prstGeom prst="rect">
+            <a:avLst/>
+          </a:prstGeom>
+          <a:solidFill>
+            <a:srgbClr val="E8F5F3"/>
+          </a:solidFill>
+          <a:ln/>
+          <a:effectLst>
+            <a:outerShdw sx="100000" sy="100000" kx="0" ky="0" algn="bl" rotWithShape="0" blurRad="50800" dist="25400" dir="8100000">
+              <a:srgbClr val="000000">
+                <a:alpha val="10000"/>
+              </a:srgbClr>
+            </a:outerShdw>
+          </a:effectLst>
+        </p:spPr>
+      </p:sp>
+      <p:sp>
+        <p:nvSpPr>
+          <p:cNvPr id="22" name="Text 20"/>
+          <p:cNvSpPr/>
+          <p:nvPr/>
+        </p:nvSpPr>
+        <p:spPr>
+          <a:xfrm>
+            <a:off x="914400" y="3749040"/>
+            <a:ext cx="7315200" cy="594360"/>
+          </a:xfrm>
+          <a:prstGeom prst="rect">
+            <a:avLst/>
+          </a:prstGeom>
+          <a:noFill/>
+          <a:ln/>
+        </p:spPr>
+        <p:txBody>
+          <a:bodyPr wrap="square" rtlCol="0" anchor="ctr"/>
+          <a:lstStyle/>
+          <a:p>
+            <a:pPr indent="0" marL="0">
+              <a:buNone/>
+            </a:pPr>
+            <a:r>
+              <a:rPr lang="en-US" sz="1200" b="1" dirty="0">
+                <a:solidFill>
+                  <a:srgbClr val="2A9D8F"/>
+                </a:solidFill>
+                <a:latin typeface="Calibri" pitchFamily="34" charset="0"/>
+                <a:ea typeface="Calibri" pitchFamily="34" charset="-122"/>
+                <a:cs typeface="Calibri" pitchFamily="34" charset="-120"/>
+              </a:rPr>
+              <a:t>Key Idea: </a:t>
+            </a:r>
+            <a:pPr indent="0" marL="0">
+              <a:buNone/>
+            </a:pPr>
+            <a:r>
+              <a:rPr lang="en-US" sz="1200" i="1" dirty="0">
+                <a:solidFill>
+                  <a:srgbClr val="3D3A36"/>
+                </a:solidFill>
+                <a:latin typeface="Calibri" pitchFamily="34" charset="0"/>
+                <a:ea typeface="Calibri" pitchFamily="34" charset="-122"/>
+                <a:cs typeface="Calibri" pitchFamily="34" charset="-120"/>
+              </a:rPr>
+              <a:t>Factors divide IN, multiples multiply OUT, primes have exactly 2 factors.</a:t>
+            </a:r>
+            <a:endParaRPr lang="en-US" sz="1200" dirty="0"/>
+          </a:p>
+        </p:txBody>
+      </p:sp>
+    </p:spTree>
+  </p:cSld>
+  <p:clrMapOvr>
+    <a:masterClrMapping/>
+  </p:clrMapOvr>
+</p:sld>
+</file>
+
+<file path=ppt/slides/slide7.xml><?xml version="1.0" encoding="utf-8"?>
+<p:sld xmlns:a="http://schemas.openxmlformats.org/drawingml/2006/main" xmlns:r="http://schemas.openxmlformats.org/officeDocument/2006/relationships" xmlns:p="http://schemas.openxmlformats.org/presentationml/2006/main">
+  <p:cSld name="Slide 7">
+    <p:spTree>
+      <p:nvGrpSpPr>
+        <p:cNvPr id="1" name=""/>
+        <p:cNvGrpSpPr/>
+        <p:nvPr/>
+      </p:nvGrpSpPr>
+      <p:grpSpPr>
+        <a:xfrm>
+          <a:off x="0" y="0"/>
+          <a:ext cx="0" cy="0"/>
+          <a:chOff x="0" y="0"/>
+          <a:chExt cx="0" cy="0"/>
+        </a:xfrm>
+      </p:grpSpPr>
+      <p:sp>
+        <p:nvSpPr>
+          <p:cNvPr id="2" name="Shape 0"/>
+          <p:cNvSpPr/>
+          <p:nvPr/>
+        </p:nvSpPr>
+        <p:spPr>
+          <a:xfrm>
+            <a:off x="0" y="0"/>
+            <a:ext cx="9144000" cy="5143500"/>
+          </a:xfrm>
+          <a:prstGeom prst="rect">
+            <a:avLst/>
+          </a:prstGeom>
+          <a:solidFill>
+            <a:srgbClr val="1B2A4A"/>
+          </a:solidFill>
+          <a:ln/>
+        </p:spPr>
+      </p:sp>
+      <p:sp>
+        <p:nvSpPr>
+          <p:cNvPr id="3" name="Shape 1"/>
+          <p:cNvSpPr/>
+          <p:nvPr/>
+        </p:nvSpPr>
+        <p:spPr>
+          <a:xfrm>
+            <a:off x="0" y="4777740"/>
+            <a:ext cx="9144000" cy="365760"/>
+          </a:xfrm>
+          <a:prstGeom prst="rect">
+            <a:avLst/>
+          </a:prstGeom>
+          <a:solidFill>
+            <a:srgbClr val="2A9D8F"/>
+          </a:solidFill>
+          <a:ln/>
+        </p:spPr>
+      </p:sp>
+      <p:sp>
+        <p:nvSpPr>
+          <p:cNvPr id="4" name="Shape 2"/>
+          <p:cNvSpPr/>
+          <p:nvPr/>
+        </p:nvSpPr>
+        <p:spPr>
+          <a:xfrm>
+            <a:off x="-914400" y="-914400"/>
+            <a:ext cx="3657600" cy="3657600"/>
+          </a:xfrm>
+          <a:prstGeom prst="ellipse">
+            <a:avLst/>
+          </a:prstGeom>
+          <a:solidFill>
+            <a:srgbClr val="2A9D8F">
+              <a:alpha val="10000"/>
+            </a:srgbClr>
+          </a:solidFill>
+          <a:ln/>
+        </p:spPr>
+      </p:sp>
+      <p:sp>
+        <p:nvSpPr>
+          <p:cNvPr id="5" name="Text 3"/>
+          <p:cNvSpPr/>
+          <p:nvPr/>
+        </p:nvSpPr>
+        <p:spPr>
+          <a:xfrm>
+            <a:off x="731520" y="1463040"/>
+            <a:ext cx="7680960" cy="822960"/>
+          </a:xfrm>
+          <a:prstGeom prst="rect">
+            <a:avLst/>
+          </a:prstGeom>
+          <a:noFill/>
+          <a:ln/>
+        </p:spPr>
+        <p:txBody>
+          <a:bodyPr wrap="square" rtlCol="0" anchor="ctr"/>
+          <a:lstStyle/>
+          <a:p>
+            <a:pPr algn="ctr" indent="0" marL="0">
+              <a:buNone/>
+            </a:pPr>
+            <a:r>
+              <a:rPr lang="en-US" sz="3400" b="1" dirty="0">
+                <a:solidFill>
+                  <a:srgbClr val="FFFFFF"/>
+                </a:solidFill>
+                <a:latin typeface="Georgia" pitchFamily="34" charset="0"/>
+                <a:ea typeface="Georgia" pitchFamily="34" charset="-122"/>
+                <a:cs typeface="Georgia" pitchFamily="34" charset="-120"/>
+              </a:rPr>
+              <a:t>Review &amp; Practise</a:t>
+            </a:r>
+            <a:endParaRPr lang="en-US" sz="3400" dirty="0"/>
+          </a:p>
+        </p:txBody>
+      </p:sp>
+      <p:sp>
+        <p:nvSpPr>
+          <p:cNvPr id="6" name="Text 4"/>
+          <p:cNvSpPr/>
+          <p:nvPr/>
+        </p:nvSpPr>
+        <p:spPr>
+          <a:xfrm>
+            <a:off x="731520" y="2468880"/>
+            <a:ext cx="7680960" cy="457200"/>
+          </a:xfrm>
+          <a:prstGeom prst="rect">
+            <a:avLst/>
+          </a:prstGeom>
+          <a:noFill/>
+          <a:ln/>
+        </p:spPr>
+        <p:txBody>
+          <a:bodyPr wrap="square" rtlCol="0" anchor="ctr"/>
+          <a:lstStyle/>
+          <a:p>
+            <a:pPr algn="ctr" indent="0" marL="0">
+              <a:buNone/>
+            </a:pPr>
+            <a:r>
+              <a:rPr lang="en-US" sz="1800" dirty="0">
+                <a:solidFill>
+                  <a:srgbClr val="2A9D8F"/>
+                </a:solidFill>
+                <a:latin typeface="Calibri" pitchFamily="34" charset="0"/>
+                <a:ea typeface="Calibri" pitchFamily="34" charset="-122"/>
+                <a:cs typeface="Calibri" pitchFamily="34" charset="-120"/>
+              </a:rPr>
               <a:t>mrzocchi.com</a:t>
             </a:r>
-            <a:endParaRPr lang="en-US" sz="1100" dirty="0"/>
+            <a:endParaRPr lang="en-US" sz="1800" dirty="0"/>
+          </a:p>
+        </p:txBody>
+      </p:sp>
+      <p:sp>
+        <p:nvSpPr>
+          <p:cNvPr id="7" name="Text 5"/>
+          <p:cNvSpPr/>
+          <p:nvPr/>
+        </p:nvSpPr>
+        <p:spPr>
+          <a:xfrm>
+            <a:off x="731520" y="3108960"/>
+            <a:ext cx="7680960" cy="457200"/>
+          </a:xfrm>
+          <a:prstGeom prst="rect">
+            <a:avLst/>
+          </a:prstGeom>
+          <a:noFill/>
+          <a:ln/>
+        </p:spPr>
+        <p:txBody>
+          <a:bodyPr wrap="square" rtlCol="0" anchor="ctr"/>
+          <a:lstStyle/>
+          <a:p>
+            <a:pPr algn="ctr" indent="0" marL="0">
+              <a:buNone/>
+            </a:pPr>
+            <a:r>
+              <a:rPr lang="en-US" sz="1300" dirty="0">
+                <a:solidFill>
+                  <a:srgbClr val="9B9690"/>
+                </a:solidFill>
+                <a:latin typeface="Calibri" pitchFamily="34" charset="0"/>
+                <a:ea typeface="Calibri" pitchFamily="34" charset="-122"/>
+                <a:cs typeface="Calibri" pitchFamily="34" charset="-120"/>
+              </a:rPr>
+              <a:t>Use the Self-Quiz, Review Games, and Practice Builder to test yourself.</a:t>
+            </a:r>
+            <a:endParaRPr lang="en-US" sz="1300" dirty="0"/>
           </a:p>
         </p:txBody>
       </p:sp>

--- a/static/ppts/G6_Math_T1_Factors_Multiples.pptx
+++ b/static/ppts/G6_Math_T1_Factors_Multiples.pptx
@@ -12,12 +12,13 @@
     <p:sldId id="260" r:id="rId6"/>
     <p:sldId id="261" r:id="rId7"/>
     <p:sldId id="262" r:id="rId8"/>
+    <p:sldId id="263" r:id="rId9"/>
   </p:sldIdLst>
   <p:notesMasterIdLst>
-    <p:notesMasterId r:id="rId9"/>
+    <p:notesMasterId r:id="rId10"/>
   </p:notesMasterIdLst>
-  <p:sldSz cx="9144000" cy="5143500"/>
-  <p:notesSz cx="5143500" cy="9144000"/>
+  <p:sldSz cx="12192000" cy="6858000"/>
+  <p:notesSz cx="6858000" cy="12192000"/>
   <p:defaultTextStyle>
     <a:lvl1pPr marL="0" algn="l" defTabSz="914400" rtl="0" eaLnBrk="1" latinLnBrk="0" hangingPunct="1">
       <a:defRPr sz="1800" kern="1200">
@@ -1060,6 +1061,94 @@
             <a:fld id="{F7021451-1387-4CA6-816F-3879F97B5CBC}" type="slidenum">
               <a:rPr lang="en-US"/>
               <a:t>7</a:t>
+            </a:fld>
+            <a:endParaRPr lang="en-US"/>
+          </a:p>
+        </p:txBody>
+      </p:sp>
+    </p:spTree>
+    <p:extLst>
+      <p:ext uri="{BB962C8B-B14F-4D97-AF65-F5344CB8AC3E}">
+        <p14:creationId xmlns:p14="http://schemas.microsoft.com/office/powerpoint/2010/main" val="1024086991"/>
+      </p:ext>
+    </p:extLst>
+  </p:cSld>
+  <p:clrMapOvr>
+    <a:masterClrMapping/>
+  </p:clrMapOvr>
+</p:notes>
+</file>
+
+<file path=ppt/notesSlides/notesSlide8.xml><?xml version="1.0" encoding="utf-8"?>
+<p:notes xmlns:a="http://schemas.openxmlformats.org/drawingml/2006/main" xmlns:r="http://schemas.openxmlformats.org/officeDocument/2006/relationships" xmlns:p="http://schemas.openxmlformats.org/presentationml/2006/main">
+  <p:cSld>
+    <p:spTree>
+      <p:nvGrpSpPr>
+        <p:cNvPr id="1" name=""/>
+        <p:cNvGrpSpPr/>
+        <p:nvPr/>
+      </p:nvGrpSpPr>
+      <p:grpSpPr>
+        <a:xfrm>
+          <a:off x="0" y="0"/>
+          <a:ext cx="0" cy="0"/>
+          <a:chOff x="0" y="0"/>
+          <a:chExt cx="0" cy="0"/>
+        </a:xfrm>
+      </p:grpSpPr>
+      <p:sp>
+        <p:nvSpPr>
+          <p:cNvPr id="2" name="Slide Image Placeholder 1"/>
+          <p:cNvSpPr>
+            <a:spLocks noGrp="1" noRot="1" noChangeAspect="1"/>
+          </p:cNvSpPr>
+          <p:nvPr>
+            <p:ph type="sldImg"/>
+          </p:nvPr>
+        </p:nvSpPr>
+        <p:spPr/>
+      </p:sp>
+      <p:sp>
+        <p:nvSpPr>
+          <p:cNvPr id="3" name="Notes Placeholder 2"/>
+          <p:cNvSpPr>
+            <a:spLocks noGrp="1"/>
+          </p:cNvSpPr>
+          <p:nvPr>
+            <p:ph type="body" idx="1"/>
+          </p:nvPr>
+        </p:nvSpPr>
+        <p:spPr/>
+        <p:txBody>
+          <a:bodyPr/>
+          <a:lstStyle/>
+          <a:p>
+            <a:r>
+              <a:rPr lang="en-US" dirty="0"/>
+              <a:t/>
+            </a:r>
+            <a:endParaRPr lang="en-US" dirty="0"/>
+          </a:p>
+        </p:txBody>
+      </p:sp>
+      <p:sp>
+        <p:nvSpPr>
+          <p:cNvPr id="4" name="Slide Number Placeholder 3"/>
+          <p:cNvSpPr>
+            <a:spLocks noGrp="1"/>
+          </p:cNvSpPr>
+          <p:nvPr>
+            <p:ph type="sldNum" sz="quarter" idx="10"/>
+          </p:nvPr>
+        </p:nvSpPr>
+        <p:spPr/>
+        <p:txBody>
+          <a:bodyPr/>
+          <a:lstStyle/>
+          <a:p>
+            <a:fld id="{F7021451-1387-4CA6-816F-3879F97B5CBC}" type="slidenum">
+              <a:rPr lang="en-US"/>
+              <a:t>8</a:t>
             </a:fld>
             <a:endParaRPr lang="en-US"/>
           </a:p>
@@ -1388,6 +1477,13 @@
 <file path=ppt/slides/slide1.xml><?xml version="1.0" encoding="utf-8"?>
 <p:sld xmlns:a="http://schemas.openxmlformats.org/drawingml/2006/main" xmlns:r="http://schemas.openxmlformats.org/officeDocument/2006/relationships" xmlns:p="http://schemas.openxmlformats.org/presentationml/2006/main">
   <p:cSld name="Slide 1">
+    <p:bg>
+      <p:bgPr>
+        <a:solidFill>
+          <a:srgbClr val="2A9D8F"/>
+        </a:solidFill>
+      </p:bgPr>
+    </p:bg>
     <p:spTree>
       <p:nvGrpSpPr>
         <p:cNvPr id="1" name=""/>
@@ -1410,55 +1506,15 @@
         </p:nvSpPr>
         <p:spPr>
           <a:xfrm>
-            <a:off x="0" y="0"/>
-            <a:ext cx="9144000" cy="5143500"/>
-          </a:xfrm>
-          <a:prstGeom prst="rect">
+            <a:off x="7772400" y="-914400"/>
+            <a:ext cx="3657600" cy="3657600"/>
+          </a:xfrm>
+          <a:prstGeom prst="ellipse">
             <a:avLst/>
           </a:prstGeom>
           <a:solidFill>
-            <a:srgbClr val="1B2A4A"/>
-          </a:solidFill>
-          <a:ln/>
-        </p:spPr>
-      </p:sp>
-      <p:sp>
-        <p:nvSpPr>
-          <p:cNvPr id="3" name="Shape 1"/>
-          <p:cNvSpPr/>
-          <p:nvPr/>
-        </p:nvSpPr>
-        <p:spPr>
-          <a:xfrm>
-            <a:off x="0" y="4777740"/>
-            <a:ext cx="9144000" cy="365760"/>
-          </a:xfrm>
-          <a:prstGeom prst="rect">
-            <a:avLst/>
-          </a:prstGeom>
-          <a:solidFill>
-            <a:srgbClr val="2A9D8F"/>
-          </a:solidFill>
-          <a:ln/>
-        </p:spPr>
-      </p:sp>
-      <p:sp>
-        <p:nvSpPr>
-          <p:cNvPr id="4" name="Shape 2"/>
-          <p:cNvSpPr/>
-          <p:nvPr/>
-        </p:nvSpPr>
-        <p:spPr>
-          <a:xfrm>
-            <a:off x="6858000" y="-1371600"/>
-            <a:ext cx="4572000" cy="4572000"/>
-          </a:xfrm>
-          <a:prstGeom prst="ellipse">
-            <a:avLst/>
-          </a:prstGeom>
-          <a:solidFill>
-            <a:srgbClr val="2A9D8F">
-              <a:alpha val="12000"/>
+            <a:srgbClr val="FFFFFF">
+              <a:alpha val="8000"/>
             </a:srgbClr>
           </a:solidFill>
           <a:ln/>
@@ -1466,14 +1522,14 @@
       </p:sp>
       <p:sp>
         <p:nvSpPr>
-          <p:cNvPr id="5" name="Text 3"/>
-          <p:cNvSpPr/>
-          <p:nvPr/>
-        </p:nvSpPr>
-        <p:spPr>
-          <a:xfrm>
-            <a:off x="731520" y="914400"/>
-            <a:ext cx="7680960" cy="457200"/>
+          <p:cNvPr id="3" name="Text 1"/>
+          <p:cNvSpPr/>
+          <p:nvPr/>
+        </p:nvSpPr>
+        <p:spPr>
+          <a:xfrm>
+            <a:off x="731520" y="548640"/>
+            <a:ext cx="7315200" cy="365760"/>
           </a:xfrm>
           <a:prstGeom prst="rect">
             <a:avLst/>
@@ -1489,30 +1545,30 @@
               <a:buNone/>
             </a:pPr>
             <a:r>
-              <a:rPr lang="en-US" sz="1300" b="1" spc="500" kern="0" dirty="0">
-                <a:solidFill>
-                  <a:srgbClr val="2A9D8F"/>
-                </a:solidFill>
-                <a:latin typeface="Calibri" pitchFamily="34" charset="0"/>
-                <a:ea typeface="Calibri" pitchFamily="34" charset="-122"/>
-                <a:cs typeface="Calibri" pitchFamily="34" charset="-120"/>
+              <a:rPr lang="en-US" sz="1100" b="1" dirty="0">
+                <a:solidFill>
+                  <a:srgbClr val="F2D68A"/>
+                </a:solidFill>
+                <a:latin typeface="Arial" pitchFamily="34" charset="0"/>
+                <a:ea typeface="Arial" pitchFamily="34" charset="-122"/>
+                <a:cs typeface="Arial" pitchFamily="34" charset="-120"/>
               </a:rPr>
               <a:t>GRADE 6 MATHEMATICS</a:t>
             </a:r>
-            <a:endParaRPr lang="en-US" sz="1300" dirty="0"/>
-          </a:p>
-        </p:txBody>
-      </p:sp>
-      <p:sp>
-        <p:nvSpPr>
-          <p:cNvPr id="6" name="Text 4"/>
-          <p:cNvSpPr/>
-          <p:nvPr/>
-        </p:nvSpPr>
-        <p:spPr>
-          <a:xfrm>
-            <a:off x="731520" y="1463040"/>
-            <a:ext cx="6858000" cy="1645920"/>
+            <a:endParaRPr lang="en-US" sz="1100" dirty="0"/>
+          </a:p>
+        </p:txBody>
+      </p:sp>
+      <p:sp>
+        <p:nvSpPr>
+          <p:cNvPr id="4" name="Text 2"/>
+          <p:cNvSpPr/>
+          <p:nvPr/>
+        </p:nvSpPr>
+        <p:spPr>
+          <a:xfrm>
+            <a:off x="731520" y="1371600"/>
+            <a:ext cx="9144000" cy="1645920"/>
           </a:xfrm>
           <a:prstGeom prst="rect">
             <a:avLst/>
@@ -1521,14 +1577,17 @@
           <a:ln/>
         </p:spPr>
         <p:txBody>
-          <a:bodyPr wrap="square" rtlCol="0" anchor="t"/>
+          <a:bodyPr wrap="square" rtlCol="0" anchor="ctr"/>
           <a:lstStyle/>
           <a:p>
             <a:pPr indent="0" marL="0">
+              <a:lnSpc>
+                <a:spcPct val="110000"/>
+              </a:lnSpc>
               <a:buNone/>
             </a:pPr>
             <a:r>
-              <a:rPr lang="en-US" sz="3800" b="1" dirty="0">
+              <a:rPr lang="en-US" sz="3600" b="1" dirty="0">
                 <a:solidFill>
                   <a:srgbClr val="FFFFFF"/>
                 </a:solidFill>
@@ -1536,39 +1595,63 @@
                 <a:ea typeface="Georgia" pitchFamily="34" charset="-122"/>
                 <a:cs typeface="Georgia" pitchFamily="34" charset="-120"/>
               </a:rPr>
-              <a:t>Factors, Multiples</a:t>
-            </a:r>
-            <a:endParaRPr lang="en-US" sz="3800" dirty="0"/>
-          </a:p>
+              <a:t>Factors, Multiples &amp; Primes</a:t>
+            </a:r>
+            <a:endParaRPr lang="en-US" sz="3600" dirty="0"/>
+          </a:p>
+        </p:txBody>
+      </p:sp>
+      <p:sp>
+        <p:nvSpPr>
+          <p:cNvPr id="5" name="Text 3"/>
+          <p:cNvSpPr/>
+          <p:nvPr/>
+        </p:nvSpPr>
+        <p:spPr>
+          <a:xfrm>
+            <a:off x="731520" y="3200400"/>
+            <a:ext cx="7315200" cy="548640"/>
+          </a:xfrm>
+          <a:prstGeom prst="rect">
+            <a:avLst/>
+          </a:prstGeom>
+          <a:noFill/>
+          <a:ln/>
+        </p:spPr>
+        <p:txBody>
+          <a:bodyPr wrap="square" rtlCol="0" anchor="ctr"/>
+          <a:lstStyle/>
           <a:p>
             <a:pPr indent="0" marL="0">
               <a:buNone/>
             </a:pPr>
             <a:r>
-              <a:rPr lang="en-US" sz="3800" b="1" dirty="0">
-                <a:solidFill>
-                  <a:srgbClr val="FFFFFF"/>
-                </a:solidFill>
-                <a:latin typeface="Georgia" pitchFamily="34" charset="0"/>
-                <a:ea typeface="Georgia" pitchFamily="34" charset="-122"/>
-                <a:cs typeface="Georgia" pitchFamily="34" charset="-120"/>
-              </a:rPr>
-              <a:t>&amp; Primes</a:t>
-            </a:r>
-            <a:endParaRPr lang="en-US" sz="3800" dirty="0"/>
-          </a:p>
-        </p:txBody>
-      </p:sp>
-      <p:sp>
-        <p:nvSpPr>
-          <p:cNvPr id="7" name="Text 5"/>
-          <p:cNvSpPr/>
-          <p:nvPr/>
-        </p:nvSpPr>
-        <p:spPr>
-          <a:xfrm>
-            <a:off x="731520" y="3200400"/>
-            <a:ext cx="6400800" cy="548640"/>
+              <a:rPr lang="en-US" sz="1600" dirty="0">
+                <a:solidFill>
+                  <a:srgbClr val="FFFFFF">
+                    <a:alpha val="65000"/>
+                  </a:srgbClr>
+                </a:solidFill>
+                <a:latin typeface="Arial" pitchFamily="34" charset="0"/>
+                <a:ea typeface="Arial" pitchFamily="34" charset="-122"/>
+                <a:cs typeface="Arial" pitchFamily="34" charset="-120"/>
+              </a:rPr>
+              <a:t>Building blocks of numbers</a:t>
+            </a:r>
+            <a:endParaRPr lang="en-US" sz="1600" dirty="0"/>
+          </a:p>
+        </p:txBody>
+      </p:sp>
+      <p:sp>
+        <p:nvSpPr>
+          <p:cNvPr id="6" name="Text 4"/>
+          <p:cNvSpPr/>
+          <p:nvPr/>
+        </p:nvSpPr>
+        <p:spPr>
+          <a:xfrm>
+            <a:off x="731520" y="4389120"/>
+            <a:ext cx="2743200" cy="320040"/>
           </a:xfrm>
           <a:prstGeom prst="rect">
             <a:avLst/>
@@ -1584,56 +1667,19 @@
               <a:buNone/>
             </a:pPr>
             <a:r>
-              <a:rPr lang="en-US" sz="1600" i="1" dirty="0">
-                <a:solidFill>
-                  <a:srgbClr val="9B9690"/>
-                </a:solidFill>
-                <a:latin typeface="Calibri" pitchFamily="34" charset="0"/>
-                <a:ea typeface="Calibri" pitchFamily="34" charset="-122"/>
-                <a:cs typeface="Calibri" pitchFamily="34" charset="-120"/>
-              </a:rPr>
-              <a:t>The building blocks of numbers</a:t>
-            </a:r>
-            <a:endParaRPr lang="en-US" sz="1600" dirty="0"/>
-          </a:p>
-        </p:txBody>
-      </p:sp>
-      <p:sp>
-        <p:nvSpPr>
-          <p:cNvPr id="8" name="Text 6"/>
-          <p:cNvSpPr/>
-          <p:nvPr/>
-        </p:nvSpPr>
-        <p:spPr>
-          <a:xfrm>
-            <a:off x="731520" y="4297680"/>
-            <a:ext cx="2743200" cy="365760"/>
-          </a:xfrm>
-          <a:prstGeom prst="rect">
-            <a:avLst/>
-          </a:prstGeom>
-          <a:noFill/>
-          <a:ln/>
-        </p:spPr>
-        <p:txBody>
-          <a:bodyPr wrap="square" rtlCol="0" anchor="ctr"/>
-          <a:lstStyle/>
-          <a:p>
-            <a:pPr indent="0" marL="0">
-              <a:buNone/>
-            </a:pPr>
-            <a:r>
-              <a:rPr lang="en-US" sz="1100" dirty="0">
-                <a:solidFill>
-                  <a:srgbClr val="9B9690"/>
-                </a:solidFill>
-                <a:latin typeface="Calibri" pitchFamily="34" charset="0"/>
-                <a:ea typeface="Calibri" pitchFamily="34" charset="-122"/>
-                <a:cs typeface="Calibri" pitchFamily="34" charset="-120"/>
+              <a:rPr lang="en-US" sz="1000" dirty="0">
+                <a:solidFill>
+                  <a:srgbClr val="FFFFFF">
+                    <a:alpha val="40000"/>
+                  </a:srgbClr>
+                </a:solidFill>
+                <a:latin typeface="Arial" pitchFamily="34" charset="0"/>
+                <a:ea typeface="Arial" pitchFamily="34" charset="-122"/>
+                <a:cs typeface="Arial" pitchFamily="34" charset="-120"/>
               </a:rPr>
               <a:t>mrzocchi.com</a:t>
             </a:r>
-            <a:endParaRPr lang="en-US" sz="1100" dirty="0"/>
+            <a:endParaRPr lang="en-US" sz="1000" dirty="0"/>
           </a:p>
         </p:txBody>
       </p:sp>
@@ -1678,67 +1724,113 @@
         <p:spPr>
           <a:xfrm>
             <a:off x="0" y="0"/>
-            <a:ext cx="9144000" cy="822960"/>
-          </a:xfrm>
-          <a:prstGeom prst="rect">
-            <a:avLst/>
+            <a:ext cx="73152" cy="5148072"/>
+          </a:xfrm>
+          <a:prstGeom prst="rect">
+            <a:avLst/>
+          </a:prstGeom>
+          <a:solidFill>
+            <a:srgbClr val="2A9D8F"/>
+          </a:solidFill>
+          <a:ln/>
+        </p:spPr>
+      </p:sp>
+      <p:sp>
+        <p:nvSpPr>
+          <p:cNvPr id="3" name="Text 1"/>
+          <p:cNvSpPr/>
+          <p:nvPr/>
+        </p:nvSpPr>
+        <p:spPr>
+          <a:xfrm>
+            <a:off x="548640" y="274320"/>
+            <a:ext cx="9144000" cy="640080"/>
+          </a:xfrm>
+          <a:prstGeom prst="rect">
+            <a:avLst/>
+          </a:prstGeom>
+          <a:noFill/>
+          <a:ln/>
+        </p:spPr>
+        <p:txBody>
+          <a:bodyPr wrap="square" rtlCol="0" anchor="ctr"/>
+          <a:lstStyle/>
+          <a:p>
+            <a:pPr indent="0" marL="0">
+              <a:buNone/>
+            </a:pPr>
+            <a:r>
+              <a:rPr lang="en-US" sz="2400" b="1" dirty="0">
+                <a:solidFill>
+                  <a:srgbClr val="1B2A4A"/>
+                </a:solidFill>
+                <a:latin typeface="Georgia" pitchFamily="34" charset="0"/>
+                <a:ea typeface="Georgia" pitchFamily="34" charset="-122"/>
+                <a:cs typeface="Georgia" pitchFamily="34" charset="-120"/>
+              </a:rPr>
+              <a:t>Key Vocabulary</a:t>
+            </a:r>
+            <a:endParaRPr lang="en-US" sz="2400" dirty="0"/>
+          </a:p>
+        </p:txBody>
+      </p:sp>
+      <p:sp>
+        <p:nvSpPr>
+          <p:cNvPr id="4" name="Shape 2"/>
+          <p:cNvSpPr/>
+          <p:nvPr/>
+        </p:nvSpPr>
+        <p:spPr>
+          <a:xfrm>
+            <a:off x="548640" y="960120"/>
+            <a:ext cx="2286000" cy="36576"/>
+          </a:xfrm>
+          <a:prstGeom prst="rect">
+            <a:avLst/>
+          </a:prstGeom>
+          <a:solidFill>
+            <a:srgbClr val="2A9D8F"/>
+          </a:solidFill>
+          <a:ln/>
+        </p:spPr>
+      </p:sp>
+      <p:sp>
+        <p:nvSpPr>
+          <p:cNvPr id="5" name="Shape 3"/>
+          <p:cNvSpPr/>
+          <p:nvPr/>
+        </p:nvSpPr>
+        <p:spPr>
+          <a:xfrm>
+            <a:off x="548640" y="1234440"/>
+            <a:ext cx="3200400" cy="914400"/>
+          </a:xfrm>
+          <a:prstGeom prst="roundRect">
+            <a:avLst>
+              <a:gd name="adj" fmla="val 10000"/>
+            </a:avLst>
           </a:prstGeom>
           <a:solidFill>
             <a:srgbClr val="FFFFFF"/>
           </a:solidFill>
-          <a:ln/>
-        </p:spPr>
-      </p:sp>
-      <p:sp>
-        <p:nvSpPr>
-          <p:cNvPr id="3" name="Shape 1"/>
-          <p:cNvSpPr/>
-          <p:nvPr/>
-        </p:nvSpPr>
-        <p:spPr>
-          <a:xfrm>
-            <a:off x="0" y="804672"/>
-            <a:ext cx="9144000" cy="27432"/>
-          </a:xfrm>
-          <a:prstGeom prst="rect">
-            <a:avLst/>
-          </a:prstGeom>
-          <a:solidFill>
-            <a:srgbClr val="E5E2DC"/>
-          </a:solidFill>
-          <a:ln/>
-        </p:spPr>
-      </p:sp>
-      <p:sp>
-        <p:nvSpPr>
-          <p:cNvPr id="4" name="Shape 2"/>
-          <p:cNvSpPr/>
-          <p:nvPr/>
-        </p:nvSpPr>
-        <p:spPr>
-          <a:xfrm>
-            <a:off x="548640" y="201168"/>
-            <a:ext cx="54864" cy="420624"/>
-          </a:xfrm>
-          <a:prstGeom prst="rect">
-            <a:avLst/>
-          </a:prstGeom>
-          <a:solidFill>
-            <a:srgbClr val="2A9D8F"/>
-          </a:solidFill>
-          <a:ln/>
-        </p:spPr>
-      </p:sp>
-      <p:sp>
-        <p:nvSpPr>
-          <p:cNvPr id="5" name="Text 3"/>
-          <p:cNvSpPr/>
-          <p:nvPr/>
-        </p:nvSpPr>
-        <p:spPr>
-          <a:xfrm>
-            <a:off x="777240" y="137160"/>
-            <a:ext cx="7772400" cy="548640"/>
+          <a:ln w="9525">
+            <a:solidFill>
+              <a:srgbClr val="E5E2DC"/>
+            </a:solidFill>
+            <a:prstDash val="solid"/>
+          </a:ln>
+        </p:spPr>
+      </p:sp>
+      <p:sp>
+        <p:nvSpPr>
+          <p:cNvPr id="6" name="Text 4"/>
+          <p:cNvSpPr/>
+          <p:nvPr/>
+        </p:nvSpPr>
+        <p:spPr>
+          <a:xfrm>
+            <a:off x="685800" y="1307592"/>
+            <a:ext cx="2926080" cy="320040"/>
           </a:xfrm>
           <a:prstGeom prst="rect">
             <a:avLst/>
@@ -1747,84 +1839,106 @@
           <a:ln/>
         </p:spPr>
         <p:txBody>
-          <a:bodyPr wrap="square" lIns="0" tIns="0" rIns="0" bIns="0" rtlCol="0" anchor="ctr"/>
+          <a:bodyPr wrap="square" rtlCol="0" anchor="ctr"/>
           <a:lstStyle/>
           <a:p>
             <a:pPr indent="0" marL="0">
               <a:buNone/>
             </a:pPr>
             <a:r>
-              <a:rPr lang="en-US" sz="2000" b="1" dirty="0">
-                <a:solidFill>
-                  <a:srgbClr val="1B2A4A"/>
+              <a:rPr lang="en-US" sz="1400" b="1" dirty="0">
+                <a:solidFill>
+                  <a:srgbClr val="2A9D8F"/>
                 </a:solidFill>
                 <a:latin typeface="Georgia" pitchFamily="34" charset="0"/>
                 <a:ea typeface="Georgia" pitchFamily="34" charset="-122"/>
                 <a:cs typeface="Georgia" pitchFamily="34" charset="-120"/>
               </a:rPr>
-              <a:t>Key Vocabulary</a:t>
-            </a:r>
-            <a:endParaRPr lang="en-US" sz="2000" dirty="0"/>
-          </a:p>
-        </p:txBody>
-      </p:sp>
-      <p:sp>
-        <p:nvSpPr>
-          <p:cNvPr id="6" name="Shape 4"/>
-          <p:cNvSpPr/>
-          <p:nvPr/>
-        </p:nvSpPr>
-        <p:spPr>
-          <a:xfrm>
-            <a:off x="731520" y="1051560"/>
-            <a:ext cx="3657600" cy="658368"/>
-          </a:xfrm>
-          <a:prstGeom prst="rect">
-            <a:avLst/>
+              <a:t>Factor</a:t>
+            </a:r>
+            <a:endParaRPr lang="en-US" sz="1400" dirty="0"/>
+          </a:p>
+        </p:txBody>
+      </p:sp>
+      <p:sp>
+        <p:nvSpPr>
+          <p:cNvPr id="7" name="Text 5"/>
+          <p:cNvSpPr/>
+          <p:nvPr/>
+        </p:nvSpPr>
+        <p:spPr>
+          <a:xfrm>
+            <a:off x="685800" y="1645920"/>
+            <a:ext cx="2926080" cy="457200"/>
+          </a:xfrm>
+          <a:prstGeom prst="rect">
+            <a:avLst/>
+          </a:prstGeom>
+          <a:noFill/>
+          <a:ln/>
+        </p:spPr>
+        <p:txBody>
+          <a:bodyPr wrap="square" rtlCol="0" anchor="ctr"/>
+          <a:lstStyle/>
+          <a:p>
+            <a:pPr indent="0" marL="0">
+              <a:lnSpc>
+                <a:spcPct val="130000"/>
+              </a:lnSpc>
+              <a:buNone/>
+            </a:pPr>
+            <a:r>
+              <a:rPr lang="en-US" sz="1100" dirty="0">
+                <a:solidFill>
+                  <a:srgbClr val="6B6660"/>
+                </a:solidFill>
+                <a:latin typeface="Arial" pitchFamily="34" charset="0"/>
+                <a:ea typeface="Arial" pitchFamily="34" charset="-122"/>
+                <a:cs typeface="Arial" pitchFamily="34" charset="-120"/>
+              </a:rPr>
+              <a:t>A number that divides exactly into another number.</a:t>
+            </a:r>
+            <a:endParaRPr lang="en-US" sz="1100" dirty="0"/>
+          </a:p>
+        </p:txBody>
+      </p:sp>
+      <p:sp>
+        <p:nvSpPr>
+          <p:cNvPr id="8" name="Shape 6"/>
+          <p:cNvSpPr/>
+          <p:nvPr/>
+        </p:nvSpPr>
+        <p:spPr>
+          <a:xfrm>
+            <a:off x="4023360" y="1234440"/>
+            <a:ext cx="3200400" cy="914400"/>
+          </a:xfrm>
+          <a:prstGeom prst="roundRect">
+            <a:avLst>
+              <a:gd name="adj" fmla="val 10000"/>
+            </a:avLst>
           </a:prstGeom>
           <a:solidFill>
             <a:srgbClr val="FFFFFF"/>
           </a:solidFill>
-          <a:ln/>
-          <a:effectLst>
-            <a:outerShdw sx="100000" sy="100000" kx="0" ky="0" algn="bl" rotWithShape="0" blurRad="50800" dist="25400" dir="8100000">
-              <a:srgbClr val="000000">
-                <a:alpha val="10000"/>
-              </a:srgbClr>
-            </a:outerShdw>
-          </a:effectLst>
-        </p:spPr>
-      </p:sp>
-      <p:sp>
-        <p:nvSpPr>
-          <p:cNvPr id="7" name="Shape 5"/>
-          <p:cNvSpPr/>
-          <p:nvPr/>
-        </p:nvSpPr>
-        <p:spPr>
-          <a:xfrm>
-            <a:off x="731520" y="1051560"/>
-            <a:ext cx="54864" cy="658368"/>
-          </a:xfrm>
-          <a:prstGeom prst="rect">
-            <a:avLst/>
-          </a:prstGeom>
-          <a:solidFill>
-            <a:srgbClr val="2A9D8F"/>
-          </a:solidFill>
-          <a:ln/>
-        </p:spPr>
-      </p:sp>
-      <p:sp>
-        <p:nvSpPr>
-          <p:cNvPr id="8" name="Text 6"/>
-          <p:cNvSpPr/>
-          <p:nvPr/>
-        </p:nvSpPr>
-        <p:spPr>
-          <a:xfrm>
-            <a:off x="914400" y="1051560"/>
-            <a:ext cx="1463040" cy="658368"/>
+          <a:ln w="9525">
+            <a:solidFill>
+              <a:srgbClr val="E5E2DC"/>
+            </a:solidFill>
+            <a:prstDash val="solid"/>
+          </a:ln>
+        </p:spPr>
+      </p:sp>
+      <p:sp>
+        <p:nvSpPr>
+          <p:cNvPr id="9" name="Text 7"/>
+          <p:cNvSpPr/>
+          <p:nvPr/>
+        </p:nvSpPr>
+        <p:spPr>
+          <a:xfrm>
+            <a:off x="4160520" y="1307592"/>
+            <a:ext cx="2926080" cy="320040"/>
           </a:xfrm>
           <a:prstGeom prst="rect">
             <a:avLst/>
@@ -1833,37 +1947,37 @@
           <a:ln/>
         </p:spPr>
         <p:txBody>
-          <a:bodyPr wrap="square" lIns="0" tIns="0" rIns="0" bIns="0" rtlCol="0" anchor="ctr"/>
+          <a:bodyPr wrap="square" rtlCol="0" anchor="ctr"/>
           <a:lstStyle/>
           <a:p>
             <a:pPr indent="0" marL="0">
               <a:buNone/>
             </a:pPr>
             <a:r>
-              <a:rPr lang="en-US" sz="1300" b="1" dirty="0">
-                <a:solidFill>
-                  <a:srgbClr val="1B2A4A"/>
+              <a:rPr lang="en-US" sz="1400" b="1" dirty="0">
+                <a:solidFill>
+                  <a:srgbClr val="2A9D8F"/>
                 </a:solidFill>
                 <a:latin typeface="Georgia" pitchFamily="34" charset="0"/>
                 <a:ea typeface="Georgia" pitchFamily="34" charset="-122"/>
                 <a:cs typeface="Georgia" pitchFamily="34" charset="-120"/>
               </a:rPr>
-              <a:t>Factor</a:t>
-            </a:r>
-            <a:endParaRPr lang="en-US" sz="1300" dirty="0"/>
-          </a:p>
-        </p:txBody>
-      </p:sp>
-      <p:sp>
-        <p:nvSpPr>
-          <p:cNvPr id="9" name="Text 7"/>
-          <p:cNvSpPr/>
-          <p:nvPr/>
-        </p:nvSpPr>
-        <p:spPr>
-          <a:xfrm>
-            <a:off x="2377440" y="1051560"/>
-            <a:ext cx="1920240" cy="658368"/>
+              <a:t>Multiple</a:t>
+            </a:r>
+            <a:endParaRPr lang="en-US" sz="1400" dirty="0"/>
+          </a:p>
+        </p:txBody>
+      </p:sp>
+      <p:sp>
+        <p:nvSpPr>
+          <p:cNvPr id="10" name="Text 8"/>
+          <p:cNvSpPr/>
+          <p:nvPr/>
+        </p:nvSpPr>
+        <p:spPr>
+          <a:xfrm>
+            <a:off x="4160520" y="1645920"/>
+            <a:ext cx="2926080" cy="457200"/>
           </a:xfrm>
           <a:prstGeom prst="rect">
             <a:avLst/>
@@ -1872,10 +1986,13 @@
           <a:ln/>
         </p:spPr>
         <p:txBody>
-          <a:bodyPr wrap="square" lIns="0" tIns="0" rIns="0" bIns="0" rtlCol="0" anchor="ctr"/>
+          <a:bodyPr wrap="square" rtlCol="0" anchor="ctr"/>
           <a:lstStyle/>
           <a:p>
             <a:pPr indent="0" marL="0">
+              <a:lnSpc>
+                <a:spcPct val="130000"/>
+              </a:lnSpc>
               <a:buNone/>
             </a:pPr>
             <a:r>
@@ -1883,11 +2000,11 @@
                 <a:solidFill>
                   <a:srgbClr val="6B6660"/>
                 </a:solidFill>
-                <a:latin typeface="Calibri" pitchFamily="34" charset="0"/>
-                <a:ea typeface="Calibri" pitchFamily="34" charset="-122"/>
-                <a:cs typeface="Calibri" pitchFamily="34" charset="-120"/>
-              </a:rPr>
-              <a:t>A number that divides exactly into another</a:t>
+                <a:latin typeface="Arial" pitchFamily="34" charset="0"/>
+                <a:ea typeface="Arial" pitchFamily="34" charset="-122"/>
+                <a:cs typeface="Arial" pitchFamily="34" charset="-120"/>
+              </a:rPr>
+              <a:t>The result of multiplying a number by an integer.</a:t>
             </a:r>
             <a:endParaRPr lang="en-US" sz="1100" dirty="0"/>
           </a:p>
@@ -1895,49 +2012,29 @@
       </p:sp>
       <p:sp>
         <p:nvSpPr>
-          <p:cNvPr id="10" name="Shape 8"/>
-          <p:cNvSpPr/>
-          <p:nvPr/>
-        </p:nvSpPr>
-        <p:spPr>
-          <a:xfrm>
-            <a:off x="4754880" y="1051560"/>
-            <a:ext cx="3657600" cy="658368"/>
-          </a:xfrm>
-          <a:prstGeom prst="rect">
-            <a:avLst/>
+          <p:cNvPr id="11" name="Shape 9"/>
+          <p:cNvSpPr/>
+          <p:nvPr/>
+        </p:nvSpPr>
+        <p:spPr>
+          <a:xfrm>
+            <a:off x="7498080" y="1234440"/>
+            <a:ext cx="3200400" cy="914400"/>
+          </a:xfrm>
+          <a:prstGeom prst="roundRect">
+            <a:avLst>
+              <a:gd name="adj" fmla="val 10000"/>
+            </a:avLst>
           </a:prstGeom>
           <a:solidFill>
             <a:srgbClr val="FFFFFF"/>
           </a:solidFill>
-          <a:ln/>
-          <a:effectLst>
-            <a:outerShdw sx="100000" sy="100000" kx="0" ky="0" algn="bl" rotWithShape="0" blurRad="50800" dist="25400" dir="8100000">
-              <a:srgbClr val="000000">
-                <a:alpha val="10000"/>
-              </a:srgbClr>
-            </a:outerShdw>
-          </a:effectLst>
-        </p:spPr>
-      </p:sp>
-      <p:sp>
-        <p:nvSpPr>
-          <p:cNvPr id="11" name="Shape 9"/>
-          <p:cNvSpPr/>
-          <p:nvPr/>
-        </p:nvSpPr>
-        <p:spPr>
-          <a:xfrm>
-            <a:off x="4754880" y="1051560"/>
-            <a:ext cx="54864" cy="658368"/>
-          </a:xfrm>
-          <a:prstGeom prst="rect">
-            <a:avLst/>
-          </a:prstGeom>
-          <a:solidFill>
-            <a:srgbClr val="2A9D8F"/>
-          </a:solidFill>
-          <a:ln/>
+          <a:ln w="9525">
+            <a:solidFill>
+              <a:srgbClr val="E5E2DC"/>
+            </a:solidFill>
+            <a:prstDash val="solid"/>
+          </a:ln>
         </p:spPr>
       </p:sp>
       <p:sp>
@@ -1948,8 +2045,8 @@
         </p:nvSpPr>
         <p:spPr>
           <a:xfrm>
-            <a:off x="4937760" y="1051560"/>
-            <a:ext cx="1463040" cy="658368"/>
+            <a:off x="7635240" y="1307592"/>
+            <a:ext cx="2926080" cy="320040"/>
           </a:xfrm>
           <a:prstGeom prst="rect">
             <a:avLst/>
@@ -1958,24 +2055,24 @@
           <a:ln/>
         </p:spPr>
         <p:txBody>
-          <a:bodyPr wrap="square" lIns="0" tIns="0" rIns="0" bIns="0" rtlCol="0" anchor="ctr"/>
+          <a:bodyPr wrap="square" rtlCol="0" anchor="ctr"/>
           <a:lstStyle/>
           <a:p>
             <a:pPr indent="0" marL="0">
               <a:buNone/>
             </a:pPr>
             <a:r>
-              <a:rPr lang="en-US" sz="1300" b="1" dirty="0">
-                <a:solidFill>
-                  <a:srgbClr val="1B2A4A"/>
+              <a:rPr lang="en-US" sz="1400" b="1" dirty="0">
+                <a:solidFill>
+                  <a:srgbClr val="2A9D8F"/>
                 </a:solidFill>
                 <a:latin typeface="Georgia" pitchFamily="34" charset="0"/>
                 <a:ea typeface="Georgia" pitchFamily="34" charset="-122"/>
                 <a:cs typeface="Georgia" pitchFamily="34" charset="-120"/>
               </a:rPr>
-              <a:t>Multiple</a:t>
-            </a:r>
-            <a:endParaRPr lang="en-US" sz="1300" dirty="0"/>
+              <a:t>Prime Number</a:t>
+            </a:r>
+            <a:endParaRPr lang="en-US" sz="1400" dirty="0"/>
           </a:p>
         </p:txBody>
       </p:sp>
@@ -1987,8 +2084,8 @@
         </p:nvSpPr>
         <p:spPr>
           <a:xfrm>
-            <a:off x="6400800" y="1051560"/>
-            <a:ext cx="1920240" cy="658368"/>
+            <a:off x="7635240" y="1645920"/>
+            <a:ext cx="2926080" cy="457200"/>
           </a:xfrm>
           <a:prstGeom prst="rect">
             <a:avLst/>
@@ -1997,10 +2094,13 @@
           <a:ln/>
         </p:spPr>
         <p:txBody>
-          <a:bodyPr wrap="square" lIns="0" tIns="0" rIns="0" bIns="0" rtlCol="0" anchor="ctr"/>
+          <a:bodyPr wrap="square" rtlCol="0" anchor="ctr"/>
           <a:lstStyle/>
           <a:p>
             <a:pPr indent="0" marL="0">
+              <a:lnSpc>
+                <a:spcPct val="130000"/>
+              </a:lnSpc>
               <a:buNone/>
             </a:pPr>
             <a:r>
@@ -2008,11 +2108,11 @@
                 <a:solidFill>
                   <a:srgbClr val="6B6660"/>
                 </a:solidFill>
-                <a:latin typeface="Calibri" pitchFamily="34" charset="0"/>
-                <a:ea typeface="Calibri" pitchFamily="34" charset="-122"/>
-                <a:cs typeface="Calibri" pitchFamily="34" charset="-120"/>
-              </a:rPr>
-              <a:t>The result of multiplying a number</a:t>
+                <a:latin typeface="Arial" pitchFamily="34" charset="0"/>
+                <a:ea typeface="Arial" pitchFamily="34" charset="-122"/>
+                <a:cs typeface="Arial" pitchFamily="34" charset="-120"/>
+              </a:rPr>
+              <a:t>A number with exactly 2 factors: 1 and itself.</a:t>
             </a:r>
             <a:endParaRPr lang="en-US" sz="1100" dirty="0"/>
           </a:p>
@@ -2026,55 +2126,35 @@
         </p:nvSpPr>
         <p:spPr>
           <a:xfrm>
-            <a:off x="731520" y="1819656"/>
-            <a:ext cx="3657600" cy="658368"/>
-          </a:xfrm>
-          <a:prstGeom prst="rect">
-            <a:avLst/>
+            <a:off x="548640" y="2286000"/>
+            <a:ext cx="3200400" cy="914400"/>
+          </a:xfrm>
+          <a:prstGeom prst="roundRect">
+            <a:avLst>
+              <a:gd name="adj" fmla="val 10000"/>
+            </a:avLst>
           </a:prstGeom>
           <a:solidFill>
             <a:srgbClr val="FFFFFF"/>
           </a:solidFill>
-          <a:ln/>
-          <a:effectLst>
-            <a:outerShdw sx="100000" sy="100000" kx="0" ky="0" algn="bl" rotWithShape="0" blurRad="50800" dist="25400" dir="8100000">
-              <a:srgbClr val="000000">
-                <a:alpha val="10000"/>
-              </a:srgbClr>
-            </a:outerShdw>
-          </a:effectLst>
-        </p:spPr>
-      </p:sp>
-      <p:sp>
-        <p:nvSpPr>
-          <p:cNvPr id="15" name="Shape 13"/>
-          <p:cNvSpPr/>
-          <p:nvPr/>
-        </p:nvSpPr>
-        <p:spPr>
-          <a:xfrm>
-            <a:off x="731520" y="1819656"/>
-            <a:ext cx="54864" cy="658368"/>
-          </a:xfrm>
-          <a:prstGeom prst="rect">
-            <a:avLst/>
-          </a:prstGeom>
-          <a:solidFill>
-            <a:srgbClr val="2A9D8F"/>
-          </a:solidFill>
-          <a:ln/>
-        </p:spPr>
-      </p:sp>
-      <p:sp>
-        <p:nvSpPr>
-          <p:cNvPr id="16" name="Text 14"/>
-          <p:cNvSpPr/>
-          <p:nvPr/>
-        </p:nvSpPr>
-        <p:spPr>
-          <a:xfrm>
-            <a:off x="914400" y="1819656"/>
-            <a:ext cx="1463040" cy="658368"/>
+          <a:ln w="9525">
+            <a:solidFill>
+              <a:srgbClr val="E5E2DC"/>
+            </a:solidFill>
+            <a:prstDash val="solid"/>
+          </a:ln>
+        </p:spPr>
+      </p:sp>
+      <p:sp>
+        <p:nvSpPr>
+          <p:cNvPr id="15" name="Text 13"/>
+          <p:cNvSpPr/>
+          <p:nvPr/>
+        </p:nvSpPr>
+        <p:spPr>
+          <a:xfrm>
+            <a:off x="685800" y="2359152"/>
+            <a:ext cx="2926080" cy="320040"/>
           </a:xfrm>
           <a:prstGeom prst="rect">
             <a:avLst/>
@@ -2083,37 +2163,37 @@
           <a:ln/>
         </p:spPr>
         <p:txBody>
-          <a:bodyPr wrap="square" lIns="0" tIns="0" rIns="0" bIns="0" rtlCol="0" anchor="ctr"/>
+          <a:bodyPr wrap="square" rtlCol="0" anchor="ctr"/>
           <a:lstStyle/>
           <a:p>
             <a:pPr indent="0" marL="0">
               <a:buNone/>
             </a:pPr>
             <a:r>
-              <a:rPr lang="en-US" sz="1300" b="1" dirty="0">
-                <a:solidFill>
-                  <a:srgbClr val="1B2A4A"/>
+              <a:rPr lang="en-US" sz="1400" b="1" dirty="0">
+                <a:solidFill>
+                  <a:srgbClr val="2A9D8F"/>
                 </a:solidFill>
                 <a:latin typeface="Georgia" pitchFamily="34" charset="0"/>
                 <a:ea typeface="Georgia" pitchFamily="34" charset="-122"/>
                 <a:cs typeface="Georgia" pitchFamily="34" charset="-120"/>
               </a:rPr>
-              <a:t>Prime</a:t>
-            </a:r>
-            <a:endParaRPr lang="en-US" sz="1300" dirty="0"/>
-          </a:p>
-        </p:txBody>
-      </p:sp>
-      <p:sp>
-        <p:nvSpPr>
-          <p:cNvPr id="17" name="Text 15"/>
-          <p:cNvSpPr/>
-          <p:nvPr/>
-        </p:nvSpPr>
-        <p:spPr>
-          <a:xfrm>
-            <a:off x="2377440" y="1819656"/>
-            <a:ext cx="1920240" cy="658368"/>
+              <a:t>Composite</a:t>
+            </a:r>
+            <a:endParaRPr lang="en-US" sz="1400" dirty="0"/>
+          </a:p>
+        </p:txBody>
+      </p:sp>
+      <p:sp>
+        <p:nvSpPr>
+          <p:cNvPr id="16" name="Text 14"/>
+          <p:cNvSpPr/>
+          <p:nvPr/>
+        </p:nvSpPr>
+        <p:spPr>
+          <a:xfrm>
+            <a:off x="685800" y="2697480"/>
+            <a:ext cx="2926080" cy="457200"/>
           </a:xfrm>
           <a:prstGeom prst="rect">
             <a:avLst/>
@@ -2122,10 +2202,13 @@
           <a:ln/>
         </p:spPr>
         <p:txBody>
-          <a:bodyPr wrap="square" lIns="0" tIns="0" rIns="0" bIns="0" rtlCol="0" anchor="ctr"/>
+          <a:bodyPr wrap="square" rtlCol="0" anchor="ctr"/>
           <a:lstStyle/>
           <a:p>
             <a:pPr indent="0" marL="0">
+              <a:lnSpc>
+                <a:spcPct val="130000"/>
+              </a:lnSpc>
               <a:buNone/>
             </a:pPr>
             <a:r>
@@ -2133,11 +2216,11 @@
                 <a:solidFill>
                   <a:srgbClr val="6B6660"/>
                 </a:solidFill>
-                <a:latin typeface="Calibri" pitchFamily="34" charset="0"/>
-                <a:ea typeface="Calibri" pitchFamily="34" charset="-122"/>
-                <a:cs typeface="Calibri" pitchFamily="34" charset="-120"/>
-              </a:rPr>
-              <a:t>A number with exactly 2 factors (1 and itself)</a:t>
+                <a:latin typeface="Arial" pitchFamily="34" charset="0"/>
+                <a:ea typeface="Arial" pitchFamily="34" charset="-122"/>
+                <a:cs typeface="Arial" pitchFamily="34" charset="-120"/>
+              </a:rPr>
+              <a:t>A number with MORE than 2 factors.</a:t>
             </a:r>
             <a:endParaRPr lang="en-US" sz="1100" dirty="0"/>
           </a:p>
@@ -2145,61 +2228,41 @@
       </p:sp>
       <p:sp>
         <p:nvSpPr>
-          <p:cNvPr id="18" name="Shape 16"/>
-          <p:cNvSpPr/>
-          <p:nvPr/>
-        </p:nvSpPr>
-        <p:spPr>
-          <a:xfrm>
-            <a:off x="4754880" y="1819656"/>
-            <a:ext cx="3657600" cy="658368"/>
-          </a:xfrm>
-          <a:prstGeom prst="rect">
-            <a:avLst/>
+          <p:cNvPr id="17" name="Shape 15"/>
+          <p:cNvSpPr/>
+          <p:nvPr/>
+        </p:nvSpPr>
+        <p:spPr>
+          <a:xfrm>
+            <a:off x="4023360" y="2286000"/>
+            <a:ext cx="3200400" cy="914400"/>
+          </a:xfrm>
+          <a:prstGeom prst="roundRect">
+            <a:avLst>
+              <a:gd name="adj" fmla="val 10000"/>
+            </a:avLst>
           </a:prstGeom>
           <a:solidFill>
             <a:srgbClr val="FFFFFF"/>
           </a:solidFill>
-          <a:ln/>
-          <a:effectLst>
-            <a:outerShdw sx="100000" sy="100000" kx="0" ky="0" algn="bl" rotWithShape="0" blurRad="50800" dist="25400" dir="8100000">
-              <a:srgbClr val="000000">
-                <a:alpha val="10000"/>
-              </a:srgbClr>
-            </a:outerShdw>
-          </a:effectLst>
-        </p:spPr>
-      </p:sp>
-      <p:sp>
-        <p:nvSpPr>
-          <p:cNvPr id="19" name="Shape 17"/>
-          <p:cNvSpPr/>
-          <p:nvPr/>
-        </p:nvSpPr>
-        <p:spPr>
-          <a:xfrm>
-            <a:off x="4754880" y="1819656"/>
-            <a:ext cx="54864" cy="658368"/>
-          </a:xfrm>
-          <a:prstGeom prst="rect">
-            <a:avLst/>
-          </a:prstGeom>
-          <a:solidFill>
-            <a:srgbClr val="2A9D8F"/>
-          </a:solidFill>
-          <a:ln/>
-        </p:spPr>
-      </p:sp>
-      <p:sp>
-        <p:nvSpPr>
-          <p:cNvPr id="20" name="Text 18"/>
-          <p:cNvSpPr/>
-          <p:nvPr/>
-        </p:nvSpPr>
-        <p:spPr>
-          <a:xfrm>
-            <a:off x="4937760" y="1819656"/>
-            <a:ext cx="1463040" cy="658368"/>
+          <a:ln w="9525">
+            <a:solidFill>
+              <a:srgbClr val="E5E2DC"/>
+            </a:solidFill>
+            <a:prstDash val="solid"/>
+          </a:ln>
+        </p:spPr>
+      </p:sp>
+      <p:sp>
+        <p:nvSpPr>
+          <p:cNvPr id="18" name="Text 16"/>
+          <p:cNvSpPr/>
+          <p:nvPr/>
+        </p:nvSpPr>
+        <p:spPr>
+          <a:xfrm>
+            <a:off x="4160520" y="2359152"/>
+            <a:ext cx="2926080" cy="320040"/>
           </a:xfrm>
           <a:prstGeom prst="rect">
             <a:avLst/>
@@ -2208,37 +2271,37 @@
           <a:ln/>
         </p:spPr>
         <p:txBody>
-          <a:bodyPr wrap="square" lIns="0" tIns="0" rIns="0" bIns="0" rtlCol="0" anchor="ctr"/>
+          <a:bodyPr wrap="square" rtlCol="0" anchor="ctr"/>
           <a:lstStyle/>
           <a:p>
             <a:pPr indent="0" marL="0">
               <a:buNone/>
             </a:pPr>
             <a:r>
-              <a:rPr lang="en-US" sz="1300" b="1" dirty="0">
-                <a:solidFill>
-                  <a:srgbClr val="1B2A4A"/>
+              <a:rPr lang="en-US" sz="1400" b="1" dirty="0">
+                <a:solidFill>
+                  <a:srgbClr val="2A9D8F"/>
                 </a:solidFill>
                 <a:latin typeface="Georgia" pitchFamily="34" charset="0"/>
                 <a:ea typeface="Georgia" pitchFamily="34" charset="-122"/>
                 <a:cs typeface="Georgia" pitchFamily="34" charset="-120"/>
               </a:rPr>
-              <a:t>Composite</a:t>
-            </a:r>
-            <a:endParaRPr lang="en-US" sz="1300" dirty="0"/>
-          </a:p>
-        </p:txBody>
-      </p:sp>
-      <p:sp>
-        <p:nvSpPr>
-          <p:cNvPr id="21" name="Text 19"/>
-          <p:cNvSpPr/>
-          <p:nvPr/>
-        </p:nvSpPr>
-        <p:spPr>
-          <a:xfrm>
-            <a:off x="6400800" y="1819656"/>
-            <a:ext cx="1920240" cy="658368"/>
+              <a:t>Factor Pair</a:t>
+            </a:r>
+            <a:endParaRPr lang="en-US" sz="1400" dirty="0"/>
+          </a:p>
+        </p:txBody>
+      </p:sp>
+      <p:sp>
+        <p:nvSpPr>
+          <p:cNvPr id="19" name="Text 17"/>
+          <p:cNvSpPr/>
+          <p:nvPr/>
+        </p:nvSpPr>
+        <p:spPr>
+          <a:xfrm>
+            <a:off x="4160520" y="2697480"/>
+            <a:ext cx="2926080" cy="457200"/>
           </a:xfrm>
           <a:prstGeom prst="rect">
             <a:avLst/>
@@ -2247,10 +2310,13 @@
           <a:ln/>
         </p:spPr>
         <p:txBody>
-          <a:bodyPr wrap="square" lIns="0" tIns="0" rIns="0" bIns="0" rtlCol="0" anchor="ctr"/>
+          <a:bodyPr wrap="square" rtlCol="0" anchor="ctr"/>
           <a:lstStyle/>
           <a:p>
             <a:pPr indent="0" marL="0">
+              <a:lnSpc>
+                <a:spcPct val="130000"/>
+              </a:lnSpc>
               <a:buNone/>
             </a:pPr>
             <a:r>
@@ -2258,261 +2324,11 @@
                 <a:solidFill>
                   <a:srgbClr val="6B6660"/>
                 </a:solidFill>
-                <a:latin typeface="Calibri" pitchFamily="34" charset="0"/>
-                <a:ea typeface="Calibri" pitchFamily="34" charset="-122"/>
-                <a:cs typeface="Calibri" pitchFamily="34" charset="-120"/>
-              </a:rPr>
-              <a:t>A number with more than 2 factors</a:t>
-            </a:r>
-            <a:endParaRPr lang="en-US" sz="1100" dirty="0"/>
-          </a:p>
-        </p:txBody>
-      </p:sp>
-      <p:sp>
-        <p:nvSpPr>
-          <p:cNvPr id="22" name="Shape 20"/>
-          <p:cNvSpPr/>
-          <p:nvPr/>
-        </p:nvSpPr>
-        <p:spPr>
-          <a:xfrm>
-            <a:off x="731520" y="2587752"/>
-            <a:ext cx="3657600" cy="658368"/>
-          </a:xfrm>
-          <a:prstGeom prst="rect">
-            <a:avLst/>
-          </a:prstGeom>
-          <a:solidFill>
-            <a:srgbClr val="FFFFFF"/>
-          </a:solidFill>
-          <a:ln/>
-          <a:effectLst>
-            <a:outerShdw sx="100000" sy="100000" kx="0" ky="0" algn="bl" rotWithShape="0" blurRad="50800" dist="25400" dir="8100000">
-              <a:srgbClr val="000000">
-                <a:alpha val="10000"/>
-              </a:srgbClr>
-            </a:outerShdw>
-          </a:effectLst>
-        </p:spPr>
-      </p:sp>
-      <p:sp>
-        <p:nvSpPr>
-          <p:cNvPr id="23" name="Shape 21"/>
-          <p:cNvSpPr/>
-          <p:nvPr/>
-        </p:nvSpPr>
-        <p:spPr>
-          <a:xfrm>
-            <a:off x="731520" y="2587752"/>
-            <a:ext cx="54864" cy="658368"/>
-          </a:xfrm>
-          <a:prstGeom prst="rect">
-            <a:avLst/>
-          </a:prstGeom>
-          <a:solidFill>
-            <a:srgbClr val="2A9D8F"/>
-          </a:solidFill>
-          <a:ln/>
-        </p:spPr>
-      </p:sp>
-      <p:sp>
-        <p:nvSpPr>
-          <p:cNvPr id="24" name="Text 22"/>
-          <p:cNvSpPr/>
-          <p:nvPr/>
-        </p:nvSpPr>
-        <p:spPr>
-          <a:xfrm>
-            <a:off x="914400" y="2587752"/>
-            <a:ext cx="1463040" cy="658368"/>
-          </a:xfrm>
-          <a:prstGeom prst="rect">
-            <a:avLst/>
-          </a:prstGeom>
-          <a:noFill/>
-          <a:ln/>
-        </p:spPr>
-        <p:txBody>
-          <a:bodyPr wrap="square" lIns="0" tIns="0" rIns="0" bIns="0" rtlCol="0" anchor="ctr"/>
-          <a:lstStyle/>
-          <a:p>
-            <a:pPr indent="0" marL="0">
-              <a:buNone/>
-            </a:pPr>
-            <a:r>
-              <a:rPr lang="en-US" sz="1300" b="1" dirty="0">
-                <a:solidFill>
-                  <a:srgbClr val="1B2A4A"/>
-                </a:solidFill>
-                <a:latin typeface="Georgia" pitchFamily="34" charset="0"/>
-                <a:ea typeface="Georgia" pitchFamily="34" charset="-122"/>
-                <a:cs typeface="Georgia" pitchFamily="34" charset="-120"/>
-              </a:rPr>
-              <a:t>HCF</a:t>
-            </a:r>
-            <a:endParaRPr lang="en-US" sz="1300" dirty="0"/>
-          </a:p>
-        </p:txBody>
-      </p:sp>
-      <p:sp>
-        <p:nvSpPr>
-          <p:cNvPr id="25" name="Text 23"/>
-          <p:cNvSpPr/>
-          <p:nvPr/>
-        </p:nvSpPr>
-        <p:spPr>
-          <a:xfrm>
-            <a:off x="2377440" y="2587752"/>
-            <a:ext cx="1920240" cy="658368"/>
-          </a:xfrm>
-          <a:prstGeom prst="rect">
-            <a:avLst/>
-          </a:prstGeom>
-          <a:noFill/>
-          <a:ln/>
-        </p:spPr>
-        <p:txBody>
-          <a:bodyPr wrap="square" lIns="0" tIns="0" rIns="0" bIns="0" rtlCol="0" anchor="ctr"/>
-          <a:lstStyle/>
-          <a:p>
-            <a:pPr indent="0" marL="0">
-              <a:buNone/>
-            </a:pPr>
-            <a:r>
-              <a:rPr lang="en-US" sz="1100" dirty="0">
-                <a:solidFill>
-                  <a:srgbClr val="6B6660"/>
-                </a:solidFill>
-                <a:latin typeface="Calibri" pitchFamily="34" charset="0"/>
-                <a:ea typeface="Calibri" pitchFamily="34" charset="-122"/>
-                <a:cs typeface="Calibri" pitchFamily="34" charset="-120"/>
-              </a:rPr>
-              <a:t>Highest Common Factor</a:t>
-            </a:r>
-            <a:endParaRPr lang="en-US" sz="1100" dirty="0"/>
-          </a:p>
-        </p:txBody>
-      </p:sp>
-      <p:sp>
-        <p:nvSpPr>
-          <p:cNvPr id="26" name="Shape 24"/>
-          <p:cNvSpPr/>
-          <p:nvPr/>
-        </p:nvSpPr>
-        <p:spPr>
-          <a:xfrm>
-            <a:off x="4754880" y="2587752"/>
-            <a:ext cx="3657600" cy="658368"/>
-          </a:xfrm>
-          <a:prstGeom prst="rect">
-            <a:avLst/>
-          </a:prstGeom>
-          <a:solidFill>
-            <a:srgbClr val="FFFFFF"/>
-          </a:solidFill>
-          <a:ln/>
-          <a:effectLst>
-            <a:outerShdw sx="100000" sy="100000" kx="0" ky="0" algn="bl" rotWithShape="0" blurRad="50800" dist="25400" dir="8100000">
-              <a:srgbClr val="000000">
-                <a:alpha val="10000"/>
-              </a:srgbClr>
-            </a:outerShdw>
-          </a:effectLst>
-        </p:spPr>
-      </p:sp>
-      <p:sp>
-        <p:nvSpPr>
-          <p:cNvPr id="27" name="Shape 25"/>
-          <p:cNvSpPr/>
-          <p:nvPr/>
-        </p:nvSpPr>
-        <p:spPr>
-          <a:xfrm>
-            <a:off x="4754880" y="2587752"/>
-            <a:ext cx="54864" cy="658368"/>
-          </a:xfrm>
-          <a:prstGeom prst="rect">
-            <a:avLst/>
-          </a:prstGeom>
-          <a:solidFill>
-            <a:srgbClr val="2A9D8F"/>
-          </a:solidFill>
-          <a:ln/>
-        </p:spPr>
-      </p:sp>
-      <p:sp>
-        <p:nvSpPr>
-          <p:cNvPr id="28" name="Text 26"/>
-          <p:cNvSpPr/>
-          <p:nvPr/>
-        </p:nvSpPr>
-        <p:spPr>
-          <a:xfrm>
-            <a:off x="4937760" y="2587752"/>
-            <a:ext cx="1463040" cy="658368"/>
-          </a:xfrm>
-          <a:prstGeom prst="rect">
-            <a:avLst/>
-          </a:prstGeom>
-          <a:noFill/>
-          <a:ln/>
-        </p:spPr>
-        <p:txBody>
-          <a:bodyPr wrap="square" lIns="0" tIns="0" rIns="0" bIns="0" rtlCol="0" anchor="ctr"/>
-          <a:lstStyle/>
-          <a:p>
-            <a:pPr indent="0" marL="0">
-              <a:buNone/>
-            </a:pPr>
-            <a:r>
-              <a:rPr lang="en-US" sz="1300" b="1" dirty="0">
-                <a:solidFill>
-                  <a:srgbClr val="1B2A4A"/>
-                </a:solidFill>
-                <a:latin typeface="Georgia" pitchFamily="34" charset="0"/>
-                <a:ea typeface="Georgia" pitchFamily="34" charset="-122"/>
-                <a:cs typeface="Georgia" pitchFamily="34" charset="-120"/>
-              </a:rPr>
-              <a:t>LCM</a:t>
-            </a:r>
-            <a:endParaRPr lang="en-US" sz="1300" dirty="0"/>
-          </a:p>
-        </p:txBody>
-      </p:sp>
-      <p:sp>
-        <p:nvSpPr>
-          <p:cNvPr id="29" name="Text 27"/>
-          <p:cNvSpPr/>
-          <p:nvPr/>
-        </p:nvSpPr>
-        <p:spPr>
-          <a:xfrm>
-            <a:off x="6400800" y="2587752"/>
-            <a:ext cx="1920240" cy="658368"/>
-          </a:xfrm>
-          <a:prstGeom prst="rect">
-            <a:avLst/>
-          </a:prstGeom>
-          <a:noFill/>
-          <a:ln/>
-        </p:spPr>
-        <p:txBody>
-          <a:bodyPr wrap="square" lIns="0" tIns="0" rIns="0" bIns="0" rtlCol="0" anchor="ctr"/>
-          <a:lstStyle/>
-          <a:p>
-            <a:pPr indent="0" marL="0">
-              <a:buNone/>
-            </a:pPr>
-            <a:r>
-              <a:rPr lang="en-US" sz="1100" dirty="0">
-                <a:solidFill>
-                  <a:srgbClr val="6B6660"/>
-                </a:solidFill>
-                <a:latin typeface="Calibri" pitchFamily="34" charset="0"/>
-                <a:ea typeface="Calibri" pitchFamily="34" charset="-122"/>
-                <a:cs typeface="Calibri" pitchFamily="34" charset="-120"/>
-              </a:rPr>
-              <a:t>Lowest Common Multiple</a:t>
+                <a:latin typeface="Arial" pitchFamily="34" charset="0"/>
+                <a:ea typeface="Arial" pitchFamily="34" charset="-122"/>
+                <a:cs typeface="Arial" pitchFamily="34" charset="-120"/>
+              </a:rPr>
+              <a:t>Two numbers that multiply to give the original number.</a:t>
             </a:r>
             <a:endParaRPr lang="en-US" sz="1100" dirty="0"/>
           </a:p>
@@ -2559,47 +2375,7 @@
         <p:spPr>
           <a:xfrm>
             <a:off x="0" y="0"/>
-            <a:ext cx="9144000" cy="822960"/>
-          </a:xfrm>
-          <a:prstGeom prst="rect">
-            <a:avLst/>
-          </a:prstGeom>
-          <a:solidFill>
-            <a:srgbClr val="FFFFFF"/>
-          </a:solidFill>
-          <a:ln/>
-        </p:spPr>
-      </p:sp>
-      <p:sp>
-        <p:nvSpPr>
-          <p:cNvPr id="3" name="Shape 1"/>
-          <p:cNvSpPr/>
-          <p:nvPr/>
-        </p:nvSpPr>
-        <p:spPr>
-          <a:xfrm>
-            <a:off x="0" y="804672"/>
-            <a:ext cx="9144000" cy="27432"/>
-          </a:xfrm>
-          <a:prstGeom prst="rect">
-            <a:avLst/>
-          </a:prstGeom>
-          <a:solidFill>
-            <a:srgbClr val="E5E2DC"/>
-          </a:solidFill>
-          <a:ln/>
-        </p:spPr>
-      </p:sp>
-      <p:sp>
-        <p:nvSpPr>
-          <p:cNvPr id="4" name="Shape 2"/>
-          <p:cNvSpPr/>
-          <p:nvPr/>
-        </p:nvSpPr>
-        <p:spPr>
-          <a:xfrm>
-            <a:off x="548640" y="201168"/>
-            <a:ext cx="54864" cy="420624"/>
+            <a:ext cx="73152" cy="5148072"/>
           </a:xfrm>
           <a:prstGeom prst="rect">
             <a:avLst/>
@@ -2612,14 +2388,14 @@
       </p:sp>
       <p:sp>
         <p:nvSpPr>
-          <p:cNvPr id="5" name="Text 3"/>
-          <p:cNvSpPr/>
-          <p:nvPr/>
-        </p:nvSpPr>
-        <p:spPr>
-          <a:xfrm>
-            <a:off x="777240" y="137160"/>
-            <a:ext cx="7772400" cy="548640"/>
+          <p:cNvPr id="3" name="Text 1"/>
+          <p:cNvSpPr/>
+          <p:nvPr/>
+        </p:nvSpPr>
+        <p:spPr>
+          <a:xfrm>
+            <a:off x="548640" y="274320"/>
+            <a:ext cx="9144000" cy="640080"/>
           </a:xfrm>
           <a:prstGeom prst="rect">
             <a:avLst/>
@@ -2628,14 +2404,14 @@
           <a:ln/>
         </p:spPr>
         <p:txBody>
-          <a:bodyPr wrap="square" lIns="0" tIns="0" rIns="0" bIns="0" rtlCol="0" anchor="ctr"/>
+          <a:bodyPr wrap="square" rtlCol="0" anchor="ctr"/>
           <a:lstStyle/>
           <a:p>
             <a:pPr indent="0" marL="0">
               <a:buNone/>
             </a:pPr>
             <a:r>
-              <a:rPr lang="en-US" sz="2000" b="1" dirty="0">
+              <a:rPr lang="en-US" sz="2400" b="1" dirty="0">
                 <a:solidFill>
                   <a:srgbClr val="1B2A4A"/>
                 </a:solidFill>
@@ -2643,49 +2419,22 @@
                 <a:ea typeface="Georgia" pitchFamily="34" charset="-122"/>
                 <a:cs typeface="Georgia" pitchFamily="34" charset="-120"/>
               </a:rPr>
-              <a:t>Factors vs Multiples</a:t>
-            </a:r>
-            <a:endParaRPr lang="en-US" sz="2000" dirty="0"/>
-          </a:p>
-        </p:txBody>
-      </p:sp>
-      <p:sp>
-        <p:nvSpPr>
-          <p:cNvPr id="6" name="Shape 4"/>
-          <p:cNvSpPr/>
-          <p:nvPr/>
-        </p:nvSpPr>
-        <p:spPr>
-          <a:xfrm>
-            <a:off x="548640" y="1051560"/>
-            <a:ext cx="3840480" cy="3474720"/>
-          </a:xfrm>
-          <a:prstGeom prst="rect">
-            <a:avLst/>
-          </a:prstGeom>
-          <a:solidFill>
-            <a:srgbClr val="FFFFFF"/>
-          </a:solidFill>
-          <a:ln/>
-          <a:effectLst>
-            <a:outerShdw sx="100000" sy="100000" kx="0" ky="0" algn="bl" rotWithShape="0" blurRad="50800" dist="25400" dir="8100000">
-              <a:srgbClr val="000000">
-                <a:alpha val="10000"/>
-              </a:srgbClr>
-            </a:outerShdw>
-          </a:effectLst>
-        </p:spPr>
-      </p:sp>
-      <p:sp>
-        <p:nvSpPr>
-          <p:cNvPr id="7" name="Shape 5"/>
-          <p:cNvSpPr/>
-          <p:nvPr/>
-        </p:nvSpPr>
-        <p:spPr>
-          <a:xfrm>
-            <a:off x="548640" y="1051560"/>
-            <a:ext cx="3840480" cy="54864"/>
+              <a:t>Finding Factors</a:t>
+            </a:r>
+            <a:endParaRPr lang="en-US" sz="2400" dirty="0"/>
+          </a:p>
+        </p:txBody>
+      </p:sp>
+      <p:sp>
+        <p:nvSpPr>
+          <p:cNvPr id="4" name="Shape 2"/>
+          <p:cNvSpPr/>
+          <p:nvPr/>
+        </p:nvSpPr>
+        <p:spPr>
+          <a:xfrm>
+            <a:off x="548640" y="960120"/>
+            <a:ext cx="2286000" cy="36576"/>
           </a:xfrm>
           <a:prstGeom prst="rect">
             <a:avLst/>
@@ -2698,14 +2447,14 @@
       </p:sp>
       <p:sp>
         <p:nvSpPr>
-          <p:cNvPr id="8" name="Text 6"/>
-          <p:cNvSpPr/>
-          <p:nvPr/>
-        </p:nvSpPr>
-        <p:spPr>
-          <a:xfrm>
-            <a:off x="777240" y="1188720"/>
-            <a:ext cx="3383280" cy="457200"/>
+          <p:cNvPr id="5" name="Text 3"/>
+          <p:cNvSpPr/>
+          <p:nvPr/>
+        </p:nvSpPr>
+        <p:spPr>
+          <a:xfrm>
+            <a:off x="548640" y="1188720"/>
+            <a:ext cx="10058400" cy="3474720"/>
           </a:xfrm>
           <a:prstGeom prst="rect">
             <a:avLst/>
@@ -2714,364 +2463,117 @@
           <a:ln/>
         </p:spPr>
         <p:txBody>
-          <a:bodyPr wrap="square" lIns="0" tIns="0" rIns="0" bIns="0" rtlCol="0" anchor="ctr"/>
-          <a:lstStyle/>
-          <a:p>
-            <a:pPr indent="0" marL="0">
-              <a:buNone/>
-            </a:pPr>
-            <a:r>
-              <a:rPr lang="en-US" sz="1500" b="1" dirty="0">
-                <a:solidFill>
-                  <a:srgbClr val="1B2A4A"/>
-                </a:solidFill>
-                <a:latin typeface="Georgia" pitchFamily="34" charset="0"/>
-                <a:ea typeface="Georgia" pitchFamily="34" charset="-122"/>
-                <a:cs typeface="Georgia" pitchFamily="34" charset="-120"/>
-              </a:rPr>
-              <a:t>Factors</a:t>
-            </a:r>
-            <a:endParaRPr lang="en-US" sz="1500" dirty="0"/>
-          </a:p>
-        </p:txBody>
-      </p:sp>
-      <p:sp>
-        <p:nvSpPr>
-          <p:cNvPr id="9" name="Text 7"/>
-          <p:cNvSpPr/>
-          <p:nvPr/>
-        </p:nvSpPr>
-        <p:spPr>
-          <a:xfrm>
-            <a:off x="777240" y="1691640"/>
-            <a:ext cx="3383280" cy="2651760"/>
-          </a:xfrm>
-          <a:prstGeom prst="rect">
-            <a:avLst/>
-          </a:prstGeom>
-          <a:noFill/>
-          <a:ln/>
-        </p:spPr>
-        <p:txBody>
           <a:bodyPr wrap="square" rtlCol="0" anchor="t"/>
           <a:lstStyle/>
           <a:p>
-            <a:pPr marL="342900" indent="-342900">
+            <a:pPr>
+              <a:lnSpc>
+                <a:spcPct val="150000"/>
+              </a:lnSpc>
               <a:spcAft>
                 <a:spcPts val="600"/>
               </a:spcAft>
-              <a:buSzPct val="100000"/>
-              <a:buChar char="•"/>
-            </a:pPr>
-            <a:r>
-              <a:rPr lang="en-US" sz="1300" dirty="0">
+            </a:pPr>
+            <a:r>
+              <a:rPr lang="en-US" sz="1500" dirty="0">
                 <a:solidFill>
                   <a:srgbClr val="3D3A36"/>
                 </a:solidFill>
-                <a:latin typeface="Calibri" pitchFamily="34" charset="0"/>
-                <a:ea typeface="Calibri" pitchFamily="34" charset="-122"/>
-                <a:cs typeface="Calibri" pitchFamily="34" charset="-120"/>
-              </a:rPr>
-              <a:t>Numbers that divide INTO a number exactly</a:t>
-            </a:r>
-            <a:endParaRPr lang="en-US" sz="1300" dirty="0"/>
-          </a:p>
-          <a:p>
-            <a:pPr marL="342900" indent="-342900">
+                <a:latin typeface="Arial" pitchFamily="34" charset="0"/>
+                <a:ea typeface="Arial" pitchFamily="34" charset="-122"/>
+                <a:cs typeface="Arial" pitchFamily="34" charset="-120"/>
+              </a:rPr>
+              <a:t>Factors of 12: 1, 2, 3, 4, 6, 12 (all divide into 12 exactly).</a:t>
+            </a:r>
+            <a:endParaRPr lang="en-US" sz="1500" dirty="0"/>
+          </a:p>
+          <a:p>
+            <a:pPr>
+              <a:lnSpc>
+                <a:spcPct val="150000"/>
+              </a:lnSpc>
               <a:spcAft>
                 <a:spcPts val="600"/>
               </a:spcAft>
-              <a:buSzPct val="100000"/>
-              <a:buChar char="•"/>
-            </a:pPr>
-            <a:r>
-              <a:rPr lang="en-US" sz="1300" dirty="0">
+            </a:pPr>
+            <a:r>
+              <a:rPr lang="en-US" sz="1500" dirty="0">
                 <a:solidFill>
                   <a:srgbClr val="3D3A36"/>
                 </a:solidFill>
-                <a:latin typeface="Calibri" pitchFamily="34" charset="0"/>
-                <a:ea typeface="Calibri" pitchFamily="34" charset="-122"/>
-                <a:cs typeface="Calibri" pitchFamily="34" charset="-120"/>
-              </a:rPr>
-              <a:t>Factors of 12: 1, 2, 3, 4, 6, 12</a:t>
-            </a:r>
-            <a:endParaRPr lang="en-US" sz="1300" dirty="0"/>
-          </a:p>
-          <a:p>
-            <a:pPr marL="342900" indent="-342900">
+                <a:latin typeface="Arial" pitchFamily="34" charset="0"/>
+                <a:ea typeface="Arial" pitchFamily="34" charset="-122"/>
+                <a:cs typeface="Arial" pitchFamily="34" charset="-120"/>
+              </a:rPr>
+              <a:t>Work in PAIRS: 1×12, 2×6, 3×4.</a:t>
+            </a:r>
+            <a:endParaRPr lang="en-US" sz="1500" dirty="0"/>
+          </a:p>
+          <a:p>
+            <a:pPr>
+              <a:lnSpc>
+                <a:spcPct val="150000"/>
+              </a:lnSpc>
               <a:spcAft>
                 <a:spcPts val="600"/>
               </a:spcAft>
-              <a:buSzPct val="100000"/>
-              <a:buChar char="•"/>
-            </a:pPr>
-            <a:r>
-              <a:rPr lang="en-US" sz="1300" dirty="0">
+            </a:pPr>
+            <a:r>
+              <a:rPr lang="en-US" sz="1500" dirty="0">
                 <a:solidFill>
                   <a:srgbClr val="3D3A36"/>
                 </a:solidFill>
-                <a:latin typeface="Calibri" pitchFamily="34" charset="0"/>
-                <a:ea typeface="Calibri" pitchFamily="34" charset="-122"/>
-                <a:cs typeface="Calibri" pitchFamily="34" charset="-120"/>
-              </a:rPr>
-              <a:t>Always start from 1 and the number itself</a:t>
-            </a:r>
-            <a:endParaRPr lang="en-US" sz="1300" dirty="0"/>
-          </a:p>
-          <a:p>
-            <a:pPr marL="342900" indent="-342900">
+                <a:latin typeface="Arial" pitchFamily="34" charset="0"/>
+                <a:ea typeface="Arial" pitchFamily="34" charset="-122"/>
+                <a:cs typeface="Arial" pitchFamily="34" charset="-120"/>
+              </a:rPr>
+              <a:t>Start from 1 and work up — stop when pairs start repeating.</a:t>
+            </a:r>
+            <a:endParaRPr lang="en-US" sz="1500" dirty="0"/>
+          </a:p>
+          <a:p>
+            <a:pPr>
+              <a:lnSpc>
+                <a:spcPct val="150000"/>
+              </a:lnSpc>
               <a:spcAft>
                 <a:spcPts val="600"/>
               </a:spcAft>
-              <a:buSzPct val="100000"/>
-              <a:buChar char="•"/>
-            </a:pPr>
-            <a:r>
-              <a:rPr lang="en-US" sz="1300" dirty="0">
+            </a:pPr>
+            <a:r>
+              <a:rPr lang="en-US" sz="1500" dirty="0">
                 <a:solidFill>
                   <a:srgbClr val="3D3A36"/>
                 </a:solidFill>
-                <a:latin typeface="Calibri" pitchFamily="34" charset="0"/>
-                <a:ea typeface="Calibri" pitchFamily="34" charset="-122"/>
-                <a:cs typeface="Calibri" pitchFamily="34" charset="-120"/>
-              </a:rPr>
-              <a:t>Work in pairs: 1×12, 2×6, 3×4</a:t>
-            </a:r>
-            <a:endParaRPr lang="en-US" sz="1300" dirty="0"/>
-          </a:p>
-          <a:p>
-            <a:pPr marL="342900" indent="-342900">
+                <a:latin typeface="Arial" pitchFamily="34" charset="0"/>
+                <a:ea typeface="Arial" pitchFamily="34" charset="-122"/>
+                <a:cs typeface="Arial" pitchFamily="34" charset="-120"/>
+              </a:rPr>
+              <a:t>Every number has at least 2 factors: 1 and itself.</a:t>
+            </a:r>
+            <a:endParaRPr lang="en-US" sz="1500" dirty="0"/>
+          </a:p>
+          <a:p>
+            <a:pPr>
+              <a:lnSpc>
+                <a:spcPct val="150000"/>
+              </a:lnSpc>
               <a:spcAft>
                 <a:spcPts val="600"/>
               </a:spcAft>
-              <a:buSzPct val="100000"/>
-              <a:buChar char="•"/>
-            </a:pPr>
-            <a:r>
-              <a:rPr lang="en-US" sz="1300" dirty="0">
+            </a:pPr>
+            <a:r>
+              <a:rPr lang="en-US" sz="1500" dirty="0">
                 <a:solidFill>
                   <a:srgbClr val="3D3A36"/>
                 </a:solidFill>
-                <a:latin typeface="Calibri" pitchFamily="34" charset="0"/>
-                <a:ea typeface="Calibri" pitchFamily="34" charset="-122"/>
-                <a:cs typeface="Calibri" pitchFamily="34" charset="-120"/>
-              </a:rPr>
-              <a:t>Factors get SMALLER — there's a fixed set</a:t>
-            </a:r>
-            <a:endParaRPr lang="en-US" sz="1300" dirty="0"/>
-          </a:p>
-        </p:txBody>
-      </p:sp>
-      <p:sp>
-        <p:nvSpPr>
-          <p:cNvPr id="10" name="Shape 8"/>
-          <p:cNvSpPr/>
-          <p:nvPr/>
-        </p:nvSpPr>
-        <p:spPr>
-          <a:xfrm>
-            <a:off x="4754880" y="1051560"/>
-            <a:ext cx="3840480" cy="3474720"/>
-          </a:xfrm>
-          <a:prstGeom prst="rect">
-            <a:avLst/>
-          </a:prstGeom>
-          <a:solidFill>
-            <a:srgbClr val="FFFFFF"/>
-          </a:solidFill>
-          <a:ln/>
-          <a:effectLst>
-            <a:outerShdw sx="100000" sy="100000" kx="0" ky="0" algn="bl" rotWithShape="0" blurRad="50800" dist="25400" dir="8100000">
-              <a:srgbClr val="000000">
-                <a:alpha val="10000"/>
-              </a:srgbClr>
-            </a:outerShdw>
-          </a:effectLst>
-        </p:spPr>
-      </p:sp>
-      <p:sp>
-        <p:nvSpPr>
-          <p:cNvPr id="11" name="Shape 9"/>
-          <p:cNvSpPr/>
-          <p:nvPr/>
-        </p:nvSpPr>
-        <p:spPr>
-          <a:xfrm>
-            <a:off x="4754880" y="1051560"/>
-            <a:ext cx="3840480" cy="54864"/>
-          </a:xfrm>
-          <a:prstGeom prst="rect">
-            <a:avLst/>
-          </a:prstGeom>
-          <a:solidFill>
-            <a:srgbClr val="E9C46A"/>
-          </a:solidFill>
-          <a:ln/>
-        </p:spPr>
-      </p:sp>
-      <p:sp>
-        <p:nvSpPr>
-          <p:cNvPr id="12" name="Text 10"/>
-          <p:cNvSpPr/>
-          <p:nvPr/>
-        </p:nvSpPr>
-        <p:spPr>
-          <a:xfrm>
-            <a:off x="4983480" y="1188720"/>
-            <a:ext cx="3383280" cy="457200"/>
-          </a:xfrm>
-          <a:prstGeom prst="rect">
-            <a:avLst/>
-          </a:prstGeom>
-          <a:noFill/>
-          <a:ln/>
-        </p:spPr>
-        <p:txBody>
-          <a:bodyPr wrap="square" lIns="0" tIns="0" rIns="0" bIns="0" rtlCol="0" anchor="ctr"/>
-          <a:lstStyle/>
-          <a:p>
-            <a:pPr indent="0" marL="0">
-              <a:buNone/>
-            </a:pPr>
-            <a:r>
-              <a:rPr lang="en-US" sz="1500" b="1" dirty="0">
-                <a:solidFill>
-                  <a:srgbClr val="1B2A4A"/>
-                </a:solidFill>
-                <a:latin typeface="Georgia" pitchFamily="34" charset="0"/>
-                <a:ea typeface="Georgia" pitchFamily="34" charset="-122"/>
-                <a:cs typeface="Georgia" pitchFamily="34" charset="-120"/>
-              </a:rPr>
-              <a:t>Multiples</a:t>
+                <a:latin typeface="Arial" pitchFamily="34" charset="0"/>
+                <a:ea typeface="Arial" pitchFamily="34" charset="-122"/>
+                <a:cs typeface="Arial" pitchFamily="34" charset="-120"/>
+              </a:rPr>
+              <a:t>Square numbers have an ODD number of factors (e.g. 9: 1, 3, 9).</a:t>
             </a:r>
             <a:endParaRPr lang="en-US" sz="1500" dirty="0"/>
-          </a:p>
-        </p:txBody>
-      </p:sp>
-      <p:sp>
-        <p:nvSpPr>
-          <p:cNvPr id="13" name="Text 11"/>
-          <p:cNvSpPr/>
-          <p:nvPr/>
-        </p:nvSpPr>
-        <p:spPr>
-          <a:xfrm>
-            <a:off x="4983480" y="1691640"/>
-            <a:ext cx="3383280" cy="2651760"/>
-          </a:xfrm>
-          <a:prstGeom prst="rect">
-            <a:avLst/>
-          </a:prstGeom>
-          <a:noFill/>
-          <a:ln/>
-        </p:spPr>
-        <p:txBody>
-          <a:bodyPr wrap="square" rtlCol="0" anchor="t"/>
-          <a:lstStyle/>
-          <a:p>
-            <a:pPr marL="342900" indent="-342900">
-              <a:spcAft>
-                <a:spcPts val="600"/>
-              </a:spcAft>
-              <a:buSzPct val="100000"/>
-              <a:buChar char="•"/>
-            </a:pPr>
-            <a:r>
-              <a:rPr lang="en-US" sz="1300" dirty="0">
-                <a:solidFill>
-                  <a:srgbClr val="3D3A36"/>
-                </a:solidFill>
-                <a:latin typeface="Calibri" pitchFamily="34" charset="0"/>
-                <a:ea typeface="Calibri" pitchFamily="34" charset="-122"/>
-                <a:cs typeface="Calibri" pitchFamily="34" charset="-120"/>
-              </a:rPr>
-              <a:t>The TIMES TABLE of a number</a:t>
-            </a:r>
-            <a:endParaRPr lang="en-US" sz="1300" dirty="0"/>
-          </a:p>
-          <a:p>
-            <a:pPr marL="342900" indent="-342900">
-              <a:spcAft>
-                <a:spcPts val="600"/>
-              </a:spcAft>
-              <a:buSzPct val="100000"/>
-              <a:buChar char="•"/>
-            </a:pPr>
-            <a:r>
-              <a:rPr lang="en-US" sz="1300" dirty="0">
-                <a:solidFill>
-                  <a:srgbClr val="3D3A36"/>
-                </a:solidFill>
-                <a:latin typeface="Calibri" pitchFamily="34" charset="0"/>
-                <a:ea typeface="Calibri" pitchFamily="34" charset="-122"/>
-                <a:cs typeface="Calibri" pitchFamily="34" charset="-120"/>
-              </a:rPr>
-              <a:t>Multiples of 3: 3, 6, 9, 12, 15, 18...</a:t>
-            </a:r>
-            <a:endParaRPr lang="en-US" sz="1300" dirty="0"/>
-          </a:p>
-          <a:p>
-            <a:pPr marL="342900" indent="-342900">
-              <a:spcAft>
-                <a:spcPts val="600"/>
-              </a:spcAft>
-              <a:buSzPct val="100000"/>
-              <a:buChar char="•"/>
-            </a:pPr>
-            <a:r>
-              <a:rPr lang="en-US" sz="1300" dirty="0">
-                <a:solidFill>
-                  <a:srgbClr val="3D3A36"/>
-                </a:solidFill>
-                <a:latin typeface="Calibri" pitchFamily="34" charset="0"/>
-                <a:ea typeface="Calibri" pitchFamily="34" charset="-122"/>
-                <a:cs typeface="Calibri" pitchFamily="34" charset="-120"/>
-              </a:rPr>
-              <a:t>Start from the number and keep adding</a:t>
-            </a:r>
-            <a:endParaRPr lang="en-US" sz="1300" dirty="0"/>
-          </a:p>
-          <a:p>
-            <a:pPr marL="342900" indent="-342900">
-              <a:spcAft>
-                <a:spcPts val="600"/>
-              </a:spcAft>
-              <a:buSzPct val="100000"/>
-              <a:buChar char="•"/>
-            </a:pPr>
-            <a:r>
-              <a:rPr lang="en-US" sz="1300" dirty="0">
-                <a:solidFill>
-                  <a:srgbClr val="3D3A36"/>
-                </a:solidFill>
-                <a:latin typeface="Calibri" pitchFamily="34" charset="0"/>
-                <a:ea typeface="Calibri" pitchFamily="34" charset="-122"/>
-                <a:cs typeface="Calibri" pitchFamily="34" charset="-120"/>
-              </a:rPr>
-              <a:t>Multiples go on FOREVER</a:t>
-            </a:r>
-            <a:endParaRPr lang="en-US" sz="1300" dirty="0"/>
-          </a:p>
-          <a:p>
-            <a:pPr marL="342900" indent="-342900">
-              <a:spcAft>
-                <a:spcPts val="600"/>
-              </a:spcAft>
-              <a:buSzPct val="100000"/>
-              <a:buChar char="•"/>
-            </a:pPr>
-            <a:r>
-              <a:rPr lang="en-US" sz="1300" dirty="0">
-                <a:solidFill>
-                  <a:srgbClr val="3D3A36"/>
-                </a:solidFill>
-                <a:latin typeface="Calibri" pitchFamily="34" charset="0"/>
-                <a:ea typeface="Calibri" pitchFamily="34" charset="-122"/>
-                <a:cs typeface="Calibri" pitchFamily="34" charset="-120"/>
-              </a:rPr>
-              <a:t>Every number has infinite multiples</a:t>
-            </a:r>
-            <a:endParaRPr lang="en-US" sz="1300" dirty="0"/>
           </a:p>
         </p:txBody>
       </p:sp>
@@ -3116,47 +2618,7 @@
         <p:spPr>
           <a:xfrm>
             <a:off x="0" y="0"/>
-            <a:ext cx="9144000" cy="822960"/>
-          </a:xfrm>
-          <a:prstGeom prst="rect">
-            <a:avLst/>
-          </a:prstGeom>
-          <a:solidFill>
-            <a:srgbClr val="FFFFFF"/>
-          </a:solidFill>
-          <a:ln/>
-        </p:spPr>
-      </p:sp>
-      <p:sp>
-        <p:nvSpPr>
-          <p:cNvPr id="3" name="Shape 1"/>
-          <p:cNvSpPr/>
-          <p:nvPr/>
-        </p:nvSpPr>
-        <p:spPr>
-          <a:xfrm>
-            <a:off x="0" y="804672"/>
-            <a:ext cx="9144000" cy="27432"/>
-          </a:xfrm>
-          <a:prstGeom prst="rect">
-            <a:avLst/>
-          </a:prstGeom>
-          <a:solidFill>
-            <a:srgbClr val="E5E2DC"/>
-          </a:solidFill>
-          <a:ln/>
-        </p:spPr>
-      </p:sp>
-      <p:sp>
-        <p:nvSpPr>
-          <p:cNvPr id="4" name="Shape 2"/>
-          <p:cNvSpPr/>
-          <p:nvPr/>
-        </p:nvSpPr>
-        <p:spPr>
-          <a:xfrm>
-            <a:off x="548640" y="201168"/>
-            <a:ext cx="54864" cy="420624"/>
+            <a:ext cx="73152" cy="5148072"/>
           </a:xfrm>
           <a:prstGeom prst="rect">
             <a:avLst/>
@@ -3169,14 +2631,14 @@
       </p:sp>
       <p:sp>
         <p:nvSpPr>
-          <p:cNvPr id="5" name="Text 3"/>
-          <p:cNvSpPr/>
-          <p:nvPr/>
-        </p:nvSpPr>
-        <p:spPr>
-          <a:xfrm>
-            <a:off x="777240" y="137160"/>
-            <a:ext cx="7772400" cy="548640"/>
+          <p:cNvPr id="3" name="Text 1"/>
+          <p:cNvSpPr/>
+          <p:nvPr/>
+        </p:nvSpPr>
+        <p:spPr>
+          <a:xfrm>
+            <a:off x="548640" y="274320"/>
+            <a:ext cx="9144000" cy="640080"/>
           </a:xfrm>
           <a:prstGeom prst="rect">
             <a:avLst/>
@@ -3185,14 +2647,14 @@
           <a:ln/>
         </p:spPr>
         <p:txBody>
-          <a:bodyPr wrap="square" lIns="0" tIns="0" rIns="0" bIns="0" rtlCol="0" anchor="ctr"/>
+          <a:bodyPr wrap="square" rtlCol="0" anchor="ctr"/>
           <a:lstStyle/>
           <a:p>
             <a:pPr indent="0" marL="0">
               <a:buNone/>
             </a:pPr>
             <a:r>
-              <a:rPr lang="en-US" sz="2000" b="1" dirty="0">
+              <a:rPr lang="en-US" sz="2400" b="1" dirty="0">
                 <a:solidFill>
                   <a:srgbClr val="1B2A4A"/>
                 </a:solidFill>
@@ -3200,22 +2662,42 @@
                 <a:ea typeface="Georgia" pitchFamily="34" charset="-122"/>
                 <a:cs typeface="Georgia" pitchFamily="34" charset="-120"/>
               </a:rPr>
-              <a:t>Prime Numbers</a:t>
-            </a:r>
-            <a:endParaRPr lang="en-US" sz="2000" dirty="0"/>
-          </a:p>
-        </p:txBody>
-      </p:sp>
-      <p:sp>
-        <p:nvSpPr>
-          <p:cNvPr id="6" name="Text 4"/>
-          <p:cNvSpPr/>
-          <p:nvPr/>
-        </p:nvSpPr>
-        <p:spPr>
-          <a:xfrm>
-            <a:off x="731520" y="1051560"/>
-            <a:ext cx="7680960" cy="3108960"/>
+              <a:t>Multiples — Times Tables</a:t>
+            </a:r>
+            <a:endParaRPr lang="en-US" sz="2400" dirty="0"/>
+          </a:p>
+        </p:txBody>
+      </p:sp>
+      <p:sp>
+        <p:nvSpPr>
+          <p:cNvPr id="4" name="Shape 2"/>
+          <p:cNvSpPr/>
+          <p:nvPr/>
+        </p:nvSpPr>
+        <p:spPr>
+          <a:xfrm>
+            <a:off x="548640" y="960120"/>
+            <a:ext cx="2286000" cy="36576"/>
+          </a:xfrm>
+          <a:prstGeom prst="rect">
+            <a:avLst/>
+          </a:prstGeom>
+          <a:solidFill>
+            <a:srgbClr val="2A9D8F"/>
+          </a:solidFill>
+          <a:ln/>
+        </p:spPr>
+      </p:sp>
+      <p:sp>
+        <p:nvSpPr>
+          <p:cNvPr id="5" name="Text 3"/>
+          <p:cNvSpPr/>
+          <p:nvPr/>
+        </p:nvSpPr>
+        <p:spPr>
+          <a:xfrm>
+            <a:off x="548640" y="1188720"/>
+            <a:ext cx="10058400" cy="3474720"/>
           </a:xfrm>
           <a:prstGeom prst="rect">
             <a:avLst/>
@@ -3227,189 +2709,114 @@
           <a:bodyPr wrap="square" rtlCol="0" anchor="t"/>
           <a:lstStyle/>
           <a:p>
-            <a:pPr marL="342900" indent="-342900">
+            <a:pPr>
+              <a:lnSpc>
+                <a:spcPct val="150000"/>
+              </a:lnSpc>
               <a:spcAft>
-                <a:spcPts val="800"/>
+                <a:spcPts val="600"/>
               </a:spcAft>
-              <a:buSzPct val="100000"/>
-              <a:buChar char="•"/>
             </a:pPr>
             <a:r>
               <a:rPr lang="en-US" sz="1500" dirty="0">
                 <a:solidFill>
                   <a:srgbClr val="3D3A36"/>
                 </a:solidFill>
-                <a:latin typeface="Calibri" pitchFamily="34" charset="0"/>
-                <a:ea typeface="Calibri" pitchFamily="34" charset="-122"/>
-                <a:cs typeface="Calibri" pitchFamily="34" charset="-120"/>
-              </a:rPr>
-              <a:t>A prime number has EXACTLY 2 factors: 1 and itself.</a:t>
+                <a:latin typeface="Arial" pitchFamily="34" charset="0"/>
+                <a:ea typeface="Arial" pitchFamily="34" charset="-122"/>
+                <a:cs typeface="Arial" pitchFamily="34" charset="-120"/>
+              </a:rPr>
+              <a:t>Multiples of 3: 3, 6, 9, 12, 15, 18, 21, 24, ...</a:t>
             </a:r>
             <a:endParaRPr lang="en-US" sz="1500" dirty="0"/>
           </a:p>
           <a:p>
-            <a:pPr marL="342900" indent="-342900">
+            <a:pPr>
+              <a:lnSpc>
+                <a:spcPct val="150000"/>
+              </a:lnSpc>
               <a:spcAft>
-                <a:spcPts val="800"/>
+                <a:spcPts val="600"/>
               </a:spcAft>
-              <a:buSzPct val="100000"/>
-              <a:buChar char="•"/>
             </a:pPr>
             <a:r>
               <a:rPr lang="en-US" sz="1500" dirty="0">
                 <a:solidFill>
                   <a:srgbClr val="3D3A36"/>
                 </a:solidFill>
-                <a:latin typeface="Calibri" pitchFamily="34" charset="0"/>
-                <a:ea typeface="Calibri" pitchFamily="34" charset="-122"/>
-                <a:cs typeface="Calibri" pitchFamily="34" charset="-120"/>
-              </a:rPr>
-              <a:t>First primes: 2, 3, 5, 7, 11, 13, 17, 19, 23, 29, 31...</a:t>
+                <a:latin typeface="Arial" pitchFamily="34" charset="0"/>
+                <a:ea typeface="Arial" pitchFamily="34" charset="-122"/>
+                <a:cs typeface="Arial" pitchFamily="34" charset="-120"/>
+              </a:rPr>
+              <a:t>Multiples of 7: 7, 14, 21, 28, 35, 42, ...</a:t>
             </a:r>
             <a:endParaRPr lang="en-US" sz="1500" dirty="0"/>
           </a:p>
           <a:p>
-            <a:pPr marL="342900" indent="-342900">
+            <a:pPr>
+              <a:lnSpc>
+                <a:spcPct val="150000"/>
+              </a:lnSpc>
               <a:spcAft>
-                <a:spcPts val="800"/>
+                <a:spcPts val="600"/>
               </a:spcAft>
-              <a:buSzPct val="100000"/>
-              <a:buChar char="•"/>
             </a:pPr>
             <a:r>
               <a:rPr lang="en-US" sz="1500" dirty="0">
                 <a:solidFill>
                   <a:srgbClr val="3D3A36"/>
                 </a:solidFill>
-                <a:latin typeface="Calibri" pitchFamily="34" charset="0"/>
-                <a:ea typeface="Calibri" pitchFamily="34" charset="-122"/>
-                <a:cs typeface="Calibri" pitchFamily="34" charset="-120"/>
-              </a:rPr>
-              <a:t>2 is the ONLY even prime number.</a:t>
+                <a:latin typeface="Arial" pitchFamily="34" charset="0"/>
+                <a:ea typeface="Arial" pitchFamily="34" charset="-122"/>
+                <a:cs typeface="Arial" pitchFamily="34" charset="-120"/>
+              </a:rPr>
+              <a:t>The list of multiples goes on FOREVER.</a:t>
             </a:r>
             <a:endParaRPr lang="en-US" sz="1500" dirty="0"/>
           </a:p>
           <a:p>
-            <a:pPr marL="342900" indent="-342900">
+            <a:pPr>
+              <a:lnSpc>
+                <a:spcPct val="150000"/>
+              </a:lnSpc>
               <a:spcAft>
-                <a:spcPts val="800"/>
+                <a:spcPts val="600"/>
               </a:spcAft>
-              <a:buSzPct val="100000"/>
-              <a:buChar char="•"/>
             </a:pPr>
             <a:r>
               <a:rPr lang="en-US" sz="1500" dirty="0">
                 <a:solidFill>
                   <a:srgbClr val="3D3A36"/>
                 </a:solidFill>
-                <a:latin typeface="Calibri" pitchFamily="34" charset="0"/>
-                <a:ea typeface="Calibri" pitchFamily="34" charset="-122"/>
-                <a:cs typeface="Calibri" pitchFamily="34" charset="-120"/>
-              </a:rPr>
-              <a:t>1 is NOT prime (it only has one factor).</a:t>
+                <a:latin typeface="Arial" pitchFamily="34" charset="0"/>
+                <a:ea typeface="Arial" pitchFamily="34" charset="-122"/>
+                <a:cs typeface="Arial" pitchFamily="34" charset="-120"/>
+              </a:rPr>
+              <a:t>COMMON MULTIPLE: a number in BOTH lists.</a:t>
             </a:r>
             <a:endParaRPr lang="en-US" sz="1500" dirty="0"/>
           </a:p>
           <a:p>
-            <a:pPr marL="342900" indent="-342900">
+            <a:pPr>
+              <a:lnSpc>
+                <a:spcPct val="150000"/>
+              </a:lnSpc>
               <a:spcAft>
-                <a:spcPts val="800"/>
+                <a:spcPts val="600"/>
               </a:spcAft>
-              <a:buSzPct val="100000"/>
-              <a:buChar char="•"/>
             </a:pPr>
             <a:r>
               <a:rPr lang="en-US" sz="1500" dirty="0">
                 <a:solidFill>
                   <a:srgbClr val="3D3A36"/>
                 </a:solidFill>
-                <a:latin typeface="Calibri" pitchFamily="34" charset="0"/>
-                <a:ea typeface="Calibri" pitchFamily="34" charset="-122"/>
-                <a:cs typeface="Calibri" pitchFamily="34" charset="-120"/>
-              </a:rPr>
-              <a:t>Every whole number &gt; 1 is either prime or can be written as a product of primes.</a:t>
+                <a:latin typeface="Arial" pitchFamily="34" charset="0"/>
+                <a:ea typeface="Arial" pitchFamily="34" charset="-122"/>
+                <a:cs typeface="Arial" pitchFamily="34" charset="-120"/>
+              </a:rPr>
+              <a:t>Common multiples of 3 and 4: 12, 24, 36, 48, ...</a:t>
             </a:r>
             <a:endParaRPr lang="en-US" sz="1500" dirty="0"/>
-          </a:p>
-        </p:txBody>
-      </p:sp>
-      <p:sp>
-        <p:nvSpPr>
-          <p:cNvPr id="7" name="Shape 5"/>
-          <p:cNvSpPr/>
-          <p:nvPr/>
-        </p:nvSpPr>
-        <p:spPr>
-          <a:xfrm>
-            <a:off x="731520" y="4206240"/>
-            <a:ext cx="7680960" cy="640080"/>
-          </a:xfrm>
-          <a:prstGeom prst="rect">
-            <a:avLst/>
-          </a:prstGeom>
-          <a:solidFill>
-            <a:srgbClr val="E8F5F3"/>
-          </a:solidFill>
-          <a:ln/>
-          <a:effectLst>
-            <a:outerShdw sx="100000" sy="100000" kx="0" ky="0" algn="bl" rotWithShape="0" blurRad="50800" dist="25400" dir="8100000">
-              <a:srgbClr val="000000">
-                <a:alpha val="10000"/>
-              </a:srgbClr>
-            </a:outerShdw>
-          </a:effectLst>
-        </p:spPr>
-      </p:sp>
-      <p:sp>
-        <p:nvSpPr>
-          <p:cNvPr id="8" name="Text 6"/>
-          <p:cNvSpPr/>
-          <p:nvPr/>
-        </p:nvSpPr>
-        <p:spPr>
-          <a:xfrm>
-            <a:off x="914400" y="4251960"/>
-            <a:ext cx="7315200" cy="548640"/>
-          </a:xfrm>
-          <a:prstGeom prst="rect">
-            <a:avLst/>
-          </a:prstGeom>
-          <a:noFill/>
-          <a:ln/>
-        </p:spPr>
-        <p:txBody>
-          <a:bodyPr wrap="square" rtlCol="0" anchor="ctr"/>
-          <a:lstStyle/>
-          <a:p>
-            <a:pPr indent="0" marL="0">
-              <a:buNone/>
-            </a:pPr>
-            <a:r>
-              <a:rPr lang="en-US" sz="1200" b="1" dirty="0">
-                <a:solidFill>
-                  <a:srgbClr val="2A9D8F"/>
-                </a:solidFill>
-                <a:latin typeface="Calibri" pitchFamily="34" charset="0"/>
-                <a:ea typeface="Calibri" pitchFamily="34" charset="-122"/>
-                <a:cs typeface="Calibri" pitchFamily="34" charset="-120"/>
-              </a:rPr>
-              <a:t>Key Idea: </a:t>
-            </a:r>
-            <a:pPr indent="0" marL="0">
-              <a:buNone/>
-            </a:pPr>
-            <a:r>
-              <a:rPr lang="en-US" sz="1200" i="1" dirty="0">
-                <a:solidFill>
-                  <a:srgbClr val="3D3A36"/>
-                </a:solidFill>
-                <a:latin typeface="Calibri" pitchFamily="34" charset="0"/>
-                <a:ea typeface="Calibri" pitchFamily="34" charset="-122"/>
-                <a:cs typeface="Calibri" pitchFamily="34" charset="-120"/>
-              </a:rPr>
-              <a:t>There are infinitely many prime numbers — they go on forever.</a:t>
-            </a:r>
-            <a:endParaRPr lang="en-US" sz="1200" dirty="0"/>
           </a:p>
         </p:txBody>
       </p:sp>
@@ -3454,47 +2861,7 @@
         <p:spPr>
           <a:xfrm>
             <a:off x="0" y="0"/>
-            <a:ext cx="9144000" cy="822960"/>
-          </a:xfrm>
-          <a:prstGeom prst="rect">
-            <a:avLst/>
-          </a:prstGeom>
-          <a:solidFill>
-            <a:srgbClr val="FFFFFF"/>
-          </a:solidFill>
-          <a:ln/>
-        </p:spPr>
-      </p:sp>
-      <p:sp>
-        <p:nvSpPr>
-          <p:cNvPr id="3" name="Shape 1"/>
-          <p:cNvSpPr/>
-          <p:nvPr/>
-        </p:nvSpPr>
-        <p:spPr>
-          <a:xfrm>
-            <a:off x="0" y="804672"/>
-            <a:ext cx="9144000" cy="27432"/>
-          </a:xfrm>
-          <a:prstGeom prst="rect">
-            <a:avLst/>
-          </a:prstGeom>
-          <a:solidFill>
-            <a:srgbClr val="E5E2DC"/>
-          </a:solidFill>
-          <a:ln/>
-        </p:spPr>
-      </p:sp>
-      <p:sp>
-        <p:nvSpPr>
-          <p:cNvPr id="4" name="Shape 2"/>
-          <p:cNvSpPr/>
-          <p:nvPr/>
-        </p:nvSpPr>
-        <p:spPr>
-          <a:xfrm>
-            <a:off x="548640" y="201168"/>
-            <a:ext cx="54864" cy="420624"/>
+            <a:ext cx="73152" cy="5148072"/>
           </a:xfrm>
           <a:prstGeom prst="rect">
             <a:avLst/>
@@ -3507,14 +2874,14 @@
       </p:sp>
       <p:sp>
         <p:nvSpPr>
-          <p:cNvPr id="5" name="Text 3"/>
-          <p:cNvSpPr/>
-          <p:nvPr/>
-        </p:nvSpPr>
-        <p:spPr>
-          <a:xfrm>
-            <a:off x="777240" y="137160"/>
-            <a:ext cx="7772400" cy="548640"/>
+          <p:cNvPr id="3" name="Text 1"/>
+          <p:cNvSpPr/>
+          <p:nvPr/>
+        </p:nvSpPr>
+        <p:spPr>
+          <a:xfrm>
+            <a:off x="548640" y="274320"/>
+            <a:ext cx="9144000" cy="640080"/>
           </a:xfrm>
           <a:prstGeom prst="rect">
             <a:avLst/>
@@ -3523,14 +2890,14 @@
           <a:ln/>
         </p:spPr>
         <p:txBody>
-          <a:bodyPr wrap="square" lIns="0" tIns="0" rIns="0" bIns="0" rtlCol="0" anchor="ctr"/>
+          <a:bodyPr wrap="square" rtlCol="0" anchor="ctr"/>
           <a:lstStyle/>
           <a:p>
             <a:pPr indent="0" marL="0">
               <a:buNone/>
             </a:pPr>
             <a:r>
-              <a:rPr lang="en-US" sz="2000" b="1" dirty="0">
+              <a:rPr lang="en-US" sz="2400" b="1" dirty="0">
                 <a:solidFill>
                   <a:srgbClr val="1B2A4A"/>
                 </a:solidFill>
@@ -3538,22 +2905,42 @@
                 <a:ea typeface="Georgia" pitchFamily="34" charset="-122"/>
                 <a:cs typeface="Georgia" pitchFamily="34" charset="-120"/>
               </a:rPr>
-              <a:t>HCF and LCM</a:t>
-            </a:r>
-            <a:endParaRPr lang="en-US" sz="2000" dirty="0"/>
-          </a:p>
-        </p:txBody>
-      </p:sp>
-      <p:sp>
-        <p:nvSpPr>
-          <p:cNvPr id="6" name="Text 4"/>
-          <p:cNvSpPr/>
-          <p:nvPr/>
-        </p:nvSpPr>
-        <p:spPr>
-          <a:xfrm>
-            <a:off x="731520" y="1051560"/>
-            <a:ext cx="7680960" cy="3108960"/>
+              <a:t>Prime Numbers</a:t>
+            </a:r>
+            <a:endParaRPr lang="en-US" sz="2400" dirty="0"/>
+          </a:p>
+        </p:txBody>
+      </p:sp>
+      <p:sp>
+        <p:nvSpPr>
+          <p:cNvPr id="4" name="Shape 2"/>
+          <p:cNvSpPr/>
+          <p:nvPr/>
+        </p:nvSpPr>
+        <p:spPr>
+          <a:xfrm>
+            <a:off x="548640" y="960120"/>
+            <a:ext cx="2286000" cy="36576"/>
+          </a:xfrm>
+          <a:prstGeom prst="rect">
+            <a:avLst/>
+          </a:prstGeom>
+          <a:solidFill>
+            <a:srgbClr val="2A9D8F"/>
+          </a:solidFill>
+          <a:ln/>
+        </p:spPr>
+      </p:sp>
+      <p:sp>
+        <p:nvSpPr>
+          <p:cNvPr id="5" name="Text 3"/>
+          <p:cNvSpPr/>
+          <p:nvPr/>
+        </p:nvSpPr>
+        <p:spPr>
+          <a:xfrm>
+            <a:off x="548640" y="1188720"/>
+            <a:ext cx="10058400" cy="3474720"/>
           </a:xfrm>
           <a:prstGeom prst="rect">
             <a:avLst/>
@@ -3565,107 +2952,112 @@
           <a:bodyPr wrap="square" rtlCol="0" anchor="t"/>
           <a:lstStyle/>
           <a:p>
-            <a:pPr marL="342900" indent="-342900">
+            <a:pPr>
+              <a:lnSpc>
+                <a:spcPct val="150000"/>
+              </a:lnSpc>
               <a:spcAft>
-                <a:spcPts val="800"/>
+                <a:spcPts val="600"/>
               </a:spcAft>
-              <a:buSzPct val="100000"/>
-              <a:buChar char="•"/>
             </a:pPr>
             <a:r>
               <a:rPr lang="en-US" sz="1500" dirty="0">
                 <a:solidFill>
                   <a:srgbClr val="3D3A36"/>
                 </a:solidFill>
-                <a:latin typeface="Calibri" pitchFamily="34" charset="0"/>
-                <a:ea typeface="Calibri" pitchFamily="34" charset="-122"/>
-                <a:cs typeface="Calibri" pitchFamily="34" charset="-120"/>
-              </a:rPr>
-              <a:t>HCF (Highest Common Factor): the LARGEST factor shared by two numbers.</a:t>
+                <a:latin typeface="Arial" pitchFamily="34" charset="0"/>
+                <a:ea typeface="Arial" pitchFamily="34" charset="-122"/>
+                <a:cs typeface="Arial" pitchFamily="34" charset="-120"/>
+              </a:rPr>
+              <a:t>A prime has EXACTLY 2 factors: 1 and itself.</a:t>
             </a:r>
             <a:endParaRPr lang="en-US" sz="1500" dirty="0"/>
           </a:p>
           <a:p>
-            <a:pPr marL="342900" indent="-342900">
+            <a:pPr>
+              <a:lnSpc>
+                <a:spcPct val="150000"/>
+              </a:lnSpc>
               <a:spcAft>
-                <a:spcPts val="800"/>
+                <a:spcPts val="600"/>
               </a:spcAft>
-              <a:buSzPct val="100000"/>
-              <a:buChar char="•"/>
             </a:pPr>
             <a:r>
               <a:rPr lang="en-US" sz="1500" dirty="0">
                 <a:solidFill>
                   <a:srgbClr val="3D3A36"/>
                 </a:solidFill>
-                <a:latin typeface="Calibri" pitchFamily="34" charset="0"/>
-                <a:ea typeface="Calibri" pitchFamily="34" charset="-122"/>
-                <a:cs typeface="Calibri" pitchFamily="34" charset="-120"/>
-              </a:rPr>
-              <a:t>HCF of 12 and 18: Factors of 12 = {1,2,3,4,6,12}, Factors of 18 = {1,2,3,6,9,18} → HCF = 6.</a:t>
+                <a:latin typeface="Arial" pitchFamily="34" charset="0"/>
+                <a:ea typeface="Arial" pitchFamily="34" charset="-122"/>
+                <a:cs typeface="Arial" pitchFamily="34" charset="-120"/>
+              </a:rPr>
+              <a:t>First primes: 2, 3, 5, 7, 11, 13, 17, 19, 23, 29, 31, 37...</a:t>
             </a:r>
             <a:endParaRPr lang="en-US" sz="1500" dirty="0"/>
           </a:p>
           <a:p>
-            <a:pPr marL="342900" indent="-342900">
+            <a:pPr>
+              <a:lnSpc>
+                <a:spcPct val="150000"/>
+              </a:lnSpc>
               <a:spcAft>
-                <a:spcPts val="800"/>
+                <a:spcPts val="600"/>
               </a:spcAft>
-              <a:buSzPct val="100000"/>
-              <a:buChar char="•"/>
             </a:pPr>
             <a:r>
               <a:rPr lang="en-US" sz="1500" dirty="0">
                 <a:solidFill>
                   <a:srgbClr val="3D3A36"/>
                 </a:solidFill>
-                <a:latin typeface="Calibri" pitchFamily="34" charset="0"/>
-                <a:ea typeface="Calibri" pitchFamily="34" charset="-122"/>
-                <a:cs typeface="Calibri" pitchFamily="34" charset="-120"/>
-              </a:rPr>
-              <a:t>LCM (Lowest Common Multiple): the SMALLEST multiple shared by two numbers.</a:t>
+                <a:latin typeface="Arial" pitchFamily="34" charset="0"/>
+                <a:ea typeface="Arial" pitchFamily="34" charset="-122"/>
+                <a:cs typeface="Arial" pitchFamily="34" charset="-120"/>
+              </a:rPr>
+              <a:t>2 is the ONLY even prime number.</a:t>
             </a:r>
             <a:endParaRPr lang="en-US" sz="1500" dirty="0"/>
           </a:p>
           <a:p>
-            <a:pPr marL="342900" indent="-342900">
+            <a:pPr>
+              <a:lnSpc>
+                <a:spcPct val="150000"/>
+              </a:lnSpc>
               <a:spcAft>
-                <a:spcPts val="800"/>
+                <a:spcPts val="600"/>
               </a:spcAft>
-              <a:buSzPct val="100000"/>
-              <a:buChar char="•"/>
             </a:pPr>
             <a:r>
               <a:rPr lang="en-US" sz="1500" dirty="0">
                 <a:solidFill>
                   <a:srgbClr val="3D3A36"/>
                 </a:solidFill>
-                <a:latin typeface="Calibri" pitchFamily="34" charset="0"/>
-                <a:ea typeface="Calibri" pitchFamily="34" charset="-122"/>
-                <a:cs typeface="Calibri" pitchFamily="34" charset="-120"/>
-              </a:rPr>
-              <a:t>LCM of 4 and 6: Multiples of 4 = {4,8,12,16...}, Multiples of 6 = {6,12,18...} → LCM = 12.</a:t>
+                <a:latin typeface="Arial" pitchFamily="34" charset="0"/>
+                <a:ea typeface="Arial" pitchFamily="34" charset="-122"/>
+                <a:cs typeface="Arial" pitchFamily="34" charset="-120"/>
+              </a:rPr>
+              <a:t>1 is NOT prime (only has 1 factor).</a:t>
             </a:r>
             <a:endParaRPr lang="en-US" sz="1500" dirty="0"/>
           </a:p>
           <a:p>
-            <a:pPr marL="342900" indent="-342900">
+            <a:pPr>
+              <a:lnSpc>
+                <a:spcPct val="150000"/>
+              </a:lnSpc>
               <a:spcAft>
-                <a:spcPts val="800"/>
+                <a:spcPts val="600"/>
               </a:spcAft>
-              <a:buSzPct val="100000"/>
-              <a:buChar char="•"/>
             </a:pPr>
             <a:r>
               <a:rPr lang="en-US" sz="1500" dirty="0">
                 <a:solidFill>
                   <a:srgbClr val="3D3A36"/>
                 </a:solidFill>
-                <a:latin typeface="Calibri" pitchFamily="34" charset="0"/>
-                <a:ea typeface="Calibri" pitchFamily="34" charset="-122"/>
-                <a:cs typeface="Calibri" pitchFamily="34" charset="-120"/>
-              </a:rPr>
-              <a:t>HCF is useful for simplifying fractions. LCM is useful for adding fractions.</a:t>
+                <a:latin typeface="Arial" pitchFamily="34" charset="0"/>
+                <a:ea typeface="Arial" pitchFamily="34" charset="-122"/>
+                <a:cs typeface="Arial" pitchFamily="34" charset="-120"/>
+              </a:rPr>
+              <a:t>To test if a number is prime: try dividing by 2, 3, 5, 7... up to its square root.</a:t>
             </a:r>
             <a:endParaRPr lang="en-US" sz="1500" dirty="0"/>
           </a:p>
@@ -3712,67 +3104,113 @@
         <p:spPr>
           <a:xfrm>
             <a:off x="0" y="0"/>
-            <a:ext cx="9144000" cy="822960"/>
-          </a:xfrm>
-          <a:prstGeom prst="rect">
-            <a:avLst/>
+            <a:ext cx="73152" cy="5148072"/>
+          </a:xfrm>
+          <a:prstGeom prst="rect">
+            <a:avLst/>
+          </a:prstGeom>
+          <a:solidFill>
+            <a:srgbClr val="2A9D8F"/>
+          </a:solidFill>
+          <a:ln/>
+        </p:spPr>
+      </p:sp>
+      <p:sp>
+        <p:nvSpPr>
+          <p:cNvPr id="3" name="Text 1"/>
+          <p:cNvSpPr/>
+          <p:nvPr/>
+        </p:nvSpPr>
+        <p:spPr>
+          <a:xfrm>
+            <a:off x="548640" y="274320"/>
+            <a:ext cx="9144000" cy="640080"/>
+          </a:xfrm>
+          <a:prstGeom prst="rect">
+            <a:avLst/>
+          </a:prstGeom>
+          <a:noFill/>
+          <a:ln/>
+        </p:spPr>
+        <p:txBody>
+          <a:bodyPr wrap="square" rtlCol="0" anchor="ctr"/>
+          <a:lstStyle/>
+          <a:p>
+            <a:pPr indent="0" marL="0">
+              <a:buNone/>
+            </a:pPr>
+            <a:r>
+              <a:rPr lang="en-US" sz="2400" b="1" dirty="0">
+                <a:solidFill>
+                  <a:srgbClr val="1B2A4A"/>
+                </a:solidFill>
+                <a:latin typeface="Georgia" pitchFamily="34" charset="0"/>
+                <a:ea typeface="Georgia" pitchFamily="34" charset="-122"/>
+                <a:cs typeface="Georgia" pitchFamily="34" charset="-120"/>
+              </a:rPr>
+              <a:t>HCF and LCM (Preview)</a:t>
+            </a:r>
+            <a:endParaRPr lang="en-US" sz="2400" dirty="0"/>
+          </a:p>
+        </p:txBody>
+      </p:sp>
+      <p:sp>
+        <p:nvSpPr>
+          <p:cNvPr id="4" name="Shape 2"/>
+          <p:cNvSpPr/>
+          <p:nvPr/>
+        </p:nvSpPr>
+        <p:spPr>
+          <a:xfrm>
+            <a:off x="548640" y="960120"/>
+            <a:ext cx="2286000" cy="36576"/>
+          </a:xfrm>
+          <a:prstGeom prst="rect">
+            <a:avLst/>
+          </a:prstGeom>
+          <a:solidFill>
+            <a:srgbClr val="2A9D8F"/>
+          </a:solidFill>
+          <a:ln/>
+        </p:spPr>
+      </p:sp>
+      <p:sp>
+        <p:nvSpPr>
+          <p:cNvPr id="5" name="Shape 3"/>
+          <p:cNvSpPr/>
+          <p:nvPr/>
+        </p:nvSpPr>
+        <p:spPr>
+          <a:xfrm>
+            <a:off x="548640" y="1188720"/>
+            <a:ext cx="5029200" cy="3474720"/>
+          </a:xfrm>
+          <a:prstGeom prst="roundRect">
+            <a:avLst>
+              <a:gd name="adj" fmla="val 3158"/>
+            </a:avLst>
           </a:prstGeom>
           <a:solidFill>
             <a:srgbClr val="FFFFFF"/>
           </a:solidFill>
-          <a:ln/>
-        </p:spPr>
-      </p:sp>
-      <p:sp>
-        <p:nvSpPr>
-          <p:cNvPr id="3" name="Shape 1"/>
-          <p:cNvSpPr/>
-          <p:nvPr/>
-        </p:nvSpPr>
-        <p:spPr>
-          <a:xfrm>
-            <a:off x="0" y="804672"/>
-            <a:ext cx="9144000" cy="27432"/>
-          </a:xfrm>
-          <a:prstGeom prst="rect">
-            <a:avLst/>
-          </a:prstGeom>
-          <a:solidFill>
-            <a:srgbClr val="E5E2DC"/>
-          </a:solidFill>
-          <a:ln/>
-        </p:spPr>
-      </p:sp>
-      <p:sp>
-        <p:nvSpPr>
-          <p:cNvPr id="4" name="Shape 2"/>
-          <p:cNvSpPr/>
-          <p:nvPr/>
-        </p:nvSpPr>
-        <p:spPr>
-          <a:xfrm>
-            <a:off x="548640" y="201168"/>
-            <a:ext cx="54864" cy="420624"/>
-          </a:xfrm>
-          <a:prstGeom prst="rect">
-            <a:avLst/>
-          </a:prstGeom>
-          <a:solidFill>
-            <a:srgbClr val="2A9D8F"/>
-          </a:solidFill>
-          <a:ln/>
-        </p:spPr>
-      </p:sp>
-      <p:sp>
-        <p:nvSpPr>
-          <p:cNvPr id="5" name="Text 3"/>
-          <p:cNvSpPr/>
-          <p:nvPr/>
-        </p:nvSpPr>
-        <p:spPr>
-          <a:xfrm>
-            <a:off x="777240" y="137160"/>
-            <a:ext cx="7772400" cy="548640"/>
+          <a:ln w="9525">
+            <a:solidFill>
+              <a:srgbClr val="E5E2DC"/>
+            </a:solidFill>
+            <a:prstDash val="solid"/>
+          </a:ln>
+        </p:spPr>
+      </p:sp>
+      <p:sp>
+        <p:nvSpPr>
+          <p:cNvPr id="6" name="Text 4"/>
+          <p:cNvSpPr/>
+          <p:nvPr/>
+        </p:nvSpPr>
+        <p:spPr>
+          <a:xfrm>
+            <a:off x="777240" y="1325880"/>
+            <a:ext cx="4572000" cy="365760"/>
           </a:xfrm>
           <a:prstGeom prst="rect">
             <a:avLst/>
@@ -3781,57 +3219,196 @@
           <a:ln/>
         </p:spPr>
         <p:txBody>
-          <a:bodyPr wrap="square" lIns="0" tIns="0" rIns="0" bIns="0" rtlCol="0" anchor="ctr"/>
+          <a:bodyPr wrap="square" rtlCol="0" anchor="ctr"/>
           <a:lstStyle/>
           <a:p>
             <a:pPr indent="0" marL="0">
               <a:buNone/>
             </a:pPr>
             <a:r>
-              <a:rPr lang="en-US" sz="2000" b="1" dirty="0">
-                <a:solidFill>
-                  <a:srgbClr val="1B2A4A"/>
+              <a:rPr lang="en-US" sz="1500" b="1" dirty="0">
+                <a:solidFill>
+                  <a:srgbClr val="2A9D8F"/>
                 </a:solidFill>
                 <a:latin typeface="Georgia" pitchFamily="34" charset="0"/>
                 <a:ea typeface="Georgia" pitchFamily="34" charset="-122"/>
                 <a:cs typeface="Georgia" pitchFamily="34" charset="-120"/>
               </a:rPr>
-              <a:t>Check Your Understanding</a:t>
-            </a:r>
-            <a:endParaRPr lang="en-US" sz="2000" dirty="0"/>
-          </a:p>
-        </p:txBody>
-      </p:sp>
-      <p:sp>
-        <p:nvSpPr>
-          <p:cNvPr id="6" name="Shape 4"/>
-          <p:cNvSpPr/>
-          <p:nvPr/>
-        </p:nvSpPr>
-        <p:spPr>
-          <a:xfrm>
-            <a:off x="731520" y="1051560"/>
-            <a:ext cx="7680960" cy="438912"/>
-          </a:xfrm>
-          <a:prstGeom prst="rect">
-            <a:avLst/>
+              <a:t>HCF (Highest Common Factor)</a:t>
+            </a:r>
+            <a:endParaRPr lang="en-US" sz="1500" dirty="0"/>
+          </a:p>
+        </p:txBody>
+      </p:sp>
+      <p:sp>
+        <p:nvSpPr>
+          <p:cNvPr id="7" name="Text 5"/>
+          <p:cNvSpPr/>
+          <p:nvPr/>
+        </p:nvSpPr>
+        <p:spPr>
+          <a:xfrm>
+            <a:off x="777240" y="1783080"/>
+            <a:ext cx="4572000" cy="2651760"/>
+          </a:xfrm>
+          <a:prstGeom prst="rect">
+            <a:avLst/>
+          </a:prstGeom>
+          <a:noFill/>
+          <a:ln/>
+        </p:spPr>
+        <p:txBody>
+          <a:bodyPr wrap="square" rtlCol="0" anchor="t"/>
+          <a:lstStyle/>
+          <a:p>
+            <a:pPr>
+              <a:lnSpc>
+                <a:spcPct val="140000"/>
+              </a:lnSpc>
+              <a:spcAft>
+                <a:spcPts val="400"/>
+              </a:spcAft>
+            </a:pPr>
+            <a:r>
+              <a:rPr lang="en-US" sz="1300" dirty="0">
+                <a:solidFill>
+                  <a:srgbClr val="3D3A36"/>
+                </a:solidFill>
+                <a:latin typeface="Arial" pitchFamily="34" charset="0"/>
+                <a:ea typeface="Arial" pitchFamily="34" charset="-122"/>
+                <a:cs typeface="Arial" pitchFamily="34" charset="-120"/>
+              </a:rPr>
+              <a:t>The LARGEST factor shared by two numbers.</a:t>
+            </a:r>
+            <a:endParaRPr lang="en-US" sz="1300" dirty="0"/>
+          </a:p>
+          <a:p>
+            <a:pPr>
+              <a:lnSpc>
+                <a:spcPct val="140000"/>
+              </a:lnSpc>
+              <a:spcAft>
+                <a:spcPts val="400"/>
+              </a:spcAft>
+            </a:pPr>
+            <a:r>
+              <a:rPr lang="en-US" sz="1300" dirty="0">
+                <a:solidFill>
+                  <a:srgbClr val="3D3A36"/>
+                </a:solidFill>
+                <a:latin typeface="Arial" pitchFamily="34" charset="0"/>
+                <a:ea typeface="Arial" pitchFamily="34" charset="-122"/>
+                <a:cs typeface="Arial" pitchFamily="34" charset="-120"/>
+              </a:rPr>
+              <a:t>HCF of 12 and 18:</a:t>
+            </a:r>
+            <a:endParaRPr lang="en-US" sz="1300" dirty="0"/>
+          </a:p>
+          <a:p>
+            <a:pPr>
+              <a:lnSpc>
+                <a:spcPct val="140000"/>
+              </a:lnSpc>
+              <a:spcAft>
+                <a:spcPts val="400"/>
+              </a:spcAft>
+            </a:pPr>
+            <a:r>
+              <a:rPr lang="en-US" sz="1300" dirty="0">
+                <a:solidFill>
+                  <a:srgbClr val="3D3A36"/>
+                </a:solidFill>
+                <a:latin typeface="Arial" pitchFamily="34" charset="0"/>
+                <a:ea typeface="Arial" pitchFamily="34" charset="-122"/>
+                <a:cs typeface="Arial" pitchFamily="34" charset="-120"/>
+              </a:rPr>
+              <a:t>Factors of 12: 1, 2, 3, 4, 6, 12</a:t>
+            </a:r>
+            <a:endParaRPr lang="en-US" sz="1300" dirty="0"/>
+          </a:p>
+          <a:p>
+            <a:pPr>
+              <a:lnSpc>
+                <a:spcPct val="140000"/>
+              </a:lnSpc>
+              <a:spcAft>
+                <a:spcPts val="400"/>
+              </a:spcAft>
+            </a:pPr>
+            <a:r>
+              <a:rPr lang="en-US" sz="1300" dirty="0">
+                <a:solidFill>
+                  <a:srgbClr val="3D3A36"/>
+                </a:solidFill>
+                <a:latin typeface="Arial" pitchFamily="34" charset="0"/>
+                <a:ea typeface="Arial" pitchFamily="34" charset="-122"/>
+                <a:cs typeface="Arial" pitchFamily="34" charset="-120"/>
+              </a:rPr>
+              <a:t>Factors of 18: 1, 2, 3, 6, 9, 18</a:t>
+            </a:r>
+            <a:endParaRPr lang="en-US" sz="1300" dirty="0"/>
+          </a:p>
+          <a:p>
+            <a:pPr>
+              <a:lnSpc>
+                <a:spcPct val="140000"/>
+              </a:lnSpc>
+              <a:spcAft>
+                <a:spcPts val="400"/>
+              </a:spcAft>
+            </a:pPr>
+            <a:r>
+              <a:rPr lang="en-US" sz="1300" dirty="0">
+                <a:solidFill>
+                  <a:srgbClr val="3D3A36"/>
+                </a:solidFill>
+                <a:latin typeface="Arial" pitchFamily="34" charset="0"/>
+                <a:ea typeface="Arial" pitchFamily="34" charset="-122"/>
+                <a:cs typeface="Arial" pitchFamily="34" charset="-120"/>
+              </a:rPr>
+              <a:t>Common: 1, 2, 3, 6 → HCF = 6</a:t>
+            </a:r>
+            <a:endParaRPr lang="en-US" sz="1300" dirty="0"/>
+          </a:p>
+        </p:txBody>
+      </p:sp>
+      <p:sp>
+        <p:nvSpPr>
+          <p:cNvPr id="8" name="Shape 6"/>
+          <p:cNvSpPr/>
+          <p:nvPr/>
+        </p:nvSpPr>
+        <p:spPr>
+          <a:xfrm>
+            <a:off x="5852160" y="1188720"/>
+            <a:ext cx="5029200" cy="3474720"/>
+          </a:xfrm>
+          <a:prstGeom prst="roundRect">
+            <a:avLst>
+              <a:gd name="adj" fmla="val 3158"/>
+            </a:avLst>
           </a:prstGeom>
           <a:solidFill>
             <a:srgbClr val="FFFFFF"/>
           </a:solidFill>
-          <a:ln/>
-        </p:spPr>
-      </p:sp>
-      <p:sp>
-        <p:nvSpPr>
-          <p:cNvPr id="7" name="Text 5"/>
-          <p:cNvSpPr/>
-          <p:nvPr/>
-        </p:nvSpPr>
-        <p:spPr>
-          <a:xfrm>
-            <a:off x="868680" y="1051560"/>
-            <a:ext cx="320040" cy="438912"/>
+          <a:ln w="9525">
+            <a:solidFill>
+              <a:srgbClr val="E5E2DC"/>
+            </a:solidFill>
+            <a:prstDash val="solid"/>
+          </a:ln>
+        </p:spPr>
+      </p:sp>
+      <p:sp>
+        <p:nvSpPr>
+          <p:cNvPr id="9" name="Text 7"/>
+          <p:cNvSpPr/>
+          <p:nvPr/>
+        </p:nvSpPr>
+        <p:spPr>
+          <a:xfrm>
+            <a:off x="6080760" y="1325880"/>
+            <a:ext cx="4572000" cy="365760"/>
           </a:xfrm>
           <a:prstGeom prst="rect">
             <a:avLst/>
@@ -3847,27 +3424,30 @@
               <a:buNone/>
             </a:pPr>
             <a:r>
-              <a:rPr lang="en-US" sz="1400" dirty="0">
-                <a:solidFill>
-                  <a:srgbClr val="2A9D8F"/>
-                </a:solidFill>
-              </a:rPr>
-              <a:t>☐</a:t>
-            </a:r>
-            <a:endParaRPr lang="en-US" sz="1400" dirty="0"/>
-          </a:p>
-        </p:txBody>
-      </p:sp>
-      <p:sp>
-        <p:nvSpPr>
-          <p:cNvPr id="8" name="Text 6"/>
-          <p:cNvSpPr/>
-          <p:nvPr/>
-        </p:nvSpPr>
-        <p:spPr>
-          <a:xfrm>
-            <a:off x="1234440" y="1051560"/>
-            <a:ext cx="6949440" cy="438912"/>
+              <a:rPr lang="en-US" sz="1500" b="1" dirty="0">
+                <a:solidFill>
+                  <a:srgbClr val="E9C46A"/>
+                </a:solidFill>
+                <a:latin typeface="Georgia" pitchFamily="34" charset="0"/>
+                <a:ea typeface="Georgia" pitchFamily="34" charset="-122"/>
+                <a:cs typeface="Georgia" pitchFamily="34" charset="-120"/>
+              </a:rPr>
+              <a:t>LCM (Lowest Common Multiple)</a:t>
+            </a:r>
+            <a:endParaRPr lang="en-US" sz="1500" dirty="0"/>
+          </a:p>
+        </p:txBody>
+      </p:sp>
+      <p:sp>
+        <p:nvSpPr>
+          <p:cNvPr id="10" name="Text 8"/>
+          <p:cNvSpPr/>
+          <p:nvPr/>
+        </p:nvSpPr>
+        <p:spPr>
+          <a:xfrm>
+            <a:off x="6080760" y="1783080"/>
+            <a:ext cx="4572000" cy="2651760"/>
           </a:xfrm>
           <a:prstGeom prst="rect">
             <a:avLst/>
@@ -3876,484 +3456,117 @@
           <a:ln/>
         </p:spPr>
         <p:txBody>
-          <a:bodyPr wrap="square" rtlCol="0" anchor="ctr"/>
-          <a:lstStyle/>
-          <a:p>
-            <a:pPr indent="0" marL="0">
-              <a:buNone/>
+          <a:bodyPr wrap="square" rtlCol="0" anchor="t"/>
+          <a:lstStyle/>
+          <a:p>
+            <a:pPr>
+              <a:lnSpc>
+                <a:spcPct val="140000"/>
+              </a:lnSpc>
+              <a:spcAft>
+                <a:spcPts val="400"/>
+              </a:spcAft>
             </a:pPr>
             <a:r>
               <a:rPr lang="en-US" sz="1300" dirty="0">
                 <a:solidFill>
                   <a:srgbClr val="3D3A36"/>
                 </a:solidFill>
-                <a:latin typeface="Calibri" pitchFamily="34" charset="0"/>
-                <a:ea typeface="Calibri" pitchFamily="34" charset="-122"/>
-                <a:cs typeface="Calibri" pitchFamily="34" charset="-120"/>
-              </a:rPr>
-              <a:t>I can find all factors of a number</a:t>
+                <a:latin typeface="Arial" pitchFamily="34" charset="0"/>
+                <a:ea typeface="Arial" pitchFamily="34" charset="-122"/>
+                <a:cs typeface="Arial" pitchFamily="34" charset="-120"/>
+              </a:rPr>
+              <a:t>The SMALLEST multiple shared by two numbers.</a:t>
             </a:r>
             <a:endParaRPr lang="en-US" sz="1300" dirty="0"/>
           </a:p>
-        </p:txBody>
-      </p:sp>
-      <p:sp>
-        <p:nvSpPr>
-          <p:cNvPr id="9" name="Shape 7"/>
-          <p:cNvSpPr/>
-          <p:nvPr/>
-        </p:nvSpPr>
-        <p:spPr>
-          <a:xfrm>
-            <a:off x="731520" y="1554480"/>
-            <a:ext cx="7680960" cy="438912"/>
-          </a:xfrm>
-          <a:prstGeom prst="rect">
-            <a:avLst/>
-          </a:prstGeom>
-          <a:solidFill>
-            <a:srgbClr val="F8F6F3"/>
-          </a:solidFill>
-          <a:ln/>
-        </p:spPr>
-      </p:sp>
-      <p:sp>
-        <p:nvSpPr>
-          <p:cNvPr id="10" name="Text 8"/>
-          <p:cNvSpPr/>
-          <p:nvPr/>
-        </p:nvSpPr>
-        <p:spPr>
-          <a:xfrm>
-            <a:off x="868680" y="1554480"/>
-            <a:ext cx="320040" cy="438912"/>
-          </a:xfrm>
-          <a:prstGeom prst="rect">
-            <a:avLst/>
-          </a:prstGeom>
-          <a:noFill/>
-          <a:ln/>
-        </p:spPr>
-        <p:txBody>
-          <a:bodyPr wrap="square" rtlCol="0" anchor="ctr"/>
-          <a:lstStyle/>
-          <a:p>
-            <a:pPr indent="0" marL="0">
-              <a:buNone/>
-            </a:pPr>
-            <a:r>
-              <a:rPr lang="en-US" sz="1400" dirty="0">
-                <a:solidFill>
-                  <a:srgbClr val="2A9D8F"/>
-                </a:solidFill>
-              </a:rPr>
-              <a:t>☐</a:t>
-            </a:r>
-            <a:endParaRPr lang="en-US" sz="1400" dirty="0"/>
-          </a:p>
-        </p:txBody>
-      </p:sp>
-      <p:sp>
-        <p:nvSpPr>
-          <p:cNvPr id="11" name="Text 9"/>
-          <p:cNvSpPr/>
-          <p:nvPr/>
-        </p:nvSpPr>
-        <p:spPr>
-          <a:xfrm>
-            <a:off x="1234440" y="1554480"/>
-            <a:ext cx="6949440" cy="438912"/>
-          </a:xfrm>
-          <a:prstGeom prst="rect">
-            <a:avLst/>
-          </a:prstGeom>
-          <a:noFill/>
-          <a:ln/>
-        </p:spPr>
-        <p:txBody>
-          <a:bodyPr wrap="square" rtlCol="0" anchor="ctr"/>
-          <a:lstStyle/>
-          <a:p>
-            <a:pPr indent="0" marL="0">
-              <a:buNone/>
+          <a:p>
+            <a:pPr>
+              <a:lnSpc>
+                <a:spcPct val="140000"/>
+              </a:lnSpc>
+              <a:spcAft>
+                <a:spcPts val="400"/>
+              </a:spcAft>
             </a:pPr>
             <a:r>
               <a:rPr lang="en-US" sz="1300" dirty="0">
                 <a:solidFill>
                   <a:srgbClr val="3D3A36"/>
                 </a:solidFill>
-                <a:latin typeface="Calibri" pitchFamily="34" charset="0"/>
-                <a:ea typeface="Calibri" pitchFamily="34" charset="-122"/>
-                <a:cs typeface="Calibri" pitchFamily="34" charset="-120"/>
-              </a:rPr>
-              <a:t>I can list multiples of a number</a:t>
+                <a:latin typeface="Arial" pitchFamily="34" charset="0"/>
+                <a:ea typeface="Arial" pitchFamily="34" charset="-122"/>
+                <a:cs typeface="Arial" pitchFamily="34" charset="-120"/>
+              </a:rPr>
+              <a:t>LCM of 4 and 6:</a:t>
             </a:r>
             <a:endParaRPr lang="en-US" sz="1300" dirty="0"/>
           </a:p>
-        </p:txBody>
-      </p:sp>
-      <p:sp>
-        <p:nvSpPr>
-          <p:cNvPr id="12" name="Shape 10"/>
-          <p:cNvSpPr/>
-          <p:nvPr/>
-        </p:nvSpPr>
-        <p:spPr>
-          <a:xfrm>
-            <a:off x="731520" y="2057400"/>
-            <a:ext cx="7680960" cy="438912"/>
-          </a:xfrm>
-          <a:prstGeom prst="rect">
-            <a:avLst/>
-          </a:prstGeom>
-          <a:solidFill>
-            <a:srgbClr val="FFFFFF"/>
-          </a:solidFill>
-          <a:ln/>
-        </p:spPr>
-      </p:sp>
-      <p:sp>
-        <p:nvSpPr>
-          <p:cNvPr id="13" name="Text 11"/>
-          <p:cNvSpPr/>
-          <p:nvPr/>
-        </p:nvSpPr>
-        <p:spPr>
-          <a:xfrm>
-            <a:off x="868680" y="2057400"/>
-            <a:ext cx="320040" cy="438912"/>
-          </a:xfrm>
-          <a:prstGeom prst="rect">
-            <a:avLst/>
-          </a:prstGeom>
-          <a:noFill/>
-          <a:ln/>
-        </p:spPr>
-        <p:txBody>
-          <a:bodyPr wrap="square" rtlCol="0" anchor="ctr"/>
-          <a:lstStyle/>
-          <a:p>
-            <a:pPr indent="0" marL="0">
-              <a:buNone/>
-            </a:pPr>
-            <a:r>
-              <a:rPr lang="en-US" sz="1400" dirty="0">
-                <a:solidFill>
-                  <a:srgbClr val="2A9D8F"/>
-                </a:solidFill>
-              </a:rPr>
-              <a:t>☐</a:t>
-            </a:r>
-            <a:endParaRPr lang="en-US" sz="1400" dirty="0"/>
-          </a:p>
-        </p:txBody>
-      </p:sp>
-      <p:sp>
-        <p:nvSpPr>
-          <p:cNvPr id="14" name="Text 12"/>
-          <p:cNvSpPr/>
-          <p:nvPr/>
-        </p:nvSpPr>
-        <p:spPr>
-          <a:xfrm>
-            <a:off x="1234440" y="2057400"/>
-            <a:ext cx="6949440" cy="438912"/>
-          </a:xfrm>
-          <a:prstGeom prst="rect">
-            <a:avLst/>
-          </a:prstGeom>
-          <a:noFill/>
-          <a:ln/>
-        </p:spPr>
-        <p:txBody>
-          <a:bodyPr wrap="square" rtlCol="0" anchor="ctr"/>
-          <a:lstStyle/>
-          <a:p>
-            <a:pPr indent="0" marL="0">
-              <a:buNone/>
+          <a:p>
+            <a:pPr>
+              <a:lnSpc>
+                <a:spcPct val="140000"/>
+              </a:lnSpc>
+              <a:spcAft>
+                <a:spcPts val="400"/>
+              </a:spcAft>
             </a:pPr>
             <a:r>
               <a:rPr lang="en-US" sz="1300" dirty="0">
                 <a:solidFill>
                   <a:srgbClr val="3D3A36"/>
                 </a:solidFill>
-                <a:latin typeface="Calibri" pitchFamily="34" charset="0"/>
-                <a:ea typeface="Calibri" pitchFamily="34" charset="-122"/>
-                <a:cs typeface="Calibri" pitchFamily="34" charset="-120"/>
-              </a:rPr>
-              <a:t>I can identify prime numbers</a:t>
+                <a:latin typeface="Arial" pitchFamily="34" charset="0"/>
+                <a:ea typeface="Arial" pitchFamily="34" charset="-122"/>
+                <a:cs typeface="Arial" pitchFamily="34" charset="-120"/>
+              </a:rPr>
+              <a:t>Multiples of 4: 4, 8, 12, 16, 20...</a:t>
             </a:r>
             <a:endParaRPr lang="en-US" sz="1300" dirty="0"/>
           </a:p>
-        </p:txBody>
-      </p:sp>
-      <p:sp>
-        <p:nvSpPr>
-          <p:cNvPr id="15" name="Shape 13"/>
-          <p:cNvSpPr/>
-          <p:nvPr/>
-        </p:nvSpPr>
-        <p:spPr>
-          <a:xfrm>
-            <a:off x="731520" y="2560320"/>
-            <a:ext cx="7680960" cy="438912"/>
-          </a:xfrm>
-          <a:prstGeom prst="rect">
-            <a:avLst/>
-          </a:prstGeom>
-          <a:solidFill>
-            <a:srgbClr val="F8F6F3"/>
-          </a:solidFill>
-          <a:ln/>
-        </p:spPr>
-      </p:sp>
-      <p:sp>
-        <p:nvSpPr>
-          <p:cNvPr id="16" name="Text 14"/>
-          <p:cNvSpPr/>
-          <p:nvPr/>
-        </p:nvSpPr>
-        <p:spPr>
-          <a:xfrm>
-            <a:off x="868680" y="2560320"/>
-            <a:ext cx="320040" cy="438912"/>
-          </a:xfrm>
-          <a:prstGeom prst="rect">
-            <a:avLst/>
-          </a:prstGeom>
-          <a:noFill/>
-          <a:ln/>
-        </p:spPr>
-        <p:txBody>
-          <a:bodyPr wrap="square" rtlCol="0" anchor="ctr"/>
-          <a:lstStyle/>
-          <a:p>
-            <a:pPr indent="0" marL="0">
-              <a:buNone/>
-            </a:pPr>
-            <a:r>
-              <a:rPr lang="en-US" sz="1400" dirty="0">
-                <a:solidFill>
-                  <a:srgbClr val="2A9D8F"/>
-                </a:solidFill>
-              </a:rPr>
-              <a:t>☐</a:t>
-            </a:r>
-            <a:endParaRPr lang="en-US" sz="1400" dirty="0"/>
-          </a:p>
-        </p:txBody>
-      </p:sp>
-      <p:sp>
-        <p:nvSpPr>
-          <p:cNvPr id="17" name="Text 15"/>
-          <p:cNvSpPr/>
-          <p:nvPr/>
-        </p:nvSpPr>
-        <p:spPr>
-          <a:xfrm>
-            <a:off x="1234440" y="2560320"/>
-            <a:ext cx="6949440" cy="438912"/>
-          </a:xfrm>
-          <a:prstGeom prst="rect">
-            <a:avLst/>
-          </a:prstGeom>
-          <a:noFill/>
-          <a:ln/>
-        </p:spPr>
-        <p:txBody>
-          <a:bodyPr wrap="square" rtlCol="0" anchor="ctr"/>
-          <a:lstStyle/>
-          <a:p>
-            <a:pPr indent="0" marL="0">
-              <a:buNone/>
+          <a:p>
+            <a:pPr>
+              <a:lnSpc>
+                <a:spcPct val="140000"/>
+              </a:lnSpc>
+              <a:spcAft>
+                <a:spcPts val="400"/>
+              </a:spcAft>
             </a:pPr>
             <a:r>
               <a:rPr lang="en-US" sz="1300" dirty="0">
                 <a:solidFill>
                   <a:srgbClr val="3D3A36"/>
                 </a:solidFill>
-                <a:latin typeface="Calibri" pitchFamily="34" charset="0"/>
-                <a:ea typeface="Calibri" pitchFamily="34" charset="-122"/>
-                <a:cs typeface="Calibri" pitchFamily="34" charset="-120"/>
-              </a:rPr>
-              <a:t>I can find the HCF of two numbers</a:t>
+                <a:latin typeface="Arial" pitchFamily="34" charset="0"/>
+                <a:ea typeface="Arial" pitchFamily="34" charset="-122"/>
+                <a:cs typeface="Arial" pitchFamily="34" charset="-120"/>
+              </a:rPr>
+              <a:t>Multiples of 6: 6, 12, 18, 24...</a:t>
             </a:r>
             <a:endParaRPr lang="en-US" sz="1300" dirty="0"/>
           </a:p>
-        </p:txBody>
-      </p:sp>
-      <p:sp>
-        <p:nvSpPr>
-          <p:cNvPr id="18" name="Shape 16"/>
-          <p:cNvSpPr/>
-          <p:nvPr/>
-        </p:nvSpPr>
-        <p:spPr>
-          <a:xfrm>
-            <a:off x="731520" y="3063240"/>
-            <a:ext cx="7680960" cy="438912"/>
-          </a:xfrm>
-          <a:prstGeom prst="rect">
-            <a:avLst/>
-          </a:prstGeom>
-          <a:solidFill>
-            <a:srgbClr val="FFFFFF"/>
-          </a:solidFill>
-          <a:ln/>
-        </p:spPr>
-      </p:sp>
-      <p:sp>
-        <p:nvSpPr>
-          <p:cNvPr id="19" name="Text 17"/>
-          <p:cNvSpPr/>
-          <p:nvPr/>
-        </p:nvSpPr>
-        <p:spPr>
-          <a:xfrm>
-            <a:off x="868680" y="3063240"/>
-            <a:ext cx="320040" cy="438912"/>
-          </a:xfrm>
-          <a:prstGeom prst="rect">
-            <a:avLst/>
-          </a:prstGeom>
-          <a:noFill/>
-          <a:ln/>
-        </p:spPr>
-        <p:txBody>
-          <a:bodyPr wrap="square" rtlCol="0" anchor="ctr"/>
-          <a:lstStyle/>
-          <a:p>
-            <a:pPr indent="0" marL="0">
-              <a:buNone/>
-            </a:pPr>
-            <a:r>
-              <a:rPr lang="en-US" sz="1400" dirty="0">
-                <a:solidFill>
-                  <a:srgbClr val="2A9D8F"/>
-                </a:solidFill>
-              </a:rPr>
-              <a:t>☐</a:t>
-            </a:r>
-            <a:endParaRPr lang="en-US" sz="1400" dirty="0"/>
-          </a:p>
-        </p:txBody>
-      </p:sp>
-      <p:sp>
-        <p:nvSpPr>
-          <p:cNvPr id="20" name="Text 18"/>
-          <p:cNvSpPr/>
-          <p:nvPr/>
-        </p:nvSpPr>
-        <p:spPr>
-          <a:xfrm>
-            <a:off x="1234440" y="3063240"/>
-            <a:ext cx="6949440" cy="438912"/>
-          </a:xfrm>
-          <a:prstGeom prst="rect">
-            <a:avLst/>
-          </a:prstGeom>
-          <a:noFill/>
-          <a:ln/>
-        </p:spPr>
-        <p:txBody>
-          <a:bodyPr wrap="square" rtlCol="0" anchor="ctr"/>
-          <a:lstStyle/>
-          <a:p>
-            <a:pPr indent="0" marL="0">
-              <a:buNone/>
+          <a:p>
+            <a:pPr>
+              <a:lnSpc>
+                <a:spcPct val="140000"/>
+              </a:lnSpc>
+              <a:spcAft>
+                <a:spcPts val="400"/>
+              </a:spcAft>
             </a:pPr>
             <a:r>
               <a:rPr lang="en-US" sz="1300" dirty="0">
                 <a:solidFill>
                   <a:srgbClr val="3D3A36"/>
                 </a:solidFill>
-                <a:latin typeface="Calibri" pitchFamily="34" charset="0"/>
-                <a:ea typeface="Calibri" pitchFamily="34" charset="-122"/>
-                <a:cs typeface="Calibri" pitchFamily="34" charset="-120"/>
-              </a:rPr>
-              <a:t>I can find the LCM of two numbers</a:t>
+                <a:latin typeface="Arial" pitchFamily="34" charset="0"/>
+                <a:ea typeface="Arial" pitchFamily="34" charset="-122"/>
+                <a:cs typeface="Arial" pitchFamily="34" charset="-120"/>
+              </a:rPr>
+              <a:t>Common: 12, 24... → LCM = 12</a:t>
             </a:r>
             <a:endParaRPr lang="en-US" sz="1300" dirty="0"/>
-          </a:p>
-        </p:txBody>
-      </p:sp>
-      <p:sp>
-        <p:nvSpPr>
-          <p:cNvPr id="21" name="Shape 19"/>
-          <p:cNvSpPr/>
-          <p:nvPr/>
-        </p:nvSpPr>
-        <p:spPr>
-          <a:xfrm>
-            <a:off x="731520" y="3749040"/>
-            <a:ext cx="7680960" cy="594360"/>
-          </a:xfrm>
-          <a:prstGeom prst="rect">
-            <a:avLst/>
-          </a:prstGeom>
-          <a:solidFill>
-            <a:srgbClr val="E8F5F3"/>
-          </a:solidFill>
-          <a:ln/>
-          <a:effectLst>
-            <a:outerShdw sx="100000" sy="100000" kx="0" ky="0" algn="bl" rotWithShape="0" blurRad="50800" dist="25400" dir="8100000">
-              <a:srgbClr val="000000">
-                <a:alpha val="10000"/>
-              </a:srgbClr>
-            </a:outerShdw>
-          </a:effectLst>
-        </p:spPr>
-      </p:sp>
-      <p:sp>
-        <p:nvSpPr>
-          <p:cNvPr id="22" name="Text 20"/>
-          <p:cNvSpPr/>
-          <p:nvPr/>
-        </p:nvSpPr>
-        <p:spPr>
-          <a:xfrm>
-            <a:off x="914400" y="3749040"/>
-            <a:ext cx="7315200" cy="594360"/>
-          </a:xfrm>
-          <a:prstGeom prst="rect">
-            <a:avLst/>
-          </a:prstGeom>
-          <a:noFill/>
-          <a:ln/>
-        </p:spPr>
-        <p:txBody>
-          <a:bodyPr wrap="square" rtlCol="0" anchor="ctr"/>
-          <a:lstStyle/>
-          <a:p>
-            <a:pPr indent="0" marL="0">
-              <a:buNone/>
-            </a:pPr>
-            <a:r>
-              <a:rPr lang="en-US" sz="1200" b="1" dirty="0">
-                <a:solidFill>
-                  <a:srgbClr val="2A9D8F"/>
-                </a:solidFill>
-                <a:latin typeface="Calibri" pitchFamily="34" charset="0"/>
-                <a:ea typeface="Calibri" pitchFamily="34" charset="-122"/>
-                <a:cs typeface="Calibri" pitchFamily="34" charset="-120"/>
-              </a:rPr>
-              <a:t>Key Idea: </a:t>
-            </a:r>
-            <a:pPr indent="0" marL="0">
-              <a:buNone/>
-            </a:pPr>
-            <a:r>
-              <a:rPr lang="en-US" sz="1200" i="1" dirty="0">
-                <a:solidFill>
-                  <a:srgbClr val="3D3A36"/>
-                </a:solidFill>
-                <a:latin typeface="Calibri" pitchFamily="34" charset="0"/>
-                <a:ea typeface="Calibri" pitchFamily="34" charset="-122"/>
-                <a:cs typeface="Calibri" pitchFamily="34" charset="-120"/>
-              </a:rPr>
-              <a:t>Factors divide IN, multiples multiply OUT, primes have exactly 2 factors.</a:t>
-            </a:r>
-            <a:endParaRPr lang="en-US" sz="1200" dirty="0"/>
           </a:p>
         </p:txBody>
       </p:sp>
@@ -4368,6 +3581,13 @@
 <file path=ppt/slides/slide7.xml><?xml version="1.0" encoding="utf-8"?>
 <p:sld xmlns:a="http://schemas.openxmlformats.org/drawingml/2006/main" xmlns:r="http://schemas.openxmlformats.org/officeDocument/2006/relationships" xmlns:p="http://schemas.openxmlformats.org/presentationml/2006/main">
   <p:cSld name="Slide 7">
+    <p:bg>
+      <p:bgPr>
+        <a:solidFill>
+          <a:srgbClr val="FAF8F5"/>
+        </a:solidFill>
+      </p:bgPr>
+    </p:bg>
     <p:spTree>
       <p:nvGrpSpPr>
         <p:cNvPr id="1" name=""/>
@@ -4391,27 +3611,7 @@
         <p:spPr>
           <a:xfrm>
             <a:off x="0" y="0"/>
-            <a:ext cx="9144000" cy="5143500"/>
-          </a:xfrm>
-          <a:prstGeom prst="rect">
-            <a:avLst/>
-          </a:prstGeom>
-          <a:solidFill>
-            <a:srgbClr val="1B2A4A"/>
-          </a:solidFill>
-          <a:ln/>
-        </p:spPr>
-      </p:sp>
-      <p:sp>
-        <p:nvSpPr>
-          <p:cNvPr id="3" name="Shape 1"/>
-          <p:cNvSpPr/>
-          <p:nvPr/>
-        </p:nvSpPr>
-        <p:spPr>
-          <a:xfrm>
-            <a:off x="0" y="4777740"/>
-            <a:ext cx="9144000" cy="365760"/>
+            <a:ext cx="73152" cy="5148072"/>
           </a:xfrm>
           <a:prstGeom prst="rect">
             <a:avLst/>
@@ -4424,36 +3624,14 @@
       </p:sp>
       <p:sp>
         <p:nvSpPr>
-          <p:cNvPr id="4" name="Shape 2"/>
-          <p:cNvSpPr/>
-          <p:nvPr/>
-        </p:nvSpPr>
-        <p:spPr>
-          <a:xfrm>
-            <a:off x="-914400" y="-914400"/>
-            <a:ext cx="3657600" cy="3657600"/>
-          </a:xfrm>
-          <a:prstGeom prst="ellipse">
-            <a:avLst/>
-          </a:prstGeom>
-          <a:solidFill>
-            <a:srgbClr val="2A9D8F">
-              <a:alpha val="10000"/>
-            </a:srgbClr>
-          </a:solidFill>
-          <a:ln/>
-        </p:spPr>
-      </p:sp>
-      <p:sp>
-        <p:nvSpPr>
-          <p:cNvPr id="5" name="Text 3"/>
-          <p:cNvSpPr/>
-          <p:nvPr/>
-        </p:nvSpPr>
-        <p:spPr>
-          <a:xfrm>
-            <a:off x="731520" y="1463040"/>
-            <a:ext cx="7680960" cy="822960"/>
+          <p:cNvPr id="3" name="Text 1"/>
+          <p:cNvSpPr/>
+          <p:nvPr/>
+        </p:nvSpPr>
+        <p:spPr>
+          <a:xfrm>
+            <a:off x="548640" y="274320"/>
+            <a:ext cx="9144000" cy="640080"/>
           </a:xfrm>
           <a:prstGeom prst="rect">
             <a:avLst/>
@@ -4465,34 +3643,449 @@
           <a:bodyPr wrap="square" rtlCol="0" anchor="ctr"/>
           <a:lstStyle/>
           <a:p>
-            <a:pPr algn="ctr" indent="0" marL="0">
+            <a:pPr indent="0" marL="0">
               <a:buNone/>
             </a:pPr>
             <a:r>
-              <a:rPr lang="en-US" sz="3400" b="1" dirty="0">
-                <a:solidFill>
-                  <a:srgbClr val="FFFFFF"/>
+              <a:rPr lang="en-US" sz="2400" b="1" dirty="0">
+                <a:solidFill>
+                  <a:srgbClr val="1B2A4A"/>
                 </a:solidFill>
                 <a:latin typeface="Georgia" pitchFamily="34" charset="0"/>
                 <a:ea typeface="Georgia" pitchFamily="34" charset="-122"/>
                 <a:cs typeface="Georgia" pitchFamily="34" charset="-120"/>
               </a:rPr>
+              <a:t>Check Your Understanding</a:t>
+            </a:r>
+            <a:endParaRPr lang="en-US" sz="2400" dirty="0"/>
+          </a:p>
+        </p:txBody>
+      </p:sp>
+      <p:sp>
+        <p:nvSpPr>
+          <p:cNvPr id="4" name="Shape 2"/>
+          <p:cNvSpPr/>
+          <p:nvPr/>
+        </p:nvSpPr>
+        <p:spPr>
+          <a:xfrm>
+            <a:off x="548640" y="960120"/>
+            <a:ext cx="2286000" cy="36576"/>
+          </a:xfrm>
+          <a:prstGeom prst="rect">
+            <a:avLst/>
+          </a:prstGeom>
+          <a:solidFill>
+            <a:srgbClr val="2A9D8F"/>
+          </a:solidFill>
+          <a:ln/>
+        </p:spPr>
+      </p:sp>
+      <p:sp>
+        <p:nvSpPr>
+          <p:cNvPr id="5" name="Text 3"/>
+          <p:cNvSpPr/>
+          <p:nvPr/>
+        </p:nvSpPr>
+        <p:spPr>
+          <a:xfrm>
+            <a:off x="548640" y="1188720"/>
+            <a:ext cx="365760" cy="457200"/>
+          </a:xfrm>
+          <a:prstGeom prst="rect">
+            <a:avLst/>
+          </a:prstGeom>
+          <a:noFill/>
+          <a:ln/>
+        </p:spPr>
+        <p:txBody>
+          <a:bodyPr wrap="square" rtlCol="0" anchor="ctr"/>
+          <a:lstStyle/>
+          <a:p>
+            <a:pPr indent="0" marL="0">
+              <a:buNone/>
+            </a:pPr>
+            <a:r>
+              <a:rPr lang="en-US" sz="1600" dirty="0">
+                <a:solidFill>
+                  <a:srgbClr val="2A9D8F"/>
+                </a:solidFill>
+                <a:latin typeface="Arial" pitchFamily="34" charset="0"/>
+                <a:ea typeface="Arial" pitchFamily="34" charset="-122"/>
+                <a:cs typeface="Arial" pitchFamily="34" charset="-120"/>
+              </a:rPr>
+              <a:t>☐</a:t>
+            </a:r>
+            <a:endParaRPr lang="en-US" sz="1600" dirty="0"/>
+          </a:p>
+        </p:txBody>
+      </p:sp>
+      <p:sp>
+        <p:nvSpPr>
+          <p:cNvPr id="6" name="Text 4"/>
+          <p:cNvSpPr/>
+          <p:nvPr/>
+        </p:nvSpPr>
+        <p:spPr>
+          <a:xfrm>
+            <a:off x="1005840" y="1188720"/>
+            <a:ext cx="9601200" cy="457200"/>
+          </a:xfrm>
+          <a:prstGeom prst="rect">
+            <a:avLst/>
+          </a:prstGeom>
+          <a:noFill/>
+          <a:ln/>
+        </p:spPr>
+        <p:txBody>
+          <a:bodyPr wrap="square" rtlCol="0" anchor="ctr"/>
+          <a:lstStyle/>
+          <a:p>
+            <a:pPr indent="0" marL="0">
+              <a:lnSpc>
+                <a:spcPct val="130000"/>
+              </a:lnSpc>
+              <a:buNone/>
+            </a:pPr>
+            <a:r>
+              <a:rPr lang="en-US" sz="1400" dirty="0">
+                <a:solidFill>
+                  <a:srgbClr val="3D3A36"/>
+                </a:solidFill>
+                <a:latin typeface="Arial" pitchFamily="34" charset="0"/>
+                <a:ea typeface="Arial" pitchFamily="34" charset="-122"/>
+                <a:cs typeface="Arial" pitchFamily="34" charset="-120"/>
+              </a:rPr>
+              <a:t>I can find all factors of a number up to 100.</a:t>
+            </a:r>
+            <a:endParaRPr lang="en-US" sz="1400" dirty="0"/>
+          </a:p>
+        </p:txBody>
+      </p:sp>
+      <p:sp>
+        <p:nvSpPr>
+          <p:cNvPr id="7" name="Text 5"/>
+          <p:cNvSpPr/>
+          <p:nvPr/>
+        </p:nvSpPr>
+        <p:spPr>
+          <a:xfrm>
+            <a:off x="548640" y="1783080"/>
+            <a:ext cx="365760" cy="457200"/>
+          </a:xfrm>
+          <a:prstGeom prst="rect">
+            <a:avLst/>
+          </a:prstGeom>
+          <a:noFill/>
+          <a:ln/>
+        </p:spPr>
+        <p:txBody>
+          <a:bodyPr wrap="square" rtlCol="0" anchor="ctr"/>
+          <a:lstStyle/>
+          <a:p>
+            <a:pPr indent="0" marL="0">
+              <a:buNone/>
+            </a:pPr>
+            <a:r>
+              <a:rPr lang="en-US" sz="1600" dirty="0">
+                <a:solidFill>
+                  <a:srgbClr val="2A9D8F"/>
+                </a:solidFill>
+                <a:latin typeface="Arial" pitchFamily="34" charset="0"/>
+                <a:ea typeface="Arial" pitchFamily="34" charset="-122"/>
+                <a:cs typeface="Arial" pitchFamily="34" charset="-120"/>
+              </a:rPr>
+              <a:t>☐</a:t>
+            </a:r>
+            <a:endParaRPr lang="en-US" sz="1600" dirty="0"/>
+          </a:p>
+        </p:txBody>
+      </p:sp>
+      <p:sp>
+        <p:nvSpPr>
+          <p:cNvPr id="8" name="Text 6"/>
+          <p:cNvSpPr/>
+          <p:nvPr/>
+        </p:nvSpPr>
+        <p:spPr>
+          <a:xfrm>
+            <a:off x="1005840" y="1783080"/>
+            <a:ext cx="9601200" cy="457200"/>
+          </a:xfrm>
+          <a:prstGeom prst="rect">
+            <a:avLst/>
+          </a:prstGeom>
+          <a:noFill/>
+          <a:ln/>
+        </p:spPr>
+        <p:txBody>
+          <a:bodyPr wrap="square" rtlCol="0" anchor="ctr"/>
+          <a:lstStyle/>
+          <a:p>
+            <a:pPr indent="0" marL="0">
+              <a:lnSpc>
+                <a:spcPct val="130000"/>
+              </a:lnSpc>
+              <a:buNone/>
+            </a:pPr>
+            <a:r>
+              <a:rPr lang="en-US" sz="1400" dirty="0">
+                <a:solidFill>
+                  <a:srgbClr val="3D3A36"/>
+                </a:solidFill>
+                <a:latin typeface="Arial" pitchFamily="34" charset="0"/>
+                <a:ea typeface="Arial" pitchFamily="34" charset="-122"/>
+                <a:cs typeface="Arial" pitchFamily="34" charset="-120"/>
+              </a:rPr>
+              <a:t>I can list multiples of any number.</a:t>
+            </a:r>
+            <a:endParaRPr lang="en-US" sz="1400" dirty="0"/>
+          </a:p>
+        </p:txBody>
+      </p:sp>
+      <p:sp>
+        <p:nvSpPr>
+          <p:cNvPr id="9" name="Text 7"/>
+          <p:cNvSpPr/>
+          <p:nvPr/>
+        </p:nvSpPr>
+        <p:spPr>
+          <a:xfrm>
+            <a:off x="548640" y="2377440"/>
+            <a:ext cx="365760" cy="457200"/>
+          </a:xfrm>
+          <a:prstGeom prst="rect">
+            <a:avLst/>
+          </a:prstGeom>
+          <a:noFill/>
+          <a:ln/>
+        </p:spPr>
+        <p:txBody>
+          <a:bodyPr wrap="square" rtlCol="0" anchor="ctr"/>
+          <a:lstStyle/>
+          <a:p>
+            <a:pPr indent="0" marL="0">
+              <a:buNone/>
+            </a:pPr>
+            <a:r>
+              <a:rPr lang="en-US" sz="1600" dirty="0">
+                <a:solidFill>
+                  <a:srgbClr val="2A9D8F"/>
+                </a:solidFill>
+                <a:latin typeface="Arial" pitchFamily="34" charset="0"/>
+                <a:ea typeface="Arial" pitchFamily="34" charset="-122"/>
+                <a:cs typeface="Arial" pitchFamily="34" charset="-120"/>
+              </a:rPr>
+              <a:t>☐</a:t>
+            </a:r>
+            <a:endParaRPr lang="en-US" sz="1600" dirty="0"/>
+          </a:p>
+        </p:txBody>
+      </p:sp>
+      <p:sp>
+        <p:nvSpPr>
+          <p:cNvPr id="10" name="Text 8"/>
+          <p:cNvSpPr/>
+          <p:nvPr/>
+        </p:nvSpPr>
+        <p:spPr>
+          <a:xfrm>
+            <a:off x="1005840" y="2377440"/>
+            <a:ext cx="9601200" cy="457200"/>
+          </a:xfrm>
+          <a:prstGeom prst="rect">
+            <a:avLst/>
+          </a:prstGeom>
+          <a:noFill/>
+          <a:ln/>
+        </p:spPr>
+        <p:txBody>
+          <a:bodyPr wrap="square" rtlCol="0" anchor="ctr"/>
+          <a:lstStyle/>
+          <a:p>
+            <a:pPr indent="0" marL="0">
+              <a:lnSpc>
+                <a:spcPct val="130000"/>
+              </a:lnSpc>
+              <a:buNone/>
+            </a:pPr>
+            <a:r>
+              <a:rPr lang="en-US" sz="1400" dirty="0">
+                <a:solidFill>
+                  <a:srgbClr val="3D3A36"/>
+                </a:solidFill>
+                <a:latin typeface="Arial" pitchFamily="34" charset="0"/>
+                <a:ea typeface="Arial" pitchFamily="34" charset="-122"/>
+                <a:cs typeface="Arial" pitchFamily="34" charset="-120"/>
+              </a:rPr>
+              <a:t>I can identify whether a number is prime or composite.</a:t>
+            </a:r>
+            <a:endParaRPr lang="en-US" sz="1400" dirty="0"/>
+          </a:p>
+        </p:txBody>
+      </p:sp>
+      <p:sp>
+        <p:nvSpPr>
+          <p:cNvPr id="11" name="Text 9"/>
+          <p:cNvSpPr/>
+          <p:nvPr/>
+        </p:nvSpPr>
+        <p:spPr>
+          <a:xfrm>
+            <a:off x="548640" y="2971800"/>
+            <a:ext cx="365760" cy="457200"/>
+          </a:xfrm>
+          <a:prstGeom prst="rect">
+            <a:avLst/>
+          </a:prstGeom>
+          <a:noFill/>
+          <a:ln/>
+        </p:spPr>
+        <p:txBody>
+          <a:bodyPr wrap="square" rtlCol="0" anchor="ctr"/>
+          <a:lstStyle/>
+          <a:p>
+            <a:pPr indent="0" marL="0">
+              <a:buNone/>
+            </a:pPr>
+            <a:r>
+              <a:rPr lang="en-US" sz="1600" dirty="0">
+                <a:solidFill>
+                  <a:srgbClr val="2A9D8F"/>
+                </a:solidFill>
+                <a:latin typeface="Arial" pitchFamily="34" charset="0"/>
+                <a:ea typeface="Arial" pitchFamily="34" charset="-122"/>
+                <a:cs typeface="Arial" pitchFamily="34" charset="-120"/>
+              </a:rPr>
+              <a:t>☐</a:t>
+            </a:r>
+            <a:endParaRPr lang="en-US" sz="1600" dirty="0"/>
+          </a:p>
+        </p:txBody>
+      </p:sp>
+      <p:sp>
+        <p:nvSpPr>
+          <p:cNvPr id="12" name="Text 10"/>
+          <p:cNvSpPr/>
+          <p:nvPr/>
+        </p:nvSpPr>
+        <p:spPr>
+          <a:xfrm>
+            <a:off x="1005840" y="2971800"/>
+            <a:ext cx="9601200" cy="457200"/>
+          </a:xfrm>
+          <a:prstGeom prst="rect">
+            <a:avLst/>
+          </a:prstGeom>
+          <a:noFill/>
+          <a:ln/>
+        </p:spPr>
+        <p:txBody>
+          <a:bodyPr wrap="square" rtlCol="0" anchor="ctr"/>
+          <a:lstStyle/>
+          <a:p>
+            <a:pPr indent="0" marL="0">
+              <a:lnSpc>
+                <a:spcPct val="130000"/>
+              </a:lnSpc>
+              <a:buNone/>
+            </a:pPr>
+            <a:r>
+              <a:rPr lang="en-US" sz="1400" dirty="0">
+                <a:solidFill>
+                  <a:srgbClr val="3D3A36"/>
+                </a:solidFill>
+                <a:latin typeface="Arial" pitchFamily="34" charset="0"/>
+                <a:ea typeface="Arial" pitchFamily="34" charset="-122"/>
+                <a:cs typeface="Arial" pitchFamily="34" charset="-120"/>
+              </a:rPr>
+              <a:t>I can find the HCF and LCM of two numbers.</a:t>
+            </a:r>
+            <a:endParaRPr lang="en-US" sz="1400" dirty="0"/>
+          </a:p>
+        </p:txBody>
+      </p:sp>
+    </p:spTree>
+  </p:cSld>
+  <p:clrMapOvr>
+    <a:masterClrMapping/>
+  </p:clrMapOvr>
+</p:sld>
+</file>
+
+<file path=ppt/slides/slide8.xml><?xml version="1.0" encoding="utf-8"?>
+<p:sld xmlns:a="http://schemas.openxmlformats.org/drawingml/2006/main" xmlns:r="http://schemas.openxmlformats.org/officeDocument/2006/relationships" xmlns:p="http://schemas.openxmlformats.org/presentationml/2006/main">
+  <p:cSld name="Slide 8">
+    <p:bg>
+      <p:bgPr>
+        <a:solidFill>
+          <a:srgbClr val="111D35"/>
+        </a:solidFill>
+      </p:bgPr>
+    </p:bg>
+    <p:spTree>
+      <p:nvGrpSpPr>
+        <p:cNvPr id="1" name=""/>
+        <p:cNvGrpSpPr/>
+        <p:nvPr/>
+      </p:nvGrpSpPr>
+      <p:grpSpPr>
+        <a:xfrm>
+          <a:off x="0" y="0"/>
+          <a:ext cx="0" cy="0"/>
+          <a:chOff x="0" y="0"/>
+          <a:chExt cx="0" cy="0"/>
+        </a:xfrm>
+      </p:grpSpPr>
+      <p:sp>
+        <p:nvSpPr>
+          <p:cNvPr id="2" name="Text 0"/>
+          <p:cNvSpPr/>
+          <p:nvPr/>
+        </p:nvSpPr>
+        <p:spPr>
+          <a:xfrm>
+            <a:off x="731520" y="1371600"/>
+            <a:ext cx="9144000" cy="914400"/>
+          </a:xfrm>
+          <a:prstGeom prst="rect">
+            <a:avLst/>
+          </a:prstGeom>
+          <a:noFill/>
+          <a:ln/>
+        </p:spPr>
+        <p:txBody>
+          <a:bodyPr wrap="square" rtlCol="0" anchor="ctr"/>
+          <a:lstStyle/>
+          <a:p>
+            <a:pPr indent="0" marL="0">
+              <a:buNone/>
+            </a:pPr>
+            <a:r>
+              <a:rPr lang="en-US" sz="3200" b="1" dirty="0">
+                <a:solidFill>
+                  <a:srgbClr val="FFFFFF"/>
+                </a:solidFill>
+                <a:latin typeface="Georgia" pitchFamily="34" charset="0"/>
+                <a:ea typeface="Georgia" pitchFamily="34" charset="-122"/>
+                <a:cs typeface="Georgia" pitchFamily="34" charset="-120"/>
+              </a:rPr>
               <a:t>Review &amp; Practise</a:t>
             </a:r>
-            <a:endParaRPr lang="en-US" sz="3400" dirty="0"/>
-          </a:p>
-        </p:txBody>
-      </p:sp>
-      <p:sp>
-        <p:nvSpPr>
-          <p:cNvPr id="6" name="Text 4"/>
-          <p:cNvSpPr/>
-          <p:nvPr/>
-        </p:nvSpPr>
-        <p:spPr>
-          <a:xfrm>
-            <a:off x="731520" y="2468880"/>
-            <a:ext cx="7680960" cy="457200"/>
+            <a:endParaRPr lang="en-US" sz="3200" dirty="0"/>
+          </a:p>
+        </p:txBody>
+      </p:sp>
+      <p:sp>
+        <p:nvSpPr>
+          <p:cNvPr id="3" name="Text 1"/>
+          <p:cNvSpPr/>
+          <p:nvPr/>
+        </p:nvSpPr>
+        <p:spPr>
+          <a:xfrm>
+            <a:off x="731520" y="2377440"/>
+            <a:ext cx="7315200" cy="548640"/>
           </a:xfrm>
           <a:prstGeom prst="rect">
             <a:avLst/>
@@ -4504,60 +4097,62 @@
           <a:bodyPr wrap="square" rtlCol="0" anchor="ctr"/>
           <a:lstStyle/>
           <a:p>
-            <a:pPr algn="ctr" indent="0" marL="0">
+            <a:pPr indent="0" marL="0">
               <a:buNone/>
             </a:pPr>
             <a:r>
-              <a:rPr lang="en-US" sz="1800" dirty="0">
-                <a:solidFill>
-                  <a:srgbClr val="2A9D8F"/>
-                </a:solidFill>
-                <a:latin typeface="Calibri" pitchFamily="34" charset="0"/>
-                <a:ea typeface="Calibri" pitchFamily="34" charset="-122"/>
-                <a:cs typeface="Calibri" pitchFamily="34" charset="-120"/>
+              <a:rPr lang="en-US" sz="1500" dirty="0">
+                <a:solidFill>
+                  <a:srgbClr val="FFFFFF">
+                    <a:alpha val="60000"/>
+                  </a:srgbClr>
+                </a:solidFill>
+                <a:latin typeface="Arial" pitchFamily="34" charset="0"/>
+                <a:ea typeface="Arial" pitchFamily="34" charset="-122"/>
+                <a:cs typeface="Arial" pitchFamily="34" charset="-120"/>
+              </a:rPr>
+              <a:t>Use the Self-Quiz, Review Games, and Practice Builder to test yourself.</a:t>
+            </a:r>
+            <a:endParaRPr lang="en-US" sz="1500" dirty="0"/>
+          </a:p>
+        </p:txBody>
+      </p:sp>
+      <p:sp>
+        <p:nvSpPr>
+          <p:cNvPr id="4" name="Text 2"/>
+          <p:cNvSpPr/>
+          <p:nvPr/>
+        </p:nvSpPr>
+        <p:spPr>
+          <a:xfrm>
+            <a:off x="731520" y="3291840"/>
+            <a:ext cx="3657600" cy="457200"/>
+          </a:xfrm>
+          <a:prstGeom prst="rect">
+            <a:avLst/>
+          </a:prstGeom>
+          <a:noFill/>
+          <a:ln/>
+        </p:spPr>
+        <p:txBody>
+          <a:bodyPr wrap="square" rtlCol="0" anchor="ctr"/>
+          <a:lstStyle/>
+          <a:p>
+            <a:pPr indent="0" marL="0">
+              <a:buNone/>
+            </a:pPr>
+            <a:r>
+              <a:rPr lang="en-US" sz="1800" b="1" dirty="0">
+                <a:solidFill>
+                  <a:srgbClr val="E9C46A"/>
+                </a:solidFill>
+                <a:latin typeface="Georgia" pitchFamily="34" charset="0"/>
+                <a:ea typeface="Georgia" pitchFamily="34" charset="-122"/>
+                <a:cs typeface="Georgia" pitchFamily="34" charset="-120"/>
               </a:rPr>
               <a:t>mrzocchi.com</a:t>
             </a:r>
             <a:endParaRPr lang="en-US" sz="1800" dirty="0"/>
-          </a:p>
-        </p:txBody>
-      </p:sp>
-      <p:sp>
-        <p:nvSpPr>
-          <p:cNvPr id="7" name="Text 5"/>
-          <p:cNvSpPr/>
-          <p:nvPr/>
-        </p:nvSpPr>
-        <p:spPr>
-          <a:xfrm>
-            <a:off x="731520" y="3108960"/>
-            <a:ext cx="7680960" cy="457200"/>
-          </a:xfrm>
-          <a:prstGeom prst="rect">
-            <a:avLst/>
-          </a:prstGeom>
-          <a:noFill/>
-          <a:ln/>
-        </p:spPr>
-        <p:txBody>
-          <a:bodyPr wrap="square" rtlCol="0" anchor="ctr"/>
-          <a:lstStyle/>
-          <a:p>
-            <a:pPr algn="ctr" indent="0" marL="0">
-              <a:buNone/>
-            </a:pPr>
-            <a:r>
-              <a:rPr lang="en-US" sz="1300" dirty="0">
-                <a:solidFill>
-                  <a:srgbClr val="9B9690"/>
-                </a:solidFill>
-                <a:latin typeface="Calibri" pitchFamily="34" charset="0"/>
-                <a:ea typeface="Calibri" pitchFamily="34" charset="-122"/>
-                <a:cs typeface="Calibri" pitchFamily="34" charset="-120"/>
-              </a:rPr>
-              <a:t>Use the Self-Quiz, Review Games, and Practice Builder to test yourself.</a:t>
-            </a:r>
-            <a:endParaRPr lang="en-US" sz="1300" dirty="0"/>
           </a:p>
         </p:txBody>
       </p:sp>
